--- a/1st_document/화면설계서.pptx
+++ b/1st_document/화면설계서.pptx
@@ -2,7 +2,7 @@
 <file path=ppt/presentation.xml><?xml version="1.0" encoding="utf-8"?>
 <p:presentation xmlns:a="http://schemas.openxmlformats.org/drawingml/2006/main" xmlns:r="http://schemas.openxmlformats.org/officeDocument/2006/relationships" xmlns:p="http://schemas.openxmlformats.org/presentationml/2006/main" xmlns:p14="http://schemas.microsoft.com/office/powerpoint/2010/main" saveSubsetFonts="1">
   <p:sldMasterIdLst>
-    <p:sldMasterId id="2147483677" r:id="rId13"/>
+    <p:sldMasterId id="2147483793" r:id="rId13"/>
   </p:sldMasterIdLst>
   <p:notesMasterIdLst>
     <p:notesMasterId r:id="rId17"/>
@@ -12,9 +12,10 @@
   </p:handoutMasterIdLst>
   <p:sldIdLst>
     <p:sldId id="256" r:id="rId19"/>
-    <p:sldId id="257" r:id="rId21"/>
-    <p:sldId id="258" r:id="rId22"/>
-    <p:sldId id="259" r:id="rId23"/>
+    <p:sldId id="260" r:id="rId21"/>
+    <p:sldId id="257" r:id="rId23"/>
+    <p:sldId id="258" r:id="rId24"/>
+    <p:sldId id="259" r:id="rId25"/>
   </p:sldIdLst>
   <p:sldSz cx="12192000" cy="6858000"/>
   <p:notesSz cx="6858000" cy="9144000"/>
@@ -720,8 +721,141 @@
 </p:notes>
 </file>
 
+<file path=ppt/notesSlides/notesSlide2.xml><?xml version="1.0" encoding="utf-8"?>
+<p:notes xmlns:a="http://schemas.openxmlformats.org/drawingml/2006/main" xmlns:r="http://schemas.openxmlformats.org/officeDocument/2006/relationships" xmlns:p="http://schemas.openxmlformats.org/presentationml/2006/main">
+  <p:cSld>
+    <p:spTree>
+      <p:nvGrpSpPr>
+        <p:cNvPr id="1" name=""/>
+        <p:cNvGrpSpPr/>
+        <p:nvPr/>
+      </p:nvGrpSpPr>
+      <p:grpSpPr>
+        <a:xfrm>
+          <a:off x="0" y="0"/>
+          <a:ext cx="0" cy="0"/>
+          <a:chOff x="0" y="0"/>
+          <a:chExt cx="0" cy="0"/>
+        </a:xfrm>
+      </p:grpSpPr>
+      <p:sp>
+        <p:nvSpPr>
+          <p:cNvPr id="2" name="슬라이드 이미지 개체 틀 1"/>
+          <p:cNvSpPr>
+            <a:spLocks noGrp="1" noRot="1" noChangeAspect="1"/>
+          </p:cNvSpPr>
+          <p:nvPr>
+            <p:ph type="sldImg"/>
+          </p:nvPr>
+        </p:nvSpPr>
+        <p:spPr>
+          <a:xfrm rot="0">
+            <a:off x="685800" y="1143000"/>
+            <a:ext cx="5487035" cy="3086735"/>
+          </a:xfrm>
+          <a:prstGeom prst="rect"/>
+          <a:noFill/>
+          <a:ln w="12700" cap="flat" cmpd="sng">
+            <a:solidFill>
+              <a:srgbClr val="000000">
+                <a:alpha val="100000"/>
+              </a:srgbClr>
+            </a:solidFill>
+            <a:prstDash val="solid"/>
+          </a:ln>
+        </p:spPr>
+        <p:txBody>
+          <a:bodyPr wrap="square" lIns="0" tIns="0" rIns="0" bIns="0" vert="horz" anchor="t">
+            <a:noAutofit/>
+          </a:bodyPr>
+          <a:lstStyle/>
+          <a:p>
+            <a:pPr marL="0" indent="0"/>
+          </a:p>
+        </p:txBody>
+      </p:sp>
+      <p:sp>
+        <p:nvSpPr>
+          <p:cNvPr id="3" name="슬라이드 노트 개체 틀 2"/>
+          <p:cNvSpPr txBox="1">
+            <a:spLocks noGrp="1"/>
+          </p:cNvSpPr>
+          <p:nvPr>
+            <p:ph type="body" idx="1"/>
+          </p:nvPr>
+        </p:nvSpPr>
+        <p:spPr>
+          <a:xfrm rot="0">
+            <a:off x="685800" y="4400550"/>
+            <a:ext cx="5487035" cy="3601085"/>
+          </a:xfrm>
+          <a:prstGeom prst="rect"/>
+        </p:spPr>
+        <p:txBody>
+          <a:bodyPr wrap="square" lIns="91440" tIns="45720" rIns="91440" bIns="45720" numCol="1" vert="horz" anchor="t">
+            <a:noAutofit/>
+          </a:bodyPr>
+          <a:lstStyle/>
+          <a:p>
+            <a:pPr marL="0" indent="0">
+              <a:buFontTx/>
+              <a:buNone/>
+            </a:pPr>
+          </a:p>
+        </p:txBody>
+      </p:sp>
+      <p:sp>
+        <p:nvSpPr>
+          <p:cNvPr id="4" name="슬라이드 번호 개체 틀 3"/>
+          <p:cNvSpPr txBox="1">
+            <a:spLocks noGrp="1"/>
+          </p:cNvSpPr>
+          <p:nvPr>
+            <p:ph type="sldNum" idx="10"/>
+          </p:nvPr>
+        </p:nvSpPr>
+        <p:spPr>
+          <a:xfrm rot="0">
+            <a:off x="3884930" y="8685530"/>
+            <a:ext cx="2972435" cy="459105"/>
+          </a:xfrm>
+          <a:prstGeom prst="rect"/>
+        </p:spPr>
+        <p:txBody>
+          <a:bodyPr wrap="square" lIns="91440" tIns="45720" rIns="91440" bIns="45720" numCol="1" vert="horz" anchor="b">
+            <a:noAutofit/>
+          </a:bodyPr>
+          <a:lstStyle/>
+          <a:p>
+            <a:pPr marL="0" indent="0">
+              <a:buFontTx/>
+              <a:buNone/>
+            </a:pPr>
+            <a:fld id="{B9320F77-B9A0-41C5-862A-B4B631284C64}" type="slidenum">
+              <a:rPr lang="ko-KR" altLang="en-US"/>
+              <a:t>1</a:t>
+            </a:fld>
+          </a:p>
+        </p:txBody>
+      </p:sp>
+    </p:spTree>
+  </p:cSld>
+  <p:clrMapOvr>
+    <a:masterClrMapping/>
+  </p:clrMapOvr>
+  <mc:AlternateContent xmlns:mc="http://schemas.openxmlformats.org/markup-compatibility/2006">
+    <mc:Choice xmlns:p14="http://schemas.microsoft.com/office/powerpoint/2010/main" Requires="p14">
+      <p:transition spd="slow" p14:dur="0"/>
+    </mc:Choice>
+    <mc:Fallback>
+      <p:transition spd="slow"/>
+    </mc:Fallback>
+  </mc:AlternateContent>
+</p:notes>
+</file>
+
 <file path=ppt/slideLayouts/slideLayout1.xml><?xml version="1.0" encoding="utf-8"?>
-<p:sldLayout xmlns:a="http://schemas.openxmlformats.org/drawingml/2006/main" xmlns:r="http://schemas.openxmlformats.org/officeDocument/2006/relationships" xmlns:p="http://schemas.openxmlformats.org/presentationml/2006/main" type="title" preserve="1">
+<p:sldLayout xmlns:a="http://schemas.openxmlformats.org/drawingml/2006/main" xmlns:r="http://schemas.openxmlformats.org/officeDocument/2006/relationships" xmlns:p="http://schemas.openxmlformats.org/presentationml/2006/main" xmlns:p14="http://schemas.microsoft.com/office/powerpoint/2010/main" type="title" preserve="1">
   <p:cSld name="제목 슬라이드">
     <p:spTree>
       <p:nvGrpSpPr>
@@ -749,7 +883,7 @@
         </p:nvSpPr>
         <p:spPr>
           <a:xfrm>
-            <a:off x="1524000" y="1122363"/>
+            <a:off x="1524000" y="1122680"/>
             <a:ext cx="9144000" cy="2387600"/>
           </a:xfrm>
         </p:spPr>
@@ -781,8 +915,8 @@
         </p:nvSpPr>
         <p:spPr>
           <a:xfrm>
-            <a:off x="1524000" y="3602038"/>
-            <a:ext cx="9144000" cy="1655762"/>
+            <a:off x="1524000" y="3602355"/>
+            <a:ext cx="9144000" cy="1655445"/>
           </a:xfrm>
         </p:spPr>
         <p:txBody>
@@ -844,7 +978,12 @@
             <p:ph type="dt" sz="half" idx="10"/>
           </p:nvPr>
         </p:nvSpPr>
-        <p:spPr/>
+        <p:spPr>
+          <a:xfrm>
+            <a:off x="838200" y="6356350"/>
+            <a:ext cx="2743835" cy="365760"/>
+          </a:xfrm>
+        </p:spPr>
         <p:txBody>
           <a:bodyPr/>
           <a:lstStyle/>
@@ -867,7 +1006,12 @@
             <p:ph type="ftr" sz="quarter" idx="11"/>
           </p:nvPr>
         </p:nvSpPr>
-        <p:spPr/>
+        <p:spPr>
+          <a:xfrm>
+            <a:off x="4038600" y="6356350"/>
+            <a:ext cx="4115435" cy="365760"/>
+          </a:xfrm>
+        </p:spPr>
         <p:txBody>
           <a:bodyPr/>
           <a:lstStyle/>
@@ -886,7 +1030,12 @@
             <p:ph type="sldNum" sz="quarter" idx="12"/>
           </p:nvPr>
         </p:nvSpPr>
-        <p:spPr/>
+        <p:spPr>
+          <a:xfrm>
+            <a:off x="8610600" y="6356350"/>
+            <a:ext cx="2743835" cy="365760"/>
+          </a:xfrm>
+        </p:spPr>
         <p:txBody>
           <a:bodyPr/>
           <a:lstStyle/>
@@ -909,6 +1058,14 @@
   <p:clrMapOvr>
     <a:masterClrMapping/>
   </p:clrMapOvr>
+  <mc:AlternateContent xmlns:mc="http://schemas.openxmlformats.org/markup-compatibility/2006">
+    <mc:Choice xmlns:p14="http://schemas.microsoft.com/office/powerpoint/2010/main" Requires="p14">
+      <p:transition spd="slow" p14:dur="2000"/>
+    </mc:Choice>
+    <mc:Fallback>
+      <p:transition spd="slow"/>
+    </mc:Fallback>
+  </mc:AlternateContent>
 </p:sldLayout>
 </file>
 
@@ -3021,7 +3178,7 @@
 </file>
 
 <file path=ppt/slideMasters/slideMaster1.xml><?xml version="1.0" encoding="utf-8"?>
-<p:sldMaster xmlns:a="http://schemas.openxmlformats.org/drawingml/2006/main" xmlns:r="http://schemas.openxmlformats.org/officeDocument/2006/relationships" xmlns:p="http://schemas.openxmlformats.org/presentationml/2006/main">
+<p:sldMaster xmlns:a="http://schemas.openxmlformats.org/drawingml/2006/main" xmlns:r="http://schemas.openxmlformats.org/officeDocument/2006/relationships" xmlns:p="http://schemas.openxmlformats.org/presentationml/2006/main" xmlns:p14="http://schemas.microsoft.com/office/powerpoint/2010/main">
   <p:cSld>
     <p:bg>
       <p:bgRef idx="1001">
@@ -3055,7 +3212,7 @@
         <p:spPr>
           <a:xfrm>
             <a:off x="838200" y="365125"/>
-            <a:ext cx="10515600" cy="1325563"/>
+            <a:ext cx="10515600" cy="1325880"/>
           </a:xfrm>
           <a:prstGeom prst="rect">
             <a:avLst/>
@@ -3088,7 +3245,7 @@
         <p:spPr>
           <a:xfrm>
             <a:off x="838200" y="1825625"/>
-            <a:ext cx="10515600" cy="4351338"/>
+            <a:ext cx="10515600" cy="4351655"/>
           </a:xfrm>
           <a:prstGeom prst="rect">
             <a:avLst/>
@@ -3265,18 +3422,33 @@
   </p:cSld>
   <p:clrMap bg1="lt1" tx1="dk1" bg2="lt2" tx2="dk2" accent1="accent1" accent2="accent2" accent3="accent3" accent4="accent4" accent5="accent5" accent6="accent6" hlink="hlink" folHlink="folHlink"/>
   <p:sldLayoutIdLst>
-    <p:sldLayoutId id="2147483649" r:id="rId1"/>
-    <p:sldLayoutId id="2147483650" r:id="rId2"/>
-    <p:sldLayoutId id="2147483651" r:id="rId3"/>
-    <p:sldLayoutId id="2147483652" r:id="rId4"/>
-    <p:sldLayoutId id="2147483653" r:id="rId5"/>
-    <p:sldLayoutId id="2147483654" r:id="rId6"/>
-    <p:sldLayoutId id="2147483655" r:id="rId7"/>
-    <p:sldLayoutId id="2147483656" r:id="rId8"/>
-    <p:sldLayoutId id="2147483657" r:id="rId9"/>
-    <p:sldLayoutId id="2147483658" r:id="rId10"/>
-    <p:sldLayoutId id="2147483659" r:id="rId11"/>
+    <p:sldLayoutId id="2147483779" r:id="rId1"/>
+    <p:sldLayoutId id="2147483780" r:id="rId2"/>
+    <p:sldLayoutId id="2147483781" r:id="rId3"/>
+    <p:sldLayoutId id="2147483782" r:id="rId4"/>
+    <p:sldLayoutId id="2147483783" r:id="rId5"/>
+    <p:sldLayoutId id="2147483784" r:id="rId6"/>
+    <p:sldLayoutId id="2147483785" r:id="rId7"/>
+    <p:sldLayoutId id="2147483786" r:id="rId8"/>
+    <p:sldLayoutId id="2147483787" r:id="rId9"/>
+    <p:sldLayoutId id="2147483788" r:id="rId10"/>
+    <p:sldLayoutId id="2147483789" r:id="rId11"/>
   </p:sldLayoutIdLst>
+  <mc:AlternateContent xmlns:mc="http://schemas.openxmlformats.org/markup-compatibility/2006">
+    <mc:Choice xmlns:p14="http://schemas.microsoft.com/office/powerpoint/2010/main" Requires="p14">
+      <p:transition spd="slow" p14:dur="2000"/>
+    </mc:Choice>
+    <mc:Fallback>
+      <p:transition spd="slow"/>
+    </mc:Fallback>
+  </mc:AlternateContent>
+  <p:timing>
+    <p:tnLst>
+      <p:par>
+        <p:cTn id="1" dur="indefinite" restart="never" nodeType="tmRoot"/>
+      </p:par>
+    </p:tnLst>
+  </p:timing>
   <p:txStyles>
     <p:titleStyle>
       <a:lvl1pPr algn="l" defTabSz="914400" rtl="0" eaLnBrk="1" latinLnBrk="1" hangingPunct="1">
@@ -3640,7 +3812,7 @@
 </file>
 
 <file path=ppt/slides/slide2.xml><?xml version="1.0" encoding="utf-8"?>
-<p:sld xmlns:a="http://schemas.openxmlformats.org/drawingml/2006/main" xmlns:r="http://schemas.openxmlformats.org/officeDocument/2006/relationships" xmlns:p="http://schemas.openxmlformats.org/presentationml/2006/main" xmlns:p14="http://schemas.microsoft.com/office/powerpoint/2010/main">
+<p:sld xmlns:a="http://schemas.openxmlformats.org/drawingml/2006/main" xmlns:r="http://schemas.openxmlformats.org/officeDocument/2006/relationships" xmlns:p="http://schemas.openxmlformats.org/presentationml/2006/main">
   <p:cSld>
     <p:spTree>
       <p:nvGrpSpPr>
@@ -3658,7 +3830,7 @@
       </p:grpSpPr>
       <p:sp>
         <p:nvSpPr>
-          <p:cNvPr id="2" name="도형 2"/>
+          <p:cNvPr id="2" name="도형 1"/>
           <p:cNvSpPr>
             <a:spLocks/>
           </p:cNvSpPr>
@@ -3666,8 +3838,8 @@
         </p:nvSpPr>
         <p:spPr>
           <a:xfrm rot="0">
-            <a:off x="1115695" y="1016635"/>
-            <a:ext cx="9411970" cy="4979035"/>
+            <a:off x="1125855" y="977265"/>
+            <a:ext cx="9412605" cy="4979670"/>
           </a:xfrm>
           <a:prstGeom prst="rect"/>
           <a:solidFill>
@@ -3712,426 +3884,29 @@
       </p:sp>
       <p:sp>
         <p:nvSpPr>
-          <p:cNvPr id="3" name="텍스트 상자 5"/>
-          <p:cNvSpPr txBox="1">
+          <p:cNvPr id="3" name="도형 2"/>
+          <p:cNvSpPr>
             <a:spLocks/>
           </p:cNvSpPr>
           <p:nvPr/>
         </p:nvSpPr>
         <p:spPr>
           <a:xfrm rot="0">
-            <a:off x="1876425" y="1706880"/>
-            <a:ext cx="2619375" cy="370205"/>
+            <a:off x="2597150" y="2162175"/>
+            <a:ext cx="6142355" cy="2607310"/>
           </a:xfrm>
           <a:prstGeom prst="rect"/>
-          <a:noFill/>
-          <a:ln w="19050" cap="flat" cmpd="sng">
+          <a:solidFill>
+            <a:schemeClr val="bg1"/>
+          </a:solidFill>
+          <a:ln w="12700" cap="flat" cmpd="sng">
             <a:solidFill>
-              <a:schemeClr val="bg1">
+              <a:schemeClr val="tx1">
                 <a:alpha val="100000"/>
               </a:schemeClr>
             </a:solidFill>
             <a:prstDash val="solid"/>
-            <a:round/>
           </a:ln>
-        </p:spPr>
-        <p:txBody>
-          <a:bodyPr wrap="square" lIns="89535" tIns="46355" rIns="89535" bIns="46355" numCol="1" vert="horz" anchor="t">
-            <a:spAutoFit/>
-          </a:bodyPr>
-          <a:lstStyle/>
-          <a:p>
-            <a:pPr marL="0" indent="0" algn="l" hangingPunct="1">
-              <a:buFontTx/>
-              <a:buNone/>
-            </a:pPr>
-            <a:r>
-              <a:rPr sz="1800">
-                <a:latin typeface="맑은 고딕" charset="0"/>
-                <a:ea typeface="맑은 고딕" charset="0"/>
-              </a:rPr>
-              <a:t>스마트팜 </a:t>
-            </a:r>
-            <a:r>
-              <a:rPr lang="ko-KR" sz="1800">
-                <a:latin typeface="맑은 고딕" charset="0"/>
-                <a:ea typeface="맑은 고딕" charset="0"/>
-              </a:rPr>
-              <a:t>AI 환경플랫폼</a:t>
-            </a:r>
-            <a:endParaRPr lang="ko-KR" altLang="en-US" sz="1800">
-              <a:latin typeface="맑은 고딕" charset="0"/>
-              <a:ea typeface="맑은 고딕" charset="0"/>
-            </a:endParaRPr>
-          </a:p>
-        </p:txBody>
-      </p:sp>
-      <p:sp>
-        <p:nvSpPr>
-          <p:cNvPr id="4" name="텍스트 상자 6"/>
-          <p:cNvSpPr txBox="1">
-            <a:spLocks/>
-          </p:cNvSpPr>
-          <p:nvPr/>
-        </p:nvSpPr>
-        <p:spPr>
-          <a:xfrm rot="0">
-            <a:off x="2082165" y="2429510"/>
-            <a:ext cx="2089150" cy="1477645"/>
-          </a:xfrm>
-          <a:prstGeom prst="rect"/>
-          <a:noFill/>
-          <a:ln w="19050" cap="flat" cmpd="sng">
-            <a:solidFill>
-              <a:schemeClr val="bg1">
-                <a:alpha val="100000"/>
-              </a:schemeClr>
-            </a:solidFill>
-            <a:prstDash val="solid"/>
-            <a:round/>
-          </a:ln>
-        </p:spPr>
-        <p:txBody>
-          <a:bodyPr wrap="none" lIns="89535" tIns="46355" rIns="89535" bIns="46355" numCol="1" vert="horz" anchor="t">
-            <a:spAutoFit/>
-          </a:bodyPr>
-          <a:lstStyle/>
-          <a:p>
-            <a:pPr marL="0" indent="0" algn="l" hangingPunct="1">
-              <a:buFontTx/>
-              <a:buNone/>
-            </a:pPr>
-            <a:r>
-              <a:rPr sz="1800">
-                <a:solidFill>
-                  <a:schemeClr val="bg1"/>
-                </a:solidFill>
-                <a:latin typeface="맑은 고딕" charset="0"/>
-                <a:ea typeface="맑은 고딕" charset="0"/>
-              </a:rPr>
-              <a:t>스마</a:t>
-            </a:r>
-            <a:r>
-              <a:rPr lang="ko-KR" sz="1800">
-                <a:solidFill>
-                  <a:schemeClr val="bg1"/>
-                </a:solidFill>
-                <a:latin typeface="맑은 고딕" charset="0"/>
-                <a:ea typeface="맑은 고딕" charset="0"/>
-              </a:rPr>
-              <a:t>트팜</a:t>
-            </a:r>
-            <a:r>
-              <a:rPr lang="ko-KR" sz="1800">
-                <a:solidFill>
-                  <a:schemeClr val="bg1"/>
-                </a:solidFill>
-                <a:latin typeface="맑은 고딕" charset="0"/>
-                <a:ea typeface="맑은 고딕" charset="0"/>
-              </a:rPr>
-              <a:t> </a:t>
-            </a:r>
-            <a:r>
-              <a:rPr lang="ko-KR" sz="1800">
-                <a:solidFill>
-                  <a:schemeClr val="bg1"/>
-                </a:solidFill>
-                <a:latin typeface="맑은 고딕" charset="0"/>
-                <a:ea typeface="맑은 고딕" charset="0"/>
-              </a:rPr>
-              <a:t>대시보드</a:t>
-            </a:r>
-            <a:endParaRPr lang="ko-KR" altLang="en-US" sz="1800">
-              <a:solidFill>
-                <a:schemeClr val="bg1"/>
-              </a:solidFill>
-              <a:latin typeface="맑은 고딕" charset="0"/>
-              <a:ea typeface="맑은 고딕" charset="0"/>
-            </a:endParaRPr>
-          </a:p>
-          <a:p>
-            <a:pPr marL="0" indent="0" algn="l" hangingPunct="1">
-              <a:buFontTx/>
-              <a:buNone/>
-            </a:pPr>
-            <a:endParaRPr lang="ko-KR" altLang="en-US" sz="1800">
-              <a:solidFill>
-                <a:schemeClr val="bg1"/>
-              </a:solidFill>
-              <a:latin typeface="맑은 고딕" charset="0"/>
-              <a:ea typeface="맑은 고딕" charset="0"/>
-            </a:endParaRPr>
-          </a:p>
-          <a:p>
-            <a:pPr marL="0" indent="0" algn="l" hangingPunct="1">
-              <a:buFontTx/>
-              <a:buNone/>
-            </a:pPr>
-            <a:r>
-              <a:rPr lang="ko-KR" sz="1800">
-                <a:solidFill>
-                  <a:schemeClr val="bg1"/>
-                </a:solidFill>
-                <a:latin typeface="맑은 고딕" charset="0"/>
-                <a:ea typeface="맑은 고딕" charset="0"/>
-              </a:rPr>
-              <a:t>데이터 분석</a:t>
-            </a:r>
-            <a:endParaRPr lang="ko-KR" altLang="en-US" sz="1800">
-              <a:solidFill>
-                <a:schemeClr val="bg1"/>
-              </a:solidFill>
-              <a:latin typeface="맑은 고딕" charset="0"/>
-              <a:ea typeface="맑은 고딕" charset="0"/>
-            </a:endParaRPr>
-          </a:p>
-          <a:p>
-            <a:pPr marL="0" indent="0" algn="l" hangingPunct="1">
-              <a:buFontTx/>
-              <a:buNone/>
-            </a:pPr>
-            <a:endParaRPr lang="ko-KR" altLang="en-US" sz="1800">
-              <a:solidFill>
-                <a:schemeClr val="bg1"/>
-              </a:solidFill>
-              <a:latin typeface="맑은 고딕" charset="0"/>
-              <a:ea typeface="맑은 고딕" charset="0"/>
-            </a:endParaRPr>
-          </a:p>
-          <a:p>
-            <a:pPr marL="0" indent="0" algn="l" hangingPunct="1">
-              <a:buFontTx/>
-              <a:buNone/>
-            </a:pPr>
-            <a:r>
-              <a:rPr lang="ko-KR" sz="1800">
-                <a:solidFill>
-                  <a:schemeClr val="bg1"/>
-                </a:solidFill>
-                <a:latin typeface="맑은 고딕" charset="0"/>
-                <a:ea typeface="맑은 고딕" charset="0"/>
-              </a:rPr>
-              <a:t>가격 예측</a:t>
-            </a:r>
-            <a:endParaRPr lang="ko-KR" altLang="en-US" sz="1800">
-              <a:solidFill>
-                <a:schemeClr val="bg1"/>
-              </a:solidFill>
-              <a:latin typeface="맑은 고딕" charset="0"/>
-              <a:ea typeface="맑은 고딕" charset="0"/>
-            </a:endParaRPr>
-          </a:p>
-        </p:txBody>
-      </p:sp>
-      <p:sp>
-        <p:nvSpPr>
-          <p:cNvPr id="7" name="텍스트 상자 7"/>
-          <p:cNvSpPr txBox="1">
-            <a:spLocks/>
-          </p:cNvSpPr>
-          <p:nvPr/>
-        </p:nvSpPr>
-        <p:spPr>
-          <a:xfrm rot="0">
-            <a:off x="3850640" y="3505200"/>
-            <a:ext cx="1175385" cy="370840"/>
-          </a:xfrm>
-          <a:prstGeom prst="rect"/>
-          <a:noFill/>
-          <a:ln w="19050" cap="flat" cmpd="sng">
-            <a:solidFill>
-              <a:schemeClr val="bg1">
-                <a:alpha val="100000"/>
-              </a:schemeClr>
-            </a:solidFill>
-            <a:prstDash val="solid"/>
-            <a:round/>
-          </a:ln>
-        </p:spPr>
-        <p:txBody>
-          <a:bodyPr wrap="none" lIns="89535" tIns="46355" rIns="89535" bIns="46355" numCol="1" vert="horz" anchor="t">
-            <a:spAutoFit/>
-          </a:bodyPr>
-          <a:lstStyle/>
-          <a:p>
-            <a:pPr marL="0" indent="0" algn="l" hangingPunct="1">
-              <a:buFontTx/>
-              <a:buNone/>
-            </a:pPr>
-            <a:r>
-              <a:rPr lang="ko-KR" sz="1800">
-                <a:solidFill>
-                  <a:schemeClr val="bg1"/>
-                </a:solidFill>
-                <a:latin typeface="맑은 고딕" charset="0"/>
-                <a:ea typeface="맑은 고딕" charset="0"/>
-              </a:rPr>
-              <a:t>메뉴 분류</a:t>
-            </a:r>
-            <a:endParaRPr lang="ko-KR" altLang="en-US" sz="1800">
-              <a:solidFill>
-                <a:schemeClr val="bg1"/>
-              </a:solidFill>
-              <a:latin typeface="맑은 고딕" charset="0"/>
-              <a:ea typeface="맑은 고딕" charset="0"/>
-            </a:endParaRPr>
-          </a:p>
-        </p:txBody>
-      </p:sp>
-      <p:cxnSp>
-        <p:nvCxnSpPr>
-          <p:cNvPr id="8" name="도형 8"/>
-          <p:cNvCxnSpPr/>
-          <p:nvPr/>
-        </p:nvCxnSpPr>
-        <p:spPr>
-          <a:xfrm rot="0">
-            <a:off x="3406775" y="3603625"/>
-            <a:ext cx="484505" cy="69850"/>
-          </a:xfrm>
-          <a:prstGeom prst="straightConnector1"/>
-          <a:ln w="6350" cap="flat" cmpd="sng">
-            <a:prstDash/>
-            <a:headEnd type="none" w="med" len="med"/>
-            <a:tailEnd type="triangle" w="med" len="med"/>
-          </a:ln>
-        </p:spPr>
-        <p:style>
-          <a:lnRef idx="1">
-            <a:schemeClr val="dk1"/>
-          </a:lnRef>
-          <a:fillRef idx="0">
-            <a:schemeClr val="dk1"/>
-          </a:fillRef>
-          <a:effectRef idx="0">
-            <a:schemeClr val="dk1"/>
-          </a:effectRef>
-          <a:fontRef idx="minor">
-            <a:schemeClr val="tx1"/>
-          </a:fontRef>
-        </p:style>
-      </p:cxnSp>
-      <p:sp>
-        <p:nvSpPr>
-          <p:cNvPr id="9" name="텍스트 상자 10"/>
-          <p:cNvSpPr txBox="1">
-            <a:spLocks/>
-          </p:cNvSpPr>
-          <p:nvPr/>
-        </p:nvSpPr>
-        <p:spPr>
-          <a:xfrm rot="0">
-            <a:off x="5243195" y="1797050"/>
-            <a:ext cx="1094740" cy="370840"/>
-          </a:xfrm>
-          <a:prstGeom prst="rect"/>
-          <a:noFill/>
-          <a:ln w="19050" cap="flat" cmpd="sng">
-            <a:solidFill>
-              <a:schemeClr val="bg1">
-                <a:alpha val="100000"/>
-              </a:schemeClr>
-            </a:solidFill>
-            <a:prstDash val="solid"/>
-            <a:round/>
-          </a:ln>
-        </p:spPr>
-        <p:txBody>
-          <a:bodyPr wrap="none" lIns="89535" tIns="46355" rIns="89535" bIns="46355" numCol="1" vert="horz" anchor="t">
-            <a:spAutoFit/>
-          </a:bodyPr>
-          <a:lstStyle/>
-          <a:p>
-            <a:pPr marL="0" indent="0" algn="l" hangingPunct="1">
-              <a:buFontTx/>
-              <a:buNone/>
-            </a:pPr>
-            <a:r>
-              <a:rPr lang="ko-KR" sz="1800">
-                <a:latin typeface="맑은 고딕" charset="0"/>
-                <a:ea typeface="맑은 고딕" charset="0"/>
-              </a:rPr>
-              <a:t>대시보드</a:t>
-            </a:r>
-            <a:endParaRPr lang="ko-KR" altLang="en-US" sz="1800">
-              <a:latin typeface="맑은 고딕" charset="0"/>
-              <a:ea typeface="맑은 고딕" charset="0"/>
-            </a:endParaRPr>
-          </a:p>
-        </p:txBody>
-      </p:sp>
-      <p:sp>
-        <p:nvSpPr>
-          <p:cNvPr id="10" name="텍스트 상자 12"/>
-          <p:cNvSpPr txBox="1">
-            <a:spLocks/>
-          </p:cNvSpPr>
-          <p:nvPr/>
-        </p:nvSpPr>
-        <p:spPr>
-          <a:xfrm rot="0">
-            <a:off x="5026660" y="2300605"/>
-            <a:ext cx="3002915" cy="370840"/>
-          </a:xfrm>
-          <a:prstGeom prst="rect"/>
-          <a:noFill/>
-          <a:ln w="19050" cap="flat" cmpd="sng">
-            <a:solidFill>
-              <a:schemeClr val="bg1">
-                <a:alpha val="100000"/>
-              </a:schemeClr>
-            </a:solidFill>
-            <a:prstDash val="solid"/>
-            <a:round/>
-          </a:ln>
-        </p:spPr>
-        <p:txBody>
-          <a:bodyPr wrap="none" lIns="89535" tIns="46355" rIns="89535" bIns="46355" numCol="1" vert="horz" anchor="t">
-            <a:spAutoFit/>
-          </a:bodyPr>
-          <a:lstStyle/>
-          <a:p>
-            <a:pPr marL="0" indent="0" algn="l" hangingPunct="1">
-              <a:buFontTx/>
-              <a:buNone/>
-            </a:pPr>
-            <a:r>
-              <a:rPr lang="ko-KR" sz="1800">
-                <a:solidFill>
-                  <a:schemeClr val="bg1"/>
-                </a:solidFill>
-                <a:latin typeface="맑은 고딕" charset="0"/>
-                <a:ea typeface="맑은 고딕" charset="0"/>
-              </a:rPr>
-              <a:t>스마트팜 현황 한눈에 보기!</a:t>
-            </a:r>
-            <a:endParaRPr lang="ko-KR" altLang="en-US" sz="1800">
-              <a:solidFill>
-                <a:schemeClr val="bg1"/>
-              </a:solidFill>
-              <a:latin typeface="맑은 고딕" charset="0"/>
-              <a:ea typeface="맑은 고딕" charset="0"/>
-            </a:endParaRPr>
-          </a:p>
-        </p:txBody>
-      </p:sp>
-      <p:sp>
-        <p:nvSpPr>
-          <p:cNvPr id="11" name="도형 13"/>
-          <p:cNvSpPr>
-            <a:spLocks/>
-          </p:cNvSpPr>
-          <p:nvPr/>
-        </p:nvSpPr>
-        <p:spPr>
-          <a:xfrm rot="0">
-            <a:off x="5184140" y="2853690"/>
-            <a:ext cx="879475" cy="652145"/>
-          </a:xfrm>
-          <a:prstGeom prst="rect"/>
-          <a:solidFill>
-            <a:schemeClr val="bg1"/>
-          </a:solidFill>
         </p:spPr>
         <p:style>
           <a:lnRef idx="2">
@@ -4156,16 +3931,229 @@
           <a:lstStyle/>
           <a:p>
             <a:pPr marL="0" indent="0" algn="ctr" hangingPunct="1"/>
+            <a:r>
+              <a:rPr lang="ko-KR" sz="1800">
+                <a:solidFill>
+                  <a:schemeClr val="tx1"/>
+                </a:solidFill>
+                <a:latin typeface="맑은 고딕" charset="0"/>
+                <a:ea typeface="맑은 고딕" charset="0"/>
+              </a:rPr>
+              <a:t>메인내용꾸미기/파프리카 </a:t>
+            </a:r>
+            <a:r>
+              <a:rPr lang="ko-KR" sz="1800">
+                <a:solidFill>
+                  <a:schemeClr val="tx1"/>
+                </a:solidFill>
+                <a:latin typeface="맑은 고딕" charset="0"/>
+                <a:ea typeface="맑은 고딕" charset="0"/>
+              </a:rPr>
+              <a:t>내용이나 스</a:t>
+            </a:r>
+            <a:r>
+              <a:rPr lang="ko-KR" sz="1800">
+                <a:solidFill>
+                  <a:schemeClr val="tx1"/>
+                </a:solidFill>
+                <a:latin typeface="맑은 고딕" charset="0"/>
+                <a:ea typeface="맑은 고딕" charset="0"/>
+              </a:rPr>
+              <a:t>마트팜 </a:t>
+            </a:r>
+            <a:r>
+              <a:rPr lang="ko-KR" sz="1800">
+                <a:solidFill>
+                  <a:schemeClr val="tx1"/>
+                </a:solidFill>
+                <a:latin typeface="맑은 고딕" charset="0"/>
+                <a:ea typeface="맑은 고딕" charset="0"/>
+              </a:rPr>
+              <a:t>재배에</a:t>
+            </a:r>
             <a:endParaRPr lang="ko-KR" altLang="en-US" sz="1800">
+              <a:solidFill>
+                <a:schemeClr val="tx1"/>
+              </a:solidFill>
               <a:latin typeface="맑은 고딕" charset="0"/>
               <a:ea typeface="맑은 고딕" charset="0"/>
             </a:endParaRPr>
           </a:p>
-        </p:txBody>
-      </p:sp>
-      <p:sp>
-        <p:nvSpPr>
-          <p:cNvPr id="12" name="도형 15"/>
+          <a:p>
+            <a:pPr marL="0" indent="0" algn="ctr" hangingPunct="1"/>
+            <a:r>
+              <a:rPr lang="ko-KR" sz="1800">
+                <a:solidFill>
+                  <a:schemeClr val="tx1"/>
+                </a:solidFill>
+                <a:latin typeface="맑은 고딕" charset="0"/>
+                <a:ea typeface="맑은 고딕" charset="0"/>
+              </a:rPr>
+              <a:t>필요한 식물위주(딸기,</a:t>
+            </a:r>
+            <a:r>
+              <a:rPr lang="ko-KR" sz="1800">
+                <a:solidFill>
+                  <a:schemeClr val="tx1"/>
+                </a:solidFill>
+                <a:latin typeface="맑은 고딕" charset="0"/>
+                <a:ea typeface="맑은 고딕" charset="0"/>
+              </a:rPr>
+              <a:t> 토마토, 파프리카)</a:t>
+            </a:r>
+            <a:r>
+              <a:rPr lang="ko-KR" sz="1800">
+                <a:solidFill>
+                  <a:schemeClr val="tx1"/>
+                </a:solidFill>
+                <a:latin typeface="맑은 고딕" charset="0"/>
+                <a:ea typeface="맑은 고딕" charset="0"/>
+              </a:rPr>
+              <a:t>의 캐러셀이나 </a:t>
+            </a:r>
+            <a:r>
+              <a:rPr lang="ko-KR" sz="1800">
+                <a:solidFill>
+                  <a:schemeClr val="tx1"/>
+                </a:solidFill>
+                <a:latin typeface="맑은 고딕" charset="0"/>
+                <a:ea typeface="맑은 고딕" charset="0"/>
+              </a:rPr>
+              <a:t>css내용이 들어가게끔!</a:t>
+            </a:r>
+            <a:endParaRPr lang="ko-KR" altLang="en-US" sz="1800">
+              <a:solidFill>
+                <a:schemeClr val="tx1"/>
+              </a:solidFill>
+              <a:latin typeface="맑은 고딕" charset="0"/>
+              <a:ea typeface="맑은 고딕" charset="0"/>
+            </a:endParaRPr>
+          </a:p>
+          <a:p>
+            <a:pPr marL="0" indent="0" algn="ctr" hangingPunct="1"/>
+            <a:r>
+              <a:rPr lang="ko-KR" sz="1800">
+                <a:solidFill>
+                  <a:schemeClr val="tx1"/>
+                </a:solidFill>
+                <a:latin typeface="맑은 고딕" charset="0"/>
+                <a:ea typeface="맑은 고딕" charset="0"/>
+              </a:rPr>
+              <a:t>s</a:t>
+            </a:r>
+            <a:r>
+              <a:rPr lang="ko-KR" sz="1800">
+                <a:solidFill>
+                  <a:schemeClr val="tx1"/>
+                </a:solidFill>
+                <a:latin typeface="맑은 고딕" charset="0"/>
+                <a:ea typeface="맑은 고딕" charset="0"/>
+              </a:rPr>
+              <a:t>ection</a:t>
+            </a:r>
+            <a:r>
+              <a:rPr lang="ko-KR" sz="1800">
+                <a:solidFill>
+                  <a:schemeClr val="tx1"/>
+                </a:solidFill>
+                <a:latin typeface="맑은 고딕" charset="0"/>
+                <a:ea typeface="맑은 고딕" charset="0"/>
+              </a:rPr>
+              <a:t>안에 </a:t>
+            </a:r>
+            <a:r>
+              <a:rPr lang="ko-KR" sz="1800">
+                <a:solidFill>
+                  <a:schemeClr val="tx1"/>
+                </a:solidFill>
+                <a:latin typeface="맑은 고딕" charset="0"/>
+                <a:ea typeface="맑은 고딕" charset="0"/>
+              </a:rPr>
+              <a:t>다른 꾸</a:t>
+            </a:r>
+            <a:r>
+              <a:rPr lang="ko-KR" sz="1800">
+                <a:solidFill>
+                  <a:schemeClr val="tx1"/>
+                </a:solidFill>
+                <a:latin typeface="맑은 고딕" charset="0"/>
+                <a:ea typeface="맑은 고딕" charset="0"/>
+              </a:rPr>
+              <a:t>미는 이미지나 </a:t>
+            </a:r>
+            <a:r>
+              <a:rPr lang="ko-KR" sz="1800">
+                <a:solidFill>
+                  <a:schemeClr val="tx1"/>
+                </a:solidFill>
+                <a:latin typeface="맑은 고딕" charset="0"/>
+                <a:ea typeface="맑은 고딕" charset="0"/>
+              </a:rPr>
+              <a:t>글씨</a:t>
+            </a:r>
+            <a:r>
+              <a:rPr lang="ko-KR" sz="1800">
+                <a:solidFill>
+                  <a:schemeClr val="tx1"/>
+                </a:solidFill>
+                <a:latin typeface="맑은 고딕" charset="0"/>
+                <a:ea typeface="맑은 고딕" charset="0"/>
+              </a:rPr>
+              <a:t>도 넣고</a:t>
+            </a:r>
+            <a:endParaRPr lang="ko-KR" altLang="en-US" sz="1800">
+              <a:solidFill>
+                <a:schemeClr val="tx1"/>
+              </a:solidFill>
+              <a:latin typeface="맑은 고딕" charset="0"/>
+              <a:ea typeface="맑은 고딕" charset="0"/>
+            </a:endParaRPr>
+          </a:p>
+          <a:p>
+            <a:pPr marL="0" indent="0" algn="ctr" hangingPunct="1"/>
+            <a:r>
+              <a:rPr lang="ko-KR" sz="1800">
+                <a:solidFill>
+                  <a:schemeClr val="tx1"/>
+                </a:solidFill>
+                <a:latin typeface="맑은 고딕" charset="0"/>
+                <a:ea typeface="맑은 고딕" charset="0"/>
+              </a:rPr>
+              <a:t>동영상도 있으면 </a:t>
+            </a:r>
+            <a:r>
+              <a:rPr lang="ko-KR" sz="1800">
+                <a:solidFill>
+                  <a:schemeClr val="tx1"/>
+                </a:solidFill>
+                <a:latin typeface="맑은 고딕" charset="0"/>
+                <a:ea typeface="맑은 고딕" charset="0"/>
+              </a:rPr>
+              <a:t>넣을 </a:t>
+            </a:r>
+            <a:r>
+              <a:rPr lang="ko-KR" sz="1800">
+                <a:solidFill>
+                  <a:schemeClr val="tx1"/>
+                </a:solidFill>
+                <a:latin typeface="맑은 고딕" charset="0"/>
+                <a:ea typeface="맑은 고딕" charset="0"/>
+              </a:rPr>
+              <a:t>계획!</a:t>
+            </a:r>
+            <a:endParaRPr lang="ko-KR" altLang="en-US" sz="1800">
+              <a:solidFill>
+                <a:schemeClr val="tx1"/>
+              </a:solidFill>
+              <a:latin typeface="맑은 고딕" charset="0"/>
+              <a:ea typeface="맑은 고딕" charset="0"/>
+            </a:endParaRPr>
+          </a:p>
+        </p:txBody>
+      </p:sp>
+      <p:sp>
+        <p:nvSpPr>
+          <p:cNvPr id="4" name="도형 6"/>
           <p:cNvSpPr>
             <a:spLocks/>
           </p:cNvSpPr>
@@ -4173,13 +4161,21 @@
         </p:nvSpPr>
         <p:spPr>
           <a:xfrm rot="0">
-            <a:off x="6381750" y="2856230"/>
-            <a:ext cx="879475" cy="652145"/>
+            <a:off x="1125855" y="977265"/>
+            <a:ext cx="9401175" cy="800100"/>
           </a:xfrm>
           <a:prstGeom prst="rect"/>
           <a:solidFill>
             <a:schemeClr val="bg1"/>
           </a:solidFill>
+          <a:ln w="12700" cap="flat" cmpd="sng">
+            <a:solidFill>
+              <a:schemeClr val="tx1">
+                <a:alpha val="100000"/>
+              </a:schemeClr>
+            </a:solidFill>
+            <a:prstDash val="solid"/>
+          </a:ln>
         </p:spPr>
         <p:style>
           <a:lnRef idx="2">
@@ -4213,7 +4209,7 @@
       </p:sp>
       <p:sp>
         <p:nvSpPr>
-          <p:cNvPr id="13" name="도형 16"/>
+          <p:cNvPr id="5" name="도형 10"/>
           <p:cNvSpPr>
             <a:spLocks/>
           </p:cNvSpPr>
@@ -4221,13 +4217,10 @@
         </p:nvSpPr>
         <p:spPr>
           <a:xfrm rot="0">
-            <a:off x="7588885" y="2849245"/>
-            <a:ext cx="879475" cy="652145"/>
+            <a:off x="6812915" y="1203960"/>
+            <a:ext cx="2203450" cy="445770"/>
           </a:xfrm>
           <a:prstGeom prst="rect"/>
-          <a:solidFill>
-            <a:schemeClr val="bg1"/>
-          </a:solidFill>
         </p:spPr>
         <p:style>
           <a:lnRef idx="2">
@@ -4246,12 +4239,22 @@
           </a:fontRef>
         </p:style>
         <p:txBody>
-          <a:bodyPr wrap="square" lIns="91440" tIns="45720" rIns="91440" bIns="45720" vert="horz" anchor="ctr">
+          <a:bodyPr wrap="square" lIns="91440" tIns="45720" rIns="91440" bIns="45720" numCol="1" vert="horz" anchor="ctr">
             <a:noAutofit/>
           </a:bodyPr>
           <a:lstStyle/>
           <a:p>
-            <a:pPr marL="0" indent="0" algn="ctr" hangingPunct="1"/>
+            <a:pPr marL="0" indent="0" algn="ctr" hangingPunct="1">
+              <a:buFontTx/>
+              <a:buNone/>
+            </a:pPr>
+            <a:r>
+              <a:rPr lang="ko-KR" sz="1800">
+                <a:latin typeface="맑은 고딕" charset="0"/>
+                <a:ea typeface="맑은 고딕" charset="0"/>
+              </a:rPr>
+              <a:t>Snss님 반갑습니다</a:t>
+            </a:r>
             <a:endParaRPr lang="ko-KR" altLang="en-US" sz="1800">
               <a:latin typeface="맑은 고딕" charset="0"/>
               <a:ea typeface="맑은 고딕" charset="0"/>
@@ -4261,7 +4264,7 @@
       </p:sp>
       <p:sp>
         <p:nvSpPr>
-          <p:cNvPr id="14" name="도형 17"/>
+          <p:cNvPr id="6" name="도형 11"/>
           <p:cNvSpPr>
             <a:spLocks/>
           </p:cNvSpPr>
@@ -4269,12 +4272,12 @@
         </p:nvSpPr>
         <p:spPr>
           <a:xfrm rot="0">
-            <a:off x="8786495" y="2851785"/>
-            <a:ext cx="879475" cy="652145"/>
+            <a:off x="9143365" y="1184275"/>
+            <a:ext cx="1146810" cy="465455"/>
           </a:xfrm>
           <a:prstGeom prst="rect"/>
           <a:solidFill>
-            <a:schemeClr val="bg1"/>
+            <a:schemeClr val="tx1"/>
           </a:solidFill>
         </p:spPr>
         <p:style>
@@ -4294,12 +4297,29 @@
           </a:fontRef>
         </p:style>
         <p:txBody>
-          <a:bodyPr wrap="square" lIns="91440" tIns="45720" rIns="91440" bIns="45720" vert="horz" anchor="ctr">
+          <a:bodyPr wrap="square" lIns="91440" tIns="45720" rIns="91440" bIns="45720" numCol="1" vert="horz" anchor="ctr">
             <a:noAutofit/>
           </a:bodyPr>
           <a:lstStyle/>
           <a:p>
-            <a:pPr marL="0" indent="0" algn="ctr" hangingPunct="1"/>
+            <a:pPr marL="0" indent="0" algn="ctr" hangingPunct="1">
+              <a:buFontTx/>
+              <a:buNone/>
+            </a:pPr>
+            <a:r>
+              <a:rPr sz="1800">
+                <a:latin typeface="맑은 고딕" charset="0"/>
+                <a:ea typeface="맑은 고딕" charset="0"/>
+              </a:rPr>
+              <a:t>로그</a:t>
+            </a:r>
+            <a:r>
+              <a:rPr sz="1800">
+                <a:latin typeface="맑은 고딕" charset="0"/>
+                <a:ea typeface="맑은 고딕" charset="0"/>
+              </a:rPr>
+              <a:t>아웃</a:t>
+            </a:r>
             <a:endParaRPr lang="ko-KR" altLang="en-US" sz="1800">
               <a:latin typeface="맑은 고딕" charset="0"/>
               <a:ea typeface="맑은 고딕" charset="0"/>
@@ -4309,210 +4329,20 @@
       </p:sp>
       <p:sp>
         <p:nvSpPr>
-          <p:cNvPr id="15" name="텍스트 상자 18"/>
-          <p:cNvSpPr txBox="1">
+          <p:cNvPr id="7" name="도형 17"/>
+          <p:cNvSpPr>
             <a:spLocks/>
           </p:cNvSpPr>
           <p:nvPr/>
         </p:nvSpPr>
         <p:spPr>
           <a:xfrm rot="0">
-            <a:off x="5193665" y="2941955"/>
-            <a:ext cx="306705" cy="254635"/>
-          </a:xfrm>
-          <a:prstGeom prst="rect"/>
-          <a:noFill/>
-          <a:ln>
-            <a:noFill/>
-            <a:prstDash/>
-          </a:ln>
-        </p:spPr>
-        <p:txBody>
-          <a:bodyPr wrap="none" lIns="89535" tIns="46355" rIns="89535" bIns="46355" vert="horz" anchor="t">
-            <a:spAutoFit/>
-          </a:bodyPr>
-          <a:lstStyle/>
-          <a:p>
-            <a:pPr marL="0" indent="0" algn="l" hangingPunct="1"/>
-            <a:r>
-              <a:rPr sz="1050" i="0" b="0">
-                <a:latin typeface="Segoe UI Emoji" charset="0"/>
-                <a:ea typeface="ui-sans-serif" charset="0"/>
-              </a:rPr>
-              <a:t>이번 달 예상 수확량</a:t>
-            </a:r>
-            <a:endParaRPr lang="ko-KR" altLang="en-US" sz="1800">
-              <a:latin typeface="맑은 고딕" charset="0"/>
-              <a:ea typeface="맑은 고딕" charset="0"/>
-            </a:endParaRPr>
-          </a:p>
-        </p:txBody>
-      </p:sp>
-      <p:sp>
-        <p:nvSpPr>
-          <p:cNvPr id="16" name="텍스트 상자 19"/>
-          <p:cNvSpPr txBox="1">
-            <a:spLocks/>
-          </p:cNvSpPr>
-          <p:nvPr/>
-        </p:nvSpPr>
-        <p:spPr>
-          <a:xfrm rot="0">
-            <a:off x="6391275" y="2983865"/>
-            <a:ext cx="306705" cy="254635"/>
-          </a:xfrm>
-          <a:prstGeom prst="rect"/>
-          <a:noFill/>
-          <a:ln w="0" cap="flat" cmpd="sng">
-            <a:solidFill>
-              <a:srgbClr val="FFFFFF">
-                <a:alpha val="100000"/>
-              </a:srgbClr>
-            </a:solidFill>
-            <a:prstDash/>
-          </a:ln>
-        </p:spPr>
-        <p:txBody>
-          <a:bodyPr wrap="none" lIns="89535" tIns="46355" rIns="89535" bIns="46355" vert="horz" anchor="t">
-            <a:spAutoFit/>
-          </a:bodyPr>
-          <a:lstStyle/>
-          <a:p>
-            <a:pPr marL="0" indent="0" algn="l" hangingPunct="1"/>
-            <a:r>
-              <a:rPr sz="1050" i="0" b="0">
-                <a:latin typeface="Segoe UI Emoji" charset="0"/>
-                <a:ea typeface="ui-sans-serif" charset="0"/>
-              </a:rPr>
-              <a:t>평균 품질 점수</a:t>
-            </a:r>
-            <a:endParaRPr lang="ko-KR" altLang="en-US" sz="1800">
-              <a:latin typeface="맑은 고딕" charset="0"/>
-              <a:ea typeface="맑은 고딕" charset="0"/>
-            </a:endParaRPr>
-          </a:p>
-        </p:txBody>
-      </p:sp>
-      <p:sp>
-        <p:nvSpPr>
-          <p:cNvPr id="17" name="텍스트 상자 20"/>
-          <p:cNvSpPr txBox="1">
-            <a:spLocks/>
-          </p:cNvSpPr>
-          <p:nvPr/>
-        </p:nvSpPr>
-        <p:spPr>
-          <a:xfrm rot="0">
-            <a:off x="7578725" y="2907665"/>
-            <a:ext cx="953770" cy="415925"/>
-          </a:xfrm>
-          <a:prstGeom prst="rect"/>
-          <a:noFill/>
-          <a:ln w="0" cap="flat" cmpd="sng">
-            <a:solidFill>
-              <a:srgbClr val="FFFFFF">
-                <a:alpha val="100000"/>
-              </a:srgbClr>
-            </a:solidFill>
-            <a:prstDash/>
-          </a:ln>
-        </p:spPr>
-        <p:txBody>
-          <a:bodyPr wrap="square" lIns="89535" tIns="46355" rIns="89535" bIns="46355" vert="horz" anchor="t">
-            <a:spAutoFit/>
-          </a:bodyPr>
-          <a:lstStyle/>
-          <a:p>
-            <a:pPr marL="0" indent="0" algn="l" hangingPunct="1"/>
-            <a:r>
-              <a:rPr sz="1050" i="0" b="0">
-                <a:latin typeface="Segoe UI Emoji" charset="0"/>
-                <a:ea typeface="ui-sans-serif" charset="0"/>
-              </a:rPr>
-              <a:t>재배식물</a:t>
-            </a:r>
-            <a:r>
-              <a:rPr sz="1050" i="0" b="0">
-                <a:latin typeface="Segoe UI Emoji" charset="0"/>
-                <a:ea typeface="ui-sans-serif" charset="0"/>
-              </a:rPr>
-              <a:t> 현재가 (소매)</a:t>
-            </a:r>
-            <a:endParaRPr lang="ko-KR" altLang="en-US" sz="1100">
-              <a:latin typeface="맑은 고딕" charset="0"/>
-              <a:ea typeface="맑은 고딕" charset="0"/>
-            </a:endParaRPr>
-          </a:p>
-        </p:txBody>
-      </p:sp>
-      <p:sp>
-        <p:nvSpPr>
-          <p:cNvPr id="18" name="텍스트 상자 21"/>
-          <p:cNvSpPr txBox="1">
-            <a:spLocks/>
-          </p:cNvSpPr>
-          <p:nvPr/>
-        </p:nvSpPr>
-        <p:spPr>
-          <a:xfrm rot="0">
-            <a:off x="8813165" y="2986405"/>
-            <a:ext cx="245745" cy="370205"/>
-          </a:xfrm>
-          <a:prstGeom prst="rect"/>
-          <a:noFill/>
-          <a:ln w="0" cap="flat" cmpd="sng">
-            <a:solidFill>
-              <a:srgbClr val="FFFFFF">
-                <a:alpha val="100000"/>
-              </a:srgbClr>
-            </a:solidFill>
-            <a:prstDash/>
-          </a:ln>
-        </p:spPr>
-        <p:txBody>
-          <a:bodyPr wrap="none" lIns="89535" tIns="46355" rIns="89535" bIns="46355" vert="horz" anchor="t">
-            <a:spAutoFit/>
-          </a:bodyPr>
-          <a:lstStyle/>
-          <a:p>
-            <a:pPr marL="0" indent="0" algn="l" hangingPunct="1"/>
-            <a:r>
-              <a:rPr sz="1050" i="0" b="0">
-                <a:latin typeface="Segoe UI Emoji" charset="0"/>
-                <a:ea typeface="ui-sans-serif" charset="0"/>
-              </a:rPr>
-              <a:t>예측 수익률</a:t>
-            </a:r>
-            <a:r>
-              <a:rPr lang="ko-KR" sz="1800">
-                <a:latin typeface="맑은 고딕" charset="0"/>
-                <a:ea typeface="맑은 고딕" charset="0"/>
-              </a:rPr>
-              <a:t>!</a:t>
-            </a:r>
-            <a:endParaRPr lang="ko-KR" altLang="en-US" sz="1800">
-              <a:latin typeface="맑은 고딕" charset="0"/>
-              <a:ea typeface="맑은 고딕" charset="0"/>
-            </a:endParaRPr>
-          </a:p>
-        </p:txBody>
-      </p:sp>
-      <p:sp>
-        <p:nvSpPr>
-          <p:cNvPr id="19" name="도형 22"/>
-          <p:cNvSpPr>
-            <a:spLocks/>
-          </p:cNvSpPr>
-          <p:nvPr/>
-        </p:nvSpPr>
-        <p:spPr>
-          <a:xfrm rot="0">
-            <a:off x="5105400" y="3761740"/>
-            <a:ext cx="2469515" cy="1116330"/>
+            <a:off x="1283970" y="1144905"/>
+            <a:ext cx="1066800" cy="544195"/>
           </a:xfrm>
           <a:prstGeom prst="rect"/>
           <a:solidFill>
-            <a:schemeClr val="bg1"/>
+            <a:schemeClr val="tx1"/>
           </a:solidFill>
         </p:spPr>
         <p:style>
@@ -4538,6 +4368,34 @@
           <a:lstStyle/>
           <a:p>
             <a:pPr marL="0" indent="0" algn="ctr" hangingPunct="1"/>
+            <a:r>
+              <a:rPr lang="ko-KR" sz="1800">
+                <a:latin typeface="맑은 고딕" charset="0"/>
+                <a:ea typeface="맑은 고딕" charset="0"/>
+              </a:rPr>
+              <a:t>H</a:t>
+            </a:r>
+            <a:r>
+              <a:rPr lang="ko-KR" sz="1800">
+                <a:latin typeface="맑은 고딕" charset="0"/>
+                <a:ea typeface="맑은 고딕" charset="0"/>
+              </a:rPr>
+              <a:t>ea</a:t>
+            </a:r>
+            <a:r>
+              <a:rPr lang="ko-KR" sz="1800">
+                <a:latin typeface="맑은 고딕" charset="0"/>
+                <a:ea typeface="맑은 고딕" charset="0"/>
+              </a:rPr>
+              <a:t>de</a:t>
+            </a:r>
+            <a:r>
+              <a:rPr lang="ko-KR" sz="1800">
+                <a:latin typeface="맑은 고딕" charset="0"/>
+                <a:ea typeface="맑은 고딕" charset="0"/>
+              </a:rPr>
+              <a:t>r logo</a:t>
+            </a:r>
             <a:endParaRPr lang="ko-KR" altLang="en-US" sz="1800">
               <a:latin typeface="맑은 고딕" charset="0"/>
               <a:ea typeface="맑은 고딕" charset="0"/>
@@ -4547,55 +4405,7 @@
       </p:sp>
       <p:sp>
         <p:nvSpPr>
-          <p:cNvPr id="20" name="도형 24"/>
-          <p:cNvSpPr>
-            <a:spLocks/>
-          </p:cNvSpPr>
-          <p:nvPr/>
-        </p:nvSpPr>
-        <p:spPr>
-          <a:xfrm rot="0">
-            <a:off x="7853045" y="3764280"/>
-            <a:ext cx="2469515" cy="1116330"/>
-          </a:xfrm>
-          <a:prstGeom prst="rect"/>
-          <a:solidFill>
-            <a:schemeClr val="bg1"/>
-          </a:solidFill>
-        </p:spPr>
-        <p:style>
-          <a:lnRef idx="2">
-            <a:schemeClr val="accent1">
-              <a:shade val="50000"/>
-            </a:schemeClr>
-          </a:lnRef>
-          <a:fillRef idx="1">
-            <a:schemeClr val="accent1"/>
-          </a:fillRef>
-          <a:effectRef idx="0">
-            <a:schemeClr val="accent1"/>
-          </a:effectRef>
-          <a:fontRef idx="minor">
-            <a:schemeClr val="lt1"/>
-          </a:fontRef>
-        </p:style>
-        <p:txBody>
-          <a:bodyPr wrap="square" lIns="91440" tIns="45720" rIns="91440" bIns="45720" vert="horz" anchor="ctr">
-            <a:noAutofit/>
-          </a:bodyPr>
-          <a:lstStyle/>
-          <a:p>
-            <a:pPr marL="0" indent="0" algn="ctr" hangingPunct="1"/>
-            <a:endParaRPr lang="ko-KR" altLang="en-US" sz="1800">
-              <a:latin typeface="맑은 고딕" charset="0"/>
-              <a:ea typeface="맑은 고딕" charset="0"/>
-            </a:endParaRPr>
-          </a:p>
-        </p:txBody>
-      </p:sp>
-      <p:sp>
-        <p:nvSpPr>
-          <p:cNvPr id="21" name="텍스트 상자 25"/>
+          <p:cNvPr id="8" name="텍스트 상자 19"/>
           <p:cNvSpPr txBox="1">
             <a:spLocks/>
           </p:cNvSpPr>
@@ -4603,8 +4413,8 @@
         </p:nvSpPr>
         <p:spPr>
           <a:xfrm rot="0">
-            <a:off x="5441315" y="3909695"/>
-            <a:ext cx="1403350" cy="370205"/>
+            <a:off x="2597150" y="1195070"/>
+            <a:ext cx="1094105" cy="370205"/>
           </a:xfrm>
           <a:prstGeom prst="rect"/>
           <a:noFill/>
@@ -4614,7 +4424,7 @@
           </a:ln>
         </p:spPr>
         <p:txBody>
-          <a:bodyPr wrap="square" lIns="89535" tIns="46355" rIns="89535" bIns="46355" vert="horz" anchor="t">
+          <a:bodyPr wrap="none" lIns="89535" tIns="46355" rIns="89535" bIns="46355" vert="horz" anchor="t">
             <a:spAutoFit/>
           </a:bodyPr>
           <a:lstStyle/>
@@ -4625,14 +4435,7 @@
                 <a:latin typeface="맑은 고딕" charset="0"/>
                 <a:ea typeface="맑은 고딕" charset="0"/>
               </a:rPr>
-              <a:t>생산량 </a:t>
-            </a:r>
-            <a:r>
-              <a:rPr lang="ko-KR" sz="1800">
-                <a:latin typeface="맑은 고딕" charset="0"/>
-                <a:ea typeface="맑은 고딕" charset="0"/>
-              </a:rPr>
-              <a:t>추이</a:t>
+              <a:t>대시보드</a:t>
             </a:r>
             <a:endParaRPr lang="ko-KR" altLang="en-US" sz="1800">
               <a:latin typeface="맑은 고딕" charset="0"/>
@@ -4643,7 +4446,7 @@
       </p:sp>
       <p:sp>
         <p:nvSpPr>
-          <p:cNvPr id="22" name="텍스트 상자 26"/>
+          <p:cNvPr id="9" name="텍스트 상자 20"/>
           <p:cNvSpPr txBox="1">
             <a:spLocks/>
           </p:cNvSpPr>
@@ -4651,123 +4454,8 @@
         </p:nvSpPr>
         <p:spPr>
           <a:xfrm rot="0">
-            <a:off x="5243830" y="4284980"/>
-            <a:ext cx="1930400" cy="647065"/>
-          </a:xfrm>
-          <a:prstGeom prst="rect"/>
-          <a:noFill/>
-          <a:ln>
-            <a:noFill/>
-            <a:prstDash/>
-          </a:ln>
-        </p:spPr>
-        <p:txBody>
-          <a:bodyPr wrap="none" lIns="89535" tIns="46355" rIns="89535" bIns="46355" vert="horz" anchor="t">
-            <a:spAutoFit/>
-          </a:bodyPr>
-          <a:lstStyle/>
-          <a:p>
-            <a:pPr marL="0" indent="0">
-              <a:buFontTx/>
-              <a:buNone/>
-            </a:pPr>
-            <a:r>
-              <a:rPr lang="ko-KR" sz="1800">
-                <a:latin typeface="맑은 고딕" charset="0"/>
-                <a:ea typeface="맑은 고딕" charset="0"/>
-              </a:rPr>
-              <a:t>막대그래프 </a:t>
-            </a:r>
-            <a:r>
-              <a:rPr lang="ko-KR" sz="1800">
-                <a:latin typeface="맑은 고딕" charset="0"/>
-                <a:ea typeface="맑은 고딕" charset="0"/>
-              </a:rPr>
-              <a:t>그림</a:t>
-            </a:r>
-            <a:r>
-              <a:rPr lang="ko-KR" sz="1800">
-                <a:latin typeface="맑은 고딕" charset="0"/>
-                <a:ea typeface="맑은 고딕" charset="0"/>
-              </a:rPr>
-              <a:t>(</a:t>
-            </a:r>
-            <a:endParaRPr lang="ko-KR" altLang="en-US" sz="1800">
-              <a:latin typeface="맑은 고딕" charset="0"/>
-              <a:ea typeface="맑은 고딕" charset="0"/>
-            </a:endParaRPr>
-          </a:p>
-          <a:p>
-            <a:pPr marL="0" indent="0">
-              <a:buFontTx/>
-              <a:buNone/>
-            </a:pPr>
-            <a:r>
-              <a:rPr sz="1200" i="0" b="0">
-                <a:solidFill>
-                  <a:schemeClr val="tx1"/>
-                </a:solidFill>
-                <a:latin typeface="Segoe UI Emoji" charset="0"/>
-                <a:ea typeface="ui-sans-serif" charset="0"/>
-              </a:rPr>
-              <a:t>생산량 (kg)</a:t>
-            </a:r>
-            <a:r>
-              <a:rPr sz="1200" i="0" b="0">
-                <a:solidFill>
-                  <a:schemeClr val="tx1"/>
-                </a:solidFill>
-                <a:latin typeface="Segoe UI Emoji" charset="0"/>
-                <a:ea typeface="ui-sans-serif" charset="0"/>
-              </a:rPr>
-              <a:t>,</a:t>
-            </a:r>
-            <a:r>
-              <a:rPr lang="ko-KR" sz="1200" i="0" b="0">
-                <a:solidFill>
-                  <a:schemeClr val="tx1"/>
-                </a:solidFill>
-                <a:latin typeface="Segoe UI Emoji" charset="0"/>
-                <a:ea typeface="ui-sans-serif" charset="0"/>
-              </a:rPr>
-              <a:t> </a:t>
-            </a:r>
-            <a:r>
-              <a:rPr sz="1200" i="0" b="0">
-                <a:solidFill>
-                  <a:schemeClr val="tx1"/>
-                </a:solidFill>
-                <a:latin typeface="Segoe UI Emoji" charset="0"/>
-                <a:ea typeface="ui-sans-serif" charset="0"/>
-              </a:rPr>
-              <a:t>품질 점수</a:t>
-            </a:r>
-            <a:r>
-              <a:rPr lang="ko-KR" sz="1800">
-                <a:latin typeface="맑은 고딕" charset="0"/>
-                <a:ea typeface="맑은 고딕" charset="0"/>
-              </a:rPr>
-              <a:t>)</a:t>
-            </a:r>
-            <a:endParaRPr lang="ko-KR" altLang="en-US" sz="1800">
-              <a:latin typeface="맑은 고딕" charset="0"/>
-              <a:ea typeface="맑은 고딕" charset="0"/>
-            </a:endParaRPr>
-          </a:p>
-        </p:txBody>
-      </p:sp>
-      <p:sp>
-        <p:nvSpPr>
-          <p:cNvPr id="23" name="텍스트 상자 29"/>
-          <p:cNvSpPr txBox="1">
-            <a:spLocks/>
-          </p:cNvSpPr>
-          <p:nvPr/>
-        </p:nvSpPr>
-        <p:spPr>
-          <a:xfrm rot="0">
-            <a:off x="8050530" y="3912235"/>
-            <a:ext cx="2042160" cy="370205"/>
+            <a:off x="3695700" y="1207135"/>
+            <a:ext cx="1403350" cy="370205"/>
           </a:xfrm>
           <a:prstGeom prst="rect"/>
           <a:noFill/>
@@ -4781,7 +4469,7 @@
           </a:ln>
         </p:spPr>
         <p:txBody>
-          <a:bodyPr wrap="square" lIns="89535" tIns="46355" rIns="89535" bIns="46355" vert="horz" anchor="t">
+          <a:bodyPr wrap="none" lIns="89535" tIns="46355" rIns="89535" bIns="46355" vert="horz" anchor="t">
             <a:spAutoFit/>
           </a:bodyPr>
           <a:lstStyle/>
@@ -4792,28 +4480,7 @@
                 <a:latin typeface="맑은 고딕" charset="0"/>
                 <a:ea typeface="맑은 고딕" charset="0"/>
               </a:rPr>
-              <a:t>토마토 </a:t>
-            </a:r>
-            <a:r>
-              <a:rPr lang="ko-KR" sz="1800">
-                <a:latin typeface="맑은 고딕" charset="0"/>
-                <a:ea typeface="맑은 고딕" charset="0"/>
-              </a:rPr>
-              <a:t>가격</a:t>
-            </a:r>
-            <a:r>
-              <a:rPr lang="ko-KR" sz="1800">
-                <a:latin typeface="맑은 고딕" charset="0"/>
-                <a:ea typeface="맑은 고딕" charset="0"/>
-              </a:rPr>
-              <a:t> </a:t>
-            </a:r>
-            <a:r>
-              <a:rPr lang="ko-KR" sz="1800">
-                <a:latin typeface="맑은 고딕" charset="0"/>
-                <a:ea typeface="맑은 고딕" charset="0"/>
-              </a:rPr>
-              <a:t>추이</a:t>
+              <a:t>데이터 분석</a:t>
             </a:r>
             <a:endParaRPr lang="ko-KR" altLang="en-US" sz="1800">
               <a:latin typeface="맑은 고딕" charset="0"/>
@@ -4824,7 +4491,7 @@
       </p:sp>
       <p:sp>
         <p:nvSpPr>
-          <p:cNvPr id="24" name="텍스트 상자 30"/>
+          <p:cNvPr id="10" name="텍스트 상자 21"/>
           <p:cNvSpPr txBox="1">
             <a:spLocks/>
           </p:cNvSpPr>
@@ -4832,8 +4499,8 @@
         </p:nvSpPr>
         <p:spPr>
           <a:xfrm rot="0">
-            <a:off x="7961630" y="4228465"/>
-            <a:ext cx="2239645" cy="647065"/>
+            <a:off x="5071110" y="1189990"/>
+            <a:ext cx="1174750" cy="370205"/>
           </a:xfrm>
           <a:prstGeom prst="rect"/>
           <a:noFill/>
@@ -4852,351 +4519,27 @@
           </a:bodyPr>
           <a:lstStyle/>
           <a:p>
-            <a:pPr marL="0" indent="0">
-              <a:buFontTx/>
-              <a:buNone/>
-            </a:pPr>
-            <a:r>
-              <a:rPr lang="ko-KR" sz="1800">
-                <a:latin typeface="맑은 고딕" charset="0"/>
-                <a:ea typeface="맑은 고딕" charset="0"/>
-              </a:rPr>
-              <a:t>꺽은선 그래프 </a:t>
-            </a:r>
-            <a:r>
-              <a:rPr lang="ko-KR" sz="1800">
-                <a:latin typeface="맑은 고딕" charset="0"/>
-                <a:ea typeface="맑은 고딕" charset="0"/>
-              </a:rPr>
-              <a:t>그림</a:t>
-            </a:r>
-            <a:r>
-              <a:rPr lang="ko-KR" sz="1800">
-                <a:latin typeface="맑은 고딕" charset="0"/>
-                <a:ea typeface="맑은 고딕" charset="0"/>
-              </a:rPr>
-              <a:t>(</a:t>
-            </a:r>
-            <a:endParaRPr lang="ko-KR" altLang="en-US" sz="1800">
-              <a:latin typeface="맑은 고딕" charset="0"/>
-              <a:ea typeface="맑은 고딕" charset="0"/>
-            </a:endParaRPr>
-          </a:p>
-          <a:p>
-            <a:pPr marL="0" indent="0">
-              <a:buFontTx/>
-              <a:buNone/>
-            </a:pPr>
-            <a:r>
-              <a:rPr sz="1200" i="0" b="0">
-                <a:solidFill>
-                  <a:schemeClr val="tx1"/>
-                </a:solidFill>
-                <a:latin typeface="Segoe UI Emoji" charset="0"/>
-                <a:ea typeface="ui-sans-serif" charset="0"/>
-              </a:rPr>
-              <a:t>도매가 (원/kg)</a:t>
-            </a:r>
-            <a:r>
-              <a:rPr sz="1200" i="0" b="0">
-                <a:solidFill>
-                  <a:schemeClr val="tx1"/>
-                </a:solidFill>
-                <a:latin typeface="Segoe UI Emoji" charset="0"/>
-                <a:ea typeface="ui-sans-serif" charset="0"/>
-              </a:rPr>
-              <a:t>,</a:t>
-            </a:r>
-            <a:r>
-              <a:rPr lang="ko-KR" sz="1200" i="0" b="0">
-                <a:solidFill>
-                  <a:schemeClr val="tx1"/>
-                </a:solidFill>
-                <a:latin typeface="Segoe UI Emoji" charset="0"/>
-                <a:ea typeface="ui-sans-serif" charset="0"/>
+            <a:pPr marL="0" indent="0" algn="l" hangingPunct="1"/>
+            <a:r>
+              <a:rPr sz="1800">
+                <a:latin typeface="맑은 고딕" charset="0"/>
+                <a:ea typeface="맑은 고딕" charset="0"/>
+              </a:rPr>
+              <a:t>가격</a:t>
+            </a:r>
+            <a:r>
+              <a:rPr lang="ko-KR" sz="1800">
+                <a:latin typeface="맑은 고딕" charset="0"/>
+                <a:ea typeface="맑은 고딕" charset="0"/>
               </a:rPr>
               <a:t> </a:t>
             </a:r>
             <a:r>
-              <a:rPr sz="1200" i="0" b="0">
-                <a:solidFill>
-                  <a:schemeClr val="tx1"/>
-                </a:solidFill>
-                <a:latin typeface="Segoe UI Emoji" charset="0"/>
-                <a:ea typeface="ui-sans-serif" charset="0"/>
-              </a:rPr>
-              <a:t>소매가 (원/kg</a:t>
-            </a:r>
-            <a:r>
-              <a:rPr lang="ko-KR" sz="1800">
-                <a:latin typeface="맑은 고딕" charset="0"/>
-                <a:ea typeface="맑은 고딕" charset="0"/>
-              </a:rPr>
-              <a:t>)</a:t>
-            </a:r>
-            <a:endParaRPr lang="ko-KR" altLang="en-US" sz="1800">
-              <a:latin typeface="맑은 고딕" charset="0"/>
-              <a:ea typeface="맑은 고딕" charset="0"/>
-            </a:endParaRPr>
-          </a:p>
-        </p:txBody>
-      </p:sp>
-      <p:sp>
-        <p:nvSpPr>
-          <p:cNvPr id="25" name="도형 31"/>
-          <p:cNvSpPr>
-            <a:spLocks/>
-          </p:cNvSpPr>
-          <p:nvPr/>
-        </p:nvSpPr>
-        <p:spPr>
-          <a:xfrm rot="0">
-            <a:off x="5668010" y="4975860"/>
-            <a:ext cx="3279140" cy="850265"/>
-          </a:xfrm>
-          <a:prstGeom prst="rect"/>
-          <a:solidFill>
-            <a:schemeClr val="bg1"/>
-          </a:solidFill>
-        </p:spPr>
-        <p:style>
-          <a:lnRef idx="2">
-            <a:schemeClr val="accent1">
-              <a:shade val="50000"/>
-            </a:schemeClr>
-          </a:lnRef>
-          <a:fillRef idx="1">
-            <a:schemeClr val="accent1"/>
-          </a:fillRef>
-          <a:effectRef idx="0">
-            <a:schemeClr val="accent1"/>
-          </a:effectRef>
-          <a:fontRef idx="minor">
-            <a:schemeClr val="lt1"/>
-          </a:fontRef>
-        </p:style>
-        <p:txBody>
-          <a:bodyPr wrap="square" lIns="91440" tIns="45720" rIns="91440" bIns="45720" vert="horz" anchor="ctr">
-            <a:noAutofit/>
-          </a:bodyPr>
-          <a:lstStyle/>
-          <a:p>
-            <a:pPr marL="0" indent="0" algn="ctr" hangingPunct="1"/>
-            <a:r>
-              <a:rPr sz="1800">
-                <a:solidFill>
-                  <a:schemeClr val="tx1"/>
-                </a:solidFill>
-                <a:latin typeface="맑은 고딕" charset="0"/>
-                <a:ea typeface="맑은 고딕" charset="0"/>
-              </a:rPr>
-              <a:t>재배</a:t>
-            </a:r>
-            <a:r>
-              <a:rPr lang="ko-KR" sz="1800">
-                <a:solidFill>
-                  <a:schemeClr val="tx1"/>
-                </a:solidFill>
-                <a:latin typeface="맑은 고딕" charset="0"/>
-                <a:ea typeface="맑은 고딕" charset="0"/>
-              </a:rPr>
-              <a:t>현황 </a:t>
-            </a:r>
-            <a:r>
-              <a:rPr lang="ko-KR" sz="1800">
-                <a:solidFill>
-                  <a:schemeClr val="tx1"/>
-                </a:solidFill>
-                <a:latin typeface="맑은 고딕" charset="0"/>
-                <a:ea typeface="맑은 고딕" charset="0"/>
-              </a:rPr>
-              <a:t>수확까지</a:t>
-            </a:r>
-            <a:r>
-              <a:rPr lang="ko-KR" sz="1800">
-                <a:solidFill>
-                  <a:schemeClr val="tx1"/>
-                </a:solidFill>
-                <a:latin typeface="맑은 고딕" charset="0"/>
-                <a:ea typeface="맑은 고딕" charset="0"/>
-              </a:rPr>
-              <a:t> </a:t>
-            </a:r>
-            <a:r>
-              <a:rPr lang="ko-KR" sz="1800">
-                <a:solidFill>
-                  <a:schemeClr val="tx1"/>
-                </a:solidFill>
-                <a:latin typeface="맑은 고딕" charset="0"/>
-                <a:ea typeface="맑은 고딕" charset="0"/>
-              </a:rPr>
-              <a:t>일/날짜로 표시하기(</a:t>
-            </a:r>
-            <a:r>
-              <a:rPr sz="1100" i="0" b="0">
-                <a:solidFill>
-                  <a:srgbClr val="000000"/>
-                </a:solidFill>
-                <a:latin typeface="Arial" charset="0"/>
-                <a:ea typeface="Arial" charset="0"/>
-                <a:sym typeface="맑은 고딕" charset="0"/>
-              </a:rPr>
-              <a:t>딸기, 방울토마토, 파프리카, 토마토, 오이</a:t>
-            </a:r>
-            <a:r>
-              <a:rPr lang="ko-KR" sz="1800">
-                <a:solidFill>
-                  <a:schemeClr val="tx1"/>
-                </a:solidFill>
-                <a:latin typeface="맑은 고딕" charset="0"/>
-                <a:ea typeface="맑은 고딕" charset="0"/>
-              </a:rPr>
-              <a:t>)</a:t>
-            </a:r>
-            <a:endParaRPr lang="ko-KR" altLang="en-US" sz="1800">
-              <a:solidFill>
-                <a:schemeClr val="tx1"/>
-              </a:solidFill>
-              <a:latin typeface="맑은 고딕" charset="0"/>
-              <a:ea typeface="맑은 고딕" charset="0"/>
-            </a:endParaRPr>
-          </a:p>
-        </p:txBody>
-      </p:sp>
-      <p:sp>
-        <p:nvSpPr>
-          <p:cNvPr id="26" name="도형 40"/>
-          <p:cNvSpPr>
-            <a:spLocks/>
-          </p:cNvSpPr>
-          <p:nvPr/>
-        </p:nvSpPr>
-        <p:spPr>
-          <a:xfrm rot="0">
-            <a:off x="6339205" y="1342390"/>
-            <a:ext cx="2202815" cy="445135"/>
-          </a:xfrm>
-          <a:prstGeom prst="rect"/>
-        </p:spPr>
-        <p:style>
-          <a:lnRef idx="2">
-            <a:schemeClr val="accent1">
-              <a:shade val="50000"/>
-            </a:schemeClr>
-          </a:lnRef>
-          <a:fillRef idx="1">
-            <a:schemeClr val="accent1"/>
-          </a:fillRef>
-          <a:effectRef idx="0">
-            <a:schemeClr val="accent1"/>
-          </a:effectRef>
-          <a:fontRef idx="minor">
-            <a:schemeClr val="lt1"/>
-          </a:fontRef>
-        </p:style>
-        <p:txBody>
-          <a:bodyPr wrap="square" lIns="91440" tIns="45720" rIns="91440" bIns="45720" vert="horz" anchor="ctr">
-            <a:noAutofit/>
-          </a:bodyPr>
-          <a:lstStyle/>
-          <a:p>
-            <a:pPr marL="0" indent="0" algn="ctr" hangingPunct="1"/>
-            <a:r>
-              <a:rPr lang="ko-KR" sz="1800">
-                <a:latin typeface="맑은 고딕" charset="0"/>
-                <a:ea typeface="맑은 고딕" charset="0"/>
-              </a:rPr>
-              <a:t>S</a:t>
-            </a:r>
-            <a:r>
-              <a:rPr lang="ko-KR" sz="1800">
-                <a:latin typeface="맑은 고딕" charset="0"/>
-                <a:ea typeface="맑은 고딕" charset="0"/>
-              </a:rPr>
-              <a:t>nss</a:t>
-            </a:r>
-            <a:r>
-              <a:rPr lang="ko-KR" sz="1800">
-                <a:latin typeface="맑은 고딕" charset="0"/>
-                <a:ea typeface="맑은 고딕" charset="0"/>
-              </a:rPr>
-              <a:t>님 </a:t>
-            </a:r>
-            <a:r>
-              <a:rPr lang="ko-KR" sz="1800">
-                <a:latin typeface="맑은 고딕" charset="0"/>
-                <a:ea typeface="맑은 고딕" charset="0"/>
-              </a:rPr>
-              <a:t>반갑</a:t>
-            </a:r>
-            <a:r>
-              <a:rPr lang="ko-KR" sz="1800">
-                <a:latin typeface="맑은 고딕" charset="0"/>
-                <a:ea typeface="맑은 고딕" charset="0"/>
-              </a:rPr>
-              <a:t>습니</a:t>
-            </a:r>
-            <a:r>
-              <a:rPr lang="ko-KR" sz="1800">
-                <a:latin typeface="맑은 고딕" charset="0"/>
-                <a:ea typeface="맑은 고딕" charset="0"/>
-              </a:rPr>
-              <a:t>다</a:t>
-            </a:r>
-            <a:endParaRPr lang="ko-KR" altLang="en-US" sz="1800">
-              <a:latin typeface="맑은 고딕" charset="0"/>
-              <a:ea typeface="맑은 고딕" charset="0"/>
-            </a:endParaRPr>
-          </a:p>
-        </p:txBody>
-      </p:sp>
-      <p:sp>
-        <p:nvSpPr>
-          <p:cNvPr id="27" name="도형 41"/>
-          <p:cNvSpPr>
-            <a:spLocks/>
-          </p:cNvSpPr>
-          <p:nvPr/>
-        </p:nvSpPr>
-        <p:spPr>
-          <a:xfrm rot="0">
-            <a:off x="8669655" y="1322705"/>
-            <a:ext cx="1146175" cy="464820"/>
-          </a:xfrm>
-          <a:prstGeom prst="rect"/>
-          <a:solidFill>
-            <a:schemeClr val="tx1"/>
-          </a:solidFill>
-        </p:spPr>
-        <p:style>
-          <a:lnRef idx="2">
-            <a:schemeClr val="accent1">
-              <a:shade val="50000"/>
-            </a:schemeClr>
-          </a:lnRef>
-          <a:fillRef idx="1">
-            <a:schemeClr val="accent1"/>
-          </a:fillRef>
-          <a:effectRef idx="0">
-            <a:schemeClr val="accent1"/>
-          </a:effectRef>
-          <a:fontRef idx="minor">
-            <a:schemeClr val="lt1"/>
-          </a:fontRef>
-        </p:style>
-        <p:txBody>
-          <a:bodyPr wrap="square" lIns="91440" tIns="45720" rIns="91440" bIns="45720" vert="horz" anchor="ctr">
-            <a:noAutofit/>
-          </a:bodyPr>
-          <a:lstStyle/>
-          <a:p>
-            <a:pPr marL="0" indent="0" algn="ctr" hangingPunct="1"/>
-            <a:r>
-              <a:rPr sz="1800">
-                <a:latin typeface="맑은 고딕" charset="0"/>
-                <a:ea typeface="맑은 고딕" charset="0"/>
-              </a:rPr>
-              <a:t>로그인</a:t>
+              <a:rPr lang="ko-KR" sz="1800">
+                <a:latin typeface="맑은 고딕" charset="0"/>
+                <a:ea typeface="맑은 고딕" charset="0"/>
+              </a:rPr>
+              <a:t>예측</a:t>
             </a:r>
             <a:endParaRPr lang="ko-KR" altLang="en-US" sz="1800">
               <a:latin typeface="맑은 고딕" charset="0"/>
@@ -5247,7 +4590,7 @@
       </p:grpSpPr>
       <p:sp>
         <p:nvSpPr>
-          <p:cNvPr id="2" name="Rect 0"/>
+          <p:cNvPr id="2" name="도형 2"/>
           <p:cNvSpPr>
             <a:spLocks/>
           </p:cNvSpPr>
@@ -5255,8 +4598,8 @@
         </p:nvSpPr>
         <p:spPr>
           <a:xfrm rot="0">
-            <a:off x="1136015" y="1016635"/>
-            <a:ext cx="9411335" cy="4978400"/>
+            <a:off x="1087755" y="1016635"/>
+            <a:ext cx="9412605" cy="4979670"/>
           </a:xfrm>
           <a:prstGeom prst="rect"/>
           <a:solidFill>
@@ -5301,30 +4644,31 @@
       </p:sp>
       <p:sp>
         <p:nvSpPr>
-          <p:cNvPr id="3" name="Rect 0"/>
+          <p:cNvPr id="3" name="텍스트 상자 5"/>
           <p:cNvSpPr txBox="1">
             <a:spLocks/>
           </p:cNvSpPr>
           <p:nvPr/>
         </p:nvSpPr>
         <p:spPr>
-          <a:xfrm>
-            <a:off x="1885315" y="1706880"/>
-            <a:ext cx="2610485" cy="370205"/>
+          <a:xfrm rot="0">
+            <a:off x="1838960" y="1875790"/>
+            <a:ext cx="2620010" cy="370840"/>
           </a:xfrm>
           <a:prstGeom prst="rect"/>
           <a:noFill/>
-          <a:ln w="0" cap="flat" cmpd="sng">
+          <a:ln w="19050" cap="flat" cmpd="sng">
             <a:solidFill>
-              <a:srgbClr val="FFFFFF">
+              <a:schemeClr val="bg1">
                 <a:alpha val="100000"/>
-              </a:srgbClr>
+              </a:schemeClr>
             </a:solidFill>
-            <a:prstDash/>
+            <a:prstDash val="solid"/>
+            <a:round/>
           </a:ln>
         </p:spPr>
         <p:txBody>
-          <a:bodyPr wrap="none" lIns="89535" tIns="46355" rIns="89535" bIns="46355" numCol="1" vert="horz" anchor="t">
+          <a:bodyPr wrap="square" lIns="89535" tIns="46355" rIns="89535" bIns="46355" numCol="1" vert="horz" anchor="t">
             <a:spAutoFit/>
           </a:bodyPr>
           <a:lstStyle/>
@@ -5345,7 +4689,21 @@
                 <a:latin typeface="맑은 고딕" charset="0"/>
                 <a:ea typeface="맑은 고딕" charset="0"/>
               </a:rPr>
-              <a:t>AI 환경플랫폼</a:t>
+              <a:t>AI</a:t>
+            </a:r>
+            <a:r>
+              <a:rPr lang="ko-KR" sz="1800">
+                <a:latin typeface="맑은 고딕" charset="0"/>
+                <a:ea typeface="맑은 고딕" charset="0"/>
+              </a:rPr>
+              <a:t> </a:t>
+            </a:r>
+            <a:r>
+              <a:rPr lang="ko-KR" sz="1800">
+                <a:latin typeface="맑은 고딕" charset="0"/>
+                <a:ea typeface="맑은 고딕" charset="0"/>
+              </a:rPr>
+              <a:t>환경플랫폼</a:t>
             </a:r>
             <a:endParaRPr lang="ko-KR" altLang="en-US" sz="1800">
               <a:latin typeface="맑은 고딕" charset="0"/>
@@ -5356,7 +4714,7 @@
       </p:sp>
       <p:sp>
         <p:nvSpPr>
-          <p:cNvPr id="4" name="Rect 0"/>
+          <p:cNvPr id="4" name="텍스트 상자 6"/>
           <p:cNvSpPr txBox="1">
             <a:spLocks/>
           </p:cNvSpPr>
@@ -5369,22 +4727,26 @@
           </a:xfrm>
           <a:prstGeom prst="rect"/>
           <a:noFill/>
-          <a:ln w="0" cap="flat" cmpd="sng">
+          <a:ln w="19050" cap="flat" cmpd="sng">
             <a:solidFill>
-              <a:srgbClr val="FFFFFF">
+              <a:schemeClr val="bg1">
                 <a:alpha val="100000"/>
-              </a:srgbClr>
+              </a:schemeClr>
             </a:solidFill>
-            <a:prstDash/>
+            <a:prstDash val="solid"/>
+            <a:round/>
           </a:ln>
         </p:spPr>
         <p:txBody>
-          <a:bodyPr wrap="none" lIns="89535" tIns="46355" rIns="89535" bIns="46355" vert="horz" anchor="t">
+          <a:bodyPr wrap="none" lIns="89535" tIns="46355" rIns="89535" bIns="46355" numCol="1" vert="horz" anchor="t">
             <a:spAutoFit/>
           </a:bodyPr>
           <a:lstStyle/>
           <a:p>
-            <a:pPr marL="0" indent="0" algn="l" hangingPunct="1"/>
+            <a:pPr marL="0" indent="0" algn="l" hangingPunct="1">
+              <a:buFontTx/>
+              <a:buNone/>
+            </a:pPr>
             <a:r>
               <a:rPr sz="1800">
                 <a:solidFill>
@@ -5403,7 +4765,27 @@
                 <a:latin typeface="맑은 고딕" charset="0"/>
                 <a:ea typeface="맑은 고딕" charset="0"/>
               </a:rPr>
-              <a:t>트팜 대시보드</a:t>
+              <a:t>트팜</a:t>
+            </a:r>
+            <a:r>
+              <a:rPr lang="ko-KR" sz="1800">
+                <a:solidFill>
+                  <a:schemeClr val="bg1"/>
+                </a:solidFill>
+                <a:latin typeface="맑은 고딕" charset="0"/>
+                <a:ea typeface="맑은 고딕" charset="0"/>
+              </a:rPr>
+              <a:t> </a:t>
+            </a:r>
+            <a:r>
+              <a:rPr lang="ko-KR" sz="1800">
+                <a:solidFill>
+                  <a:schemeClr val="bg1"/>
+                </a:solidFill>
+                <a:latin typeface="맑은 고딕" charset="0"/>
+                <a:ea typeface="맑은 고딕" charset="0"/>
+              </a:rPr>
+              <a:t>대시보드</a:t>
             </a:r>
             <a:endParaRPr lang="ko-KR" altLang="en-US" sz="1800">
               <a:solidFill>
@@ -5414,7 +4796,10 @@
             </a:endParaRPr>
           </a:p>
           <a:p>
-            <a:pPr marL="0" indent="0" algn="l" hangingPunct="1"/>
+            <a:pPr marL="0" indent="0" algn="l" hangingPunct="1">
+              <a:buFontTx/>
+              <a:buNone/>
+            </a:pPr>
             <a:endParaRPr lang="ko-KR" altLang="en-US" sz="1800">
               <a:solidFill>
                 <a:schemeClr val="bg1"/>
@@ -5424,7 +4809,10 @@
             </a:endParaRPr>
           </a:p>
           <a:p>
-            <a:pPr marL="0" indent="0" algn="l" hangingPunct="1"/>
+            <a:pPr marL="0" indent="0" algn="l" hangingPunct="1">
+              <a:buFontTx/>
+              <a:buNone/>
+            </a:pPr>
             <a:r>
               <a:rPr lang="ko-KR" sz="1800">
                 <a:solidFill>
@@ -5433,17 +4821,7 @@
                 <a:latin typeface="맑은 고딕" charset="0"/>
                 <a:ea typeface="맑은 고딕" charset="0"/>
               </a:rPr>
-              <a:t>데이터 </a:t>
-            </a:r>
-            <a:r>
-              <a:rPr lang="ko-KR" sz="1800">
-                <a:solidFill>
-                  <a:schemeClr val="bg1"/>
-                </a:solidFill>
-                <a:latin typeface="맑은 고딕" charset="0"/>
-                <a:ea typeface="맑은 고딕" charset="0"/>
-              </a:rPr>
-              <a:t>분석</a:t>
+              <a:t>데이터 분석</a:t>
             </a:r>
             <a:endParaRPr lang="ko-KR" altLang="en-US" sz="1800">
               <a:solidFill>
@@ -5454,7 +4832,10 @@
             </a:endParaRPr>
           </a:p>
           <a:p>
-            <a:pPr marL="0" indent="0" algn="l" hangingPunct="1"/>
+            <a:pPr marL="0" indent="0" algn="l" hangingPunct="1">
+              <a:buFontTx/>
+              <a:buNone/>
+            </a:pPr>
             <a:endParaRPr lang="ko-KR" altLang="en-US" sz="1800">
               <a:solidFill>
                 <a:schemeClr val="bg1"/>
@@ -5464,7 +4845,10 @@
             </a:endParaRPr>
           </a:p>
           <a:p>
-            <a:pPr marL="0" indent="0" algn="l" hangingPunct="1"/>
+            <a:pPr marL="0" indent="0" algn="l" hangingPunct="1">
+              <a:buFontTx/>
+              <a:buNone/>
+            </a:pPr>
             <a:r>
               <a:rPr lang="ko-KR" sz="1800">
                 <a:solidFill>
@@ -5473,17 +4857,7 @@
                 <a:latin typeface="맑은 고딕" charset="0"/>
                 <a:ea typeface="맑은 고딕" charset="0"/>
               </a:rPr>
-              <a:t>가격 </a:t>
-            </a:r>
-            <a:r>
-              <a:rPr lang="ko-KR" sz="1800">
-                <a:solidFill>
-                  <a:schemeClr val="bg1"/>
-                </a:solidFill>
-                <a:latin typeface="맑은 고딕" charset="0"/>
-                <a:ea typeface="맑은 고딕" charset="0"/>
-              </a:rPr>
-              <a:t>예측</a:t>
+              <a:t>가격 예측</a:t>
             </a:r>
             <a:endParaRPr lang="ko-KR" altLang="en-US" sz="1800">
               <a:solidFill>
@@ -5497,7 +4871,7 @@
       </p:sp>
       <p:sp>
         <p:nvSpPr>
-          <p:cNvPr id="7" name="Rect 0"/>
+          <p:cNvPr id="7" name="텍스트 상자 7"/>
           <p:cNvSpPr txBox="1">
             <a:spLocks/>
           </p:cNvSpPr>
@@ -5505,27 +4879,31 @@
         </p:nvSpPr>
         <p:spPr>
           <a:xfrm rot="0">
-            <a:off x="3850640" y="3505200"/>
-            <a:ext cx="1174750" cy="370205"/>
+            <a:off x="1974850" y="4311650"/>
+            <a:ext cx="2089150" cy="647065"/>
           </a:xfrm>
           <a:prstGeom prst="rect"/>
           <a:noFill/>
-          <a:ln w="0" cap="flat" cmpd="sng">
+          <a:ln w="19050" cap="flat" cmpd="sng">
             <a:solidFill>
-              <a:srgbClr val="FFFFFF">
+              <a:schemeClr val="bg1">
                 <a:alpha val="100000"/>
-              </a:srgbClr>
+              </a:schemeClr>
             </a:solidFill>
-            <a:prstDash/>
+            <a:prstDash val="solid"/>
+            <a:round/>
           </a:ln>
         </p:spPr>
         <p:txBody>
-          <a:bodyPr wrap="none" lIns="89535" tIns="46355" rIns="89535" bIns="46355" vert="horz" anchor="t">
+          <a:bodyPr wrap="none" lIns="89535" tIns="46355" rIns="89535" bIns="46355" numCol="1" vert="horz" anchor="t">
             <a:spAutoFit/>
           </a:bodyPr>
           <a:lstStyle/>
           <a:p>
-            <a:pPr marL="0" indent="0" algn="l" hangingPunct="1"/>
+            <a:pPr marL="0" indent="0" algn="l" hangingPunct="1">
+              <a:buFontTx/>
+              <a:buNone/>
+            </a:pPr>
             <a:r>
               <a:rPr lang="ko-KR" sz="1800">
                 <a:solidFill>
@@ -5534,7 +4912,17 @@
                 <a:latin typeface="맑은 고딕" charset="0"/>
                 <a:ea typeface="맑은 고딕" charset="0"/>
               </a:rPr>
-              <a:t>메뉴 분류</a:t>
+              <a:t>왼쪽 </a:t>
+            </a:r>
+            <a:r>
+              <a:rPr lang="ko-KR" sz="1800">
+                <a:solidFill>
+                  <a:schemeClr val="bg1"/>
+                </a:solidFill>
+                <a:latin typeface="맑은 고딕" charset="0"/>
+                <a:ea typeface="맑은 고딕" charset="0"/>
+              </a:rPr>
+              <a:t>카테고리나 </a:t>
             </a:r>
             <a:endParaRPr lang="ko-KR" altLang="en-US" sz="1800">
               <a:solidFill>
@@ -5544,23 +4932,55 @@
               <a:ea typeface="맑은 고딕" charset="0"/>
             </a:endParaRPr>
           </a:p>
+          <a:p>
+            <a:pPr marL="0" indent="0" algn="l" hangingPunct="1">
+              <a:buFontTx/>
+              <a:buNone/>
+            </a:pPr>
+            <a:r>
+              <a:rPr lang="ko-KR" sz="1800">
+                <a:solidFill>
+                  <a:schemeClr val="bg1"/>
+                </a:solidFill>
+                <a:latin typeface="맑은 고딕" charset="0"/>
+                <a:ea typeface="맑은 고딕" charset="0"/>
+              </a:rPr>
+              <a:t>슬라이드</a:t>
+            </a:r>
+            <a:r>
+              <a:rPr lang="ko-KR" sz="1800">
+                <a:solidFill>
+                  <a:schemeClr val="bg1"/>
+                </a:solidFill>
+                <a:latin typeface="맑은 고딕" charset="0"/>
+                <a:ea typeface="맑은 고딕" charset="0"/>
+              </a:rPr>
+              <a:t>메뉴 분류</a:t>
+            </a:r>
+            <a:endParaRPr lang="ko-KR" altLang="en-US" sz="1800">
+              <a:solidFill>
+                <a:schemeClr val="bg1"/>
+              </a:solidFill>
+              <a:latin typeface="맑은 고딕" charset="0"/>
+              <a:ea typeface="맑은 고딕" charset="0"/>
+            </a:endParaRPr>
+          </a:p>
         </p:txBody>
       </p:sp>
       <p:cxnSp>
         <p:nvCxnSpPr>
-          <p:cNvPr id="8" name="Rect 0"/>
+          <p:cNvPr id="8" name="도형 8"/>
           <p:cNvCxnSpPr/>
           <p:nvPr/>
         </p:nvCxnSpPr>
         <p:spPr>
           <a:xfrm rot="0">
-            <a:off x="3406775" y="3603625"/>
-            <a:ext cx="484505" cy="69850"/>
+            <a:off x="3153410" y="3950970"/>
+            <a:ext cx="7620" cy="345440"/>
           </a:xfrm>
           <a:prstGeom prst="straightConnector1"/>
           <a:ln w="6350" cap="flat" cmpd="sng">
             <a:prstDash/>
-            <a:headEnd type="none" w="med" len="med"/>
             <a:tailEnd type="triangle" w="med" len="med"/>
           </a:ln>
         </p:spPr>
@@ -5581,7 +5001,7 @@
       </p:cxnSp>
       <p:sp>
         <p:nvSpPr>
-          <p:cNvPr id="9" name="Rect 0"/>
+          <p:cNvPr id="9" name="텍스트 상자 10"/>
           <p:cNvSpPr txBox="1">
             <a:spLocks/>
           </p:cNvSpPr>
@@ -5590,39 +5010,36 @@
         <p:spPr>
           <a:xfrm rot="0">
             <a:off x="5243195" y="1797050"/>
-            <a:ext cx="1403350" cy="370205"/>
+            <a:ext cx="1094740" cy="370840"/>
           </a:xfrm>
           <a:prstGeom prst="rect"/>
           <a:noFill/>
-          <a:ln w="0" cap="flat" cmpd="sng">
+          <a:ln w="19050" cap="flat" cmpd="sng">
             <a:solidFill>
-              <a:srgbClr val="FFFFFF">
+              <a:schemeClr val="bg1">
                 <a:alpha val="100000"/>
-              </a:srgbClr>
+              </a:schemeClr>
             </a:solidFill>
-            <a:prstDash/>
+            <a:prstDash val="solid"/>
+            <a:round/>
           </a:ln>
         </p:spPr>
         <p:txBody>
-          <a:bodyPr wrap="none" lIns="89535" tIns="46355" rIns="89535" bIns="46355" vert="horz" anchor="t">
+          <a:bodyPr wrap="none" lIns="89535" tIns="46355" rIns="89535" bIns="46355" numCol="1" vert="horz" anchor="t">
             <a:spAutoFit/>
           </a:bodyPr>
           <a:lstStyle/>
           <a:p>
-            <a:pPr marL="0" indent="0" algn="l" hangingPunct="1"/>
-            <a:r>
-              <a:rPr sz="1800">
-                <a:latin typeface="맑은 고딕" charset="0"/>
-                <a:ea typeface="맑은 고딕" charset="0"/>
-              </a:rPr>
-              <a:t>데이터 </a:t>
-            </a:r>
-            <a:r>
-              <a:rPr sz="1800">
-                <a:latin typeface="맑은 고딕" charset="0"/>
-                <a:ea typeface="맑은 고딕" charset="0"/>
-              </a:rPr>
-              <a:t>분석</a:t>
+            <a:pPr marL="0" indent="0" algn="l" hangingPunct="1">
+              <a:buFontTx/>
+              <a:buNone/>
+            </a:pPr>
+            <a:r>
+              <a:rPr lang="ko-KR" sz="1800">
+                <a:latin typeface="맑은 고딕" charset="0"/>
+                <a:ea typeface="맑은 고딕" charset="0"/>
+              </a:rPr>
+              <a:t>대시보드</a:t>
             </a:r>
             <a:endParaRPr lang="ko-KR" altLang="en-US" sz="1800">
               <a:latin typeface="맑은 고딕" charset="0"/>
@@ -5633,7 +5050,7 @@
       </p:sp>
       <p:sp>
         <p:nvSpPr>
-          <p:cNvPr id="10" name="Rect 0"/>
+          <p:cNvPr id="10" name="텍스트 상자 12"/>
           <p:cNvSpPr txBox="1">
             <a:spLocks/>
           </p:cNvSpPr>
@@ -5641,66 +5058,40 @@
         </p:nvSpPr>
         <p:spPr>
           <a:xfrm rot="0">
-            <a:off x="5095875" y="2240915"/>
-            <a:ext cx="3989705" cy="278130"/>
+            <a:off x="5026660" y="2300605"/>
+            <a:ext cx="3002915" cy="370840"/>
           </a:xfrm>
           <a:prstGeom prst="rect"/>
           <a:noFill/>
-          <a:ln w="0" cap="flat" cmpd="sng">
+          <a:ln w="19050" cap="flat" cmpd="sng">
             <a:solidFill>
-              <a:srgbClr val="FFFFFF">
+              <a:schemeClr val="bg1">
                 <a:alpha val="100000"/>
-              </a:srgbClr>
+              </a:schemeClr>
             </a:solidFill>
-            <a:prstDash/>
+            <a:prstDash val="solid"/>
+            <a:round/>
           </a:ln>
         </p:spPr>
         <p:txBody>
-          <a:bodyPr wrap="square" lIns="89535" tIns="46355" rIns="89535" bIns="46355" vert="horz" anchor="t">
+          <a:bodyPr wrap="none" lIns="89535" tIns="46355" rIns="89535" bIns="46355" numCol="1" vert="horz" anchor="t">
             <a:spAutoFit/>
           </a:bodyPr>
           <a:lstStyle/>
           <a:p>
-            <a:pPr marL="0" indent="0" algn="l" hangingPunct="1"/>
-            <a:r>
-              <a:rPr sz="1200" i="0" b="0">
+            <a:pPr marL="0" indent="0" algn="l" hangingPunct="1">
+              <a:buFontTx/>
+              <a:buNone/>
+            </a:pPr>
+            <a:r>
+              <a:rPr lang="ko-KR" sz="1800">
                 <a:solidFill>
                   <a:schemeClr val="bg1"/>
                 </a:solidFill>
-                <a:latin typeface="Segoe UI Emoji" charset="0"/>
-                <a:ea typeface="ui-sans-serif" charset="0"/>
-              </a:rPr>
-              <a:t>축적된 농가 데이터를 분석하여 최적 환경</a:t>
-            </a:r>
-            <a:r>
-              <a:rPr lang="ko-KR" sz="1200" i="0" b="0">
-                <a:solidFill>
-                  <a:schemeClr val="bg1"/>
-                </a:solidFill>
-                <a:latin typeface="Segoe UI Emoji" charset="0"/>
-                <a:ea typeface="ui-sans-serif" charset="0"/>
-              </a:rPr>
-              <a:t> </a:t>
-            </a:r>
-            <a:r>
-              <a:rPr lang="ko-KR" sz="1200" i="0" b="0">
-                <a:solidFill>
-                  <a:schemeClr val="bg1"/>
-                </a:solidFill>
-                <a:latin typeface="Segoe UI Emoji" charset="0"/>
-                <a:ea typeface="ui-sans-serif" charset="0"/>
-              </a:rPr>
-              <a:t>추천</a:t>
-            </a:r>
-            <a:r>
-              <a:rPr lang="ko-KR" sz="1200" i="0" b="0">
-                <a:solidFill>
-                  <a:schemeClr val="bg1"/>
-                </a:solidFill>
-                <a:latin typeface="Segoe UI Emoji" charset="0"/>
-                <a:ea typeface="ui-sans-serif" charset="0"/>
-              </a:rPr>
-              <a:t>서비스</a:t>
+                <a:latin typeface="맑은 고딕" charset="0"/>
+                <a:ea typeface="맑은 고딕" charset="0"/>
+              </a:rPr>
+              <a:t>스마트팜 현황 한눈에 보기!</a:t>
             </a:r>
             <a:endParaRPr lang="ko-KR" altLang="en-US" sz="1800">
               <a:solidFill>
@@ -5714,7 +5105,7 @@
       </p:sp>
       <p:sp>
         <p:nvSpPr>
-          <p:cNvPr id="11" name="도형 35"/>
+          <p:cNvPr id="11" name="도형 13"/>
           <p:cNvSpPr>
             <a:spLocks/>
           </p:cNvSpPr>
@@ -5722,8 +5113,8 @@
         </p:nvSpPr>
         <p:spPr>
           <a:xfrm rot="0">
-            <a:off x="5509895" y="2705100"/>
-            <a:ext cx="3615055" cy="929005"/>
+            <a:off x="5184140" y="2853690"/>
+            <a:ext cx="879475" cy="652145"/>
           </a:xfrm>
           <a:prstGeom prst="rect"/>
           <a:solidFill>
@@ -5753,100 +5144,7 @@
           <a:lstStyle/>
           <a:p>
             <a:pPr marL="0" indent="0" algn="ctr" hangingPunct="1"/>
-            <a:r>
-              <a:rPr lang="ko-KR" sz="1800">
-                <a:solidFill>
-                  <a:schemeClr val="tx1"/>
-                </a:solidFill>
-                <a:latin typeface="맑은 고딕" charset="0"/>
-                <a:ea typeface="맑은 고딕" charset="0"/>
-              </a:rPr>
-              <a:t>데이터 </a:t>
-            </a:r>
-            <a:r>
-              <a:rPr lang="ko-KR" sz="1800">
-                <a:solidFill>
-                  <a:schemeClr val="tx1"/>
-                </a:solidFill>
-                <a:latin typeface="맑은 고딕" charset="0"/>
-                <a:ea typeface="맑은 고딕" charset="0"/>
-              </a:rPr>
-              <a:t>업로드(환경데이터,</a:t>
-            </a:r>
-            <a:r>
-              <a:rPr lang="ko-KR" sz="1800">
-                <a:solidFill>
-                  <a:schemeClr val="tx1"/>
-                </a:solidFill>
-                <a:latin typeface="맑은 고딕" charset="0"/>
-                <a:ea typeface="맑은 고딕" charset="0"/>
-              </a:rPr>
-              <a:t> 생육</a:t>
-            </a:r>
-            <a:r>
-              <a:rPr lang="ko-KR" sz="1800">
-                <a:solidFill>
-                  <a:schemeClr val="tx1"/>
-                </a:solidFill>
-                <a:latin typeface="맑은 고딕" charset="0"/>
-                <a:ea typeface="맑은 고딕" charset="0"/>
-              </a:rPr>
-              <a:t>데이터,</a:t>
-            </a:r>
-            <a:r>
-              <a:rPr lang="ko-KR" sz="1800">
-                <a:solidFill>
-                  <a:schemeClr val="tx1"/>
-                </a:solidFill>
-                <a:latin typeface="맑은 고딕" charset="0"/>
-                <a:ea typeface="맑은 고딕" charset="0"/>
-              </a:rPr>
-              <a:t> 생산량데이터</a:t>
-            </a:r>
-            <a:r>
-              <a:rPr lang="ko-KR" sz="1800">
-                <a:solidFill>
-                  <a:schemeClr val="tx1"/>
-                </a:solidFill>
-                <a:latin typeface="맑은 고딕" charset="0"/>
-                <a:ea typeface="맑은 고딕" charset="0"/>
-              </a:rPr>
-              <a:t> </a:t>
-            </a:r>
-            <a:r>
-              <a:rPr lang="ko-KR" sz="1800">
-                <a:solidFill>
-                  <a:schemeClr val="tx1"/>
-                </a:solidFill>
-                <a:latin typeface="맑은 고딕" charset="0"/>
-                <a:ea typeface="맑은 고딕" charset="0"/>
-              </a:rPr>
-              <a:t>-ㅡ csv나 xl</a:t>
-            </a:r>
-            <a:r>
-              <a:rPr lang="ko-KR" sz="1800">
-                <a:solidFill>
-                  <a:schemeClr val="tx1"/>
-                </a:solidFill>
-                <a:latin typeface="맑은 고딕" charset="0"/>
-                <a:ea typeface="맑은 고딕" charset="0"/>
-              </a:rPr>
-              <a:t>s</a:t>
-            </a:r>
-            <a:r>
-              <a:rPr lang="ko-KR" sz="1800">
-                <a:solidFill>
-                  <a:schemeClr val="tx1"/>
-                </a:solidFill>
-                <a:latin typeface="맑은 고딕" charset="0"/>
-                <a:ea typeface="맑은 고딕" charset="0"/>
-              </a:rPr>
-              <a:t>x파일들)</a:t>
-            </a:r>
             <a:endParaRPr lang="ko-KR" altLang="en-US" sz="1800">
-              <a:solidFill>
-                <a:schemeClr val="tx1"/>
-              </a:solidFill>
               <a:latin typeface="맑은 고딕" charset="0"/>
               <a:ea typeface="맑은 고딕" charset="0"/>
             </a:endParaRPr>
@@ -5855,7 +5153,7 @@
       </p:sp>
       <p:sp>
         <p:nvSpPr>
-          <p:cNvPr id="12" name="도형 37"/>
+          <p:cNvPr id="12" name="도형 15"/>
           <p:cNvSpPr>
             <a:spLocks/>
           </p:cNvSpPr>
@@ -5863,12 +5161,12 @@
         </p:nvSpPr>
         <p:spPr>
           <a:xfrm rot="0">
-            <a:off x="9044940" y="2073275"/>
-            <a:ext cx="1363345" cy="484505"/>
+            <a:off x="6381750" y="2856230"/>
+            <a:ext cx="879475" cy="652145"/>
           </a:xfrm>
           <a:prstGeom prst="rect"/>
           <a:solidFill>
-            <a:schemeClr val="tx1"/>
+            <a:schemeClr val="bg1"/>
           </a:solidFill>
         </p:spPr>
         <p:style>
@@ -5894,13 +5192,6 @@
           <a:lstStyle/>
           <a:p>
             <a:pPr marL="0" indent="0" algn="ctr" hangingPunct="1"/>
-            <a:r>
-              <a:rPr lang="ko-KR" sz="1800">
-                <a:latin typeface="맑은 고딕" charset="0"/>
-                <a:ea typeface="맑은 고딕" charset="0"/>
-              </a:rPr>
-              <a:t>ai분석버튼</a:t>
-            </a:r>
             <a:endParaRPr lang="ko-KR" altLang="en-US" sz="1800">
               <a:latin typeface="맑은 고딕" charset="0"/>
               <a:ea typeface="맑은 고딕" charset="0"/>
@@ -5910,7 +5201,7 @@
       </p:sp>
       <p:sp>
         <p:nvSpPr>
-          <p:cNvPr id="13" name="도형 46"/>
+          <p:cNvPr id="13" name="도형 16"/>
           <p:cNvSpPr>
             <a:spLocks/>
           </p:cNvSpPr>
@@ -5918,10 +5209,13 @@
         </p:nvSpPr>
         <p:spPr>
           <a:xfrm rot="0">
-            <a:off x="6339205" y="1342390"/>
-            <a:ext cx="2202815" cy="445135"/>
+            <a:off x="7588885" y="2849245"/>
+            <a:ext cx="879475" cy="652145"/>
           </a:xfrm>
           <a:prstGeom prst="rect"/>
+          <a:solidFill>
+            <a:schemeClr val="bg1"/>
+          </a:solidFill>
         </p:spPr>
         <p:style>
           <a:lnRef idx="2">
@@ -5946,48 +5240,6 @@
           <a:lstStyle/>
           <a:p>
             <a:pPr marL="0" indent="0" algn="ctr" hangingPunct="1"/>
-            <a:r>
-              <a:rPr lang="ko-KR" sz="1800">
-                <a:latin typeface="맑은 고딕" charset="0"/>
-                <a:ea typeface="맑은 고딕" charset="0"/>
-              </a:rPr>
-              <a:t>S</a:t>
-            </a:r>
-            <a:r>
-              <a:rPr lang="ko-KR" sz="1800">
-                <a:latin typeface="맑은 고딕" charset="0"/>
-                <a:ea typeface="맑은 고딕" charset="0"/>
-              </a:rPr>
-              <a:t>nss</a:t>
-            </a:r>
-            <a:r>
-              <a:rPr lang="ko-KR" sz="1800">
-                <a:latin typeface="맑은 고딕" charset="0"/>
-                <a:ea typeface="맑은 고딕" charset="0"/>
-              </a:rPr>
-              <a:t>님 </a:t>
-            </a:r>
-            <a:r>
-              <a:rPr lang="ko-KR" sz="1800">
-                <a:latin typeface="맑은 고딕" charset="0"/>
-                <a:ea typeface="맑은 고딕" charset="0"/>
-              </a:rPr>
-              <a:t>반갑</a:t>
-            </a:r>
-            <a:r>
-              <a:rPr lang="ko-KR" sz="1800">
-                <a:latin typeface="맑은 고딕" charset="0"/>
-                <a:ea typeface="맑은 고딕" charset="0"/>
-              </a:rPr>
-              <a:t>습니</a:t>
-            </a:r>
-            <a:r>
-              <a:rPr lang="ko-KR" sz="1800">
-                <a:latin typeface="맑은 고딕" charset="0"/>
-                <a:ea typeface="맑은 고딕" charset="0"/>
-              </a:rPr>
-              <a:t>다</a:t>
-            </a:r>
             <a:endParaRPr lang="ko-KR" altLang="en-US" sz="1800">
               <a:latin typeface="맑은 고딕" charset="0"/>
               <a:ea typeface="맑은 고딕" charset="0"/>
@@ -5997,7 +5249,7 @@
       </p:sp>
       <p:sp>
         <p:nvSpPr>
-          <p:cNvPr id="14" name="도형 47"/>
+          <p:cNvPr id="14" name="도형 17"/>
           <p:cNvSpPr>
             <a:spLocks/>
           </p:cNvSpPr>
@@ -6005,12 +5257,12 @@
         </p:nvSpPr>
         <p:spPr>
           <a:xfrm rot="0">
-            <a:off x="8669655" y="1322705"/>
-            <a:ext cx="1146175" cy="464820"/>
+            <a:off x="8786495" y="2851785"/>
+            <a:ext cx="879475" cy="652145"/>
           </a:xfrm>
           <a:prstGeom prst="rect"/>
           <a:solidFill>
-            <a:schemeClr val="tx1"/>
+            <a:schemeClr val="bg1"/>
           </a:solidFill>
         </p:spPr>
         <p:style>
@@ -6036,13 +5288,6 @@
           <a:lstStyle/>
           <a:p>
             <a:pPr marL="0" indent="0" algn="ctr" hangingPunct="1"/>
-            <a:r>
-              <a:rPr sz="1800">
-                <a:latin typeface="맑은 고딕" charset="0"/>
-                <a:ea typeface="맑은 고딕" charset="0"/>
-              </a:rPr>
-              <a:t>로그인</a:t>
-            </a:r>
             <a:endParaRPr lang="ko-KR" altLang="en-US" sz="1800">
               <a:latin typeface="맑은 고딕" charset="0"/>
               <a:ea typeface="맑은 고딕" charset="0"/>
@@ -6052,16 +5297,206 @@
       </p:sp>
       <p:sp>
         <p:nvSpPr>
-          <p:cNvPr id="15" name="도형 1"/>
-          <p:cNvSpPr>
+          <p:cNvPr id="15" name="텍스트 상자 18"/>
+          <p:cNvSpPr txBox="1">
             <a:spLocks/>
           </p:cNvSpPr>
           <p:nvPr/>
         </p:nvSpPr>
         <p:spPr>
           <a:xfrm rot="0">
-            <a:off x="5312410" y="4008755"/>
-            <a:ext cx="4246880" cy="1521460"/>
+            <a:off x="5193665" y="2941955"/>
+            <a:ext cx="306705" cy="254635"/>
+          </a:xfrm>
+          <a:prstGeom prst="rect"/>
+          <a:noFill/>
+          <a:ln>
+            <a:noFill/>
+            <a:prstDash/>
+          </a:ln>
+        </p:spPr>
+        <p:txBody>
+          <a:bodyPr wrap="none" lIns="89535" tIns="46355" rIns="89535" bIns="46355" vert="horz" anchor="t">
+            <a:spAutoFit/>
+          </a:bodyPr>
+          <a:lstStyle/>
+          <a:p>
+            <a:pPr marL="0" indent="0" algn="l" hangingPunct="1"/>
+            <a:r>
+              <a:rPr sz="1050" i="0" b="0">
+                <a:latin typeface="Segoe UI Emoji" charset="0"/>
+                <a:ea typeface="ui-sans-serif" charset="0"/>
+              </a:rPr>
+              <a:t>이번 달 예상 수확량</a:t>
+            </a:r>
+            <a:endParaRPr lang="ko-KR" altLang="en-US" sz="1800">
+              <a:latin typeface="맑은 고딕" charset="0"/>
+              <a:ea typeface="맑은 고딕" charset="0"/>
+            </a:endParaRPr>
+          </a:p>
+        </p:txBody>
+      </p:sp>
+      <p:sp>
+        <p:nvSpPr>
+          <p:cNvPr id="16" name="텍스트 상자 19"/>
+          <p:cNvSpPr txBox="1">
+            <a:spLocks/>
+          </p:cNvSpPr>
+          <p:nvPr/>
+        </p:nvSpPr>
+        <p:spPr>
+          <a:xfrm rot="0">
+            <a:off x="6391275" y="2983865"/>
+            <a:ext cx="306705" cy="254635"/>
+          </a:xfrm>
+          <a:prstGeom prst="rect"/>
+          <a:noFill/>
+          <a:ln w="0" cap="flat" cmpd="sng">
+            <a:solidFill>
+              <a:srgbClr val="FFFFFF">
+                <a:alpha val="100000"/>
+              </a:srgbClr>
+            </a:solidFill>
+            <a:prstDash/>
+          </a:ln>
+        </p:spPr>
+        <p:txBody>
+          <a:bodyPr wrap="none" lIns="89535" tIns="46355" rIns="89535" bIns="46355" vert="horz" anchor="t">
+            <a:spAutoFit/>
+          </a:bodyPr>
+          <a:lstStyle/>
+          <a:p>
+            <a:pPr marL="0" indent="0" algn="l" hangingPunct="1"/>
+            <a:r>
+              <a:rPr sz="1050" i="0" b="0">
+                <a:latin typeface="Segoe UI Emoji" charset="0"/>
+                <a:ea typeface="ui-sans-serif" charset="0"/>
+              </a:rPr>
+              <a:t>평균 품질 점수</a:t>
+            </a:r>
+            <a:endParaRPr lang="ko-KR" altLang="en-US" sz="1800">
+              <a:latin typeface="맑은 고딕" charset="0"/>
+              <a:ea typeface="맑은 고딕" charset="0"/>
+            </a:endParaRPr>
+          </a:p>
+        </p:txBody>
+      </p:sp>
+      <p:sp>
+        <p:nvSpPr>
+          <p:cNvPr id="17" name="텍스트 상자 20"/>
+          <p:cNvSpPr txBox="1">
+            <a:spLocks/>
+          </p:cNvSpPr>
+          <p:nvPr/>
+        </p:nvSpPr>
+        <p:spPr>
+          <a:xfrm rot="0">
+            <a:off x="7578725" y="2907665"/>
+            <a:ext cx="953770" cy="415925"/>
+          </a:xfrm>
+          <a:prstGeom prst="rect"/>
+          <a:noFill/>
+          <a:ln w="0" cap="flat" cmpd="sng">
+            <a:solidFill>
+              <a:srgbClr val="FFFFFF">
+                <a:alpha val="100000"/>
+              </a:srgbClr>
+            </a:solidFill>
+            <a:prstDash/>
+          </a:ln>
+        </p:spPr>
+        <p:txBody>
+          <a:bodyPr wrap="square" lIns="89535" tIns="46355" rIns="89535" bIns="46355" vert="horz" anchor="t">
+            <a:spAutoFit/>
+          </a:bodyPr>
+          <a:lstStyle/>
+          <a:p>
+            <a:pPr marL="0" indent="0" algn="l" hangingPunct="1"/>
+            <a:r>
+              <a:rPr sz="1050" i="0" b="0">
+                <a:latin typeface="Segoe UI Emoji" charset="0"/>
+                <a:ea typeface="ui-sans-serif" charset="0"/>
+              </a:rPr>
+              <a:t>재배식물</a:t>
+            </a:r>
+            <a:r>
+              <a:rPr sz="1050" i="0" b="0">
+                <a:latin typeface="Segoe UI Emoji" charset="0"/>
+                <a:ea typeface="ui-sans-serif" charset="0"/>
+              </a:rPr>
+              <a:t> 현재가 (소매)</a:t>
+            </a:r>
+            <a:endParaRPr lang="ko-KR" altLang="en-US" sz="1100">
+              <a:latin typeface="맑은 고딕" charset="0"/>
+              <a:ea typeface="맑은 고딕" charset="0"/>
+            </a:endParaRPr>
+          </a:p>
+        </p:txBody>
+      </p:sp>
+      <p:sp>
+        <p:nvSpPr>
+          <p:cNvPr id="18" name="텍스트 상자 21"/>
+          <p:cNvSpPr txBox="1">
+            <a:spLocks/>
+          </p:cNvSpPr>
+          <p:nvPr/>
+        </p:nvSpPr>
+        <p:spPr>
+          <a:xfrm rot="0">
+            <a:off x="8813165" y="2986405"/>
+            <a:ext cx="245745" cy="370205"/>
+          </a:xfrm>
+          <a:prstGeom prst="rect"/>
+          <a:noFill/>
+          <a:ln w="0" cap="flat" cmpd="sng">
+            <a:solidFill>
+              <a:srgbClr val="FFFFFF">
+                <a:alpha val="100000"/>
+              </a:srgbClr>
+            </a:solidFill>
+            <a:prstDash/>
+          </a:ln>
+        </p:spPr>
+        <p:txBody>
+          <a:bodyPr wrap="none" lIns="89535" tIns="46355" rIns="89535" bIns="46355" vert="horz" anchor="t">
+            <a:spAutoFit/>
+          </a:bodyPr>
+          <a:lstStyle/>
+          <a:p>
+            <a:pPr marL="0" indent="0" algn="l" hangingPunct="1"/>
+            <a:r>
+              <a:rPr sz="1050" i="0" b="0">
+                <a:latin typeface="Segoe UI Emoji" charset="0"/>
+                <a:ea typeface="ui-sans-serif" charset="0"/>
+              </a:rPr>
+              <a:t>예측 수익률</a:t>
+            </a:r>
+            <a:r>
+              <a:rPr lang="ko-KR" sz="1800">
+                <a:latin typeface="맑은 고딕" charset="0"/>
+                <a:ea typeface="맑은 고딕" charset="0"/>
+              </a:rPr>
+              <a:t>!</a:t>
+            </a:r>
+            <a:endParaRPr lang="ko-KR" altLang="en-US" sz="1800">
+              <a:latin typeface="맑은 고딕" charset="0"/>
+              <a:ea typeface="맑은 고딕" charset="0"/>
+            </a:endParaRPr>
+          </a:p>
+        </p:txBody>
+      </p:sp>
+      <p:sp>
+        <p:nvSpPr>
+          <p:cNvPr id="19" name="도형 22"/>
+          <p:cNvSpPr>
+            <a:spLocks/>
+          </p:cNvSpPr>
+          <p:nvPr/>
+        </p:nvSpPr>
+        <p:spPr>
+          <a:xfrm rot="0">
+            <a:off x="5105400" y="3761740"/>
+            <a:ext cx="2469515" cy="1116330"/>
           </a:xfrm>
           <a:prstGeom prst="rect"/>
           <a:solidFill>
@@ -6091,80 +5526,908 @@
           <a:lstStyle/>
           <a:p>
             <a:pPr marL="0" indent="0" algn="ctr" hangingPunct="1"/>
-            <a:r>
-              <a:rPr lang="ko-KR" sz="1800">
+            <a:endParaRPr lang="ko-KR" altLang="en-US" sz="1800">
+              <a:latin typeface="맑은 고딕" charset="0"/>
+              <a:ea typeface="맑은 고딕" charset="0"/>
+            </a:endParaRPr>
+          </a:p>
+        </p:txBody>
+      </p:sp>
+      <p:sp>
+        <p:nvSpPr>
+          <p:cNvPr id="20" name="도형 24"/>
+          <p:cNvSpPr>
+            <a:spLocks/>
+          </p:cNvSpPr>
+          <p:nvPr/>
+        </p:nvSpPr>
+        <p:spPr>
+          <a:xfrm rot="0">
+            <a:off x="7853045" y="3764280"/>
+            <a:ext cx="2469515" cy="1116330"/>
+          </a:xfrm>
+          <a:prstGeom prst="rect"/>
+          <a:solidFill>
+            <a:schemeClr val="bg1"/>
+          </a:solidFill>
+        </p:spPr>
+        <p:style>
+          <a:lnRef idx="2">
+            <a:schemeClr val="accent1">
+              <a:shade val="50000"/>
+            </a:schemeClr>
+          </a:lnRef>
+          <a:fillRef idx="1">
+            <a:schemeClr val="accent1"/>
+          </a:fillRef>
+          <a:effectRef idx="0">
+            <a:schemeClr val="accent1"/>
+          </a:effectRef>
+          <a:fontRef idx="minor">
+            <a:schemeClr val="lt1"/>
+          </a:fontRef>
+        </p:style>
+        <p:txBody>
+          <a:bodyPr wrap="square" lIns="91440" tIns="45720" rIns="91440" bIns="45720" vert="horz" anchor="ctr">
+            <a:noAutofit/>
+          </a:bodyPr>
+          <a:lstStyle/>
+          <a:p>
+            <a:pPr marL="0" indent="0" algn="ctr" hangingPunct="1"/>
+            <a:endParaRPr lang="ko-KR" altLang="en-US" sz="1800">
+              <a:latin typeface="맑은 고딕" charset="0"/>
+              <a:ea typeface="맑은 고딕" charset="0"/>
+            </a:endParaRPr>
+          </a:p>
+        </p:txBody>
+      </p:sp>
+      <p:sp>
+        <p:nvSpPr>
+          <p:cNvPr id="21" name="텍스트 상자 25"/>
+          <p:cNvSpPr txBox="1">
+            <a:spLocks/>
+          </p:cNvSpPr>
+          <p:nvPr/>
+        </p:nvSpPr>
+        <p:spPr>
+          <a:xfrm rot="0">
+            <a:off x="5441315" y="3909695"/>
+            <a:ext cx="1403350" cy="370205"/>
+          </a:xfrm>
+          <a:prstGeom prst="rect"/>
+          <a:noFill/>
+          <a:ln>
+            <a:noFill/>
+            <a:prstDash/>
+          </a:ln>
+        </p:spPr>
+        <p:txBody>
+          <a:bodyPr wrap="square" lIns="89535" tIns="46355" rIns="89535" bIns="46355" vert="horz" anchor="t">
+            <a:spAutoFit/>
+          </a:bodyPr>
+          <a:lstStyle/>
+          <a:p>
+            <a:pPr marL="0" indent="0" algn="l" hangingPunct="1"/>
+            <a:r>
+              <a:rPr lang="ko-KR" sz="1800">
+                <a:latin typeface="맑은 고딕" charset="0"/>
+                <a:ea typeface="맑은 고딕" charset="0"/>
+              </a:rPr>
+              <a:t>생산량 </a:t>
+            </a:r>
+            <a:r>
+              <a:rPr lang="ko-KR" sz="1800">
+                <a:latin typeface="맑은 고딕" charset="0"/>
+                <a:ea typeface="맑은 고딕" charset="0"/>
+              </a:rPr>
+              <a:t>추이</a:t>
+            </a:r>
+            <a:endParaRPr lang="ko-KR" altLang="en-US" sz="1800">
+              <a:latin typeface="맑은 고딕" charset="0"/>
+              <a:ea typeface="맑은 고딕" charset="0"/>
+            </a:endParaRPr>
+          </a:p>
+        </p:txBody>
+      </p:sp>
+      <p:sp>
+        <p:nvSpPr>
+          <p:cNvPr id="22" name="텍스트 상자 26"/>
+          <p:cNvSpPr txBox="1">
+            <a:spLocks/>
+          </p:cNvSpPr>
+          <p:nvPr/>
+        </p:nvSpPr>
+        <p:spPr>
+          <a:xfrm rot="0">
+            <a:off x="5243830" y="4284980"/>
+            <a:ext cx="1930400" cy="647065"/>
+          </a:xfrm>
+          <a:prstGeom prst="rect"/>
+          <a:noFill/>
+          <a:ln>
+            <a:noFill/>
+            <a:prstDash/>
+          </a:ln>
+        </p:spPr>
+        <p:txBody>
+          <a:bodyPr wrap="none" lIns="89535" tIns="46355" rIns="89535" bIns="46355" vert="horz" anchor="t">
+            <a:spAutoFit/>
+          </a:bodyPr>
+          <a:lstStyle/>
+          <a:p>
+            <a:pPr marL="0" indent="0">
+              <a:buFontTx/>
+              <a:buNone/>
+            </a:pPr>
+            <a:r>
+              <a:rPr lang="ko-KR" sz="1800">
+                <a:latin typeface="맑은 고딕" charset="0"/>
+                <a:ea typeface="맑은 고딕" charset="0"/>
+              </a:rPr>
+              <a:t>막대그래프 </a:t>
+            </a:r>
+            <a:r>
+              <a:rPr lang="ko-KR" sz="1800">
+                <a:latin typeface="맑은 고딕" charset="0"/>
+                <a:ea typeface="맑은 고딕" charset="0"/>
+              </a:rPr>
+              <a:t>그림</a:t>
+            </a:r>
+            <a:r>
+              <a:rPr lang="ko-KR" sz="1800">
+                <a:latin typeface="맑은 고딕" charset="0"/>
+                <a:ea typeface="맑은 고딕" charset="0"/>
+              </a:rPr>
+              <a:t>(</a:t>
+            </a:r>
+            <a:endParaRPr lang="ko-KR" altLang="en-US" sz="1800">
+              <a:latin typeface="맑은 고딕" charset="0"/>
+              <a:ea typeface="맑은 고딕" charset="0"/>
+            </a:endParaRPr>
+          </a:p>
+          <a:p>
+            <a:pPr marL="0" indent="0">
+              <a:buFontTx/>
+              <a:buNone/>
+            </a:pPr>
+            <a:r>
+              <a:rPr sz="1200" i="0" b="0">
                 <a:solidFill>
                   <a:schemeClr val="tx1"/>
                 </a:solidFill>
-                <a:latin typeface="맑은 고딕" charset="0"/>
-                <a:ea typeface="맑은 고딕" charset="0"/>
-              </a:rPr>
-              <a:t>분</a:t>
-            </a:r>
-            <a:r>
-              <a:rPr lang="ko-KR" sz="1800">
+                <a:latin typeface="Segoe UI Emoji" charset="0"/>
+                <a:ea typeface="ui-sans-serif" charset="0"/>
+              </a:rPr>
+              <a:t>생산량 (kg)</a:t>
+            </a:r>
+            <a:r>
+              <a:rPr sz="1200" i="0" b="0">
                 <a:solidFill>
                   <a:schemeClr val="tx1"/>
                 </a:solidFill>
-                <a:latin typeface="맑은 고딕" charset="0"/>
-                <a:ea typeface="맑은 고딕" charset="0"/>
-              </a:rPr>
-              <a:t>석한</a:t>
-            </a:r>
-            <a:r>
-              <a:rPr lang="ko-KR" sz="1800">
+                <a:latin typeface="Segoe UI Emoji" charset="0"/>
+                <a:ea typeface="ui-sans-serif" charset="0"/>
+              </a:rPr>
+              <a:t>,</a:t>
+            </a:r>
+            <a:r>
+              <a:rPr lang="ko-KR" sz="1200" i="0" b="0">
                 <a:solidFill>
                   <a:schemeClr val="tx1"/>
                 </a:solidFill>
-                <a:latin typeface="맑은 고딕" charset="0"/>
-                <a:ea typeface="맑은 고딕" charset="0"/>
+                <a:latin typeface="Segoe UI Emoji" charset="0"/>
+                <a:ea typeface="ui-sans-serif" charset="0"/>
               </a:rPr>
               <a:t> </a:t>
             </a:r>
             <a:r>
-              <a:rPr lang="ko-KR" sz="1800">
+              <a:rPr sz="1200" i="0" b="0">
                 <a:solidFill>
                   <a:schemeClr val="tx1"/>
                 </a:solidFill>
-                <a:latin typeface="맑은 고딕" charset="0"/>
-                <a:ea typeface="맑은 고딕" charset="0"/>
-              </a:rPr>
-              <a:t>축적된 </a:t>
-            </a:r>
-            <a:r>
-              <a:rPr lang="ko-KR" sz="1800">
+                <a:latin typeface="Segoe UI Emoji" charset="0"/>
+                <a:ea typeface="ui-sans-serif" charset="0"/>
+              </a:rPr>
+              <a:t>품질 점수</a:t>
+            </a:r>
+            <a:r>
+              <a:rPr lang="ko-KR" sz="1800">
+                <a:latin typeface="맑은 고딕" charset="0"/>
+                <a:ea typeface="맑은 고딕" charset="0"/>
+              </a:rPr>
+              <a:t>)</a:t>
+            </a:r>
+            <a:endParaRPr lang="ko-KR" altLang="en-US" sz="1800">
+              <a:latin typeface="맑은 고딕" charset="0"/>
+              <a:ea typeface="맑은 고딕" charset="0"/>
+            </a:endParaRPr>
+          </a:p>
+        </p:txBody>
+      </p:sp>
+      <p:sp>
+        <p:nvSpPr>
+          <p:cNvPr id="23" name="텍스트 상자 29"/>
+          <p:cNvSpPr txBox="1">
+            <a:spLocks/>
+          </p:cNvSpPr>
+          <p:nvPr/>
+        </p:nvSpPr>
+        <p:spPr>
+          <a:xfrm rot="0">
+            <a:off x="8050530" y="3912235"/>
+            <a:ext cx="2042160" cy="370205"/>
+          </a:xfrm>
+          <a:prstGeom prst="rect"/>
+          <a:noFill/>
+          <a:ln w="0" cap="flat" cmpd="sng">
+            <a:solidFill>
+              <a:srgbClr val="FFFFFF">
+                <a:alpha val="100000"/>
+              </a:srgbClr>
+            </a:solidFill>
+            <a:prstDash/>
+          </a:ln>
+        </p:spPr>
+        <p:txBody>
+          <a:bodyPr wrap="square" lIns="89535" tIns="46355" rIns="89535" bIns="46355" vert="horz" anchor="t">
+            <a:spAutoFit/>
+          </a:bodyPr>
+          <a:lstStyle/>
+          <a:p>
+            <a:pPr marL="0" indent="0" algn="l" hangingPunct="1"/>
+            <a:r>
+              <a:rPr lang="ko-KR" sz="1800">
+                <a:latin typeface="맑은 고딕" charset="0"/>
+                <a:ea typeface="맑은 고딕" charset="0"/>
+              </a:rPr>
+              <a:t>토마토 </a:t>
+            </a:r>
+            <a:r>
+              <a:rPr lang="ko-KR" sz="1800">
+                <a:latin typeface="맑은 고딕" charset="0"/>
+                <a:ea typeface="맑은 고딕" charset="0"/>
+              </a:rPr>
+              <a:t>가격</a:t>
+            </a:r>
+            <a:r>
+              <a:rPr lang="ko-KR" sz="1800">
+                <a:latin typeface="맑은 고딕" charset="0"/>
+                <a:ea typeface="맑은 고딕" charset="0"/>
+              </a:rPr>
+              <a:t> </a:t>
+            </a:r>
+            <a:r>
+              <a:rPr lang="ko-KR" sz="1800">
+                <a:latin typeface="맑은 고딕" charset="0"/>
+                <a:ea typeface="맑은 고딕" charset="0"/>
+              </a:rPr>
+              <a:t>추이</a:t>
+            </a:r>
+            <a:endParaRPr lang="ko-KR" altLang="en-US" sz="1800">
+              <a:latin typeface="맑은 고딕" charset="0"/>
+              <a:ea typeface="맑은 고딕" charset="0"/>
+            </a:endParaRPr>
+          </a:p>
+        </p:txBody>
+      </p:sp>
+      <p:sp>
+        <p:nvSpPr>
+          <p:cNvPr id="24" name="텍스트 상자 30"/>
+          <p:cNvSpPr txBox="1">
+            <a:spLocks/>
+          </p:cNvSpPr>
+          <p:nvPr/>
+        </p:nvSpPr>
+        <p:spPr>
+          <a:xfrm rot="0">
+            <a:off x="7961630" y="4228465"/>
+            <a:ext cx="2239645" cy="647065"/>
+          </a:xfrm>
+          <a:prstGeom prst="rect"/>
+          <a:noFill/>
+          <a:ln w="0" cap="flat" cmpd="sng">
+            <a:solidFill>
+              <a:srgbClr val="FFFFFF">
+                <a:alpha val="100000"/>
+              </a:srgbClr>
+            </a:solidFill>
+            <a:prstDash/>
+          </a:ln>
+        </p:spPr>
+        <p:txBody>
+          <a:bodyPr wrap="none" lIns="89535" tIns="46355" rIns="89535" bIns="46355" vert="horz" anchor="t">
+            <a:spAutoFit/>
+          </a:bodyPr>
+          <a:lstStyle/>
+          <a:p>
+            <a:pPr marL="0" indent="0">
+              <a:buFontTx/>
+              <a:buNone/>
+            </a:pPr>
+            <a:r>
+              <a:rPr lang="ko-KR" sz="1800">
+                <a:latin typeface="맑은 고딕" charset="0"/>
+                <a:ea typeface="맑은 고딕" charset="0"/>
+              </a:rPr>
+              <a:t>꺽은선 그래프 </a:t>
+            </a:r>
+            <a:r>
+              <a:rPr lang="ko-KR" sz="1800">
+                <a:latin typeface="맑은 고딕" charset="0"/>
+                <a:ea typeface="맑은 고딕" charset="0"/>
+              </a:rPr>
+              <a:t>그림</a:t>
+            </a:r>
+            <a:r>
+              <a:rPr lang="ko-KR" sz="1800">
+                <a:latin typeface="맑은 고딕" charset="0"/>
+                <a:ea typeface="맑은 고딕" charset="0"/>
+              </a:rPr>
+              <a:t>(</a:t>
+            </a:r>
+            <a:endParaRPr lang="ko-KR" altLang="en-US" sz="1800">
+              <a:latin typeface="맑은 고딕" charset="0"/>
+              <a:ea typeface="맑은 고딕" charset="0"/>
+            </a:endParaRPr>
+          </a:p>
+          <a:p>
+            <a:pPr marL="0" indent="0">
+              <a:buFontTx/>
+              <a:buNone/>
+            </a:pPr>
+            <a:r>
+              <a:rPr sz="1200" i="0" b="0">
                 <a:solidFill>
                   <a:schemeClr val="tx1"/>
                 </a:solidFill>
-                <a:latin typeface="맑은 고딕" charset="0"/>
-                <a:ea typeface="맑은 고딕" charset="0"/>
-              </a:rPr>
-              <a:t>농가의 데이터들이 </a:t>
-            </a:r>
-            <a:r>
-              <a:rPr lang="ko-KR" sz="1800">
+                <a:latin typeface="Segoe UI Emoji" charset="0"/>
+                <a:ea typeface="ui-sans-serif" charset="0"/>
+              </a:rPr>
+              <a:t>도매가 (원/kg)</a:t>
+            </a:r>
+            <a:r>
+              <a:rPr sz="1200" i="0" b="0">
                 <a:solidFill>
                   <a:schemeClr val="tx1"/>
                 </a:solidFill>
-                <a:latin typeface="맑은 고딕" charset="0"/>
-                <a:ea typeface="맑은 고딕" charset="0"/>
-              </a:rPr>
-              <a:t>나오게끔 </a:t>
-            </a:r>
-            <a:r>
-              <a:rPr lang="ko-KR" sz="1800">
+                <a:latin typeface="Segoe UI Emoji" charset="0"/>
+                <a:ea typeface="ui-sans-serif" charset="0"/>
+              </a:rPr>
+              <a:t>,</a:t>
+            </a:r>
+            <a:r>
+              <a:rPr lang="ko-KR" sz="1200" i="0" b="0">
                 <a:solidFill>
                   <a:schemeClr val="tx1"/>
                 </a:solidFill>
-                <a:latin typeface="맑은 고딕" charset="0"/>
-                <a:ea typeface="맑은 고딕" charset="0"/>
-              </a:rPr>
-              <a:t>할 예정!</a:t>
+                <a:latin typeface="Segoe UI Emoji" charset="0"/>
+                <a:ea typeface="ui-sans-serif" charset="0"/>
+              </a:rPr>
+              <a:t> </a:t>
+            </a:r>
+            <a:r>
+              <a:rPr sz="1200" i="0" b="0">
+                <a:solidFill>
+                  <a:schemeClr val="tx1"/>
+                </a:solidFill>
+                <a:latin typeface="Segoe UI Emoji" charset="0"/>
+                <a:ea typeface="ui-sans-serif" charset="0"/>
+              </a:rPr>
+              <a:t>소매가 (원/kg</a:t>
+            </a:r>
+            <a:r>
+              <a:rPr lang="ko-KR" sz="1800">
+                <a:latin typeface="맑은 고딕" charset="0"/>
+                <a:ea typeface="맑은 고딕" charset="0"/>
+              </a:rPr>
+              <a:t>)</a:t>
+            </a:r>
+            <a:endParaRPr lang="ko-KR" altLang="en-US" sz="1800">
+              <a:latin typeface="맑은 고딕" charset="0"/>
+              <a:ea typeface="맑은 고딕" charset="0"/>
+            </a:endParaRPr>
+          </a:p>
+        </p:txBody>
+      </p:sp>
+      <p:sp>
+        <p:nvSpPr>
+          <p:cNvPr id="25" name="도형 31"/>
+          <p:cNvSpPr>
+            <a:spLocks/>
+          </p:cNvSpPr>
+          <p:nvPr/>
+        </p:nvSpPr>
+        <p:spPr>
+          <a:xfrm>
+            <a:off x="5668010" y="4975860"/>
+            <a:ext cx="3279775" cy="850900"/>
+          </a:xfrm>
+          <a:prstGeom prst="rect"/>
+          <a:solidFill>
+            <a:schemeClr val="bg1"/>
+          </a:solidFill>
+        </p:spPr>
+        <p:style>
+          <a:lnRef idx="2">
+            <a:schemeClr val="accent1">
+              <a:shade val="50000"/>
+            </a:schemeClr>
+          </a:lnRef>
+          <a:fillRef idx="1">
+            <a:schemeClr val="accent1"/>
+          </a:fillRef>
+          <a:effectRef idx="0">
+            <a:schemeClr val="accent1"/>
+          </a:effectRef>
+          <a:fontRef idx="minor">
+            <a:schemeClr val="lt1"/>
+          </a:fontRef>
+        </p:style>
+        <p:txBody>
+          <a:bodyPr wrap="square" lIns="91440" tIns="45720" rIns="91440" bIns="45720" numCol="1" vert="horz" anchor="ctr">
+            <a:noAutofit/>
+          </a:bodyPr>
+          <a:lstStyle/>
+          <a:p>
+            <a:pPr marL="0" indent="0" algn="ctr" hangingPunct="1">
+              <a:buFontTx/>
+              <a:buNone/>
+            </a:pPr>
+            <a:r>
+              <a:rPr sz="1800">
+                <a:solidFill>
+                  <a:schemeClr val="tx1"/>
+                </a:solidFill>
+                <a:latin typeface="맑은 고딕" charset="0"/>
+                <a:ea typeface="맑은 고딕" charset="0"/>
+              </a:rPr>
+              <a:t>재배</a:t>
+            </a:r>
+            <a:r>
+              <a:rPr lang="ko-KR" sz="1800">
+                <a:solidFill>
+                  <a:schemeClr val="tx1"/>
+                </a:solidFill>
+                <a:latin typeface="맑은 고딕" charset="0"/>
+                <a:ea typeface="맑은 고딕" charset="0"/>
+              </a:rPr>
+              <a:t>현황</a:t>
+            </a:r>
+            <a:r>
+              <a:rPr lang="ko-KR" sz="1800">
+                <a:solidFill>
+                  <a:schemeClr val="tx1"/>
+                </a:solidFill>
+                <a:latin typeface="맑은 고딕" charset="0"/>
+                <a:ea typeface="맑은 고딕" charset="0"/>
+              </a:rPr>
+              <a:t> </a:t>
+            </a:r>
+            <a:r>
+              <a:rPr lang="ko-KR" sz="1800">
+                <a:solidFill>
+                  <a:schemeClr val="tx1"/>
+                </a:solidFill>
+                <a:latin typeface="맑은 고딕" charset="0"/>
+                <a:ea typeface="맑은 고딕" charset="0"/>
+              </a:rPr>
+              <a:t>수확까지 일/날짜로 표시하기(</a:t>
+            </a:r>
+            <a:r>
+              <a:rPr lang="ko-KR" sz="1800">
+                <a:solidFill>
+                  <a:schemeClr val="tx1"/>
+                </a:solidFill>
+                <a:latin typeface="맑은 고딕" charset="0"/>
+                <a:ea typeface="맑은 고딕" charset="0"/>
+              </a:rPr>
+              <a:t>파프리카 </a:t>
+            </a:r>
+            <a:r>
+              <a:rPr lang="ko-KR" sz="1800">
+                <a:solidFill>
+                  <a:schemeClr val="tx1"/>
+                </a:solidFill>
+                <a:latin typeface="맑은 고딕" charset="0"/>
+                <a:ea typeface="맑은 고딕" charset="0"/>
+              </a:rPr>
+              <a:t>위주로</a:t>
+            </a:r>
+            <a:r>
+              <a:rPr lang="ko-KR" sz="1800">
+                <a:solidFill>
+                  <a:schemeClr val="tx1"/>
+                </a:solidFill>
+                <a:latin typeface="맑은 고딕" charset="0"/>
+                <a:ea typeface="맑은 고딕" charset="0"/>
+              </a:rPr>
+              <a:t>)</a:t>
             </a:r>
             <a:endParaRPr lang="ko-KR" altLang="en-US" sz="1800">
               <a:solidFill>
                 <a:schemeClr val="tx1"/>
               </a:solidFill>
+              <a:latin typeface="맑은 고딕" charset="0"/>
+              <a:ea typeface="맑은 고딕" charset="0"/>
+            </a:endParaRPr>
+          </a:p>
+        </p:txBody>
+      </p:sp>
+      <p:sp>
+        <p:nvSpPr>
+          <p:cNvPr id="26" name="도형 22"/>
+          <p:cNvSpPr>
+            <a:spLocks/>
+          </p:cNvSpPr>
+          <p:nvPr/>
+        </p:nvSpPr>
+        <p:spPr>
+          <a:xfrm rot="0">
+            <a:off x="1086485" y="1016635"/>
+            <a:ext cx="9401810" cy="800735"/>
+          </a:xfrm>
+          <a:prstGeom prst="rect"/>
+          <a:solidFill>
+            <a:schemeClr val="bg1"/>
+          </a:solidFill>
+          <a:ln w="12700" cap="flat" cmpd="sng">
+            <a:solidFill>
+              <a:schemeClr val="tx1">
+                <a:alpha val="100000"/>
+              </a:schemeClr>
+            </a:solidFill>
+            <a:prstDash val="solid"/>
+          </a:ln>
+        </p:spPr>
+        <p:style>
+          <a:lnRef idx="2">
+            <a:schemeClr val="accent1">
+              <a:shade val="50000"/>
+            </a:schemeClr>
+          </a:lnRef>
+          <a:fillRef idx="1">
+            <a:schemeClr val="accent1"/>
+          </a:fillRef>
+          <a:effectRef idx="0">
+            <a:schemeClr val="accent1"/>
+          </a:effectRef>
+          <a:fontRef idx="minor">
+            <a:schemeClr val="lt1"/>
+          </a:fontRef>
+        </p:style>
+        <p:txBody>
+          <a:bodyPr wrap="square" lIns="91440" tIns="45720" rIns="91440" bIns="45720" numCol="1" vert="horz" anchor="ctr">
+            <a:noAutofit/>
+          </a:bodyPr>
+          <a:lstStyle/>
+          <a:p>
+            <a:pPr marL="0" indent="0" algn="ctr" hangingPunct="1">
+              <a:buFontTx/>
+              <a:buNone/>
+            </a:pPr>
+            <a:endParaRPr lang="ko-KR" altLang="en-US" sz="1800">
+              <a:latin typeface="맑은 고딕" charset="0"/>
+              <a:ea typeface="맑은 고딕" charset="0"/>
+            </a:endParaRPr>
+          </a:p>
+        </p:txBody>
+      </p:sp>
+      <p:sp>
+        <p:nvSpPr>
+          <p:cNvPr id="27" name="도형 23"/>
+          <p:cNvSpPr>
+            <a:spLocks/>
+          </p:cNvSpPr>
+          <p:nvPr/>
+        </p:nvSpPr>
+        <p:spPr>
+          <a:xfrm rot="0">
+            <a:off x="6773545" y="1243330"/>
+            <a:ext cx="2204085" cy="446405"/>
+          </a:xfrm>
+          <a:prstGeom prst="rect"/>
+        </p:spPr>
+        <p:style>
+          <a:lnRef idx="2">
+            <a:schemeClr val="accent1">
+              <a:shade val="50000"/>
+            </a:schemeClr>
+          </a:lnRef>
+          <a:fillRef idx="1">
+            <a:schemeClr val="accent1"/>
+          </a:fillRef>
+          <a:effectRef idx="0">
+            <a:schemeClr val="accent1"/>
+          </a:effectRef>
+          <a:fontRef idx="minor">
+            <a:schemeClr val="lt1"/>
+          </a:fontRef>
+        </p:style>
+        <p:txBody>
+          <a:bodyPr wrap="square" lIns="91440" tIns="45720" rIns="91440" bIns="45720" numCol="1" vert="horz" anchor="ctr">
+            <a:noAutofit/>
+          </a:bodyPr>
+          <a:lstStyle/>
+          <a:p>
+            <a:pPr marL="0" indent="0" algn="ctr" hangingPunct="1">
+              <a:buFontTx/>
+              <a:buNone/>
+            </a:pPr>
+            <a:r>
+              <a:rPr lang="ko-KR" sz="1800">
+                <a:latin typeface="맑은 고딕" charset="0"/>
+                <a:ea typeface="맑은 고딕" charset="0"/>
+              </a:rPr>
+              <a:t>Snss님 반갑습니다</a:t>
+            </a:r>
+            <a:endParaRPr lang="ko-KR" altLang="en-US" sz="1800">
+              <a:latin typeface="맑은 고딕" charset="0"/>
+              <a:ea typeface="맑은 고딕" charset="0"/>
+            </a:endParaRPr>
+          </a:p>
+        </p:txBody>
+      </p:sp>
+      <p:sp>
+        <p:nvSpPr>
+          <p:cNvPr id="28" name="도형 24"/>
+          <p:cNvSpPr>
+            <a:spLocks/>
+          </p:cNvSpPr>
+          <p:nvPr/>
+        </p:nvSpPr>
+        <p:spPr>
+          <a:xfrm rot="0">
+            <a:off x="9103995" y="1223645"/>
+            <a:ext cx="1147445" cy="466090"/>
+          </a:xfrm>
+          <a:prstGeom prst="rect"/>
+          <a:solidFill>
+            <a:schemeClr val="tx1"/>
+          </a:solidFill>
+        </p:spPr>
+        <p:style>
+          <a:lnRef idx="2">
+            <a:schemeClr val="accent1">
+              <a:shade val="50000"/>
+            </a:schemeClr>
+          </a:lnRef>
+          <a:fillRef idx="1">
+            <a:schemeClr val="accent1"/>
+          </a:fillRef>
+          <a:effectRef idx="0">
+            <a:schemeClr val="accent1"/>
+          </a:effectRef>
+          <a:fontRef idx="minor">
+            <a:schemeClr val="lt1"/>
+          </a:fontRef>
+        </p:style>
+        <p:txBody>
+          <a:bodyPr wrap="square" lIns="91440" tIns="45720" rIns="91440" bIns="45720" numCol="1" vert="horz" anchor="ctr">
+            <a:noAutofit/>
+          </a:bodyPr>
+          <a:lstStyle/>
+          <a:p>
+            <a:pPr marL="0" indent="0" algn="ctr" hangingPunct="1">
+              <a:buFontTx/>
+              <a:buNone/>
+            </a:pPr>
+            <a:r>
+              <a:rPr sz="1800">
+                <a:latin typeface="맑은 고딕" charset="0"/>
+                <a:ea typeface="맑은 고딕" charset="0"/>
+              </a:rPr>
+              <a:t>로그아웃</a:t>
+            </a:r>
+            <a:endParaRPr lang="ko-KR" altLang="en-US" sz="1800">
+              <a:latin typeface="맑은 고딕" charset="0"/>
+              <a:ea typeface="맑은 고딕" charset="0"/>
+            </a:endParaRPr>
+          </a:p>
+        </p:txBody>
+      </p:sp>
+      <p:sp>
+        <p:nvSpPr>
+          <p:cNvPr id="29" name="도형 25"/>
+          <p:cNvSpPr>
+            <a:spLocks/>
+          </p:cNvSpPr>
+          <p:nvPr/>
+        </p:nvSpPr>
+        <p:spPr>
+          <a:xfrm rot="0">
+            <a:off x="1244600" y="1184275"/>
+            <a:ext cx="1067435" cy="544830"/>
+          </a:xfrm>
+          <a:prstGeom prst="rect"/>
+          <a:solidFill>
+            <a:schemeClr val="tx1"/>
+          </a:solidFill>
+        </p:spPr>
+        <p:style>
+          <a:lnRef idx="2">
+            <a:schemeClr val="accent1">
+              <a:shade val="50000"/>
+            </a:schemeClr>
+          </a:lnRef>
+          <a:fillRef idx="1">
+            <a:schemeClr val="accent1"/>
+          </a:fillRef>
+          <a:effectRef idx="0">
+            <a:schemeClr val="accent1"/>
+          </a:effectRef>
+          <a:fontRef idx="minor">
+            <a:schemeClr val="lt1"/>
+          </a:fontRef>
+        </p:style>
+        <p:txBody>
+          <a:bodyPr wrap="square" lIns="91440" tIns="45720" rIns="91440" bIns="45720" numCol="1" vert="horz" anchor="ctr">
+            <a:noAutofit/>
+          </a:bodyPr>
+          <a:lstStyle/>
+          <a:p>
+            <a:pPr marL="0" indent="0" algn="ctr" hangingPunct="1">
+              <a:buFontTx/>
+              <a:buNone/>
+            </a:pPr>
+            <a:r>
+              <a:rPr lang="ko-KR" sz="1800">
+                <a:latin typeface="맑은 고딕" charset="0"/>
+                <a:ea typeface="맑은 고딕" charset="0"/>
+              </a:rPr>
+              <a:t>Header logo</a:t>
+            </a:r>
+            <a:endParaRPr lang="ko-KR" altLang="en-US" sz="1800">
+              <a:latin typeface="맑은 고딕" charset="0"/>
+              <a:ea typeface="맑은 고딕" charset="0"/>
+            </a:endParaRPr>
+          </a:p>
+        </p:txBody>
+      </p:sp>
+      <p:sp>
+        <p:nvSpPr>
+          <p:cNvPr id="30" name="텍스트 상자 26"/>
+          <p:cNvSpPr txBox="1">
+            <a:spLocks/>
+          </p:cNvSpPr>
+          <p:nvPr/>
+        </p:nvSpPr>
+        <p:spPr>
+          <a:xfrm rot="0">
+            <a:off x="2557780" y="1234440"/>
+            <a:ext cx="1094740" cy="370840"/>
+          </a:xfrm>
+          <a:prstGeom prst="rect"/>
+          <a:noFill/>
+          <a:ln w="0" cap="flat" cmpd="sng">
+            <a:solidFill>
+              <a:srgbClr val="FFFFFF">
+                <a:alpha val="100000"/>
+              </a:srgbClr>
+            </a:solidFill>
+            <a:prstDash val="solid"/>
+          </a:ln>
+        </p:spPr>
+        <p:txBody>
+          <a:bodyPr wrap="none" lIns="89535" tIns="46355" rIns="89535" bIns="46355" numCol="1" vert="horz" anchor="t">
+            <a:spAutoFit/>
+          </a:bodyPr>
+          <a:lstStyle/>
+          <a:p>
+            <a:pPr marL="0" indent="0" algn="l" hangingPunct="1">
+              <a:buFontTx/>
+              <a:buNone/>
+            </a:pPr>
+            <a:r>
+              <a:rPr lang="ko-KR" sz="1800">
+                <a:latin typeface="맑은 고딕" charset="0"/>
+                <a:ea typeface="맑은 고딕" charset="0"/>
+              </a:rPr>
+              <a:t>대시보드</a:t>
+            </a:r>
+            <a:endParaRPr lang="ko-KR" altLang="en-US" sz="1800">
+              <a:latin typeface="맑은 고딕" charset="0"/>
+              <a:ea typeface="맑은 고딕" charset="0"/>
+            </a:endParaRPr>
+          </a:p>
+        </p:txBody>
+      </p:sp>
+      <p:sp>
+        <p:nvSpPr>
+          <p:cNvPr id="31" name="텍스트 상자 27"/>
+          <p:cNvSpPr txBox="1">
+            <a:spLocks/>
+          </p:cNvSpPr>
+          <p:nvPr/>
+        </p:nvSpPr>
+        <p:spPr>
+          <a:xfrm rot="0">
+            <a:off x="3656330" y="1246505"/>
+            <a:ext cx="1403985" cy="370840"/>
+          </a:xfrm>
+          <a:prstGeom prst="rect"/>
+          <a:noFill/>
+          <a:ln w="0" cap="flat" cmpd="sng">
+            <a:solidFill>
+              <a:srgbClr val="FFFFFF">
+                <a:alpha val="100000"/>
+              </a:srgbClr>
+            </a:solidFill>
+            <a:prstDash val="solid"/>
+          </a:ln>
+        </p:spPr>
+        <p:txBody>
+          <a:bodyPr wrap="none" lIns="89535" tIns="46355" rIns="89535" bIns="46355" numCol="1" vert="horz" anchor="t">
+            <a:spAutoFit/>
+          </a:bodyPr>
+          <a:lstStyle/>
+          <a:p>
+            <a:pPr marL="0" indent="0" algn="l" hangingPunct="1">
+              <a:buFontTx/>
+              <a:buNone/>
+            </a:pPr>
+            <a:r>
+              <a:rPr lang="ko-KR" sz="1800">
+                <a:latin typeface="맑은 고딕" charset="0"/>
+                <a:ea typeface="맑은 고딕" charset="0"/>
+              </a:rPr>
+              <a:t>데이터 분석</a:t>
+            </a:r>
+            <a:endParaRPr lang="ko-KR" altLang="en-US" sz="1800">
+              <a:latin typeface="맑은 고딕" charset="0"/>
+              <a:ea typeface="맑은 고딕" charset="0"/>
+            </a:endParaRPr>
+          </a:p>
+        </p:txBody>
+      </p:sp>
+      <p:sp>
+        <p:nvSpPr>
+          <p:cNvPr id="32" name="텍스트 상자 28"/>
+          <p:cNvSpPr txBox="1">
+            <a:spLocks/>
+          </p:cNvSpPr>
+          <p:nvPr/>
+        </p:nvSpPr>
+        <p:spPr>
+          <a:xfrm rot="0">
+            <a:off x="5031740" y="1229360"/>
+            <a:ext cx="1175385" cy="370840"/>
+          </a:xfrm>
+          <a:prstGeom prst="rect"/>
+          <a:noFill/>
+          <a:ln w="0" cap="flat" cmpd="sng">
+            <a:solidFill>
+              <a:srgbClr val="FFFFFF">
+                <a:alpha val="100000"/>
+              </a:srgbClr>
+            </a:solidFill>
+            <a:prstDash val="solid"/>
+          </a:ln>
+        </p:spPr>
+        <p:txBody>
+          <a:bodyPr wrap="none" lIns="89535" tIns="46355" rIns="89535" bIns="46355" numCol="1" vert="horz" anchor="t">
+            <a:spAutoFit/>
+          </a:bodyPr>
+          <a:lstStyle/>
+          <a:p>
+            <a:pPr marL="0" indent="0" algn="l" hangingPunct="1">
+              <a:buFontTx/>
+              <a:buNone/>
+            </a:pPr>
+            <a:r>
+              <a:rPr sz="1800">
+                <a:latin typeface="맑은 고딕" charset="0"/>
+                <a:ea typeface="맑은 고딕" charset="0"/>
+              </a:rPr>
+              <a:t>가격</a:t>
+            </a:r>
+            <a:r>
+              <a:rPr lang="ko-KR" sz="1800">
+                <a:latin typeface="맑은 고딕" charset="0"/>
+                <a:ea typeface="맑은 고딕" charset="0"/>
+              </a:rPr>
+              <a:t> 예측</a:t>
+            </a:r>
+            <a:endParaRPr lang="ko-KR" altLang="en-US" sz="1800">
               <a:latin typeface="맑은 고딕" charset="0"/>
               <a:ea typeface="맑은 고딕" charset="0"/>
             </a:endParaRPr>
@@ -6275,8 +6538,63 @@
         </p:nvSpPr>
         <p:spPr>
           <a:xfrm rot="0">
-            <a:off x="1885315" y="1706880"/>
-            <a:ext cx="2610485" cy="370205"/>
+            <a:off x="1875790" y="1913255"/>
+            <a:ext cx="2611120" cy="370840"/>
+          </a:xfrm>
+          <a:prstGeom prst="rect"/>
+          <a:noFill/>
+          <a:ln w="0" cap="flat" cmpd="sng">
+            <a:solidFill>
+              <a:srgbClr val="FFFFFF">
+                <a:alpha val="100000"/>
+              </a:srgbClr>
+            </a:solidFill>
+            <a:prstDash val="solid"/>
+          </a:ln>
+        </p:spPr>
+        <p:txBody>
+          <a:bodyPr wrap="none" lIns="89535" tIns="46355" rIns="89535" bIns="46355" numCol="1" vert="horz" anchor="t">
+            <a:spAutoFit/>
+          </a:bodyPr>
+          <a:lstStyle/>
+          <a:p>
+            <a:pPr marL="0" indent="0" algn="l" hangingPunct="1">
+              <a:buFontTx/>
+              <a:buNone/>
+            </a:pPr>
+            <a:r>
+              <a:rPr sz="1800">
+                <a:latin typeface="맑은 고딕" charset="0"/>
+                <a:ea typeface="맑은 고딕" charset="0"/>
+              </a:rPr>
+              <a:t>스마트팜 </a:t>
+            </a:r>
+            <a:r>
+              <a:rPr lang="ko-KR" sz="1800">
+                <a:latin typeface="맑은 고딕" charset="0"/>
+                <a:ea typeface="맑은 고딕" charset="0"/>
+              </a:rPr>
+              <a:t>AI 환경플랫폼</a:t>
+            </a:r>
+            <a:endParaRPr lang="ko-KR" altLang="en-US" sz="1800">
+              <a:latin typeface="맑은 고딕" charset="0"/>
+              <a:ea typeface="맑은 고딕" charset="0"/>
+            </a:endParaRPr>
+          </a:p>
+        </p:txBody>
+      </p:sp>
+      <p:sp>
+        <p:nvSpPr>
+          <p:cNvPr id="4" name="Rect 0"/>
+          <p:cNvSpPr txBox="1">
+            <a:spLocks/>
+          </p:cNvSpPr>
+          <p:nvPr/>
+        </p:nvSpPr>
+        <p:spPr>
+          <a:xfrm rot="0">
+            <a:off x="2082165" y="2429510"/>
+            <a:ext cx="2089150" cy="1477645"/>
           </a:xfrm>
           <a:prstGeom prst="rect"/>
           <a:noFill/>
@@ -6298,42 +6616,117 @@
             <a:pPr marL="0" indent="0" algn="l" hangingPunct="1"/>
             <a:r>
               <a:rPr sz="1800">
-                <a:latin typeface="맑은 고딕" charset="0"/>
-                <a:ea typeface="맑은 고딕" charset="0"/>
-              </a:rPr>
-              <a:t>스마트팜 </a:t>
-            </a:r>
-            <a:r>
-              <a:rPr lang="ko-KR" sz="1800">
-                <a:latin typeface="맑은 고딕" charset="0"/>
-                <a:ea typeface="맑은 고딕" charset="0"/>
-              </a:rPr>
-              <a:t>A</a:t>
-            </a:r>
-            <a:r>
-              <a:rPr lang="ko-KR" sz="1800">
-                <a:latin typeface="맑은 고딕" charset="0"/>
-                <a:ea typeface="맑은 고딕" charset="0"/>
-              </a:rPr>
-              <a:t>I</a:t>
-            </a:r>
-            <a:r>
-              <a:rPr lang="ko-KR" sz="1800">
-                <a:latin typeface="맑은 고딕" charset="0"/>
-                <a:ea typeface="맑은 고딕" charset="0"/>
-              </a:rPr>
-              <a:t> 환경플랫폼</a:t>
+                <a:solidFill>
+                  <a:schemeClr val="bg1"/>
+                </a:solidFill>
+                <a:latin typeface="맑은 고딕" charset="0"/>
+                <a:ea typeface="맑은 고딕" charset="0"/>
+              </a:rPr>
+              <a:t>스마</a:t>
+            </a:r>
+            <a:r>
+              <a:rPr lang="ko-KR" sz="1800">
+                <a:solidFill>
+                  <a:schemeClr val="bg1"/>
+                </a:solidFill>
+                <a:latin typeface="맑은 고딕" charset="0"/>
+                <a:ea typeface="맑은 고딕" charset="0"/>
+              </a:rPr>
+              <a:t>트팜 대시보드</a:t>
             </a:r>
             <a:endParaRPr lang="ko-KR" altLang="en-US" sz="1800">
+              <a:solidFill>
+                <a:schemeClr val="bg1"/>
+              </a:solidFill>
               <a:latin typeface="맑은 고딕" charset="0"/>
               <a:ea typeface="맑은 고딕" charset="0"/>
             </a:endParaRPr>
           </a:p>
-        </p:txBody>
-      </p:sp>
-      <p:sp>
-        <p:nvSpPr>
-          <p:cNvPr id="4" name="Rect 0"/>
+          <a:p>
+            <a:pPr marL="0" indent="0" algn="l" hangingPunct="1"/>
+            <a:endParaRPr lang="ko-KR" altLang="en-US" sz="1800">
+              <a:solidFill>
+                <a:schemeClr val="bg1"/>
+              </a:solidFill>
+              <a:latin typeface="맑은 고딕" charset="0"/>
+              <a:ea typeface="맑은 고딕" charset="0"/>
+            </a:endParaRPr>
+          </a:p>
+          <a:p>
+            <a:pPr marL="0" indent="0" algn="l" hangingPunct="1"/>
+            <a:r>
+              <a:rPr lang="ko-KR" sz="1800">
+                <a:solidFill>
+                  <a:schemeClr val="bg1"/>
+                </a:solidFill>
+                <a:latin typeface="맑은 고딕" charset="0"/>
+                <a:ea typeface="맑은 고딕" charset="0"/>
+              </a:rPr>
+              <a:t>데이터 </a:t>
+            </a:r>
+            <a:r>
+              <a:rPr lang="ko-KR" sz="1800">
+                <a:solidFill>
+                  <a:schemeClr val="bg1"/>
+                </a:solidFill>
+                <a:latin typeface="맑은 고딕" charset="0"/>
+                <a:ea typeface="맑은 고딕" charset="0"/>
+              </a:rPr>
+              <a:t>분석</a:t>
+            </a:r>
+            <a:endParaRPr lang="ko-KR" altLang="en-US" sz="1800">
+              <a:solidFill>
+                <a:schemeClr val="bg1"/>
+              </a:solidFill>
+              <a:latin typeface="맑은 고딕" charset="0"/>
+              <a:ea typeface="맑은 고딕" charset="0"/>
+            </a:endParaRPr>
+          </a:p>
+          <a:p>
+            <a:pPr marL="0" indent="0" algn="l" hangingPunct="1"/>
+            <a:endParaRPr lang="ko-KR" altLang="en-US" sz="1800">
+              <a:solidFill>
+                <a:schemeClr val="bg1"/>
+              </a:solidFill>
+              <a:latin typeface="맑은 고딕" charset="0"/>
+              <a:ea typeface="맑은 고딕" charset="0"/>
+            </a:endParaRPr>
+          </a:p>
+          <a:p>
+            <a:pPr marL="0" indent="0" algn="l" hangingPunct="1"/>
+            <a:r>
+              <a:rPr lang="ko-KR" sz="1800">
+                <a:solidFill>
+                  <a:schemeClr val="bg1"/>
+                </a:solidFill>
+                <a:latin typeface="맑은 고딕" charset="0"/>
+                <a:ea typeface="맑은 고딕" charset="0"/>
+              </a:rPr>
+              <a:t>가격 </a:t>
+            </a:r>
+            <a:r>
+              <a:rPr lang="ko-KR" sz="1800">
+                <a:solidFill>
+                  <a:schemeClr val="bg1"/>
+                </a:solidFill>
+                <a:latin typeface="맑은 고딕" charset="0"/>
+                <a:ea typeface="맑은 고딕" charset="0"/>
+              </a:rPr>
+              <a:t>예측</a:t>
+            </a:r>
+            <a:endParaRPr lang="ko-KR" altLang="en-US" sz="1800">
+              <a:solidFill>
+                <a:schemeClr val="bg1"/>
+              </a:solidFill>
+              <a:latin typeface="맑은 고딕" charset="0"/>
+              <a:ea typeface="맑은 고딕" charset="0"/>
+            </a:endParaRPr>
+          </a:p>
+        </p:txBody>
+      </p:sp>
+      <p:sp>
+        <p:nvSpPr>
+          <p:cNvPr id="7" name="Rect 0"/>
           <p:cNvSpPr txBox="1">
             <a:spLocks/>
           </p:cNvSpPr>
@@ -6341,8 +6734,8 @@
         </p:nvSpPr>
         <p:spPr>
           <a:xfrm rot="0">
-            <a:off x="2082165" y="2429510"/>
-            <a:ext cx="2089150" cy="1477645"/>
+            <a:off x="2743835" y="4452620"/>
+            <a:ext cx="2105660" cy="647065"/>
           </a:xfrm>
           <a:prstGeom prst="rect"/>
           <a:noFill/>
@@ -6352,25 +6745,28 @@
                 <a:alpha val="100000"/>
               </a:srgbClr>
             </a:solidFill>
-            <a:prstDash/>
+            <a:prstDash val="solid"/>
           </a:ln>
         </p:spPr>
         <p:txBody>
-          <a:bodyPr wrap="none" lIns="89535" tIns="46355" rIns="89535" bIns="46355" vert="horz" anchor="t">
+          <a:bodyPr wrap="square" lIns="89535" tIns="46355" rIns="89535" bIns="46355" numCol="1" vert="horz" anchor="t">
             <a:spAutoFit/>
           </a:bodyPr>
           <a:lstStyle/>
           <a:p>
-            <a:pPr marL="0" indent="0" algn="l" hangingPunct="1"/>
-            <a:r>
-              <a:rPr sz="1800">
+            <a:pPr marL="0" indent="0" algn="l" hangingPunct="1">
+              <a:buFontTx/>
+              <a:buNone/>
+            </a:pPr>
+            <a:r>
+              <a:rPr lang="ko-KR" sz="1800">
                 <a:solidFill>
                   <a:schemeClr val="bg1"/>
                 </a:solidFill>
                 <a:latin typeface="맑은 고딕" charset="0"/>
                 <a:ea typeface="맑은 고딕" charset="0"/>
               </a:rPr>
-              <a:t>스마</a:t>
+              <a:t>왼쪽 </a:t>
             </a:r>
             <a:r>
               <a:rPr lang="ko-KR" sz="1800">
@@ -6380,7 +6776,7 @@
                 <a:latin typeface="맑은 고딕" charset="0"/>
                 <a:ea typeface="맑은 고딕" charset="0"/>
               </a:rPr>
-              <a:t>트팜 대시보드</a:t>
+              <a:t>카테고리나 </a:t>
             </a:r>
             <a:endParaRPr lang="ko-KR" altLang="en-US" sz="1800">
               <a:solidFill>
@@ -6391,7 +6787,30 @@
             </a:endParaRPr>
           </a:p>
           <a:p>
-            <a:pPr marL="0" indent="0" algn="l" hangingPunct="1"/>
+            <a:pPr marL="0" indent="0" algn="l" hangingPunct="1">
+              <a:buFontTx/>
+              <a:buNone/>
+            </a:pPr>
+            <a:r>
+              <a:rPr lang="ko-KR" sz="1800">
+                <a:solidFill>
+                  <a:schemeClr val="bg1"/>
+                </a:solidFill>
+                <a:latin typeface="맑은 고딕" charset="0"/>
+                <a:ea typeface="맑은 고딕" charset="0"/>
+              </a:rPr>
+              <a:t>슬라이드</a:t>
+            </a:r>
+            <a:r>
+              <a:rPr lang="ko-KR" sz="1800">
+                <a:solidFill>
+                  <a:schemeClr val="bg1"/>
+                </a:solidFill>
+                <a:latin typeface="맑은 고딕" charset="0"/>
+                <a:ea typeface="맑은 고딕" charset="0"/>
+              </a:rPr>
+              <a:t>메뉴 분류</a:t>
+            </a:r>
             <a:endParaRPr lang="ko-KR" altLang="en-US" sz="1800">
               <a:solidFill>
                 <a:schemeClr val="bg1"/>
@@ -6400,127 +6819,6 @@
               <a:ea typeface="맑은 고딕" charset="0"/>
             </a:endParaRPr>
           </a:p>
-          <a:p>
-            <a:pPr marL="0" indent="0" algn="l" hangingPunct="1"/>
-            <a:r>
-              <a:rPr lang="ko-KR" sz="1800">
-                <a:solidFill>
-                  <a:schemeClr val="bg1"/>
-                </a:solidFill>
-                <a:latin typeface="맑은 고딕" charset="0"/>
-                <a:ea typeface="맑은 고딕" charset="0"/>
-              </a:rPr>
-              <a:t>데이터 </a:t>
-            </a:r>
-            <a:r>
-              <a:rPr lang="ko-KR" sz="1800">
-                <a:solidFill>
-                  <a:schemeClr val="bg1"/>
-                </a:solidFill>
-                <a:latin typeface="맑은 고딕" charset="0"/>
-                <a:ea typeface="맑은 고딕" charset="0"/>
-              </a:rPr>
-              <a:t>분석</a:t>
-            </a:r>
-            <a:endParaRPr lang="ko-KR" altLang="en-US" sz="1800">
-              <a:solidFill>
-                <a:schemeClr val="bg1"/>
-              </a:solidFill>
-              <a:latin typeface="맑은 고딕" charset="0"/>
-              <a:ea typeface="맑은 고딕" charset="0"/>
-            </a:endParaRPr>
-          </a:p>
-          <a:p>
-            <a:pPr marL="0" indent="0" algn="l" hangingPunct="1"/>
-            <a:endParaRPr lang="ko-KR" altLang="en-US" sz="1800">
-              <a:solidFill>
-                <a:schemeClr val="bg1"/>
-              </a:solidFill>
-              <a:latin typeface="맑은 고딕" charset="0"/>
-              <a:ea typeface="맑은 고딕" charset="0"/>
-            </a:endParaRPr>
-          </a:p>
-          <a:p>
-            <a:pPr marL="0" indent="0" algn="l" hangingPunct="1"/>
-            <a:r>
-              <a:rPr lang="ko-KR" sz="1800">
-                <a:solidFill>
-                  <a:schemeClr val="bg1"/>
-                </a:solidFill>
-                <a:latin typeface="맑은 고딕" charset="0"/>
-                <a:ea typeface="맑은 고딕" charset="0"/>
-              </a:rPr>
-              <a:t>가격 </a:t>
-            </a:r>
-            <a:r>
-              <a:rPr lang="ko-KR" sz="1800">
-                <a:solidFill>
-                  <a:schemeClr val="bg1"/>
-                </a:solidFill>
-                <a:latin typeface="맑은 고딕" charset="0"/>
-                <a:ea typeface="맑은 고딕" charset="0"/>
-              </a:rPr>
-              <a:t>예측</a:t>
-            </a:r>
-            <a:endParaRPr lang="ko-KR" altLang="en-US" sz="1800">
-              <a:solidFill>
-                <a:schemeClr val="bg1"/>
-              </a:solidFill>
-              <a:latin typeface="맑은 고딕" charset="0"/>
-              <a:ea typeface="맑은 고딕" charset="0"/>
-            </a:endParaRPr>
-          </a:p>
-        </p:txBody>
-      </p:sp>
-      <p:sp>
-        <p:nvSpPr>
-          <p:cNvPr id="7" name="Rect 0"/>
-          <p:cNvSpPr txBox="1">
-            <a:spLocks/>
-          </p:cNvSpPr>
-          <p:nvPr/>
-        </p:nvSpPr>
-        <p:spPr>
-          <a:xfrm rot="0">
-            <a:off x="3850640" y="3505200"/>
-            <a:ext cx="1174750" cy="370205"/>
-          </a:xfrm>
-          <a:prstGeom prst="rect"/>
-          <a:noFill/>
-          <a:ln w="0" cap="flat" cmpd="sng">
-            <a:solidFill>
-              <a:srgbClr val="FFFFFF">
-                <a:alpha val="100000"/>
-              </a:srgbClr>
-            </a:solidFill>
-            <a:prstDash/>
-          </a:ln>
-        </p:spPr>
-        <p:txBody>
-          <a:bodyPr wrap="none" lIns="89535" tIns="46355" rIns="89535" bIns="46355" vert="horz" anchor="t">
-            <a:spAutoFit/>
-          </a:bodyPr>
-          <a:lstStyle/>
-          <a:p>
-            <a:pPr marL="0" indent="0" algn="l" hangingPunct="1"/>
-            <a:r>
-              <a:rPr lang="ko-KR" sz="1800">
-                <a:solidFill>
-                  <a:schemeClr val="bg1"/>
-                </a:solidFill>
-                <a:latin typeface="맑은 고딕" charset="0"/>
-                <a:ea typeface="맑은 고딕" charset="0"/>
-              </a:rPr>
-              <a:t>메뉴 분류</a:t>
-            </a:r>
-            <a:endParaRPr lang="ko-KR" altLang="en-US" sz="1800">
-              <a:solidFill>
-                <a:schemeClr val="bg1"/>
-              </a:solidFill>
-              <a:latin typeface="맑은 고딕" charset="0"/>
-              <a:ea typeface="맑은 고딕" charset="0"/>
-            </a:endParaRPr>
-          </a:p>
         </p:txBody>
       </p:sp>
       <p:cxnSp>
@@ -6530,14 +6828,13 @@
           <p:nvPr/>
         </p:nvCxnSpPr>
         <p:spPr>
-          <a:xfrm rot="0">
-            <a:off x="3406775" y="3603625"/>
-            <a:ext cx="484505" cy="69850"/>
+          <a:xfrm rot="0" flipH="1">
+            <a:off x="3244850" y="3912870"/>
+            <a:ext cx="3175" cy="561975"/>
           </a:xfrm>
           <a:prstGeom prst="straightConnector1"/>
           <a:ln w="6350" cap="flat" cmpd="sng">
             <a:prstDash/>
-            <a:headEnd type="none" w="med" len="med"/>
             <a:tailEnd type="triangle" w="med" len="med"/>
           </a:ln>
         </p:spPr>
@@ -6567,7 +6864,7 @@
         <p:spPr>
           <a:xfrm rot="0">
             <a:off x="5243195" y="1797050"/>
-            <a:ext cx="1174750" cy="370205"/>
+            <a:ext cx="1403985" cy="370840"/>
           </a:xfrm>
           <a:prstGeom prst="rect"/>
           <a:noFill/>
@@ -6577,29 +6874,25 @@
                 <a:alpha val="100000"/>
               </a:srgbClr>
             </a:solidFill>
-            <a:prstDash/>
+            <a:prstDash val="solid"/>
           </a:ln>
         </p:spPr>
         <p:txBody>
-          <a:bodyPr wrap="none" lIns="89535" tIns="46355" rIns="89535" bIns="46355" vert="horz" anchor="t">
+          <a:bodyPr wrap="none" lIns="89535" tIns="46355" rIns="89535" bIns="46355" numCol="1" vert="horz" anchor="t">
             <a:spAutoFit/>
           </a:bodyPr>
           <a:lstStyle/>
           <a:p>
-            <a:pPr marL="0" indent="0" algn="l" hangingPunct="1"/>
+            <a:pPr marL="0" indent="0" algn="l" hangingPunct="1">
+              <a:buFontTx/>
+              <a:buNone/>
+            </a:pPr>
             <a:r>
               <a:rPr sz="1800">
                 <a:latin typeface="맑은 고딕" charset="0"/>
                 <a:ea typeface="맑은 고딕" charset="0"/>
               </a:rPr>
-              <a:t>가격</a:t>
-            </a:r>
-            <a:r>
-              <a:rPr lang="ko-KR" sz="1800">
-                <a:latin typeface="맑은 고딕" charset="0"/>
-                <a:ea typeface="맑은 고딕" charset="0"/>
-              </a:rPr>
-              <a:t> 예측</a:t>
+              <a:t>데이터 분석</a:t>
             </a:r>
             <a:endParaRPr lang="ko-KR" altLang="en-US" sz="1800">
               <a:latin typeface="맑은 고딕" charset="0"/>
@@ -6618,8 +6911,8 @@
         </p:nvSpPr>
         <p:spPr>
           <a:xfrm rot="0">
-            <a:off x="4681220" y="2270760"/>
-            <a:ext cx="3989705" cy="462915"/>
+            <a:off x="4964430" y="2278380"/>
+            <a:ext cx="3990340" cy="278765"/>
           </a:xfrm>
           <a:prstGeom prst="rect"/>
           <a:noFill/>
@@ -6629,16 +6922,19 @@
                 <a:alpha val="100000"/>
               </a:srgbClr>
             </a:solidFill>
-            <a:prstDash/>
+            <a:prstDash val="solid"/>
           </a:ln>
         </p:spPr>
         <p:txBody>
-          <a:bodyPr wrap="square" lIns="89535" tIns="46355" rIns="89535" bIns="46355" vert="horz" anchor="t">
+          <a:bodyPr wrap="square" lIns="89535" tIns="46355" rIns="89535" bIns="46355" numCol="1" vert="horz" anchor="t">
             <a:spAutoFit/>
           </a:bodyPr>
           <a:lstStyle/>
           <a:p>
-            <a:pPr marL="0" indent="0" algn="l" hangingPunct="1"/>
+            <a:pPr marL="0" indent="0" algn="l" hangingPunct="1">
+              <a:buFontTx/>
+              <a:buNone/>
+            </a:pPr>
             <a:r>
               <a:rPr sz="1200" i="0" b="0">
                 <a:solidFill>
@@ -6647,17 +6943,17 @@
                 <a:latin typeface="Segoe UI Emoji" charset="0"/>
                 <a:ea typeface="ui-sans-serif" charset="0"/>
               </a:rPr>
-              <a:t>도/소매가 분석과 날씨 데이터를 연동하여 정확한 가격</a:t>
-            </a:r>
-            <a:r>
-              <a:rPr sz="1200" i="0" b="0">
+              <a:t>축적된 농가 데이터를 분석하여 최적 환경</a:t>
+            </a:r>
+            <a:r>
+              <a:rPr lang="ko-KR" sz="1200" i="0" b="0">
                 <a:solidFill>
                   <a:schemeClr val="bg1"/>
                 </a:solidFill>
                 <a:latin typeface="Segoe UI Emoji" charset="0"/>
                 <a:ea typeface="ui-sans-serif" charset="0"/>
               </a:rPr>
-              <a:t>예</a:t>
+              <a:t> </a:t>
             </a:r>
             <a:r>
               <a:rPr lang="ko-KR" sz="1200" i="0" b="0">
@@ -6667,21 +6963,21 @@
                 <a:latin typeface="Segoe UI Emoji" charset="0"/>
                 <a:ea typeface="ui-sans-serif" charset="0"/>
               </a:rPr>
-              <a:t>측하기!</a:t>
-            </a:r>
-            <a:endParaRPr lang="ko-KR" altLang="en-US" sz="1800">
+              <a:t>추천서비스</a:t>
+            </a:r>
+            <a:endParaRPr lang="ko-KR" altLang="en-US" sz="1200" i="0" b="0">
               <a:solidFill>
                 <a:schemeClr val="bg1"/>
               </a:solidFill>
-              <a:latin typeface="맑은 고딕" charset="0"/>
-              <a:ea typeface="맑은 고딕" charset="0"/>
+              <a:latin typeface="Segoe UI Emoji" charset="0"/>
+              <a:ea typeface="ui-sans-serif" charset="0"/>
             </a:endParaRPr>
           </a:p>
         </p:txBody>
       </p:sp>
       <p:sp>
         <p:nvSpPr>
-          <p:cNvPr id="11" name="도형 39"/>
+          <p:cNvPr id="11" name="도형 35"/>
           <p:cNvSpPr>
             <a:spLocks/>
           </p:cNvSpPr>
@@ -6689,12 +6985,12 @@
         </p:nvSpPr>
         <p:spPr>
           <a:xfrm rot="0">
-            <a:off x="8669655" y="1885315"/>
-            <a:ext cx="1669415" cy="484505"/>
+            <a:off x="5509895" y="2705100"/>
+            <a:ext cx="3615055" cy="929005"/>
           </a:xfrm>
           <a:prstGeom prst="rect"/>
           <a:solidFill>
-            <a:schemeClr val="tx1"/>
+            <a:schemeClr val="bg1"/>
           </a:solidFill>
         </p:spPr>
         <p:style>
@@ -6722,12 +7018,98 @@
             <a:pPr marL="0" indent="0" algn="ctr" hangingPunct="1"/>
             <a:r>
               <a:rPr lang="ko-KR" sz="1800">
-                <a:latin typeface="맑은 고딕" charset="0"/>
-                <a:ea typeface="맑은 고딕" charset="0"/>
-              </a:rPr>
-              <a:t>가격예측실행버튼</a:t>
+                <a:solidFill>
+                  <a:schemeClr val="tx1"/>
+                </a:solidFill>
+                <a:latin typeface="맑은 고딕" charset="0"/>
+                <a:ea typeface="맑은 고딕" charset="0"/>
+              </a:rPr>
+              <a:t>데이터 </a:t>
+            </a:r>
+            <a:r>
+              <a:rPr lang="ko-KR" sz="1800">
+                <a:solidFill>
+                  <a:schemeClr val="tx1"/>
+                </a:solidFill>
+                <a:latin typeface="맑은 고딕" charset="0"/>
+                <a:ea typeface="맑은 고딕" charset="0"/>
+              </a:rPr>
+              <a:t>업로드(환경데이터,</a:t>
+            </a:r>
+            <a:r>
+              <a:rPr lang="ko-KR" sz="1800">
+                <a:solidFill>
+                  <a:schemeClr val="tx1"/>
+                </a:solidFill>
+                <a:latin typeface="맑은 고딕" charset="0"/>
+                <a:ea typeface="맑은 고딕" charset="0"/>
+              </a:rPr>
+              <a:t> 생육</a:t>
+            </a:r>
+            <a:r>
+              <a:rPr lang="ko-KR" sz="1800">
+                <a:solidFill>
+                  <a:schemeClr val="tx1"/>
+                </a:solidFill>
+                <a:latin typeface="맑은 고딕" charset="0"/>
+                <a:ea typeface="맑은 고딕" charset="0"/>
+              </a:rPr>
+              <a:t>데이터,</a:t>
+            </a:r>
+            <a:r>
+              <a:rPr lang="ko-KR" sz="1800">
+                <a:solidFill>
+                  <a:schemeClr val="tx1"/>
+                </a:solidFill>
+                <a:latin typeface="맑은 고딕" charset="0"/>
+                <a:ea typeface="맑은 고딕" charset="0"/>
+              </a:rPr>
+              <a:t> 생산량데이터</a:t>
+            </a:r>
+            <a:r>
+              <a:rPr lang="ko-KR" sz="1800">
+                <a:solidFill>
+                  <a:schemeClr val="tx1"/>
+                </a:solidFill>
+                <a:latin typeface="맑은 고딕" charset="0"/>
+                <a:ea typeface="맑은 고딕" charset="0"/>
+              </a:rPr>
+              <a:t> </a:t>
+            </a:r>
+            <a:r>
+              <a:rPr lang="ko-KR" sz="1800">
+                <a:solidFill>
+                  <a:schemeClr val="tx1"/>
+                </a:solidFill>
+                <a:latin typeface="맑은 고딕" charset="0"/>
+                <a:ea typeface="맑은 고딕" charset="0"/>
+              </a:rPr>
+              <a:t>-ㅡ csv나 xl</a:t>
+            </a:r>
+            <a:r>
+              <a:rPr lang="ko-KR" sz="1800">
+                <a:solidFill>
+                  <a:schemeClr val="tx1"/>
+                </a:solidFill>
+                <a:latin typeface="맑은 고딕" charset="0"/>
+                <a:ea typeface="맑은 고딕" charset="0"/>
+              </a:rPr>
+              <a:t>s</a:t>
+            </a:r>
+            <a:r>
+              <a:rPr lang="ko-KR" sz="1800">
+                <a:solidFill>
+                  <a:schemeClr val="tx1"/>
+                </a:solidFill>
+                <a:latin typeface="맑은 고딕" charset="0"/>
+                <a:ea typeface="맑은 고딕" charset="0"/>
+              </a:rPr>
+              <a:t>x파일들)</a:t>
             </a:r>
             <a:endParaRPr lang="ko-KR" altLang="en-US" sz="1800">
+              <a:solidFill>
+                <a:schemeClr val="tx1"/>
+              </a:solidFill>
               <a:latin typeface="맑은 고딕" charset="0"/>
               <a:ea typeface="맑은 고딕" charset="0"/>
             </a:endParaRPr>
@@ -6736,7 +7118,7 @@
       </p:sp>
       <p:sp>
         <p:nvSpPr>
-          <p:cNvPr id="12" name="도형 50"/>
+          <p:cNvPr id="12" name="도형 37"/>
           <p:cNvSpPr>
             <a:spLocks/>
           </p:cNvSpPr>
@@ -6744,10 +7126,13 @@
         </p:nvSpPr>
         <p:spPr>
           <a:xfrm rot="0">
-            <a:off x="6339205" y="1342390"/>
-            <a:ext cx="2202815" cy="445135"/>
+            <a:off x="9082405" y="1979295"/>
+            <a:ext cx="1363980" cy="485140"/>
           </a:xfrm>
           <a:prstGeom prst="rect"/>
+          <a:solidFill>
+            <a:schemeClr val="tx1"/>
+          </a:solidFill>
         </p:spPr>
         <p:style>
           <a:lnRef idx="2">
@@ -6766,53 +7151,21 @@
           </a:fontRef>
         </p:style>
         <p:txBody>
-          <a:bodyPr wrap="square" lIns="91440" tIns="45720" rIns="91440" bIns="45720" vert="horz" anchor="ctr">
+          <a:bodyPr wrap="square" lIns="91440" tIns="45720" rIns="91440" bIns="45720" numCol="1" vert="horz" anchor="ctr">
             <a:noAutofit/>
           </a:bodyPr>
           <a:lstStyle/>
           <a:p>
-            <a:pPr marL="0" indent="0" algn="ctr" hangingPunct="1"/>
-            <a:r>
-              <a:rPr lang="ko-KR" sz="1800">
-                <a:latin typeface="맑은 고딕" charset="0"/>
-                <a:ea typeface="맑은 고딕" charset="0"/>
-              </a:rPr>
-              <a:t>S</a:t>
-            </a:r>
-            <a:r>
-              <a:rPr lang="ko-KR" sz="1800">
-                <a:latin typeface="맑은 고딕" charset="0"/>
-                <a:ea typeface="맑은 고딕" charset="0"/>
-              </a:rPr>
-              <a:t>nss</a:t>
-            </a:r>
-            <a:r>
-              <a:rPr lang="ko-KR" sz="1800">
-                <a:latin typeface="맑은 고딕" charset="0"/>
-                <a:ea typeface="맑은 고딕" charset="0"/>
-              </a:rPr>
-              <a:t>님 </a:t>
-            </a:r>
-            <a:r>
-              <a:rPr lang="ko-KR" sz="1800">
-                <a:latin typeface="맑은 고딕" charset="0"/>
-                <a:ea typeface="맑은 고딕" charset="0"/>
-              </a:rPr>
-              <a:t>반갑</a:t>
-            </a:r>
-            <a:r>
-              <a:rPr lang="ko-KR" sz="1800">
-                <a:latin typeface="맑은 고딕" charset="0"/>
-                <a:ea typeface="맑은 고딕" charset="0"/>
-              </a:rPr>
-              <a:t>습니</a:t>
-            </a:r>
-            <a:r>
-              <a:rPr lang="ko-KR" sz="1800">
-                <a:latin typeface="맑은 고딕" charset="0"/>
-                <a:ea typeface="맑은 고딕" charset="0"/>
-              </a:rPr>
-              <a:t>다</a:t>
+            <a:pPr marL="0" indent="0" algn="ctr" hangingPunct="1">
+              <a:buFontTx/>
+              <a:buNone/>
+            </a:pPr>
+            <a:r>
+              <a:rPr lang="ko-KR" sz="1800">
+                <a:latin typeface="맑은 고딕" charset="0"/>
+                <a:ea typeface="맑은 고딕" charset="0"/>
+              </a:rPr>
+              <a:t>ai분석버튼</a:t>
             </a:r>
             <a:endParaRPr lang="ko-KR" altLang="en-US" sz="1800">
               <a:latin typeface="맑은 고딕" charset="0"/>
@@ -6823,20 +7176,20 @@
       </p:sp>
       <p:sp>
         <p:nvSpPr>
-          <p:cNvPr id="13" name="도형 51"/>
+          <p:cNvPr id="15" name="도형 1"/>
           <p:cNvSpPr>
             <a:spLocks/>
           </p:cNvSpPr>
           <p:nvPr/>
         </p:nvSpPr>
         <p:spPr>
-          <a:xfrm rot="0">
-            <a:off x="8669655" y="1322705"/>
-            <a:ext cx="1146175" cy="464820"/>
+          <a:xfrm>
+            <a:off x="5312410" y="4008755"/>
+            <a:ext cx="4247515" cy="1522095"/>
           </a:xfrm>
           <a:prstGeom prst="rect"/>
           <a:solidFill>
-            <a:schemeClr val="tx1"/>
+            <a:schemeClr val="bg1"/>
           </a:solidFill>
         </p:spPr>
         <p:style>
@@ -6856,20 +7209,49 @@
           </a:fontRef>
         </p:style>
         <p:txBody>
-          <a:bodyPr wrap="square" lIns="91440" tIns="45720" rIns="91440" bIns="45720" vert="horz" anchor="ctr">
+          <a:bodyPr wrap="square" lIns="91440" tIns="45720" rIns="91440" bIns="45720" numCol="1" vert="horz" anchor="ctr">
             <a:noAutofit/>
           </a:bodyPr>
           <a:lstStyle/>
           <a:p>
-            <a:pPr marL="0" indent="0" algn="ctr" hangingPunct="1"/>
-            <a:r>
-              <a:rPr sz="1800">
-                <a:latin typeface="맑은 고딕" charset="0"/>
-                <a:ea typeface="맑은 고딕" charset="0"/>
-              </a:rPr>
-              <a:t>로그인</a:t>
+            <a:pPr marL="0" indent="0" algn="ctr" hangingPunct="1">
+              <a:buFontTx/>
+              <a:buNone/>
+            </a:pPr>
+            <a:r>
+              <a:rPr lang="ko-KR" sz="1800">
+                <a:solidFill>
+                  <a:schemeClr val="tx1"/>
+                </a:solidFill>
+                <a:latin typeface="맑은 고딕" charset="0"/>
+                <a:ea typeface="맑은 고딕" charset="0"/>
+              </a:rPr>
+              <a:t>분석한 축적된 농가의 데이터들이 나오게끔 할 예정</a:t>
+            </a:r>
+            <a:r>
+              <a:rPr lang="ko-KR" sz="1800">
+                <a:solidFill>
+                  <a:schemeClr val="tx1"/>
+                </a:solidFill>
+                <a:latin typeface="맑은 고딕" charset="0"/>
+                <a:ea typeface="맑은 고딕" charset="0"/>
+              </a:rPr>
+              <a:t>임</a:t>
+            </a:r>
+            <a:r>
+              <a:rPr lang="ko-KR" sz="1800">
+                <a:solidFill>
+                  <a:schemeClr val="tx1"/>
+                </a:solidFill>
+                <a:latin typeface="맑은 고딕" charset="0"/>
+                <a:ea typeface="맑은 고딕" charset="0"/>
+              </a:rPr>
+              <a:t>!</a:t>
             </a:r>
             <a:endParaRPr lang="ko-KR" altLang="en-US" sz="1800">
+              <a:solidFill>
+                <a:schemeClr val="tx1"/>
+              </a:solidFill>
               <a:latin typeface="맑은 고딕" charset="0"/>
               <a:ea typeface="맑은 고딕" charset="0"/>
             </a:endParaRPr>
@@ -6878,7 +7260,7 @@
       </p:sp>
       <p:sp>
         <p:nvSpPr>
-          <p:cNvPr id="14" name="도형 3"/>
+          <p:cNvPr id="16" name="도형 29"/>
           <p:cNvSpPr>
             <a:spLocks/>
           </p:cNvSpPr>
@@ -6886,13 +7268,21 @@
         </p:nvSpPr>
         <p:spPr>
           <a:xfrm rot="0">
-            <a:off x="5381625" y="3110230"/>
-            <a:ext cx="4078605" cy="1235075"/>
+            <a:off x="1125855" y="977265"/>
+            <a:ext cx="9401175" cy="800100"/>
           </a:xfrm>
           <a:prstGeom prst="rect"/>
           <a:solidFill>
             <a:schemeClr val="bg1"/>
           </a:solidFill>
+          <a:ln w="12700" cap="flat" cmpd="sng">
+            <a:solidFill>
+              <a:schemeClr val="tx1">
+                <a:alpha val="100000"/>
+              </a:schemeClr>
+            </a:solidFill>
+            <a:prstDash val="solid"/>
+          </a:ln>
         </p:spPr>
         <p:style>
           <a:lnRef idx="2">
@@ -6917,130 +7307,7 @@
           <a:lstStyle/>
           <a:p>
             <a:pPr marL="0" indent="0" algn="ctr" hangingPunct="1"/>
-            <a:r>
-              <a:rPr lang="ko-KR" sz="1800">
-                <a:solidFill>
-                  <a:schemeClr val="tx1"/>
-                </a:solidFill>
-                <a:latin typeface="맑은 고딕" charset="0"/>
-                <a:ea typeface="맑은 고딕" charset="0"/>
-              </a:rPr>
-              <a:t>날씨데이터</a:t>
-            </a:r>
-            <a:r>
-              <a:rPr lang="ko-KR" sz="1800">
-                <a:solidFill>
-                  <a:schemeClr val="tx1"/>
-                </a:solidFill>
-                <a:latin typeface="맑은 고딕" charset="0"/>
-                <a:ea typeface="맑은 고딕" charset="0"/>
-              </a:rPr>
-              <a:t>들의 </a:t>
-            </a:r>
-            <a:r>
-              <a:rPr lang="ko-KR" sz="1800">
-                <a:solidFill>
-                  <a:schemeClr val="tx1"/>
-                </a:solidFill>
-                <a:latin typeface="맑은 고딕" charset="0"/>
-                <a:ea typeface="맑은 고딕" charset="0"/>
-              </a:rPr>
-              <a:t>모아서 차례대로 나오게끔 1</a:t>
-            </a:r>
-            <a:r>
-              <a:rPr lang="ko-KR" sz="1800">
-                <a:solidFill>
-                  <a:schemeClr val="tx1"/>
-                </a:solidFill>
-                <a:latin typeface="맑은 고딕" charset="0"/>
-                <a:ea typeface="맑은 고딕" charset="0"/>
-              </a:rPr>
-              <a:t>s</a:t>
-            </a:r>
-            <a:r>
-              <a:rPr lang="ko-KR" sz="1800">
-                <a:solidFill>
-                  <a:schemeClr val="tx1"/>
-                </a:solidFill>
-                <a:latin typeface="맑은 고딕" charset="0"/>
-                <a:ea typeface="맑은 고딕" charset="0"/>
-              </a:rPr>
-              <a:t>t/2</a:t>
-            </a:r>
-            <a:r>
-              <a:rPr lang="ko-KR" sz="1800">
-                <a:solidFill>
-                  <a:schemeClr val="tx1"/>
-                </a:solidFill>
-                <a:latin typeface="맑은 고딕" charset="0"/>
-                <a:ea typeface="맑은 고딕" charset="0"/>
-              </a:rPr>
-              <a:t>n</a:t>
-            </a:r>
-            <a:r>
-              <a:rPr lang="ko-KR" sz="1800">
-                <a:solidFill>
-                  <a:schemeClr val="tx1"/>
-                </a:solidFill>
-                <a:latin typeface="맑은 고딕" charset="0"/>
-                <a:ea typeface="맑은 고딕" charset="0"/>
-              </a:rPr>
-              <a:t>d/3</a:t>
-            </a:r>
-            <a:r>
-              <a:rPr lang="ko-KR" sz="1800">
-                <a:solidFill>
-                  <a:schemeClr val="tx1"/>
-                </a:solidFill>
-                <a:latin typeface="맑은 고딕" charset="0"/>
-                <a:ea typeface="맑은 고딕" charset="0"/>
-              </a:rPr>
-              <a:t>r</a:t>
-            </a:r>
-            <a:r>
-              <a:rPr lang="ko-KR" sz="1800">
-                <a:solidFill>
-                  <a:schemeClr val="tx1"/>
-                </a:solidFill>
-                <a:latin typeface="맑은 고딕" charset="0"/>
-                <a:ea typeface="맑은 고딕" charset="0"/>
-              </a:rPr>
-              <a:t>d/</a:t>
-            </a:r>
-            <a:r>
-              <a:rPr lang="ko-KR" sz="1800">
-                <a:solidFill>
-                  <a:schemeClr val="tx1"/>
-                </a:solidFill>
-                <a:latin typeface="맑은 고딕" charset="0"/>
-                <a:ea typeface="맑은 고딕" charset="0"/>
-              </a:rPr>
-              <a:t>4</a:t>
-            </a:r>
-            <a:r>
-              <a:rPr lang="ko-KR" sz="1800" baseline="30000">
-                <a:solidFill>
-                  <a:schemeClr val="tx1"/>
-                </a:solidFill>
-                <a:latin typeface="맑은 고딕" charset="0"/>
-                <a:ea typeface="맑은 고딕" charset="0"/>
-              </a:rPr>
-              <a:t>th</a:t>
-            </a:r>
-            <a:r>
-              <a:rPr lang="ko-KR" sz="1800">
-                <a:solidFill>
-                  <a:schemeClr val="tx1"/>
-                </a:solidFill>
-                <a:latin typeface="맑은 고딕" charset="0"/>
-                <a:ea typeface="맑은 고딕" charset="0"/>
-              </a:rPr>
-              <a:t> 순으로!</a:t>
-            </a:r>
             <a:endParaRPr lang="ko-KR" altLang="en-US" sz="1800">
-              <a:solidFill>
-                <a:schemeClr val="tx1"/>
-              </a:solidFill>
               <a:latin typeface="맑은 고딕" charset="0"/>
               <a:ea typeface="맑은 고딕" charset="0"/>
             </a:endParaRPr>
@@ -7049,7 +7316,7 @@
       </p:sp>
       <p:sp>
         <p:nvSpPr>
-          <p:cNvPr id="15" name="도형 5"/>
+          <p:cNvPr id="17" name="도형 30"/>
           <p:cNvSpPr>
             <a:spLocks/>
           </p:cNvSpPr>
@@ -7057,13 +7324,10 @@
         </p:nvSpPr>
         <p:spPr>
           <a:xfrm rot="0">
-            <a:off x="5372100" y="4443095"/>
-            <a:ext cx="4128135" cy="1353185"/>
+            <a:off x="6812915" y="1203960"/>
+            <a:ext cx="2203450" cy="445770"/>
           </a:xfrm>
           <a:prstGeom prst="rect"/>
-          <a:solidFill>
-            <a:schemeClr val="bg1"/>
-          </a:solidFill>
         </p:spPr>
         <p:style>
           <a:lnRef idx="2">
@@ -7082,6 +7346,129 @@
           </a:fontRef>
         </p:style>
         <p:txBody>
+          <a:bodyPr wrap="square" lIns="91440" tIns="45720" rIns="91440" bIns="45720" numCol="1" vert="horz" anchor="ctr">
+            <a:noAutofit/>
+          </a:bodyPr>
+          <a:lstStyle/>
+          <a:p>
+            <a:pPr marL="0" indent="0" algn="ctr" hangingPunct="1">
+              <a:buFontTx/>
+              <a:buNone/>
+            </a:pPr>
+            <a:r>
+              <a:rPr lang="ko-KR" sz="1800">
+                <a:latin typeface="맑은 고딕" charset="0"/>
+                <a:ea typeface="맑은 고딕" charset="0"/>
+              </a:rPr>
+              <a:t>Snss님 반갑습니다</a:t>
+            </a:r>
+            <a:endParaRPr lang="ko-KR" altLang="en-US" sz="1800">
+              <a:latin typeface="맑은 고딕" charset="0"/>
+              <a:ea typeface="맑은 고딕" charset="0"/>
+            </a:endParaRPr>
+          </a:p>
+        </p:txBody>
+      </p:sp>
+      <p:sp>
+        <p:nvSpPr>
+          <p:cNvPr id="18" name="도형 31"/>
+          <p:cNvSpPr>
+            <a:spLocks/>
+          </p:cNvSpPr>
+          <p:nvPr/>
+        </p:nvSpPr>
+        <p:spPr>
+          <a:xfrm rot="0">
+            <a:off x="9143365" y="1184275"/>
+            <a:ext cx="1146810" cy="465455"/>
+          </a:xfrm>
+          <a:prstGeom prst="rect"/>
+          <a:solidFill>
+            <a:schemeClr val="tx1"/>
+          </a:solidFill>
+        </p:spPr>
+        <p:style>
+          <a:lnRef idx="2">
+            <a:schemeClr val="accent1">
+              <a:shade val="50000"/>
+            </a:schemeClr>
+          </a:lnRef>
+          <a:fillRef idx="1">
+            <a:schemeClr val="accent1"/>
+          </a:fillRef>
+          <a:effectRef idx="0">
+            <a:schemeClr val="accent1"/>
+          </a:effectRef>
+          <a:fontRef idx="minor">
+            <a:schemeClr val="lt1"/>
+          </a:fontRef>
+        </p:style>
+        <p:txBody>
+          <a:bodyPr wrap="square" lIns="91440" tIns="45720" rIns="91440" bIns="45720" numCol="1" vert="horz" anchor="ctr">
+            <a:noAutofit/>
+          </a:bodyPr>
+          <a:lstStyle/>
+          <a:p>
+            <a:pPr marL="0" indent="0" algn="ctr" hangingPunct="1">
+              <a:buFontTx/>
+              <a:buNone/>
+            </a:pPr>
+            <a:r>
+              <a:rPr sz="1800">
+                <a:latin typeface="맑은 고딕" charset="0"/>
+                <a:ea typeface="맑은 고딕" charset="0"/>
+              </a:rPr>
+              <a:t>로그</a:t>
+            </a:r>
+            <a:r>
+              <a:rPr sz="1800">
+                <a:latin typeface="맑은 고딕" charset="0"/>
+                <a:ea typeface="맑은 고딕" charset="0"/>
+              </a:rPr>
+              <a:t>아웃</a:t>
+            </a:r>
+            <a:endParaRPr lang="ko-KR" altLang="en-US" sz="1800">
+              <a:latin typeface="맑은 고딕" charset="0"/>
+              <a:ea typeface="맑은 고딕" charset="0"/>
+            </a:endParaRPr>
+          </a:p>
+        </p:txBody>
+      </p:sp>
+      <p:sp>
+        <p:nvSpPr>
+          <p:cNvPr id="19" name="도형 32"/>
+          <p:cNvSpPr>
+            <a:spLocks/>
+          </p:cNvSpPr>
+          <p:nvPr/>
+        </p:nvSpPr>
+        <p:spPr>
+          <a:xfrm rot="0">
+            <a:off x="1283970" y="1144905"/>
+            <a:ext cx="1066800" cy="544195"/>
+          </a:xfrm>
+          <a:prstGeom prst="rect"/>
+          <a:solidFill>
+            <a:schemeClr val="tx1"/>
+          </a:solidFill>
+        </p:spPr>
+        <p:style>
+          <a:lnRef idx="2">
+            <a:schemeClr val="accent1">
+              <a:shade val="50000"/>
+            </a:schemeClr>
+          </a:lnRef>
+          <a:fillRef idx="1">
+            <a:schemeClr val="accent1"/>
+          </a:fillRef>
+          <a:effectRef idx="0">
+            <a:schemeClr val="accent1"/>
+          </a:effectRef>
+          <a:fontRef idx="minor">
+            <a:schemeClr val="lt1"/>
+          </a:fontRef>
+        </p:style>
+        <p:txBody>
           <a:bodyPr wrap="square" lIns="91440" tIns="45720" rIns="91440" bIns="45720" vert="horz" anchor="ctr">
             <a:noAutofit/>
           </a:bodyPr>
@@ -7089,24 +7476,845 @@
           <a:p>
             <a:pPr marL="0" indent="0" algn="ctr" hangingPunct="1"/>
             <a:r>
+              <a:rPr lang="ko-KR" sz="1800">
+                <a:latin typeface="맑은 고딕" charset="0"/>
+                <a:ea typeface="맑은 고딕" charset="0"/>
+              </a:rPr>
+              <a:t>H</a:t>
+            </a:r>
+            <a:r>
+              <a:rPr lang="ko-KR" sz="1800">
+                <a:latin typeface="맑은 고딕" charset="0"/>
+                <a:ea typeface="맑은 고딕" charset="0"/>
+              </a:rPr>
+              <a:t>ea</a:t>
+            </a:r>
+            <a:r>
+              <a:rPr lang="ko-KR" sz="1800">
+                <a:latin typeface="맑은 고딕" charset="0"/>
+                <a:ea typeface="맑은 고딕" charset="0"/>
+              </a:rPr>
+              <a:t>de</a:t>
+            </a:r>
+            <a:r>
+              <a:rPr lang="ko-KR" sz="1800">
+                <a:latin typeface="맑은 고딕" charset="0"/>
+                <a:ea typeface="맑은 고딕" charset="0"/>
+              </a:rPr>
+              <a:t>r logo</a:t>
+            </a:r>
+            <a:endParaRPr lang="ko-KR" altLang="en-US" sz="1800">
+              <a:latin typeface="맑은 고딕" charset="0"/>
+              <a:ea typeface="맑은 고딕" charset="0"/>
+            </a:endParaRPr>
+          </a:p>
+        </p:txBody>
+      </p:sp>
+      <p:sp>
+        <p:nvSpPr>
+          <p:cNvPr id="20" name="텍스트 상자 33"/>
+          <p:cNvSpPr txBox="1">
+            <a:spLocks/>
+          </p:cNvSpPr>
+          <p:nvPr/>
+        </p:nvSpPr>
+        <p:spPr>
+          <a:xfrm rot="0">
+            <a:off x="2597150" y="1195070"/>
+            <a:ext cx="1094105" cy="370205"/>
+          </a:xfrm>
+          <a:prstGeom prst="rect"/>
+          <a:noFill/>
+          <a:ln w="0" cap="flat" cmpd="sng">
+            <a:solidFill>
+              <a:srgbClr val="FFFFFF">
+                <a:alpha val="100000"/>
+              </a:srgbClr>
+            </a:solidFill>
+            <a:prstDash/>
+          </a:ln>
+        </p:spPr>
+        <p:txBody>
+          <a:bodyPr wrap="none" lIns="89535" tIns="46355" rIns="89535" bIns="46355" vert="horz" anchor="t">
+            <a:spAutoFit/>
+          </a:bodyPr>
+          <a:lstStyle/>
+          <a:p>
+            <a:pPr marL="0" indent="0" algn="l" hangingPunct="1"/>
+            <a:r>
+              <a:rPr lang="ko-KR" sz="1800">
+                <a:latin typeface="맑은 고딕" charset="0"/>
+                <a:ea typeface="맑은 고딕" charset="0"/>
+              </a:rPr>
+              <a:t>대시보드</a:t>
+            </a:r>
+            <a:endParaRPr lang="ko-KR" altLang="en-US" sz="1800">
+              <a:latin typeface="맑은 고딕" charset="0"/>
+              <a:ea typeface="맑은 고딕" charset="0"/>
+            </a:endParaRPr>
+          </a:p>
+        </p:txBody>
+      </p:sp>
+      <p:sp>
+        <p:nvSpPr>
+          <p:cNvPr id="21" name="텍스트 상자 34"/>
+          <p:cNvSpPr txBox="1">
+            <a:spLocks/>
+          </p:cNvSpPr>
+          <p:nvPr/>
+        </p:nvSpPr>
+        <p:spPr>
+          <a:xfrm rot="0">
+            <a:off x="3695700" y="1207135"/>
+            <a:ext cx="1403350" cy="370205"/>
+          </a:xfrm>
+          <a:prstGeom prst="rect"/>
+          <a:noFill/>
+          <a:ln w="0" cap="flat" cmpd="sng">
+            <a:solidFill>
+              <a:srgbClr val="FFFFFF">
+                <a:alpha val="100000"/>
+              </a:srgbClr>
+            </a:solidFill>
+            <a:prstDash/>
+          </a:ln>
+        </p:spPr>
+        <p:txBody>
+          <a:bodyPr wrap="none" lIns="89535" tIns="46355" rIns="89535" bIns="46355" vert="horz" anchor="t">
+            <a:spAutoFit/>
+          </a:bodyPr>
+          <a:lstStyle/>
+          <a:p>
+            <a:pPr marL="0" indent="0" algn="l" hangingPunct="1"/>
+            <a:r>
+              <a:rPr lang="ko-KR" sz="1800">
+                <a:latin typeface="맑은 고딕" charset="0"/>
+                <a:ea typeface="맑은 고딕" charset="0"/>
+              </a:rPr>
+              <a:t>데이터 분석</a:t>
+            </a:r>
+            <a:endParaRPr lang="ko-KR" altLang="en-US" sz="1800">
+              <a:latin typeface="맑은 고딕" charset="0"/>
+              <a:ea typeface="맑은 고딕" charset="0"/>
+            </a:endParaRPr>
+          </a:p>
+        </p:txBody>
+      </p:sp>
+      <p:sp>
+        <p:nvSpPr>
+          <p:cNvPr id="22" name="텍스트 상자 35"/>
+          <p:cNvSpPr txBox="1">
+            <a:spLocks/>
+          </p:cNvSpPr>
+          <p:nvPr/>
+        </p:nvSpPr>
+        <p:spPr>
+          <a:xfrm rot="0">
+            <a:off x="5071110" y="1189990"/>
+            <a:ext cx="1174750" cy="370205"/>
+          </a:xfrm>
+          <a:prstGeom prst="rect"/>
+          <a:noFill/>
+          <a:ln w="0" cap="flat" cmpd="sng">
+            <a:solidFill>
+              <a:srgbClr val="FFFFFF">
+                <a:alpha val="100000"/>
+              </a:srgbClr>
+            </a:solidFill>
+            <a:prstDash/>
+          </a:ln>
+        </p:spPr>
+        <p:txBody>
+          <a:bodyPr wrap="none" lIns="89535" tIns="46355" rIns="89535" bIns="46355" vert="horz" anchor="t">
+            <a:spAutoFit/>
+          </a:bodyPr>
+          <a:lstStyle/>
+          <a:p>
+            <a:pPr marL="0" indent="0" algn="l" hangingPunct="1"/>
+            <a:r>
               <a:rPr sz="1800">
+                <a:latin typeface="맑은 고딕" charset="0"/>
+                <a:ea typeface="맑은 고딕" charset="0"/>
+              </a:rPr>
+              <a:t>가격</a:t>
+            </a:r>
+            <a:r>
+              <a:rPr lang="ko-KR" sz="1800">
+                <a:latin typeface="맑은 고딕" charset="0"/>
+                <a:ea typeface="맑은 고딕" charset="0"/>
+              </a:rPr>
+              <a:t> </a:t>
+            </a:r>
+            <a:r>
+              <a:rPr lang="ko-KR" sz="1800">
+                <a:latin typeface="맑은 고딕" charset="0"/>
+                <a:ea typeface="맑은 고딕" charset="0"/>
+              </a:rPr>
+              <a:t>예측</a:t>
+            </a:r>
+            <a:endParaRPr lang="ko-KR" altLang="en-US" sz="1800">
+              <a:latin typeface="맑은 고딕" charset="0"/>
+              <a:ea typeface="맑은 고딕" charset="0"/>
+            </a:endParaRPr>
+          </a:p>
+        </p:txBody>
+      </p:sp>
+    </p:spTree>
+  </p:cSld>
+  <p:clrMapOvr>
+    <a:masterClrMapping/>
+  </p:clrMapOvr>
+  <mc:AlternateContent xmlns:mc="http://schemas.openxmlformats.org/markup-compatibility/2006">
+    <mc:Choice xmlns:p14="http://schemas.microsoft.com/office/powerpoint/2010/main" Requires="p14">
+      <p:transition spd="slow" p14:dur="2000"/>
+    </mc:Choice>
+    <mc:Fallback>
+      <p:transition spd="slow"/>
+    </mc:Fallback>
+  </mc:AlternateContent>
+  <p:timing>
+    <p:tnLst>
+      <p:par>
+        <p:cTn id="1" dur="indefinite" restart="never" nodeType="tmRoot"/>
+      </p:par>
+    </p:tnLst>
+  </p:timing>
+</p:sld>
+</file>
+
+<file path=ppt/slides/slide5.xml><?xml version="1.0" encoding="utf-8"?>
+<p:sld xmlns:a="http://schemas.openxmlformats.org/drawingml/2006/main" xmlns:r="http://schemas.openxmlformats.org/officeDocument/2006/relationships" xmlns:p="http://schemas.openxmlformats.org/presentationml/2006/main" xmlns:p14="http://schemas.microsoft.com/office/powerpoint/2010/main">
+  <p:cSld>
+    <p:spTree>
+      <p:nvGrpSpPr>
+        <p:cNvPr id="1" name=""/>
+        <p:cNvGrpSpPr/>
+        <p:nvPr/>
+      </p:nvGrpSpPr>
+      <p:grpSpPr>
+        <a:xfrm>
+          <a:off x="0" y="0"/>
+          <a:ext cx="0" cy="0"/>
+          <a:chOff x="0" y="0"/>
+          <a:chExt cx="0" cy="0"/>
+        </a:xfrm>
+      </p:grpSpPr>
+      <p:sp>
+        <p:nvSpPr>
+          <p:cNvPr id="2" name="Rect 0"/>
+          <p:cNvSpPr>
+            <a:spLocks/>
+          </p:cNvSpPr>
+          <p:nvPr/>
+        </p:nvSpPr>
+        <p:spPr>
+          <a:xfrm rot="0">
+            <a:off x="1116965" y="1026160"/>
+            <a:ext cx="9412605" cy="4979670"/>
+          </a:xfrm>
+          <a:prstGeom prst="rect"/>
+          <a:solidFill>
+            <a:schemeClr val="bg1">
+              <a:lumMod val="50000"/>
+              <a:lumOff val="0"/>
+            </a:schemeClr>
+          </a:solidFill>
+        </p:spPr>
+        <p:style>
+          <a:lnRef idx="2">
+            <a:schemeClr val="accent1">
+              <a:shade val="50000"/>
+            </a:schemeClr>
+          </a:lnRef>
+          <a:fillRef idx="1">
+            <a:schemeClr val="accent1"/>
+          </a:fillRef>
+          <a:effectRef idx="0">
+            <a:schemeClr val="accent1"/>
+          </a:effectRef>
+          <a:fontRef idx="minor">
+            <a:schemeClr val="lt1"/>
+          </a:fontRef>
+        </p:style>
+        <p:txBody>
+          <a:bodyPr wrap="square" lIns="91440" tIns="45720" rIns="91440" bIns="45720" numCol="1" vert="horz" anchor="ctr">
+            <a:noAutofit/>
+          </a:bodyPr>
+          <a:lstStyle/>
+          <a:p>
+            <a:pPr marL="0" indent="0" algn="ctr" hangingPunct="1">
+              <a:buFontTx/>
+              <a:buNone/>
+            </a:pPr>
+            <a:endParaRPr lang="ko-KR" altLang="en-US" sz="1800">
+              <a:latin typeface="맑은 고딕" charset="0"/>
+              <a:ea typeface="맑은 고딕" charset="0"/>
+            </a:endParaRPr>
+          </a:p>
+        </p:txBody>
+      </p:sp>
+      <p:sp>
+        <p:nvSpPr>
+          <p:cNvPr id="3" name="Rect 0"/>
+          <p:cNvSpPr txBox="1">
+            <a:spLocks/>
+          </p:cNvSpPr>
+          <p:nvPr/>
+        </p:nvSpPr>
+        <p:spPr>
+          <a:xfrm rot="0">
+            <a:off x="1894840" y="1903730"/>
+            <a:ext cx="2611120" cy="370840"/>
+          </a:xfrm>
+          <a:prstGeom prst="rect"/>
+          <a:noFill/>
+          <a:ln w="0" cap="flat" cmpd="sng">
+            <a:solidFill>
+              <a:srgbClr val="FFFFFF">
+                <a:alpha val="100000"/>
+              </a:srgbClr>
+            </a:solidFill>
+            <a:prstDash val="solid"/>
+          </a:ln>
+        </p:spPr>
+        <p:txBody>
+          <a:bodyPr wrap="none" lIns="89535" tIns="46355" rIns="89535" bIns="46355" numCol="1" vert="horz" anchor="t">
+            <a:spAutoFit/>
+          </a:bodyPr>
+          <a:lstStyle/>
+          <a:p>
+            <a:pPr marL="0" indent="0" algn="l" hangingPunct="1">
+              <a:buFontTx/>
+              <a:buNone/>
+            </a:pPr>
+            <a:r>
+              <a:rPr sz="1800">
+                <a:latin typeface="맑은 고딕" charset="0"/>
+                <a:ea typeface="맑은 고딕" charset="0"/>
+              </a:rPr>
+              <a:t>스마트팜 </a:t>
+            </a:r>
+            <a:r>
+              <a:rPr lang="ko-KR" sz="1800">
+                <a:latin typeface="맑은 고딕" charset="0"/>
+                <a:ea typeface="맑은 고딕" charset="0"/>
+              </a:rPr>
+              <a:t>AI 환경플랫폼</a:t>
+            </a:r>
+            <a:endParaRPr lang="ko-KR" altLang="en-US" sz="1800">
+              <a:latin typeface="맑은 고딕" charset="0"/>
+              <a:ea typeface="맑은 고딕" charset="0"/>
+            </a:endParaRPr>
+          </a:p>
+        </p:txBody>
+      </p:sp>
+      <p:sp>
+        <p:nvSpPr>
+          <p:cNvPr id="4" name="Rect 0"/>
+          <p:cNvSpPr txBox="1">
+            <a:spLocks/>
+          </p:cNvSpPr>
+          <p:nvPr/>
+        </p:nvSpPr>
+        <p:spPr>
+          <a:xfrm rot="0">
+            <a:off x="2082165" y="2429510"/>
+            <a:ext cx="2089150" cy="1477645"/>
+          </a:xfrm>
+          <a:prstGeom prst="rect"/>
+          <a:noFill/>
+          <a:ln w="0" cap="flat" cmpd="sng">
+            <a:solidFill>
+              <a:srgbClr val="FFFFFF">
+                <a:alpha val="100000"/>
+              </a:srgbClr>
+            </a:solidFill>
+            <a:prstDash/>
+          </a:ln>
+        </p:spPr>
+        <p:txBody>
+          <a:bodyPr wrap="none" lIns="89535" tIns="46355" rIns="89535" bIns="46355" vert="horz" anchor="t">
+            <a:spAutoFit/>
+          </a:bodyPr>
+          <a:lstStyle/>
+          <a:p>
+            <a:pPr marL="0" indent="0" algn="l" hangingPunct="1"/>
+            <a:r>
+              <a:rPr sz="1800">
+                <a:solidFill>
+                  <a:schemeClr val="bg1"/>
+                </a:solidFill>
+                <a:latin typeface="맑은 고딕" charset="0"/>
+                <a:ea typeface="맑은 고딕" charset="0"/>
+              </a:rPr>
+              <a:t>스마</a:t>
+            </a:r>
+            <a:r>
+              <a:rPr lang="ko-KR" sz="1800">
+                <a:solidFill>
+                  <a:schemeClr val="bg1"/>
+                </a:solidFill>
+                <a:latin typeface="맑은 고딕" charset="0"/>
+                <a:ea typeface="맑은 고딕" charset="0"/>
+              </a:rPr>
+              <a:t>트팜 대시보드</a:t>
+            </a:r>
+            <a:endParaRPr lang="ko-KR" altLang="en-US" sz="1800">
+              <a:solidFill>
+                <a:schemeClr val="bg1"/>
+              </a:solidFill>
+              <a:latin typeface="맑은 고딕" charset="0"/>
+              <a:ea typeface="맑은 고딕" charset="0"/>
+            </a:endParaRPr>
+          </a:p>
+          <a:p>
+            <a:pPr marL="0" indent="0" algn="l" hangingPunct="1"/>
+            <a:endParaRPr lang="ko-KR" altLang="en-US" sz="1800">
+              <a:solidFill>
+                <a:schemeClr val="bg1"/>
+              </a:solidFill>
+              <a:latin typeface="맑은 고딕" charset="0"/>
+              <a:ea typeface="맑은 고딕" charset="0"/>
+            </a:endParaRPr>
+          </a:p>
+          <a:p>
+            <a:pPr marL="0" indent="0" algn="l" hangingPunct="1"/>
+            <a:r>
+              <a:rPr lang="ko-KR" sz="1800">
+                <a:solidFill>
+                  <a:schemeClr val="bg1"/>
+                </a:solidFill>
+                <a:latin typeface="맑은 고딕" charset="0"/>
+                <a:ea typeface="맑은 고딕" charset="0"/>
+              </a:rPr>
+              <a:t>데이터 </a:t>
+            </a:r>
+            <a:r>
+              <a:rPr lang="ko-KR" sz="1800">
+                <a:solidFill>
+                  <a:schemeClr val="bg1"/>
+                </a:solidFill>
+                <a:latin typeface="맑은 고딕" charset="0"/>
+                <a:ea typeface="맑은 고딕" charset="0"/>
+              </a:rPr>
+              <a:t>분석</a:t>
+            </a:r>
+            <a:endParaRPr lang="ko-KR" altLang="en-US" sz="1800">
+              <a:solidFill>
+                <a:schemeClr val="bg1"/>
+              </a:solidFill>
+              <a:latin typeface="맑은 고딕" charset="0"/>
+              <a:ea typeface="맑은 고딕" charset="0"/>
+            </a:endParaRPr>
+          </a:p>
+          <a:p>
+            <a:pPr marL="0" indent="0" algn="l" hangingPunct="1"/>
+            <a:endParaRPr lang="ko-KR" altLang="en-US" sz="1800">
+              <a:solidFill>
+                <a:schemeClr val="bg1"/>
+              </a:solidFill>
+              <a:latin typeface="맑은 고딕" charset="0"/>
+              <a:ea typeface="맑은 고딕" charset="0"/>
+            </a:endParaRPr>
+          </a:p>
+          <a:p>
+            <a:pPr marL="0" indent="0" algn="l" hangingPunct="1"/>
+            <a:r>
+              <a:rPr lang="ko-KR" sz="1800">
+                <a:solidFill>
+                  <a:schemeClr val="bg1"/>
+                </a:solidFill>
+                <a:latin typeface="맑은 고딕" charset="0"/>
+                <a:ea typeface="맑은 고딕" charset="0"/>
+              </a:rPr>
+              <a:t>가격 </a:t>
+            </a:r>
+            <a:r>
+              <a:rPr lang="ko-KR" sz="1800">
+                <a:solidFill>
+                  <a:schemeClr val="bg1"/>
+                </a:solidFill>
+                <a:latin typeface="맑은 고딕" charset="0"/>
+                <a:ea typeface="맑은 고딕" charset="0"/>
+              </a:rPr>
+              <a:t>예측</a:t>
+            </a:r>
+            <a:endParaRPr lang="ko-KR" altLang="en-US" sz="1800">
+              <a:solidFill>
+                <a:schemeClr val="bg1"/>
+              </a:solidFill>
+              <a:latin typeface="맑은 고딕" charset="0"/>
+              <a:ea typeface="맑은 고딕" charset="0"/>
+            </a:endParaRPr>
+          </a:p>
+        </p:txBody>
+      </p:sp>
+      <p:sp>
+        <p:nvSpPr>
+          <p:cNvPr id="7" name="Rect 0"/>
+          <p:cNvSpPr txBox="1">
+            <a:spLocks/>
+          </p:cNvSpPr>
+          <p:nvPr/>
+        </p:nvSpPr>
+        <p:spPr>
+          <a:xfrm rot="0">
+            <a:off x="2490470" y="4443095"/>
+            <a:ext cx="2162175" cy="647065"/>
+          </a:xfrm>
+          <a:prstGeom prst="rect"/>
+          <a:noFill/>
+          <a:ln w="0" cap="flat" cmpd="sng">
+            <a:solidFill>
+              <a:srgbClr val="FFFFFF">
+                <a:alpha val="100000"/>
+              </a:srgbClr>
+            </a:solidFill>
+            <a:prstDash val="solid"/>
+          </a:ln>
+        </p:spPr>
+        <p:txBody>
+          <a:bodyPr wrap="square" lIns="89535" tIns="46355" rIns="89535" bIns="46355" numCol="1" vert="horz" anchor="t">
+            <a:spAutoFit/>
+          </a:bodyPr>
+          <a:lstStyle/>
+          <a:p>
+            <a:pPr marL="0" indent="0" algn="l" hangingPunct="1">
+              <a:buFontTx/>
+              <a:buNone/>
+            </a:pPr>
+            <a:r>
+              <a:rPr lang="ko-KR" sz="1800">
+                <a:solidFill>
+                  <a:schemeClr val="bg1"/>
+                </a:solidFill>
+                <a:latin typeface="맑은 고딕" charset="0"/>
+                <a:ea typeface="맑은 고딕" charset="0"/>
+              </a:rPr>
+              <a:t>왼쪽 </a:t>
+            </a:r>
+            <a:r>
+              <a:rPr lang="ko-KR" sz="1800">
+                <a:solidFill>
+                  <a:schemeClr val="bg1"/>
+                </a:solidFill>
+                <a:latin typeface="맑은 고딕" charset="0"/>
+                <a:ea typeface="맑은 고딕" charset="0"/>
+              </a:rPr>
+              <a:t>카테고리나 </a:t>
+            </a:r>
+            <a:endParaRPr lang="ko-KR" altLang="en-US" sz="1800">
+              <a:solidFill>
+                <a:schemeClr val="bg1"/>
+              </a:solidFill>
+              <a:latin typeface="맑은 고딕" charset="0"/>
+              <a:ea typeface="맑은 고딕" charset="0"/>
+            </a:endParaRPr>
+          </a:p>
+          <a:p>
+            <a:pPr marL="0" indent="0" algn="l" hangingPunct="1">
+              <a:buFontTx/>
+              <a:buNone/>
+            </a:pPr>
+            <a:r>
+              <a:rPr lang="ko-KR" sz="1800">
+                <a:solidFill>
+                  <a:schemeClr val="bg1"/>
+                </a:solidFill>
+                <a:latin typeface="맑은 고딕" charset="0"/>
+                <a:ea typeface="맑은 고딕" charset="0"/>
+              </a:rPr>
+              <a:t>슬라이드</a:t>
+            </a:r>
+            <a:r>
+              <a:rPr lang="ko-KR" sz="1800">
+                <a:solidFill>
+                  <a:schemeClr val="bg1"/>
+                </a:solidFill>
+                <a:latin typeface="맑은 고딕" charset="0"/>
+                <a:ea typeface="맑은 고딕" charset="0"/>
+              </a:rPr>
+              <a:t>메뉴 분류</a:t>
+            </a:r>
+            <a:endParaRPr lang="ko-KR" altLang="en-US" sz="1800">
+              <a:solidFill>
+                <a:schemeClr val="bg1"/>
+              </a:solidFill>
+              <a:latin typeface="맑은 고딕" charset="0"/>
+              <a:ea typeface="맑은 고딕" charset="0"/>
+            </a:endParaRPr>
+          </a:p>
+        </p:txBody>
+      </p:sp>
+      <p:cxnSp>
+        <p:nvCxnSpPr>
+          <p:cNvPr id="8" name="Rect 0"/>
+          <p:cNvCxnSpPr/>
+          <p:nvPr/>
+        </p:nvCxnSpPr>
+        <p:spPr>
+          <a:xfrm rot="0">
+            <a:off x="3088005" y="3931920"/>
+            <a:ext cx="7620" cy="476885"/>
+          </a:xfrm>
+          <a:prstGeom prst="straightConnector1"/>
+          <a:ln w="6350" cap="flat" cmpd="sng">
+            <a:prstDash/>
+            <a:tailEnd type="triangle" w="med" len="med"/>
+          </a:ln>
+        </p:spPr>
+        <p:style>
+          <a:lnRef idx="1">
+            <a:schemeClr val="dk1"/>
+          </a:lnRef>
+          <a:fillRef idx="0">
+            <a:schemeClr val="dk1"/>
+          </a:fillRef>
+          <a:effectRef idx="0">
+            <a:schemeClr val="dk1"/>
+          </a:effectRef>
+          <a:fontRef idx="minor">
+            <a:schemeClr val="tx1"/>
+          </a:fontRef>
+        </p:style>
+      </p:cxnSp>
+      <p:sp>
+        <p:nvSpPr>
+          <p:cNvPr id="9" name="Rect 0"/>
+          <p:cNvSpPr txBox="1">
+            <a:spLocks/>
+          </p:cNvSpPr>
+          <p:nvPr/>
+        </p:nvSpPr>
+        <p:spPr>
+          <a:xfrm rot="0">
+            <a:off x="5173980" y="1905635"/>
+            <a:ext cx="1175385" cy="370840"/>
+          </a:xfrm>
+          <a:prstGeom prst="rect"/>
+          <a:noFill/>
+          <a:ln w="0" cap="flat" cmpd="sng">
+            <a:solidFill>
+              <a:srgbClr val="FFFFFF">
+                <a:alpha val="100000"/>
+              </a:srgbClr>
+            </a:solidFill>
+            <a:prstDash val="solid"/>
+          </a:ln>
+        </p:spPr>
+        <p:txBody>
+          <a:bodyPr wrap="none" lIns="89535" tIns="46355" rIns="89535" bIns="46355" numCol="1" vert="horz" anchor="t">
+            <a:spAutoFit/>
+          </a:bodyPr>
+          <a:lstStyle/>
+          <a:p>
+            <a:pPr marL="0" indent="0" algn="l" hangingPunct="1">
+              <a:buFontTx/>
+              <a:buNone/>
+            </a:pPr>
+            <a:r>
+              <a:rPr sz="1800">
+                <a:latin typeface="맑은 고딕" charset="0"/>
+                <a:ea typeface="맑은 고딕" charset="0"/>
+              </a:rPr>
+              <a:t>가격</a:t>
+            </a:r>
+            <a:r>
+              <a:rPr lang="ko-KR" sz="1800">
+                <a:latin typeface="맑은 고딕" charset="0"/>
+                <a:ea typeface="맑은 고딕" charset="0"/>
+              </a:rPr>
+              <a:t> 예측</a:t>
+            </a:r>
+            <a:endParaRPr lang="ko-KR" altLang="en-US" sz="1800">
+              <a:latin typeface="맑은 고딕" charset="0"/>
+              <a:ea typeface="맑은 고딕" charset="0"/>
+            </a:endParaRPr>
+          </a:p>
+        </p:txBody>
+      </p:sp>
+      <p:sp>
+        <p:nvSpPr>
+          <p:cNvPr id="10" name="Rect 0"/>
+          <p:cNvSpPr txBox="1">
+            <a:spLocks/>
+          </p:cNvSpPr>
+          <p:nvPr/>
+        </p:nvSpPr>
+        <p:spPr>
+          <a:xfrm rot="0">
+            <a:off x="4622165" y="2428875"/>
+            <a:ext cx="3990340" cy="463550"/>
+          </a:xfrm>
+          <a:prstGeom prst="rect"/>
+          <a:noFill/>
+          <a:ln w="0" cap="flat" cmpd="sng">
+            <a:solidFill>
+              <a:srgbClr val="FFFFFF">
+                <a:alpha val="100000"/>
+              </a:srgbClr>
+            </a:solidFill>
+            <a:prstDash val="solid"/>
+          </a:ln>
+        </p:spPr>
+        <p:txBody>
+          <a:bodyPr wrap="square" lIns="89535" tIns="46355" rIns="89535" bIns="46355" numCol="1" vert="horz" anchor="t">
+            <a:spAutoFit/>
+          </a:bodyPr>
+          <a:lstStyle/>
+          <a:p>
+            <a:pPr marL="0" indent="0" algn="l" hangingPunct="1">
+              <a:buFontTx/>
+              <a:buNone/>
+            </a:pPr>
+            <a:r>
+              <a:rPr sz="1200" i="0" b="0">
+                <a:solidFill>
+                  <a:schemeClr val="bg1"/>
+                </a:solidFill>
+                <a:latin typeface="Segoe UI Emoji" charset="0"/>
+                <a:ea typeface="ui-sans-serif" charset="0"/>
+              </a:rPr>
+              <a:t>도/소매가 분석과 날씨 데이터를 연동하여 정확한 가격예</a:t>
+            </a:r>
+            <a:r>
+              <a:rPr lang="ko-KR" sz="1200" i="0" b="0">
+                <a:solidFill>
+                  <a:schemeClr val="bg1"/>
+                </a:solidFill>
+                <a:latin typeface="Segoe UI Emoji" charset="0"/>
+                <a:ea typeface="ui-sans-serif" charset="0"/>
+              </a:rPr>
+              <a:t>측하기!</a:t>
+            </a:r>
+            <a:endParaRPr lang="ko-KR" altLang="en-US" sz="1200" i="0" b="0">
+              <a:solidFill>
+                <a:schemeClr val="bg1"/>
+              </a:solidFill>
+              <a:latin typeface="Segoe UI Emoji" charset="0"/>
+              <a:ea typeface="ui-sans-serif" charset="0"/>
+            </a:endParaRPr>
+          </a:p>
+        </p:txBody>
+      </p:sp>
+      <p:sp>
+        <p:nvSpPr>
+          <p:cNvPr id="11" name="도형 39"/>
+          <p:cNvSpPr>
+            <a:spLocks/>
+          </p:cNvSpPr>
+          <p:nvPr/>
+        </p:nvSpPr>
+        <p:spPr>
+          <a:xfrm rot="0">
+            <a:off x="8801100" y="1904365"/>
+            <a:ext cx="1670050" cy="485140"/>
+          </a:xfrm>
+          <a:prstGeom prst="rect"/>
+          <a:solidFill>
+            <a:schemeClr val="tx1"/>
+          </a:solidFill>
+        </p:spPr>
+        <p:style>
+          <a:lnRef idx="2">
+            <a:schemeClr val="accent1">
+              <a:shade val="50000"/>
+            </a:schemeClr>
+          </a:lnRef>
+          <a:fillRef idx="1">
+            <a:schemeClr val="accent1"/>
+          </a:fillRef>
+          <a:effectRef idx="0">
+            <a:schemeClr val="accent1"/>
+          </a:effectRef>
+          <a:fontRef idx="minor">
+            <a:schemeClr val="lt1"/>
+          </a:fontRef>
+        </p:style>
+        <p:txBody>
+          <a:bodyPr wrap="square" lIns="91440" tIns="45720" rIns="91440" bIns="45720" numCol="1" vert="horz" anchor="ctr">
+            <a:noAutofit/>
+          </a:bodyPr>
+          <a:lstStyle/>
+          <a:p>
+            <a:pPr marL="0" indent="0" algn="ctr" hangingPunct="1">
+              <a:buFontTx/>
+              <a:buNone/>
+            </a:pPr>
+            <a:r>
+              <a:rPr lang="ko-KR" sz="1800">
+                <a:latin typeface="맑은 고딕" charset="0"/>
+                <a:ea typeface="맑은 고딕" charset="0"/>
+              </a:rPr>
+              <a:t>가격예측실행버튼</a:t>
+            </a:r>
+            <a:endParaRPr lang="ko-KR" altLang="en-US" sz="1800">
+              <a:latin typeface="맑은 고딕" charset="0"/>
+              <a:ea typeface="맑은 고딕" charset="0"/>
+            </a:endParaRPr>
+          </a:p>
+        </p:txBody>
+      </p:sp>
+      <p:sp>
+        <p:nvSpPr>
+          <p:cNvPr id="14" name="도형 3"/>
+          <p:cNvSpPr>
+            <a:spLocks/>
+          </p:cNvSpPr>
+          <p:nvPr/>
+        </p:nvSpPr>
+        <p:spPr>
+          <a:xfrm rot="0">
+            <a:off x="5381625" y="3110230"/>
+            <a:ext cx="4078605" cy="1235075"/>
+          </a:xfrm>
+          <a:prstGeom prst="rect"/>
+          <a:solidFill>
+            <a:schemeClr val="bg1"/>
+          </a:solidFill>
+        </p:spPr>
+        <p:style>
+          <a:lnRef idx="2">
+            <a:schemeClr val="accent1">
+              <a:shade val="50000"/>
+            </a:schemeClr>
+          </a:lnRef>
+          <a:fillRef idx="1">
+            <a:schemeClr val="accent1"/>
+          </a:fillRef>
+          <a:effectRef idx="0">
+            <a:schemeClr val="accent1"/>
+          </a:effectRef>
+          <a:fontRef idx="minor">
+            <a:schemeClr val="lt1"/>
+          </a:fontRef>
+        </p:style>
+        <p:txBody>
+          <a:bodyPr wrap="square" lIns="91440" tIns="45720" rIns="91440" bIns="45720" vert="horz" anchor="ctr">
+            <a:noAutofit/>
+          </a:bodyPr>
+          <a:lstStyle/>
+          <a:p>
+            <a:pPr marL="0" indent="0" algn="ctr" hangingPunct="1"/>
+            <a:r>
+              <a:rPr lang="ko-KR" sz="1800">
                 <a:solidFill>
                   <a:schemeClr val="tx1"/>
                 </a:solidFill>
                 <a:latin typeface="맑은 고딕" charset="0"/>
                 <a:ea typeface="맑은 고딕" charset="0"/>
               </a:rPr>
-              <a:t>도/</a:t>
-            </a:r>
-            <a:r>
-              <a:rPr sz="1800">
+              <a:t>날씨데이터</a:t>
+            </a:r>
+            <a:r>
+              <a:rPr lang="ko-KR" sz="1800">
                 <a:solidFill>
                   <a:schemeClr val="tx1"/>
                 </a:solidFill>
                 <a:latin typeface="맑은 고딕" charset="0"/>
                 <a:ea typeface="맑은 고딕" charset="0"/>
               </a:rPr>
-              <a:t>소매가 시</a:t>
+              <a:t>들의 </a:t>
             </a:r>
             <a:r>
               <a:rPr lang="ko-KR" sz="1800">
@@ -7116,7 +8324,7 @@
                 <a:latin typeface="맑은 고딕" charset="0"/>
                 <a:ea typeface="맑은 고딕" charset="0"/>
               </a:rPr>
-              <a:t>기별 </a:t>
+              <a:t>모아서 차례대로 나오게끔 1</a:t>
             </a:r>
             <a:r>
               <a:rPr lang="ko-KR" sz="1800">
@@ -7126,7 +8334,7 @@
                 <a:latin typeface="맑은 고딕" charset="0"/>
                 <a:ea typeface="맑은 고딕" charset="0"/>
               </a:rPr>
-              <a:t>분</a:t>
+              <a:t>s</a:t>
             </a:r>
             <a:r>
               <a:rPr lang="ko-KR" sz="1800">
@@ -7136,7 +8344,7 @@
                 <a:latin typeface="맑은 고딕" charset="0"/>
                 <a:ea typeface="맑은 고딕" charset="0"/>
               </a:rPr>
-              <a:t>석 </a:t>
+              <a:t>t/2</a:t>
             </a:r>
             <a:r>
               <a:rPr lang="ko-KR" sz="1800">
@@ -7146,7 +8354,67 @@
                 <a:latin typeface="맑은 고딕" charset="0"/>
                 <a:ea typeface="맑은 고딕" charset="0"/>
               </a:rPr>
-              <a:t>/ 최적 판매 </a:t>
+              <a:t>n</a:t>
+            </a:r>
+            <a:r>
+              <a:rPr lang="ko-KR" sz="1800">
+                <a:solidFill>
+                  <a:schemeClr val="tx1"/>
+                </a:solidFill>
+                <a:latin typeface="맑은 고딕" charset="0"/>
+                <a:ea typeface="맑은 고딕" charset="0"/>
+              </a:rPr>
+              <a:t>d/3</a:t>
+            </a:r>
+            <a:r>
+              <a:rPr lang="ko-KR" sz="1800">
+                <a:solidFill>
+                  <a:schemeClr val="tx1"/>
+                </a:solidFill>
+                <a:latin typeface="맑은 고딕" charset="0"/>
+                <a:ea typeface="맑은 고딕" charset="0"/>
+              </a:rPr>
+              <a:t>r</a:t>
+            </a:r>
+            <a:r>
+              <a:rPr lang="ko-KR" sz="1800">
+                <a:solidFill>
+                  <a:schemeClr val="tx1"/>
+                </a:solidFill>
+                <a:latin typeface="맑은 고딕" charset="0"/>
+                <a:ea typeface="맑은 고딕" charset="0"/>
+              </a:rPr>
+              <a:t>d/</a:t>
+            </a:r>
+            <a:r>
+              <a:rPr lang="ko-KR" sz="1800">
+                <a:solidFill>
+                  <a:schemeClr val="tx1"/>
+                </a:solidFill>
+                <a:latin typeface="맑은 고딕" charset="0"/>
+                <a:ea typeface="맑은 고딕" charset="0"/>
+              </a:rPr>
+              <a:t>4</a:t>
+            </a:r>
+            <a:r>
+              <a:rPr lang="ko-KR" sz="1800" baseline="30000">
+                <a:solidFill>
+                  <a:schemeClr val="tx1"/>
+                </a:solidFill>
+                <a:latin typeface="맑은 고딕" charset="0"/>
+                <a:ea typeface="맑은 고딕" charset="0"/>
+              </a:rPr>
+              <a:t>th</a:t>
+            </a:r>
+            <a:r>
+              <a:rPr lang="ko-KR" sz="1800">
+                <a:solidFill>
+                  <a:schemeClr val="tx1"/>
+                </a:solidFill>
+                <a:latin typeface="맑은 고딕" charset="0"/>
+                <a:ea typeface="맑은 고딕" charset="0"/>
+              </a:rPr>
+              <a:t> 순으로!</a:t>
             </a:r>
             <a:endParaRPr lang="ko-KR" altLang="en-US" sz="1800">
               <a:solidFill>
@@ -7156,17 +8424,61 @@
               <a:ea typeface="맑은 고딕" charset="0"/>
             </a:endParaRPr>
           </a:p>
-          <a:p>
-            <a:pPr marL="0" indent="0" algn="ctr" hangingPunct="1"/>
-            <a:r>
-              <a:rPr lang="ko-KR" sz="1800">
+        </p:txBody>
+      </p:sp>
+      <p:sp>
+        <p:nvSpPr>
+          <p:cNvPr id="15" name="도형 5"/>
+          <p:cNvSpPr>
+            <a:spLocks/>
+          </p:cNvSpPr>
+          <p:nvPr/>
+        </p:nvSpPr>
+        <p:spPr>
+          <a:xfrm>
+            <a:off x="5372100" y="4443095"/>
+            <a:ext cx="4128770" cy="1353820"/>
+          </a:xfrm>
+          <a:prstGeom prst="rect"/>
+          <a:solidFill>
+            <a:schemeClr val="bg1"/>
+          </a:solidFill>
+        </p:spPr>
+        <p:style>
+          <a:lnRef idx="2">
+            <a:schemeClr val="accent1">
+              <a:shade val="50000"/>
+            </a:schemeClr>
+          </a:lnRef>
+          <a:fillRef idx="1">
+            <a:schemeClr val="accent1"/>
+          </a:fillRef>
+          <a:effectRef idx="0">
+            <a:schemeClr val="accent1"/>
+          </a:effectRef>
+          <a:fontRef idx="minor">
+            <a:schemeClr val="lt1"/>
+          </a:fontRef>
+        </p:style>
+        <p:txBody>
+          <a:bodyPr wrap="square" lIns="91440" tIns="45720" rIns="91440" bIns="45720" numCol="1" vert="horz" anchor="ctr">
+            <a:noAutofit/>
+          </a:bodyPr>
+          <a:lstStyle/>
+          <a:p>
+            <a:pPr marL="0" indent="0" algn="ctr" hangingPunct="1">
+              <a:buFontTx/>
+              <a:buNone/>
+            </a:pPr>
+            <a:r>
+              <a:rPr sz="1800">
                 <a:solidFill>
                   <a:schemeClr val="tx1"/>
                 </a:solidFill>
                 <a:latin typeface="맑은 고딕" charset="0"/>
                 <a:ea typeface="맑은 고딕" charset="0"/>
               </a:rPr>
-              <a:t>시기 알림</a:t>
+              <a:t>도/소매가 시</a:t>
             </a:r>
             <a:r>
               <a:rPr lang="ko-KR" sz="1800">
@@ -7176,22 +8488,416 @@
                 <a:latin typeface="맑은 고딕" charset="0"/>
                 <a:ea typeface="맑은 고딕" charset="0"/>
               </a:rPr>
-              <a:t>데이터들이 같이</a:t>
-            </a:r>
-            <a:r>
-              <a:rPr lang="ko-KR" sz="1800">
-                <a:solidFill>
-                  <a:schemeClr val="tx1"/>
-                </a:solidFill>
-                <a:latin typeface="맑은 고딕" charset="0"/>
-                <a:ea typeface="맑은 고딕" charset="0"/>
-              </a:rPr>
-              <a:t>나오게끔!</a:t>
+              <a:t>기별 분석 / 최적 판매 </a:t>
             </a:r>
             <a:endParaRPr lang="ko-KR" altLang="en-US" sz="1800">
               <a:solidFill>
                 <a:schemeClr val="tx1"/>
               </a:solidFill>
+              <a:latin typeface="맑은 고딕" charset="0"/>
+              <a:ea typeface="맑은 고딕" charset="0"/>
+            </a:endParaRPr>
+          </a:p>
+          <a:p>
+            <a:pPr marL="0" indent="0" algn="ctr" hangingPunct="1">
+              <a:buFontTx/>
+              <a:buNone/>
+            </a:pPr>
+            <a:r>
+              <a:rPr lang="ko-KR" sz="1800">
+                <a:solidFill>
+                  <a:schemeClr val="tx1"/>
+                </a:solidFill>
+                <a:latin typeface="맑은 고딕" charset="0"/>
+                <a:ea typeface="맑은 고딕" charset="0"/>
+              </a:rPr>
+              <a:t>시기 알림데이터들이 같이나오게!</a:t>
+            </a:r>
+            <a:endParaRPr lang="ko-KR" altLang="en-US" sz="1800">
+              <a:solidFill>
+                <a:schemeClr val="tx1"/>
+              </a:solidFill>
+              <a:latin typeface="맑은 고딕" charset="0"/>
+              <a:ea typeface="맑은 고딕" charset="0"/>
+            </a:endParaRPr>
+          </a:p>
+        </p:txBody>
+      </p:sp>
+      <p:sp>
+        <p:nvSpPr>
+          <p:cNvPr id="16" name="도형 43"/>
+          <p:cNvSpPr>
+            <a:spLocks/>
+          </p:cNvSpPr>
+          <p:nvPr/>
+        </p:nvSpPr>
+        <p:spPr>
+          <a:xfrm rot="0">
+            <a:off x="1115695" y="1026795"/>
+            <a:ext cx="9401810" cy="800735"/>
+          </a:xfrm>
+          <a:prstGeom prst="rect"/>
+          <a:solidFill>
+            <a:schemeClr val="bg1"/>
+          </a:solidFill>
+          <a:ln w="12700" cap="flat" cmpd="sng">
+            <a:solidFill>
+              <a:schemeClr val="tx1">
+                <a:alpha val="100000"/>
+              </a:schemeClr>
+            </a:solidFill>
+            <a:prstDash val="solid"/>
+          </a:ln>
+        </p:spPr>
+        <p:style>
+          <a:lnRef idx="2">
+            <a:schemeClr val="accent1">
+              <a:shade val="50000"/>
+            </a:schemeClr>
+          </a:lnRef>
+          <a:fillRef idx="1">
+            <a:schemeClr val="accent1"/>
+          </a:fillRef>
+          <a:effectRef idx="0">
+            <a:schemeClr val="accent1"/>
+          </a:effectRef>
+          <a:fontRef idx="minor">
+            <a:schemeClr val="lt1"/>
+          </a:fontRef>
+        </p:style>
+        <p:txBody>
+          <a:bodyPr wrap="square" lIns="91440" tIns="45720" rIns="91440" bIns="45720" numCol="1" vert="horz" anchor="ctr">
+            <a:noAutofit/>
+          </a:bodyPr>
+          <a:lstStyle/>
+          <a:p>
+            <a:pPr marL="0" indent="0" algn="ctr" hangingPunct="1">
+              <a:buFontTx/>
+              <a:buNone/>
+            </a:pPr>
+            <a:endParaRPr lang="ko-KR" altLang="en-US" sz="1800">
+              <a:latin typeface="맑은 고딕" charset="0"/>
+              <a:ea typeface="맑은 고딕" charset="0"/>
+            </a:endParaRPr>
+          </a:p>
+        </p:txBody>
+      </p:sp>
+      <p:sp>
+        <p:nvSpPr>
+          <p:cNvPr id="17" name="도형 44"/>
+          <p:cNvSpPr>
+            <a:spLocks/>
+          </p:cNvSpPr>
+          <p:nvPr/>
+        </p:nvSpPr>
+        <p:spPr>
+          <a:xfrm rot="0">
+            <a:off x="6802755" y="1253490"/>
+            <a:ext cx="2204085" cy="446405"/>
+          </a:xfrm>
+          <a:prstGeom prst="rect"/>
+        </p:spPr>
+        <p:style>
+          <a:lnRef idx="2">
+            <a:schemeClr val="accent1">
+              <a:shade val="50000"/>
+            </a:schemeClr>
+          </a:lnRef>
+          <a:fillRef idx="1">
+            <a:schemeClr val="accent1"/>
+          </a:fillRef>
+          <a:effectRef idx="0">
+            <a:schemeClr val="accent1"/>
+          </a:effectRef>
+          <a:fontRef idx="minor">
+            <a:schemeClr val="lt1"/>
+          </a:fontRef>
+        </p:style>
+        <p:txBody>
+          <a:bodyPr wrap="square" lIns="91440" tIns="45720" rIns="91440" bIns="45720" numCol="1" vert="horz" anchor="ctr">
+            <a:noAutofit/>
+          </a:bodyPr>
+          <a:lstStyle/>
+          <a:p>
+            <a:pPr marL="0" indent="0" algn="ctr" hangingPunct="1">
+              <a:buFontTx/>
+              <a:buNone/>
+            </a:pPr>
+            <a:r>
+              <a:rPr lang="ko-KR" sz="1800">
+                <a:latin typeface="맑은 고딕" charset="0"/>
+                <a:ea typeface="맑은 고딕" charset="0"/>
+              </a:rPr>
+              <a:t>Snss님 반갑습니다</a:t>
+            </a:r>
+            <a:endParaRPr lang="ko-KR" altLang="en-US" sz="1800">
+              <a:latin typeface="맑은 고딕" charset="0"/>
+              <a:ea typeface="맑은 고딕" charset="0"/>
+            </a:endParaRPr>
+          </a:p>
+        </p:txBody>
+      </p:sp>
+      <p:sp>
+        <p:nvSpPr>
+          <p:cNvPr id="18" name="도형 45"/>
+          <p:cNvSpPr>
+            <a:spLocks/>
+          </p:cNvSpPr>
+          <p:nvPr/>
+        </p:nvSpPr>
+        <p:spPr>
+          <a:xfrm rot="0">
+            <a:off x="9133205" y="1233805"/>
+            <a:ext cx="1147445" cy="466090"/>
+          </a:xfrm>
+          <a:prstGeom prst="rect"/>
+          <a:solidFill>
+            <a:schemeClr val="tx1"/>
+          </a:solidFill>
+        </p:spPr>
+        <p:style>
+          <a:lnRef idx="2">
+            <a:schemeClr val="accent1">
+              <a:shade val="50000"/>
+            </a:schemeClr>
+          </a:lnRef>
+          <a:fillRef idx="1">
+            <a:schemeClr val="accent1"/>
+          </a:fillRef>
+          <a:effectRef idx="0">
+            <a:schemeClr val="accent1"/>
+          </a:effectRef>
+          <a:fontRef idx="minor">
+            <a:schemeClr val="lt1"/>
+          </a:fontRef>
+        </p:style>
+        <p:txBody>
+          <a:bodyPr wrap="square" lIns="91440" tIns="45720" rIns="91440" bIns="45720" numCol="1" vert="horz" anchor="ctr">
+            <a:noAutofit/>
+          </a:bodyPr>
+          <a:lstStyle/>
+          <a:p>
+            <a:pPr marL="0" indent="0" algn="ctr" hangingPunct="1">
+              <a:buFontTx/>
+              <a:buNone/>
+            </a:pPr>
+            <a:r>
+              <a:rPr sz="1800">
+                <a:latin typeface="맑은 고딕" charset="0"/>
+                <a:ea typeface="맑은 고딕" charset="0"/>
+              </a:rPr>
+              <a:t>로그아웃</a:t>
+            </a:r>
+            <a:endParaRPr lang="ko-KR" altLang="en-US" sz="1800">
+              <a:latin typeface="맑은 고딕" charset="0"/>
+              <a:ea typeface="맑은 고딕" charset="0"/>
+            </a:endParaRPr>
+          </a:p>
+        </p:txBody>
+      </p:sp>
+      <p:sp>
+        <p:nvSpPr>
+          <p:cNvPr id="19" name="도형 46"/>
+          <p:cNvSpPr>
+            <a:spLocks/>
+          </p:cNvSpPr>
+          <p:nvPr/>
+        </p:nvSpPr>
+        <p:spPr>
+          <a:xfrm rot="0">
+            <a:off x="1273810" y="1194435"/>
+            <a:ext cx="1067435" cy="544830"/>
+          </a:xfrm>
+          <a:prstGeom prst="rect"/>
+          <a:solidFill>
+            <a:schemeClr val="tx1"/>
+          </a:solidFill>
+        </p:spPr>
+        <p:style>
+          <a:lnRef idx="2">
+            <a:schemeClr val="accent1">
+              <a:shade val="50000"/>
+            </a:schemeClr>
+          </a:lnRef>
+          <a:fillRef idx="1">
+            <a:schemeClr val="accent1"/>
+          </a:fillRef>
+          <a:effectRef idx="0">
+            <a:schemeClr val="accent1"/>
+          </a:effectRef>
+          <a:fontRef idx="minor">
+            <a:schemeClr val="lt1"/>
+          </a:fontRef>
+        </p:style>
+        <p:txBody>
+          <a:bodyPr wrap="square" lIns="91440" tIns="45720" rIns="91440" bIns="45720" numCol="1" vert="horz" anchor="ctr">
+            <a:noAutofit/>
+          </a:bodyPr>
+          <a:lstStyle/>
+          <a:p>
+            <a:pPr marL="0" indent="0" algn="ctr" hangingPunct="1">
+              <a:buFontTx/>
+              <a:buNone/>
+            </a:pPr>
+            <a:r>
+              <a:rPr lang="ko-KR" sz="1800">
+                <a:latin typeface="맑은 고딕" charset="0"/>
+                <a:ea typeface="맑은 고딕" charset="0"/>
+              </a:rPr>
+              <a:t>Header logo</a:t>
+            </a:r>
+            <a:endParaRPr lang="ko-KR" altLang="en-US" sz="1800">
+              <a:latin typeface="맑은 고딕" charset="0"/>
+              <a:ea typeface="맑은 고딕" charset="0"/>
+            </a:endParaRPr>
+          </a:p>
+        </p:txBody>
+      </p:sp>
+      <p:sp>
+        <p:nvSpPr>
+          <p:cNvPr id="20" name="텍스트 상자 47"/>
+          <p:cNvSpPr txBox="1">
+            <a:spLocks/>
+          </p:cNvSpPr>
+          <p:nvPr/>
+        </p:nvSpPr>
+        <p:spPr>
+          <a:xfrm rot="0">
+            <a:off x="2586990" y="1244600"/>
+            <a:ext cx="1094740" cy="370840"/>
+          </a:xfrm>
+          <a:prstGeom prst="rect"/>
+          <a:noFill/>
+          <a:ln w="0" cap="flat" cmpd="sng">
+            <a:solidFill>
+              <a:srgbClr val="FFFFFF">
+                <a:alpha val="100000"/>
+              </a:srgbClr>
+            </a:solidFill>
+            <a:prstDash val="solid"/>
+          </a:ln>
+        </p:spPr>
+        <p:txBody>
+          <a:bodyPr wrap="none" lIns="89535" tIns="46355" rIns="89535" bIns="46355" numCol="1" vert="horz" anchor="t">
+            <a:spAutoFit/>
+          </a:bodyPr>
+          <a:lstStyle/>
+          <a:p>
+            <a:pPr marL="0" indent="0" algn="l" hangingPunct="1">
+              <a:buFontTx/>
+              <a:buNone/>
+            </a:pPr>
+            <a:r>
+              <a:rPr lang="ko-KR" sz="1800">
+                <a:latin typeface="맑은 고딕" charset="0"/>
+                <a:ea typeface="맑은 고딕" charset="0"/>
+              </a:rPr>
+              <a:t>대시보드</a:t>
+            </a:r>
+            <a:endParaRPr lang="ko-KR" altLang="en-US" sz="1800">
+              <a:latin typeface="맑은 고딕" charset="0"/>
+              <a:ea typeface="맑은 고딕" charset="0"/>
+            </a:endParaRPr>
+          </a:p>
+        </p:txBody>
+      </p:sp>
+      <p:sp>
+        <p:nvSpPr>
+          <p:cNvPr id="21" name="텍스트 상자 48"/>
+          <p:cNvSpPr txBox="1">
+            <a:spLocks/>
+          </p:cNvSpPr>
+          <p:nvPr/>
+        </p:nvSpPr>
+        <p:spPr>
+          <a:xfrm rot="0">
+            <a:off x="3685540" y="1256665"/>
+            <a:ext cx="1403985" cy="370840"/>
+          </a:xfrm>
+          <a:prstGeom prst="rect"/>
+          <a:noFill/>
+          <a:ln w="0" cap="flat" cmpd="sng">
+            <a:solidFill>
+              <a:srgbClr val="FFFFFF">
+                <a:alpha val="100000"/>
+              </a:srgbClr>
+            </a:solidFill>
+            <a:prstDash val="solid"/>
+          </a:ln>
+        </p:spPr>
+        <p:txBody>
+          <a:bodyPr wrap="none" lIns="89535" tIns="46355" rIns="89535" bIns="46355" numCol="1" vert="horz" anchor="t">
+            <a:spAutoFit/>
+          </a:bodyPr>
+          <a:lstStyle/>
+          <a:p>
+            <a:pPr marL="0" indent="0" algn="l" hangingPunct="1">
+              <a:buFontTx/>
+              <a:buNone/>
+            </a:pPr>
+            <a:r>
+              <a:rPr lang="ko-KR" sz="1800">
+                <a:latin typeface="맑은 고딕" charset="0"/>
+                <a:ea typeface="맑은 고딕" charset="0"/>
+              </a:rPr>
+              <a:t>데이터 분석</a:t>
+            </a:r>
+            <a:endParaRPr lang="ko-KR" altLang="en-US" sz="1800">
+              <a:latin typeface="맑은 고딕" charset="0"/>
+              <a:ea typeface="맑은 고딕" charset="0"/>
+            </a:endParaRPr>
+          </a:p>
+        </p:txBody>
+      </p:sp>
+      <p:sp>
+        <p:nvSpPr>
+          <p:cNvPr id="22" name="텍스트 상자 49"/>
+          <p:cNvSpPr txBox="1">
+            <a:spLocks/>
+          </p:cNvSpPr>
+          <p:nvPr/>
+        </p:nvSpPr>
+        <p:spPr>
+          <a:xfrm rot="0">
+            <a:off x="5060950" y="1239520"/>
+            <a:ext cx="1175385" cy="370840"/>
+          </a:xfrm>
+          <a:prstGeom prst="rect"/>
+          <a:noFill/>
+          <a:ln w="0" cap="flat" cmpd="sng">
+            <a:solidFill>
+              <a:srgbClr val="FFFFFF">
+                <a:alpha val="100000"/>
+              </a:srgbClr>
+            </a:solidFill>
+            <a:prstDash val="solid"/>
+          </a:ln>
+        </p:spPr>
+        <p:txBody>
+          <a:bodyPr wrap="none" lIns="89535" tIns="46355" rIns="89535" bIns="46355" numCol="1" vert="horz" anchor="t">
+            <a:spAutoFit/>
+          </a:bodyPr>
+          <a:lstStyle/>
+          <a:p>
+            <a:pPr marL="0" indent="0" algn="l" hangingPunct="1">
+              <a:buFontTx/>
+              <a:buNone/>
+            </a:pPr>
+            <a:r>
+              <a:rPr sz="1800">
+                <a:latin typeface="맑은 고딕" charset="0"/>
+                <a:ea typeface="맑은 고딕" charset="0"/>
+              </a:rPr>
+              <a:t>가격</a:t>
+            </a:r>
+            <a:r>
+              <a:rPr lang="ko-KR" sz="1800">
+                <a:latin typeface="맑은 고딕" charset="0"/>
+                <a:ea typeface="맑은 고딕" charset="0"/>
+              </a:rPr>
+              <a:t> 예측</a:t>
+            </a:r>
+            <a:endParaRPr lang="ko-KR" altLang="en-US" sz="1800">
               <a:latin typeface="맑은 고딕" charset="0"/>
               <a:ea typeface="맑은 고딕" charset="0"/>
             </a:endParaRPr>

--- a/1st_document/화면설계서.pptx
+++ b/1st_document/화면설계서.pptx
@@ -2,7 +2,7 @@
 <file path=ppt/presentation.xml><?xml version="1.0" encoding="utf-8"?>
 <p:presentation xmlns:a="http://schemas.openxmlformats.org/drawingml/2006/main" xmlns:r="http://schemas.openxmlformats.org/officeDocument/2006/relationships" xmlns:p="http://schemas.openxmlformats.org/presentationml/2006/main" xmlns:p14="http://schemas.microsoft.com/office/powerpoint/2010/main" saveSubsetFonts="1">
   <p:sldMasterIdLst>
-    <p:sldMasterId id="2147483793" r:id="rId13"/>
+    <p:sldMasterId id="2147483794" r:id="rId13"/>
   </p:sldMasterIdLst>
   <p:notesMasterIdLst>
     <p:notesMasterId r:id="rId17"/>
@@ -8207,8 +8207,8 @@
         </p:nvSpPr>
         <p:spPr>
           <a:xfrm rot="0">
-            <a:off x="8801100" y="1904365"/>
-            <a:ext cx="1670050" cy="485140"/>
+            <a:off x="8801100" y="1943735"/>
+            <a:ext cx="1670685" cy="485775"/>
           </a:xfrm>
           <a:prstGeom prst="rect"/>
           <a:solidFill>

--- a/1st_document/화면설계서.pptx
+++ b/1st_document/화면설계서.pptx
@@ -2,7 +2,7 @@
 <file path=ppt/presentation.xml><?xml version="1.0" encoding="utf-8"?>
 <p:presentation xmlns:a="http://schemas.openxmlformats.org/drawingml/2006/main" xmlns:r="http://schemas.openxmlformats.org/officeDocument/2006/relationships" xmlns:p="http://schemas.openxmlformats.org/presentationml/2006/main" xmlns:p14="http://schemas.microsoft.com/office/powerpoint/2010/main" saveSubsetFonts="1">
   <p:sldMasterIdLst>
-    <p:sldMasterId id="2147483794" r:id="rId13"/>
+    <p:sldMasterId id="2147483802" r:id="rId13"/>
   </p:sldMasterIdLst>
   <p:notesMasterIdLst>
     <p:notesMasterId r:id="rId17"/>
@@ -12,10 +12,12 @@
   </p:handoutMasterIdLst>
   <p:sldIdLst>
     <p:sldId id="256" r:id="rId19"/>
+    <p:sldId id="262" r:id="rId20"/>
     <p:sldId id="260" r:id="rId21"/>
-    <p:sldId id="257" r:id="rId23"/>
-    <p:sldId id="258" r:id="rId24"/>
-    <p:sldId id="259" r:id="rId25"/>
+    <p:sldId id="257" r:id="rId22"/>
+    <p:sldId id="258" r:id="rId23"/>
+    <p:sldId id="259" r:id="rId24"/>
+    <p:sldId id="261" r:id="rId25"/>
   </p:sldIdLst>
   <p:sldSz cx="12192000" cy="6858000"/>
   <p:notesSz cx="6858000" cy="9144000"/>
@@ -721,7 +723,7 @@
 </p:notes>
 </file>
 
-<file path=ppt/notesSlides/notesSlide2.xml><?xml version="1.0" encoding="utf-8"?>
+<file path=ppt/notesSlides/notesSlide3.xml><?xml version="1.0" encoding="utf-8"?>
 <p:notes xmlns:a="http://schemas.openxmlformats.org/drawingml/2006/main" xmlns:r="http://schemas.openxmlformats.org/officeDocument/2006/relationships" xmlns:p="http://schemas.openxmlformats.org/presentationml/2006/main">
   <p:cSld>
     <p:spTree>
@@ -3783,6 +3785,68 @@
           </a:p>
         </p:txBody>
       </p:sp>
+      <p:sp>
+        <p:nvSpPr>
+          <p:cNvPr id="3" name="텍스트 상자 1"/>
+          <p:cNvSpPr txBox="1">
+            <a:spLocks/>
+          </p:cNvSpPr>
+          <p:nvPr/>
+        </p:nvSpPr>
+        <p:spPr>
+          <a:xfrm rot="0">
+            <a:off x="4265295" y="3860165"/>
+            <a:ext cx="1373505" cy="370205"/>
+          </a:xfrm>
+          <a:prstGeom prst="rect"/>
+          <a:noFill/>
+          <a:ln>
+            <a:noFill/>
+            <a:prstDash/>
+          </a:ln>
+        </p:spPr>
+        <p:txBody>
+          <a:bodyPr wrap="none" lIns="89535" tIns="46355" rIns="89535" bIns="46355" vert="horz" anchor="t">
+            <a:spAutoFit/>
+          </a:bodyPr>
+          <a:lstStyle/>
+          <a:p>
+            <a:pPr marL="0" indent="0" algn="l" hangingPunct="1"/>
+            <a:r>
+              <a:rPr sz="1800">
+                <a:latin typeface="맑은 고딕" charset="0"/>
+                <a:ea typeface="맑은 고딕" charset="0"/>
+              </a:rPr>
+              <a:t>2</a:t>
+            </a:r>
+            <a:r>
+              <a:rPr sz="1800">
+                <a:latin typeface="맑은 고딕" charset="0"/>
+                <a:ea typeface="맑은 고딕" charset="0"/>
+              </a:rPr>
+              <a:t>02</a:t>
+            </a:r>
+            <a:r>
+              <a:rPr lang="ko-KR" sz="1800">
+                <a:latin typeface="맑은 고딕" charset="0"/>
+                <a:ea typeface="맑은 고딕" charset="0"/>
+              </a:rPr>
+              <a:t>6</a:t>
+            </a:r>
+            <a:r>
+              <a:rPr lang="ko-KR" sz="1800">
+                <a:latin typeface="맑은 고딕" charset="0"/>
+                <a:ea typeface="맑은 고딕" charset="0"/>
+              </a:rPr>
+              <a:t>-03-24</a:t>
+            </a:r>
+            <a:endParaRPr lang="ko-KR" altLang="en-US" sz="1800">
+              <a:latin typeface="맑은 고딕" charset="0"/>
+              <a:ea typeface="맑은 고딕" charset="0"/>
+            </a:endParaRPr>
+          </a:p>
+        </p:txBody>
+      </p:sp>
     </p:spTree>
     <p:extLst>
       <p:ext uri="{BB962C8B-B14F-4D97-AF65-F5344CB8AC3E}">
@@ -3830,7 +3894,7 @@
       </p:grpSpPr>
       <p:sp>
         <p:nvSpPr>
-          <p:cNvPr id="2" name="도형 1"/>
+          <p:cNvPr id="2" name="도형 6"/>
           <p:cNvSpPr>
             <a:spLocks/>
           </p:cNvSpPr>
@@ -3838,8 +3902,8 @@
         </p:nvSpPr>
         <p:spPr>
           <a:xfrm rot="0">
-            <a:off x="1125855" y="977265"/>
-            <a:ext cx="9412605" cy="4979670"/>
+            <a:off x="1115695" y="977265"/>
+            <a:ext cx="9413240" cy="4980305"/>
           </a:xfrm>
           <a:prstGeom prst="rect"/>
           <a:solidFill>
@@ -3884,7 +3948,7 @@
       </p:sp>
       <p:sp>
         <p:nvSpPr>
-          <p:cNvPr id="3" name="도형 2"/>
+          <p:cNvPr id="4" name="도형 8"/>
           <p:cNvSpPr>
             <a:spLocks/>
           </p:cNvSpPr>
@@ -3892,8 +3956,8 @@
         </p:nvSpPr>
         <p:spPr>
           <a:xfrm rot="0">
-            <a:off x="2597150" y="2162175"/>
-            <a:ext cx="6142355" cy="2607310"/>
+            <a:off x="1125855" y="977265"/>
+            <a:ext cx="9401810" cy="800735"/>
           </a:xfrm>
           <a:prstGeom prst="rect"/>
           <a:solidFill>
@@ -3925,235 +3989,25 @@
           </a:fontRef>
         </p:style>
         <p:txBody>
-          <a:bodyPr wrap="square" lIns="91440" tIns="45720" rIns="91440" bIns="45720" vert="horz" anchor="ctr">
+          <a:bodyPr wrap="square" lIns="91440" tIns="45720" rIns="91440" bIns="45720" numCol="1" vert="horz" anchor="ctr">
             <a:noAutofit/>
           </a:bodyPr>
           <a:lstStyle/>
           <a:p>
-            <a:pPr marL="0" indent="0" algn="ctr" hangingPunct="1"/>
-            <a:r>
-              <a:rPr lang="ko-KR" sz="1800">
-                <a:solidFill>
-                  <a:schemeClr val="tx1"/>
-                </a:solidFill>
-                <a:latin typeface="맑은 고딕" charset="0"/>
-                <a:ea typeface="맑은 고딕" charset="0"/>
-              </a:rPr>
-              <a:t>메인내용꾸미기/파프리카 </a:t>
-            </a:r>
-            <a:r>
-              <a:rPr lang="ko-KR" sz="1800">
-                <a:solidFill>
-                  <a:schemeClr val="tx1"/>
-                </a:solidFill>
-                <a:latin typeface="맑은 고딕" charset="0"/>
-                <a:ea typeface="맑은 고딕" charset="0"/>
-              </a:rPr>
-              <a:t>내용이나 스</a:t>
-            </a:r>
-            <a:r>
-              <a:rPr lang="ko-KR" sz="1800">
-                <a:solidFill>
-                  <a:schemeClr val="tx1"/>
-                </a:solidFill>
-                <a:latin typeface="맑은 고딕" charset="0"/>
-                <a:ea typeface="맑은 고딕" charset="0"/>
-              </a:rPr>
-              <a:t>마트팜 </a:t>
-            </a:r>
-            <a:r>
-              <a:rPr lang="ko-KR" sz="1800">
-                <a:solidFill>
-                  <a:schemeClr val="tx1"/>
-                </a:solidFill>
-                <a:latin typeface="맑은 고딕" charset="0"/>
-                <a:ea typeface="맑은 고딕" charset="0"/>
-              </a:rPr>
-              <a:t>재배에</a:t>
-            </a:r>
-            <a:endParaRPr lang="ko-KR" altLang="en-US" sz="1800">
-              <a:solidFill>
-                <a:schemeClr val="tx1"/>
-              </a:solidFill>
-              <a:latin typeface="맑은 고딕" charset="0"/>
-              <a:ea typeface="맑은 고딕" charset="0"/>
-            </a:endParaRPr>
-          </a:p>
-          <a:p>
-            <a:pPr marL="0" indent="0" algn="ctr" hangingPunct="1"/>
-            <a:r>
-              <a:rPr lang="ko-KR" sz="1800">
-                <a:solidFill>
-                  <a:schemeClr val="tx1"/>
-                </a:solidFill>
-                <a:latin typeface="맑은 고딕" charset="0"/>
-                <a:ea typeface="맑은 고딕" charset="0"/>
-              </a:rPr>
-              <a:t>필요한 식물위주(딸기,</a:t>
-            </a:r>
-            <a:r>
-              <a:rPr lang="ko-KR" sz="1800">
-                <a:solidFill>
-                  <a:schemeClr val="tx1"/>
-                </a:solidFill>
-                <a:latin typeface="맑은 고딕" charset="0"/>
-                <a:ea typeface="맑은 고딕" charset="0"/>
-              </a:rPr>
-              <a:t> 토마토, 파프리카)</a:t>
-            </a:r>
-            <a:r>
-              <a:rPr lang="ko-KR" sz="1800">
-                <a:solidFill>
-                  <a:schemeClr val="tx1"/>
-                </a:solidFill>
-                <a:latin typeface="맑은 고딕" charset="0"/>
-                <a:ea typeface="맑은 고딕" charset="0"/>
-              </a:rPr>
-              <a:t>의 캐러셀이나 </a:t>
-            </a:r>
-            <a:r>
-              <a:rPr lang="ko-KR" sz="1800">
-                <a:solidFill>
-                  <a:schemeClr val="tx1"/>
-                </a:solidFill>
-                <a:latin typeface="맑은 고딕" charset="0"/>
-                <a:ea typeface="맑은 고딕" charset="0"/>
-              </a:rPr>
-              <a:t>css내용이 들어가게끔!</a:t>
-            </a:r>
-            <a:endParaRPr lang="ko-KR" altLang="en-US" sz="1800">
-              <a:solidFill>
-                <a:schemeClr val="tx1"/>
-              </a:solidFill>
-              <a:latin typeface="맑은 고딕" charset="0"/>
-              <a:ea typeface="맑은 고딕" charset="0"/>
-            </a:endParaRPr>
-          </a:p>
-          <a:p>
-            <a:pPr marL="0" indent="0" algn="ctr" hangingPunct="1"/>
-            <a:r>
-              <a:rPr lang="ko-KR" sz="1800">
-                <a:solidFill>
-                  <a:schemeClr val="tx1"/>
-                </a:solidFill>
-                <a:latin typeface="맑은 고딕" charset="0"/>
-                <a:ea typeface="맑은 고딕" charset="0"/>
-              </a:rPr>
-              <a:t>s</a:t>
-            </a:r>
-            <a:r>
-              <a:rPr lang="ko-KR" sz="1800">
-                <a:solidFill>
-                  <a:schemeClr val="tx1"/>
-                </a:solidFill>
-                <a:latin typeface="맑은 고딕" charset="0"/>
-                <a:ea typeface="맑은 고딕" charset="0"/>
-              </a:rPr>
-              <a:t>ection</a:t>
-            </a:r>
-            <a:r>
-              <a:rPr lang="ko-KR" sz="1800">
-                <a:solidFill>
-                  <a:schemeClr val="tx1"/>
-                </a:solidFill>
-                <a:latin typeface="맑은 고딕" charset="0"/>
-                <a:ea typeface="맑은 고딕" charset="0"/>
-              </a:rPr>
-              <a:t>안에 </a:t>
-            </a:r>
-            <a:r>
-              <a:rPr lang="ko-KR" sz="1800">
-                <a:solidFill>
-                  <a:schemeClr val="tx1"/>
-                </a:solidFill>
-                <a:latin typeface="맑은 고딕" charset="0"/>
-                <a:ea typeface="맑은 고딕" charset="0"/>
-              </a:rPr>
-              <a:t>다른 꾸</a:t>
-            </a:r>
-            <a:r>
-              <a:rPr lang="ko-KR" sz="1800">
-                <a:solidFill>
-                  <a:schemeClr val="tx1"/>
-                </a:solidFill>
-                <a:latin typeface="맑은 고딕" charset="0"/>
-                <a:ea typeface="맑은 고딕" charset="0"/>
-              </a:rPr>
-              <a:t>미는 이미지나 </a:t>
-            </a:r>
-            <a:r>
-              <a:rPr lang="ko-KR" sz="1800">
-                <a:solidFill>
-                  <a:schemeClr val="tx1"/>
-                </a:solidFill>
-                <a:latin typeface="맑은 고딕" charset="0"/>
-                <a:ea typeface="맑은 고딕" charset="0"/>
-              </a:rPr>
-              <a:t>글씨</a:t>
-            </a:r>
-            <a:r>
-              <a:rPr lang="ko-KR" sz="1800">
-                <a:solidFill>
-                  <a:schemeClr val="tx1"/>
-                </a:solidFill>
-                <a:latin typeface="맑은 고딕" charset="0"/>
-                <a:ea typeface="맑은 고딕" charset="0"/>
-              </a:rPr>
-              <a:t>도 넣고</a:t>
-            </a:r>
-            <a:endParaRPr lang="ko-KR" altLang="en-US" sz="1800">
-              <a:solidFill>
-                <a:schemeClr val="tx1"/>
-              </a:solidFill>
-              <a:latin typeface="맑은 고딕" charset="0"/>
-              <a:ea typeface="맑은 고딕" charset="0"/>
-            </a:endParaRPr>
-          </a:p>
-          <a:p>
-            <a:pPr marL="0" indent="0" algn="ctr" hangingPunct="1"/>
-            <a:r>
-              <a:rPr lang="ko-KR" sz="1800">
-                <a:solidFill>
-                  <a:schemeClr val="tx1"/>
-                </a:solidFill>
-                <a:latin typeface="맑은 고딕" charset="0"/>
-                <a:ea typeface="맑은 고딕" charset="0"/>
-              </a:rPr>
-              <a:t>동영상도 있으면 </a:t>
-            </a:r>
-            <a:r>
-              <a:rPr lang="ko-KR" sz="1800">
-                <a:solidFill>
-                  <a:schemeClr val="tx1"/>
-                </a:solidFill>
-                <a:latin typeface="맑은 고딕" charset="0"/>
-                <a:ea typeface="맑은 고딕" charset="0"/>
-              </a:rPr>
-              <a:t>넣을 </a:t>
-            </a:r>
-            <a:r>
-              <a:rPr lang="ko-KR" sz="1800">
-                <a:solidFill>
-                  <a:schemeClr val="tx1"/>
-                </a:solidFill>
-                <a:latin typeface="맑은 고딕" charset="0"/>
-                <a:ea typeface="맑은 고딕" charset="0"/>
-              </a:rPr>
-              <a:t>계획!</a:t>
-            </a:r>
-            <a:endParaRPr lang="ko-KR" altLang="en-US" sz="1800">
-              <a:solidFill>
-                <a:schemeClr val="tx1"/>
-              </a:solidFill>
-              <a:latin typeface="맑은 고딕" charset="0"/>
-              <a:ea typeface="맑은 고딕" charset="0"/>
-            </a:endParaRPr>
-          </a:p>
-        </p:txBody>
-      </p:sp>
-      <p:sp>
-        <p:nvSpPr>
-          <p:cNvPr id="4" name="도형 6"/>
+            <a:pPr marL="0" indent="0" algn="ctr" hangingPunct="1">
+              <a:buFontTx/>
+              <a:buNone/>
+            </a:pPr>
+            <a:endParaRPr lang="ko-KR" altLang="en-US" sz="1800">
+              <a:latin typeface="맑은 고딕" charset="0"/>
+              <a:ea typeface="맑은 고딕" charset="0"/>
+            </a:endParaRPr>
+          </a:p>
+        </p:txBody>
+      </p:sp>
+      <p:sp>
+        <p:nvSpPr>
+          <p:cNvPr id="6" name="도형 10"/>
           <p:cNvSpPr>
             <a:spLocks/>
           </p:cNvSpPr>
@@ -4161,21 +4015,13 @@
         </p:nvSpPr>
         <p:spPr>
           <a:xfrm rot="0">
-            <a:off x="1125855" y="977265"/>
-            <a:ext cx="9401175" cy="800100"/>
+            <a:off x="9143365" y="1184275"/>
+            <a:ext cx="1147445" cy="466090"/>
           </a:xfrm>
           <a:prstGeom prst="rect"/>
           <a:solidFill>
-            <a:schemeClr val="bg1"/>
+            <a:schemeClr val="tx1"/>
           </a:solidFill>
-          <a:ln w="12700" cap="flat" cmpd="sng">
-            <a:solidFill>
-              <a:schemeClr val="tx1">
-                <a:alpha val="100000"/>
-              </a:schemeClr>
-            </a:solidFill>
-            <a:prstDash val="solid"/>
-          </a:ln>
         </p:spPr>
         <p:style>
           <a:lnRef idx="2">
@@ -4194,22 +4040,32 @@
           </a:fontRef>
         </p:style>
         <p:txBody>
-          <a:bodyPr wrap="square" lIns="91440" tIns="45720" rIns="91440" bIns="45720" vert="horz" anchor="ctr">
+          <a:bodyPr wrap="square" lIns="91440" tIns="45720" rIns="91440" bIns="45720" numCol="1" vert="horz" anchor="ctr">
             <a:noAutofit/>
           </a:bodyPr>
           <a:lstStyle/>
           <a:p>
-            <a:pPr marL="0" indent="0" algn="ctr" hangingPunct="1"/>
-            <a:endParaRPr lang="ko-KR" altLang="en-US" sz="1800">
-              <a:latin typeface="맑은 고딕" charset="0"/>
-              <a:ea typeface="맑은 고딕" charset="0"/>
-            </a:endParaRPr>
-          </a:p>
-        </p:txBody>
-      </p:sp>
-      <p:sp>
-        <p:nvSpPr>
-          <p:cNvPr id="5" name="도형 10"/>
+            <a:pPr marL="0" indent="0" algn="ctr" hangingPunct="1">
+              <a:buFontTx/>
+              <a:buNone/>
+            </a:pPr>
+            <a:r>
+              <a:rPr sz="1800">
+                <a:latin typeface="맑은 고딕" charset="0"/>
+                <a:ea typeface="맑은 고딕" charset="0"/>
+              </a:rPr>
+              <a:t>로그인</a:t>
+            </a:r>
+            <a:endParaRPr lang="ko-KR" altLang="en-US" sz="1800">
+              <a:latin typeface="맑은 고딕" charset="0"/>
+              <a:ea typeface="맑은 고딕" charset="0"/>
+            </a:endParaRPr>
+          </a:p>
+        </p:txBody>
+      </p:sp>
+      <p:sp>
+        <p:nvSpPr>
+          <p:cNvPr id="7" name="도형 11"/>
           <p:cNvSpPr>
             <a:spLocks/>
           </p:cNvSpPr>
@@ -4217,10 +4073,13 @@
         </p:nvSpPr>
         <p:spPr>
           <a:xfrm rot="0">
-            <a:off x="6812915" y="1203960"/>
-            <a:ext cx="2203450" cy="445770"/>
+            <a:off x="1283970" y="1144905"/>
+            <a:ext cx="1067435" cy="544830"/>
           </a:xfrm>
           <a:prstGeom prst="rect"/>
+          <a:solidFill>
+            <a:schemeClr val="tx1"/>
+          </a:solidFill>
         </p:spPr>
         <p:style>
           <a:lnRef idx="2">
@@ -4253,31 +4112,181 @@
                 <a:latin typeface="맑은 고딕" charset="0"/>
                 <a:ea typeface="맑은 고딕" charset="0"/>
               </a:rPr>
-              <a:t>Snss님 반갑습니다</a:t>
-            </a:r>
-            <a:endParaRPr lang="ko-KR" altLang="en-US" sz="1800">
-              <a:latin typeface="맑은 고딕" charset="0"/>
-              <a:ea typeface="맑은 고딕" charset="0"/>
-            </a:endParaRPr>
-          </a:p>
-        </p:txBody>
-      </p:sp>
-      <p:sp>
-        <p:nvSpPr>
-          <p:cNvPr id="6" name="도형 11"/>
-          <p:cNvSpPr>
+              <a:t>Header logo</a:t>
+            </a:r>
+            <a:endParaRPr lang="ko-KR" altLang="en-US" sz="1800">
+              <a:latin typeface="맑은 고딕" charset="0"/>
+              <a:ea typeface="맑은 고딕" charset="0"/>
+            </a:endParaRPr>
+          </a:p>
+        </p:txBody>
+      </p:sp>
+      <p:sp>
+        <p:nvSpPr>
+          <p:cNvPr id="8" name="텍스트 상자 12"/>
+          <p:cNvSpPr txBox="1">
             <a:spLocks/>
           </p:cNvSpPr>
           <p:nvPr/>
         </p:nvSpPr>
         <p:spPr>
           <a:xfrm rot="0">
-            <a:off x="9143365" y="1184275"/>
-            <a:ext cx="1146810" cy="465455"/>
+            <a:off x="2597150" y="1195070"/>
+            <a:ext cx="1094740" cy="370840"/>
+          </a:xfrm>
+          <a:prstGeom prst="rect"/>
+          <a:noFill/>
+          <a:ln>
+            <a:noFill/>
+            <a:prstDash/>
+          </a:ln>
+        </p:spPr>
+        <p:txBody>
+          <a:bodyPr wrap="none" lIns="89535" tIns="46355" rIns="89535" bIns="46355" numCol="1" vert="horz" anchor="t">
+            <a:spAutoFit/>
+          </a:bodyPr>
+          <a:lstStyle/>
+          <a:p>
+            <a:pPr marL="0" indent="0" algn="l" hangingPunct="1">
+              <a:buFontTx/>
+              <a:buNone/>
+            </a:pPr>
+            <a:r>
+              <a:rPr lang="ko-KR" sz="1800">
+                <a:latin typeface="맑은 고딕" charset="0"/>
+                <a:ea typeface="맑은 고딕" charset="0"/>
+              </a:rPr>
+              <a:t>대시보드</a:t>
+            </a:r>
+            <a:endParaRPr lang="ko-KR" altLang="en-US" sz="1800">
+              <a:latin typeface="맑은 고딕" charset="0"/>
+              <a:ea typeface="맑은 고딕" charset="0"/>
+            </a:endParaRPr>
+          </a:p>
+        </p:txBody>
+      </p:sp>
+      <p:sp>
+        <p:nvSpPr>
+          <p:cNvPr id="9" name="텍스트 상자 13"/>
+          <p:cNvSpPr txBox="1">
+            <a:spLocks/>
+          </p:cNvSpPr>
+          <p:nvPr/>
+        </p:nvSpPr>
+        <p:spPr>
+          <a:xfrm rot="0">
+            <a:off x="3695700" y="1207135"/>
+            <a:ext cx="1403985" cy="370840"/>
+          </a:xfrm>
+          <a:prstGeom prst="rect"/>
+          <a:noFill/>
+          <a:ln w="0" cap="flat" cmpd="sng">
+            <a:solidFill>
+              <a:srgbClr val="FFFFFF">
+                <a:alpha val="100000"/>
+              </a:srgbClr>
+            </a:solidFill>
+            <a:prstDash val="solid"/>
+          </a:ln>
+        </p:spPr>
+        <p:txBody>
+          <a:bodyPr wrap="none" lIns="89535" tIns="46355" rIns="89535" bIns="46355" numCol="1" vert="horz" anchor="t">
+            <a:spAutoFit/>
+          </a:bodyPr>
+          <a:lstStyle/>
+          <a:p>
+            <a:pPr marL="0" indent="0" algn="l" hangingPunct="1">
+              <a:buFontTx/>
+              <a:buNone/>
+            </a:pPr>
+            <a:r>
+              <a:rPr lang="ko-KR" sz="1800">
+                <a:latin typeface="맑은 고딕" charset="0"/>
+                <a:ea typeface="맑은 고딕" charset="0"/>
+              </a:rPr>
+              <a:t>데이터 분석</a:t>
+            </a:r>
+            <a:endParaRPr lang="ko-KR" altLang="en-US" sz="1800">
+              <a:latin typeface="맑은 고딕" charset="0"/>
+              <a:ea typeface="맑은 고딕" charset="0"/>
+            </a:endParaRPr>
+          </a:p>
+        </p:txBody>
+      </p:sp>
+      <p:sp>
+        <p:nvSpPr>
+          <p:cNvPr id="10" name="텍스트 상자 14"/>
+          <p:cNvSpPr txBox="1">
+            <a:spLocks/>
+          </p:cNvSpPr>
+          <p:nvPr/>
+        </p:nvSpPr>
+        <p:spPr>
+          <a:xfrm rot="0">
+            <a:off x="5071110" y="1189990"/>
+            <a:ext cx="1175385" cy="370840"/>
+          </a:xfrm>
+          <a:prstGeom prst="rect"/>
+          <a:noFill/>
+          <a:ln w="0" cap="flat" cmpd="sng">
+            <a:solidFill>
+              <a:srgbClr val="FFFFFF">
+                <a:alpha val="100000"/>
+              </a:srgbClr>
+            </a:solidFill>
+            <a:prstDash val="solid"/>
+          </a:ln>
+        </p:spPr>
+        <p:txBody>
+          <a:bodyPr wrap="none" lIns="89535" tIns="46355" rIns="89535" bIns="46355" numCol="1" vert="horz" anchor="t">
+            <a:spAutoFit/>
+          </a:bodyPr>
+          <a:lstStyle/>
+          <a:p>
+            <a:pPr marL="0" indent="0" algn="l" hangingPunct="1">
+              <a:buFontTx/>
+              <a:buNone/>
+            </a:pPr>
+            <a:r>
+              <a:rPr sz="1800">
+                <a:latin typeface="맑은 고딕" charset="0"/>
+                <a:ea typeface="맑은 고딕" charset="0"/>
+              </a:rPr>
+              <a:t>가격</a:t>
+            </a:r>
+            <a:r>
+              <a:rPr lang="ko-KR" sz="1800">
+                <a:latin typeface="맑은 고딕" charset="0"/>
+                <a:ea typeface="맑은 고딕" charset="0"/>
+              </a:rPr>
+              <a:t> 예측</a:t>
+            </a:r>
+            <a:endParaRPr lang="ko-KR" altLang="en-US" sz="1800">
+              <a:latin typeface="맑은 고딕" charset="0"/>
+              <a:ea typeface="맑은 고딕" charset="0"/>
+            </a:endParaRPr>
+          </a:p>
+        </p:txBody>
+      </p:sp>
+      <p:sp>
+        <p:nvSpPr>
+          <p:cNvPr id="11" name="도형 17"/>
+          <p:cNvSpPr>
+            <a:spLocks/>
+          </p:cNvSpPr>
+          <p:nvPr/>
+        </p:nvSpPr>
+        <p:spPr>
+          <a:xfrm rot="0">
+            <a:off x="2597150" y="2012950"/>
+            <a:ext cx="2716530" cy="3545840"/>
           </a:xfrm>
           <a:prstGeom prst="rect"/>
           <a:solidFill>
-            <a:schemeClr val="tx1"/>
+            <a:schemeClr val="accent2">
+              <a:lumMod val="60000"/>
+              <a:lumOff val="40000"/>
+            </a:schemeClr>
           </a:solidFill>
         </p:spPr>
         <p:style>
@@ -4297,39 +4306,70 @@
           </a:fontRef>
         </p:style>
         <p:txBody>
-          <a:bodyPr wrap="square" lIns="91440" tIns="45720" rIns="91440" bIns="45720" numCol="1" vert="horz" anchor="ctr">
+          <a:bodyPr wrap="square" lIns="91440" tIns="45720" rIns="91440" bIns="45720" vert="horz" anchor="ctr">
             <a:noAutofit/>
           </a:bodyPr>
           <a:lstStyle/>
           <a:p>
-            <a:pPr marL="0" indent="0" algn="ctr" hangingPunct="1">
-              <a:buFontTx/>
-              <a:buNone/>
-            </a:pPr>
+            <a:pPr marL="0" indent="0" algn="ctr" hangingPunct="1"/>
+            <a:endParaRPr lang="ko-KR" altLang="en-US" sz="1800">
+              <a:latin typeface="맑은 고딕" charset="0"/>
+              <a:ea typeface="맑은 고딕" charset="0"/>
+            </a:endParaRPr>
+          </a:p>
+        </p:txBody>
+      </p:sp>
+      <p:sp>
+        <p:nvSpPr>
+          <p:cNvPr id="12" name="텍스트 상자 19"/>
+          <p:cNvSpPr txBox="1">
+            <a:spLocks/>
+          </p:cNvSpPr>
+          <p:nvPr/>
+        </p:nvSpPr>
+        <p:spPr>
+          <a:xfrm rot="0">
+            <a:off x="2705735" y="2211705"/>
+            <a:ext cx="1322705" cy="370205"/>
+          </a:xfrm>
+          <a:prstGeom prst="rect"/>
+          <a:noFill/>
+          <a:ln>
+            <a:noFill/>
+            <a:prstDash/>
+          </a:ln>
+        </p:spPr>
+        <p:txBody>
+          <a:bodyPr wrap="none" lIns="89535" tIns="46355" rIns="89535" bIns="46355" vert="horz" anchor="t">
+            <a:spAutoFit/>
+          </a:bodyPr>
+          <a:lstStyle/>
+          <a:p>
+            <a:pPr marL="0" indent="0" algn="l" hangingPunct="1"/>
             <a:r>
               <a:rPr sz="1800">
                 <a:latin typeface="맑은 고딕" charset="0"/>
                 <a:ea typeface="맑은 고딕" charset="0"/>
               </a:rPr>
-              <a:t>로그</a:t>
-            </a:r>
-            <a:r>
-              <a:rPr sz="1800">
-                <a:latin typeface="맑은 고딕" charset="0"/>
-                <a:ea typeface="맑은 고딕" charset="0"/>
-              </a:rPr>
-              <a:t>아웃</a:t>
-            </a:r>
-            <a:endParaRPr lang="ko-KR" altLang="en-US" sz="1800">
-              <a:latin typeface="맑은 고딕" charset="0"/>
-              <a:ea typeface="맑은 고딕" charset="0"/>
-            </a:endParaRPr>
-          </a:p>
-        </p:txBody>
-      </p:sp>
-      <p:sp>
-        <p:nvSpPr>
-          <p:cNvPr id="7" name="도형 17"/>
+              <a:t>회</a:t>
+            </a:r>
+            <a:r>
+              <a:rPr lang="ko-KR" sz="1800">
+                <a:latin typeface="맑은 고딕" charset="0"/>
+                <a:ea typeface="맑은 고딕" charset="0"/>
+              </a:rPr>
+              <a:t>원가입폼</a:t>
+            </a:r>
+            <a:endParaRPr lang="ko-KR" altLang="en-US" sz="1800">
+              <a:latin typeface="맑은 고딕" charset="0"/>
+              <a:ea typeface="맑은 고딕" charset="0"/>
+            </a:endParaRPr>
+          </a:p>
+        </p:txBody>
+      </p:sp>
+      <p:sp>
+        <p:nvSpPr>
+          <p:cNvPr id="13" name="도형 20"/>
           <p:cNvSpPr>
             <a:spLocks/>
           </p:cNvSpPr>
@@ -4337,12 +4377,12 @@
         </p:nvSpPr>
         <p:spPr>
           <a:xfrm rot="0">
-            <a:off x="1283970" y="1144905"/>
-            <a:ext cx="1066800" cy="544195"/>
+            <a:off x="3219450" y="2725420"/>
+            <a:ext cx="1995170" cy="464820"/>
           </a:xfrm>
           <a:prstGeom prst="rect"/>
           <a:solidFill>
-            <a:schemeClr val="tx1"/>
+            <a:schemeClr val="bg1"/>
           </a:solidFill>
         </p:spPr>
         <p:style>
@@ -4370,42 +4410,59 @@
             <a:pPr marL="0" indent="0" algn="ctr" hangingPunct="1"/>
             <a:r>
               <a:rPr lang="ko-KR" sz="1800">
-                <a:latin typeface="맑은 고딕" charset="0"/>
-                <a:ea typeface="맑은 고딕" charset="0"/>
-              </a:rPr>
-              <a:t>H</a:t>
-            </a:r>
-            <a:r>
-              <a:rPr lang="ko-KR" sz="1800">
-                <a:latin typeface="맑은 고딕" charset="0"/>
-                <a:ea typeface="맑은 고딕" charset="0"/>
-              </a:rPr>
-              <a:t>ea</a:t>
-            </a:r>
-            <a:r>
-              <a:rPr lang="ko-KR" sz="1800">
-                <a:latin typeface="맑은 고딕" charset="0"/>
-                <a:ea typeface="맑은 고딕" charset="0"/>
-              </a:rPr>
-              <a:t>de</a:t>
-            </a:r>
-            <a:r>
-              <a:rPr lang="ko-KR" sz="1800">
-                <a:latin typeface="맑은 고딕" charset="0"/>
-                <a:ea typeface="맑은 고딕" charset="0"/>
-              </a:rPr>
-              <a:t>r logo</a:t>
-            </a:r>
-            <a:endParaRPr lang="ko-KR" altLang="en-US" sz="1800">
-              <a:latin typeface="맑은 고딕" charset="0"/>
-              <a:ea typeface="맑은 고딕" charset="0"/>
-            </a:endParaRPr>
-          </a:p>
-        </p:txBody>
-      </p:sp>
-      <p:sp>
-        <p:nvSpPr>
-          <p:cNvPr id="8" name="텍스트 상자 19"/>
+                <a:solidFill>
+                  <a:schemeClr val="accent1">
+                    <a:lumMod val="50000"/>
+                    <a:lumOff val="0"/>
+                  </a:schemeClr>
+                </a:solidFill>
+                <a:latin typeface="맑은 고딕" charset="0"/>
+                <a:ea typeface="맑은 고딕" charset="0"/>
+              </a:rPr>
+              <a:t>I</a:t>
+            </a:r>
+            <a:r>
+              <a:rPr lang="ko-KR" sz="1800">
+                <a:solidFill>
+                  <a:schemeClr val="accent1">
+                    <a:lumMod val="50000"/>
+                    <a:lumOff val="0"/>
+                  </a:schemeClr>
+                </a:solidFill>
+                <a:latin typeface="맑은 고딕" charset="0"/>
+                <a:ea typeface="맑은 고딕" charset="0"/>
+              </a:rPr>
+              <a:t>D</a:t>
+            </a:r>
+            <a:r>
+              <a:rPr lang="ko-KR" sz="1800">
+                <a:solidFill>
+                  <a:schemeClr val="accent1">
+                    <a:lumMod val="50000"/>
+                    <a:lumOff val="0"/>
+                  </a:schemeClr>
+                </a:solidFill>
+                <a:latin typeface="맑은 고딕" charset="0"/>
+                <a:ea typeface="맑은 고딕" charset="0"/>
+              </a:rPr>
+              <a:t>입력</a:t>
+            </a:r>
+            <a:endParaRPr lang="ko-KR" altLang="en-US" sz="1800">
+              <a:solidFill>
+                <a:schemeClr val="accent1">
+                  <a:lumMod val="50000"/>
+                  <a:lumOff val="0"/>
+                </a:schemeClr>
+              </a:solidFill>
+              <a:latin typeface="맑은 고딕" charset="0"/>
+              <a:ea typeface="맑은 고딕" charset="0"/>
+            </a:endParaRPr>
+          </a:p>
+        </p:txBody>
+      </p:sp>
+      <p:sp>
+        <p:nvSpPr>
+          <p:cNvPr id="14" name="텍스트 상자 22"/>
           <p:cNvSpPr txBox="1">
             <a:spLocks/>
           </p:cNvSpPr>
@@ -4413,8 +4470,8 @@
         </p:nvSpPr>
         <p:spPr>
           <a:xfrm rot="0">
-            <a:off x="2597150" y="1195070"/>
-            <a:ext cx="1094105" cy="370205"/>
+            <a:off x="2734945" y="2724785"/>
+            <a:ext cx="405130" cy="370205"/>
           </a:xfrm>
           <a:prstGeom prst="rect"/>
           <a:noFill/>
@@ -4435,18 +4492,118 @@
                 <a:latin typeface="맑은 고딕" charset="0"/>
                 <a:ea typeface="맑은 고딕" charset="0"/>
               </a:rPr>
-              <a:t>대시보드</a:t>
-            </a:r>
-            <a:endParaRPr lang="ko-KR" altLang="en-US" sz="1800">
-              <a:latin typeface="맑은 고딕" charset="0"/>
-              <a:ea typeface="맑은 고딕" charset="0"/>
-            </a:endParaRPr>
-          </a:p>
-        </p:txBody>
-      </p:sp>
-      <p:sp>
-        <p:nvSpPr>
-          <p:cNvPr id="9" name="텍스트 상자 20"/>
+              <a:t>I</a:t>
+            </a:r>
+            <a:r>
+              <a:rPr lang="ko-KR" sz="1800">
+                <a:latin typeface="맑은 고딕" charset="0"/>
+                <a:ea typeface="맑은 고딕" charset="0"/>
+              </a:rPr>
+              <a:t>D</a:t>
+            </a:r>
+            <a:endParaRPr lang="ko-KR" altLang="en-US" sz="1800">
+              <a:latin typeface="맑은 고딕" charset="0"/>
+              <a:ea typeface="맑은 고딕" charset="0"/>
+            </a:endParaRPr>
+          </a:p>
+        </p:txBody>
+      </p:sp>
+      <p:sp>
+        <p:nvSpPr>
+          <p:cNvPr id="15" name="도형 30"/>
+          <p:cNvSpPr>
+            <a:spLocks/>
+          </p:cNvSpPr>
+          <p:nvPr/>
+        </p:nvSpPr>
+        <p:spPr>
+          <a:xfrm rot="0">
+            <a:off x="3251835" y="3349625"/>
+            <a:ext cx="1995170" cy="464820"/>
+          </a:xfrm>
+          <a:prstGeom prst="rect"/>
+          <a:solidFill>
+            <a:schemeClr val="bg1"/>
+          </a:solidFill>
+        </p:spPr>
+        <p:style>
+          <a:lnRef idx="2">
+            <a:schemeClr val="accent1">
+              <a:shade val="50000"/>
+            </a:schemeClr>
+          </a:lnRef>
+          <a:fillRef idx="1">
+            <a:schemeClr val="accent1"/>
+          </a:fillRef>
+          <a:effectRef idx="0">
+            <a:schemeClr val="accent1"/>
+          </a:effectRef>
+          <a:fontRef idx="minor">
+            <a:schemeClr val="lt1"/>
+          </a:fontRef>
+        </p:style>
+        <p:txBody>
+          <a:bodyPr wrap="square" lIns="91440" tIns="45720" rIns="91440" bIns="45720" vert="horz" anchor="ctr">
+            <a:noAutofit/>
+          </a:bodyPr>
+          <a:lstStyle/>
+          <a:p>
+            <a:pPr marL="0" indent="0" algn="ctr" hangingPunct="1"/>
+            <a:r>
+              <a:rPr lang="ko-KR" sz="1800">
+                <a:solidFill>
+                  <a:schemeClr val="accent1">
+                    <a:lumMod val="50000"/>
+                    <a:lumOff val="0"/>
+                  </a:schemeClr>
+                </a:solidFill>
+                <a:latin typeface="맑은 고딕" charset="0"/>
+                <a:ea typeface="맑은 고딕" charset="0"/>
+              </a:rPr>
+              <a:t>P</a:t>
+            </a:r>
+            <a:r>
+              <a:rPr lang="ko-KR" sz="1800">
+                <a:solidFill>
+                  <a:schemeClr val="accent1">
+                    <a:lumMod val="50000"/>
+                    <a:lumOff val="0"/>
+                  </a:schemeClr>
+                </a:solidFill>
+                <a:latin typeface="맑은 고딕" charset="0"/>
+                <a:ea typeface="맑은 고딕" charset="0"/>
+              </a:rPr>
+              <a:t>ASSWORD</a:t>
+            </a:r>
+            <a:r>
+              <a:rPr lang="ko-KR" sz="1800">
+                <a:solidFill>
+                  <a:schemeClr val="accent1">
+                    <a:lumMod val="50000"/>
+                    <a:lumOff val="0"/>
+                  </a:schemeClr>
+                </a:solidFill>
+                <a:latin typeface="맑은 고딕" charset="0"/>
+                <a:ea typeface="맑은 고딕" charset="0"/>
+              </a:rPr>
+              <a:t>입력</a:t>
+            </a:r>
+            <a:endParaRPr lang="ko-KR" altLang="en-US" sz="1800">
+              <a:solidFill>
+                <a:schemeClr val="accent1">
+                  <a:lumMod val="50000"/>
+                  <a:lumOff val="0"/>
+                </a:schemeClr>
+              </a:solidFill>
+              <a:latin typeface="맑은 고딕" charset="0"/>
+              <a:ea typeface="맑은 고딕" charset="0"/>
+            </a:endParaRPr>
+          </a:p>
+        </p:txBody>
+      </p:sp>
+      <p:sp>
+        <p:nvSpPr>
+          <p:cNvPr id="16" name="텍스트 상자 31"/>
           <p:cNvSpPr txBox="1">
             <a:spLocks/>
           </p:cNvSpPr>
@@ -4454,8 +4611,8 @@
         </p:nvSpPr>
         <p:spPr>
           <a:xfrm rot="0">
-            <a:off x="3695700" y="1207135"/>
-            <a:ext cx="1403350" cy="370205"/>
+            <a:off x="2599055" y="3329940"/>
+            <a:ext cx="630555" cy="370205"/>
           </a:xfrm>
           <a:prstGeom prst="rect"/>
           <a:noFill/>
@@ -4469,7 +4626,7 @@
           </a:ln>
         </p:spPr>
         <p:txBody>
-          <a:bodyPr wrap="none" lIns="89535" tIns="46355" rIns="89535" bIns="46355" vert="horz" anchor="t">
+          <a:bodyPr wrap="square" lIns="89535" tIns="46355" rIns="89535" bIns="46355" vert="horz" anchor="t">
             <a:spAutoFit/>
           </a:bodyPr>
           <a:lstStyle/>
@@ -4480,18 +4637,92 @@
                 <a:latin typeface="맑은 고딕" charset="0"/>
                 <a:ea typeface="맑은 고딕" charset="0"/>
               </a:rPr>
-              <a:t>데이터 분석</a:t>
-            </a:r>
-            <a:endParaRPr lang="ko-KR" altLang="en-US" sz="1800">
-              <a:latin typeface="맑은 고딕" charset="0"/>
-              <a:ea typeface="맑은 고딕" charset="0"/>
-            </a:endParaRPr>
-          </a:p>
-        </p:txBody>
-      </p:sp>
-      <p:sp>
-        <p:nvSpPr>
-          <p:cNvPr id="10" name="텍스트 상자 21"/>
+              <a:t>p</a:t>
+            </a:r>
+            <a:r>
+              <a:rPr lang="ko-KR" sz="1800">
+                <a:latin typeface="맑은 고딕" charset="0"/>
+                <a:ea typeface="맑은 고딕" charset="0"/>
+              </a:rPr>
+              <a:t>ass</a:t>
+            </a:r>
+            <a:endParaRPr lang="ko-KR" altLang="en-US" sz="1800">
+              <a:latin typeface="맑은 고딕" charset="0"/>
+              <a:ea typeface="맑은 고딕" charset="0"/>
+            </a:endParaRPr>
+          </a:p>
+        </p:txBody>
+      </p:sp>
+      <p:sp>
+        <p:nvSpPr>
+          <p:cNvPr id="17" name="도형 32"/>
+          <p:cNvSpPr>
+            <a:spLocks/>
+          </p:cNvSpPr>
+          <p:nvPr/>
+        </p:nvSpPr>
+        <p:spPr>
+          <a:xfrm rot="0">
+            <a:off x="3214370" y="3886200"/>
+            <a:ext cx="1995170" cy="464820"/>
+          </a:xfrm>
+          <a:prstGeom prst="rect"/>
+          <a:solidFill>
+            <a:schemeClr val="bg1"/>
+          </a:solidFill>
+        </p:spPr>
+        <p:style>
+          <a:lnRef idx="2">
+            <a:schemeClr val="accent1">
+              <a:shade val="50000"/>
+            </a:schemeClr>
+          </a:lnRef>
+          <a:fillRef idx="1">
+            <a:schemeClr val="accent1"/>
+          </a:fillRef>
+          <a:effectRef idx="0">
+            <a:schemeClr val="accent1"/>
+          </a:effectRef>
+          <a:fontRef idx="minor">
+            <a:schemeClr val="lt1"/>
+          </a:fontRef>
+        </p:style>
+        <p:txBody>
+          <a:bodyPr wrap="square" lIns="91440" tIns="45720" rIns="91440" bIns="45720" vert="horz" anchor="ctr">
+            <a:noAutofit/>
+          </a:bodyPr>
+          <a:lstStyle/>
+          <a:p>
+            <a:pPr marL="0" indent="0" algn="ctr" hangingPunct="1"/>
+            <a:r>
+              <a:rPr lang="ko-KR" sz="1800">
+                <a:solidFill>
+                  <a:schemeClr val="accent1">
+                    <a:lumMod val="50000"/>
+                    <a:lumOff val="0"/>
+                  </a:schemeClr>
+                </a:solidFill>
+                <a:latin typeface="맑은 고딕" charset="0"/>
+                <a:ea typeface="맑은 고딕" charset="0"/>
+              </a:rPr>
+              <a:t>이름입력</a:t>
+            </a:r>
+            <a:endParaRPr lang="ko-KR" altLang="en-US" sz="1800">
+              <a:solidFill>
+                <a:schemeClr val="accent1">
+                  <a:lumMod val="50000"/>
+                  <a:lumOff val="0"/>
+                </a:schemeClr>
+              </a:solidFill>
+              <a:latin typeface="맑은 고딕" charset="0"/>
+              <a:ea typeface="맑은 고딕" charset="0"/>
+            </a:endParaRPr>
+          </a:p>
+        </p:txBody>
+      </p:sp>
+      <p:sp>
+        <p:nvSpPr>
+          <p:cNvPr id="18" name="텍스트 상자 33"/>
           <p:cNvSpPr txBox="1">
             <a:spLocks/>
           </p:cNvSpPr>
@@ -4499,8 +4730,8 @@
         </p:nvSpPr>
         <p:spPr>
           <a:xfrm rot="0">
-            <a:off x="5071110" y="1189990"/>
-            <a:ext cx="1174750" cy="370205"/>
+            <a:off x="2601595" y="3954780"/>
+            <a:ext cx="636905" cy="370205"/>
           </a:xfrm>
           <a:prstGeom prst="rect"/>
           <a:noFill/>
@@ -4514,6 +4745,458 @@
           </a:ln>
         </p:spPr>
         <p:txBody>
+          <a:bodyPr wrap="square" lIns="89535" tIns="46355" rIns="89535" bIns="46355" vert="horz" anchor="t">
+            <a:spAutoFit/>
+          </a:bodyPr>
+          <a:lstStyle/>
+          <a:p>
+            <a:pPr marL="0" indent="0" algn="l" hangingPunct="1"/>
+            <a:r>
+              <a:rPr lang="ko-KR" sz="1800">
+                <a:latin typeface="맑은 고딕" charset="0"/>
+                <a:ea typeface="맑은 고딕" charset="0"/>
+              </a:rPr>
+              <a:t>이름</a:t>
+            </a:r>
+            <a:endParaRPr lang="ko-KR" altLang="en-US" sz="1800">
+              <a:latin typeface="맑은 고딕" charset="0"/>
+              <a:ea typeface="맑은 고딕" charset="0"/>
+            </a:endParaRPr>
+          </a:p>
+        </p:txBody>
+      </p:sp>
+      <p:sp>
+        <p:nvSpPr>
+          <p:cNvPr id="19" name="도형 34"/>
+          <p:cNvSpPr>
+            <a:spLocks/>
+          </p:cNvSpPr>
+          <p:nvPr/>
+        </p:nvSpPr>
+        <p:spPr>
+          <a:xfrm rot="0">
+            <a:off x="3216910" y="4471035"/>
+            <a:ext cx="1995170" cy="464820"/>
+          </a:xfrm>
+          <a:prstGeom prst="rect"/>
+          <a:solidFill>
+            <a:schemeClr val="bg1"/>
+          </a:solidFill>
+        </p:spPr>
+        <p:style>
+          <a:lnRef idx="2">
+            <a:schemeClr val="accent1">
+              <a:shade val="50000"/>
+            </a:schemeClr>
+          </a:lnRef>
+          <a:fillRef idx="1">
+            <a:schemeClr val="accent1"/>
+          </a:fillRef>
+          <a:effectRef idx="0">
+            <a:schemeClr val="accent1"/>
+          </a:effectRef>
+          <a:fontRef idx="minor">
+            <a:schemeClr val="lt1"/>
+          </a:fontRef>
+        </p:style>
+        <p:txBody>
+          <a:bodyPr wrap="square" lIns="91440" tIns="45720" rIns="91440" bIns="45720" vert="horz" anchor="ctr">
+            <a:noAutofit/>
+          </a:bodyPr>
+          <a:lstStyle/>
+          <a:p>
+            <a:pPr marL="0" indent="0" algn="ctr" hangingPunct="1"/>
+            <a:r>
+              <a:rPr lang="ko-KR" sz="1800">
+                <a:solidFill>
+                  <a:schemeClr val="accent1">
+                    <a:lumMod val="50000"/>
+                    <a:lumOff val="0"/>
+                  </a:schemeClr>
+                </a:solidFill>
+                <a:latin typeface="맑은 고딕" charset="0"/>
+                <a:ea typeface="맑은 고딕" charset="0"/>
+              </a:rPr>
+              <a:t>나이입력</a:t>
+            </a:r>
+            <a:endParaRPr lang="ko-KR" altLang="en-US" sz="1800">
+              <a:solidFill>
+                <a:schemeClr val="accent1">
+                  <a:lumMod val="50000"/>
+                  <a:lumOff val="0"/>
+                </a:schemeClr>
+              </a:solidFill>
+              <a:latin typeface="맑은 고딕" charset="0"/>
+              <a:ea typeface="맑은 고딕" charset="0"/>
+            </a:endParaRPr>
+          </a:p>
+        </p:txBody>
+      </p:sp>
+      <p:sp>
+        <p:nvSpPr>
+          <p:cNvPr id="20" name="텍스트 상자 35"/>
+          <p:cNvSpPr txBox="1">
+            <a:spLocks/>
+          </p:cNvSpPr>
+          <p:nvPr/>
+        </p:nvSpPr>
+        <p:spPr>
+          <a:xfrm rot="0">
+            <a:off x="2593975" y="4490720"/>
+            <a:ext cx="636905" cy="370205"/>
+          </a:xfrm>
+          <a:prstGeom prst="rect"/>
+          <a:noFill/>
+          <a:ln w="0" cap="flat" cmpd="sng">
+            <a:solidFill>
+              <a:srgbClr val="FFFFFF">
+                <a:alpha val="100000"/>
+              </a:srgbClr>
+            </a:solidFill>
+            <a:prstDash/>
+          </a:ln>
+        </p:spPr>
+        <p:txBody>
+          <a:bodyPr wrap="square" lIns="89535" tIns="46355" rIns="89535" bIns="46355" vert="horz" anchor="t">
+            <a:spAutoFit/>
+          </a:bodyPr>
+          <a:lstStyle/>
+          <a:p>
+            <a:pPr marL="0" indent="0" algn="l" hangingPunct="1"/>
+            <a:r>
+              <a:rPr sz="1800">
+                <a:latin typeface="맑은 고딕" charset="0"/>
+                <a:ea typeface="맑은 고딕" charset="0"/>
+              </a:rPr>
+              <a:t>나이</a:t>
+            </a:r>
+            <a:endParaRPr lang="ko-KR" altLang="en-US" sz="1800">
+              <a:latin typeface="맑은 고딕" charset="0"/>
+              <a:ea typeface="맑은 고딕" charset="0"/>
+            </a:endParaRPr>
+          </a:p>
+        </p:txBody>
+      </p:sp>
+      <p:sp>
+        <p:nvSpPr>
+          <p:cNvPr id="21" name="도형 36"/>
+          <p:cNvSpPr>
+            <a:spLocks/>
+          </p:cNvSpPr>
+          <p:nvPr/>
+        </p:nvSpPr>
+        <p:spPr>
+          <a:xfrm rot="0">
+            <a:off x="2981325" y="5065395"/>
+            <a:ext cx="909320" cy="386080"/>
+          </a:xfrm>
+          <a:prstGeom prst="rect"/>
+          <a:solidFill>
+            <a:schemeClr val="tx1"/>
+          </a:solidFill>
+        </p:spPr>
+        <p:style>
+          <a:lnRef idx="2">
+            <a:schemeClr val="accent1">
+              <a:shade val="50000"/>
+            </a:schemeClr>
+          </a:lnRef>
+          <a:fillRef idx="1">
+            <a:schemeClr val="accent1"/>
+          </a:fillRef>
+          <a:effectRef idx="0">
+            <a:schemeClr val="accent1"/>
+          </a:effectRef>
+          <a:fontRef idx="minor">
+            <a:schemeClr val="lt1"/>
+          </a:fontRef>
+        </p:style>
+        <p:txBody>
+          <a:bodyPr wrap="square" lIns="91440" tIns="45720" rIns="91440" bIns="45720" vert="horz" anchor="ctr">
+            <a:noAutofit/>
+          </a:bodyPr>
+          <a:lstStyle/>
+          <a:p>
+            <a:pPr marL="0" indent="0" algn="ctr" hangingPunct="1"/>
+            <a:r>
+              <a:rPr sz="1800">
+                <a:latin typeface="맑은 고딕" charset="0"/>
+                <a:ea typeface="맑은 고딕" charset="0"/>
+              </a:rPr>
+              <a:t>가입</a:t>
+            </a:r>
+            <a:endParaRPr lang="ko-KR" altLang="en-US" sz="1800">
+              <a:latin typeface="맑은 고딕" charset="0"/>
+              <a:ea typeface="맑은 고딕" charset="0"/>
+            </a:endParaRPr>
+          </a:p>
+        </p:txBody>
+      </p:sp>
+      <p:sp>
+        <p:nvSpPr>
+          <p:cNvPr id="22" name="도형 37"/>
+          <p:cNvSpPr>
+            <a:spLocks/>
+          </p:cNvSpPr>
+          <p:nvPr/>
+        </p:nvSpPr>
+        <p:spPr>
+          <a:xfrm rot="0">
+            <a:off x="4031615" y="5067935"/>
+            <a:ext cx="909320" cy="386080"/>
+          </a:xfrm>
+          <a:prstGeom prst="rect"/>
+          <a:solidFill>
+            <a:schemeClr val="tx1"/>
+          </a:solidFill>
+        </p:spPr>
+        <p:style>
+          <a:lnRef idx="2">
+            <a:schemeClr val="accent1">
+              <a:shade val="50000"/>
+            </a:schemeClr>
+          </a:lnRef>
+          <a:fillRef idx="1">
+            <a:schemeClr val="accent1"/>
+          </a:fillRef>
+          <a:effectRef idx="0">
+            <a:schemeClr val="accent1"/>
+          </a:effectRef>
+          <a:fontRef idx="minor">
+            <a:schemeClr val="lt1"/>
+          </a:fontRef>
+        </p:style>
+        <p:txBody>
+          <a:bodyPr wrap="square" lIns="91440" tIns="45720" rIns="91440" bIns="45720" vert="horz" anchor="ctr">
+            <a:noAutofit/>
+          </a:bodyPr>
+          <a:lstStyle/>
+          <a:p>
+            <a:pPr marL="0" indent="0" algn="ctr" hangingPunct="1"/>
+            <a:r>
+              <a:rPr sz="1800">
+                <a:latin typeface="맑은 고딕" charset="0"/>
+                <a:ea typeface="맑은 고딕" charset="0"/>
+              </a:rPr>
+              <a:t>취소</a:t>
+            </a:r>
+            <a:endParaRPr lang="ko-KR" altLang="en-US" sz="1800">
+              <a:latin typeface="맑은 고딕" charset="0"/>
+              <a:ea typeface="맑은 고딕" charset="0"/>
+            </a:endParaRPr>
+          </a:p>
+        </p:txBody>
+      </p:sp>
+      <p:sp>
+        <p:nvSpPr>
+          <p:cNvPr id="23" name="도형 40"/>
+          <p:cNvSpPr>
+            <a:spLocks/>
+          </p:cNvSpPr>
+          <p:nvPr/>
+        </p:nvSpPr>
+        <p:spPr>
+          <a:xfrm rot="0">
+            <a:off x="5927725" y="2015490"/>
+            <a:ext cx="2716530" cy="3545840"/>
+          </a:xfrm>
+          <a:prstGeom prst="rect"/>
+          <a:solidFill>
+            <a:schemeClr val="accent2">
+              <a:lumMod val="60000"/>
+              <a:lumOff val="40000"/>
+            </a:schemeClr>
+          </a:solidFill>
+        </p:spPr>
+        <p:style>
+          <a:lnRef idx="2">
+            <a:schemeClr val="accent1">
+              <a:shade val="50000"/>
+            </a:schemeClr>
+          </a:lnRef>
+          <a:fillRef idx="1">
+            <a:schemeClr val="accent1"/>
+          </a:fillRef>
+          <a:effectRef idx="0">
+            <a:schemeClr val="accent1"/>
+          </a:effectRef>
+          <a:fontRef idx="minor">
+            <a:schemeClr val="lt1"/>
+          </a:fontRef>
+        </p:style>
+        <p:txBody>
+          <a:bodyPr wrap="square" lIns="91440" tIns="45720" rIns="91440" bIns="45720" vert="horz" anchor="ctr">
+            <a:noAutofit/>
+          </a:bodyPr>
+          <a:lstStyle/>
+          <a:p>
+            <a:pPr marL="0" indent="0" algn="ctr" hangingPunct="1"/>
+            <a:endParaRPr lang="ko-KR" altLang="en-US" sz="1800">
+              <a:latin typeface="맑은 고딕" charset="0"/>
+              <a:ea typeface="맑은 고딕" charset="0"/>
+            </a:endParaRPr>
+          </a:p>
+        </p:txBody>
+      </p:sp>
+      <p:sp>
+        <p:nvSpPr>
+          <p:cNvPr id="24" name="텍스트 상자 41"/>
+          <p:cNvSpPr txBox="1">
+            <a:spLocks/>
+          </p:cNvSpPr>
+          <p:nvPr/>
+        </p:nvSpPr>
+        <p:spPr>
+          <a:xfrm rot="0">
+            <a:off x="6181725" y="2211705"/>
+            <a:ext cx="1294130" cy="370205"/>
+          </a:xfrm>
+          <a:prstGeom prst="rect"/>
+          <a:noFill/>
+          <a:ln>
+            <a:noFill/>
+            <a:prstDash/>
+          </a:ln>
+        </p:spPr>
+        <p:txBody>
+          <a:bodyPr wrap="square" lIns="89535" tIns="46355" rIns="89535" bIns="46355" vert="horz" anchor="t">
+            <a:spAutoFit/>
+          </a:bodyPr>
+          <a:lstStyle/>
+          <a:p>
+            <a:pPr marL="0" indent="0" algn="l" hangingPunct="1"/>
+            <a:r>
+              <a:rPr sz="1800">
+                <a:latin typeface="맑은 고딕" charset="0"/>
+                <a:ea typeface="맑은 고딕" charset="0"/>
+              </a:rPr>
+              <a:t>로그인폼</a:t>
+            </a:r>
+            <a:endParaRPr lang="ko-KR" altLang="en-US" sz="1800">
+              <a:latin typeface="맑은 고딕" charset="0"/>
+              <a:ea typeface="맑은 고딕" charset="0"/>
+            </a:endParaRPr>
+          </a:p>
+        </p:txBody>
+      </p:sp>
+      <p:sp>
+        <p:nvSpPr>
+          <p:cNvPr id="25" name="도형 42"/>
+          <p:cNvSpPr>
+            <a:spLocks/>
+          </p:cNvSpPr>
+          <p:nvPr/>
+        </p:nvSpPr>
+        <p:spPr>
+          <a:xfrm rot="0">
+            <a:off x="6609080" y="3093720"/>
+            <a:ext cx="1995170" cy="464820"/>
+          </a:xfrm>
+          <a:prstGeom prst="rect"/>
+          <a:solidFill>
+            <a:schemeClr val="bg1"/>
+          </a:solidFill>
+        </p:spPr>
+        <p:style>
+          <a:lnRef idx="2">
+            <a:schemeClr val="accent1">
+              <a:shade val="50000"/>
+            </a:schemeClr>
+          </a:lnRef>
+          <a:fillRef idx="1">
+            <a:schemeClr val="accent1"/>
+          </a:fillRef>
+          <a:effectRef idx="0">
+            <a:schemeClr val="accent1"/>
+          </a:effectRef>
+          <a:fontRef idx="minor">
+            <a:schemeClr val="lt1"/>
+          </a:fontRef>
+        </p:style>
+        <p:txBody>
+          <a:bodyPr wrap="square" lIns="91440" tIns="45720" rIns="91440" bIns="45720" vert="horz" anchor="ctr">
+            <a:noAutofit/>
+          </a:bodyPr>
+          <a:lstStyle/>
+          <a:p>
+            <a:pPr marL="0" indent="0" algn="ctr" hangingPunct="1"/>
+            <a:r>
+              <a:rPr lang="ko-KR" sz="1800">
+                <a:solidFill>
+                  <a:schemeClr val="accent1">
+                    <a:lumMod val="50000"/>
+                    <a:lumOff val="0"/>
+                  </a:schemeClr>
+                </a:solidFill>
+                <a:latin typeface="맑은 고딕" charset="0"/>
+                <a:ea typeface="맑은 고딕" charset="0"/>
+              </a:rPr>
+              <a:t>I</a:t>
+            </a:r>
+            <a:r>
+              <a:rPr lang="ko-KR" sz="1800">
+                <a:solidFill>
+                  <a:schemeClr val="accent1">
+                    <a:lumMod val="50000"/>
+                    <a:lumOff val="0"/>
+                  </a:schemeClr>
+                </a:solidFill>
+                <a:latin typeface="맑은 고딕" charset="0"/>
+                <a:ea typeface="맑은 고딕" charset="0"/>
+              </a:rPr>
+              <a:t>D</a:t>
+            </a:r>
+            <a:r>
+              <a:rPr lang="ko-KR" sz="1800">
+                <a:solidFill>
+                  <a:schemeClr val="accent1">
+                    <a:lumMod val="50000"/>
+                    <a:lumOff val="0"/>
+                  </a:schemeClr>
+                </a:solidFill>
+                <a:latin typeface="맑은 고딕" charset="0"/>
+                <a:ea typeface="맑은 고딕" charset="0"/>
+              </a:rPr>
+              <a:t>입력</a:t>
+            </a:r>
+            <a:endParaRPr lang="ko-KR" altLang="en-US" sz="1800">
+              <a:solidFill>
+                <a:schemeClr val="accent1">
+                  <a:lumMod val="50000"/>
+                  <a:lumOff val="0"/>
+                </a:schemeClr>
+              </a:solidFill>
+              <a:latin typeface="맑은 고딕" charset="0"/>
+              <a:ea typeface="맑은 고딕" charset="0"/>
+            </a:endParaRPr>
+          </a:p>
+        </p:txBody>
+      </p:sp>
+      <p:sp>
+        <p:nvSpPr>
+          <p:cNvPr id="26" name="텍스트 상자 43"/>
+          <p:cNvSpPr txBox="1">
+            <a:spLocks/>
+          </p:cNvSpPr>
+          <p:nvPr/>
+        </p:nvSpPr>
+        <p:spPr>
+          <a:xfrm rot="0">
+            <a:off x="6124575" y="3093085"/>
+            <a:ext cx="405130" cy="370205"/>
+          </a:xfrm>
+          <a:prstGeom prst="rect"/>
+          <a:noFill/>
+          <a:ln w="0" cap="flat" cmpd="sng">
+            <a:solidFill>
+              <a:srgbClr val="FFFFFF">
+                <a:alpha val="100000"/>
+              </a:srgbClr>
+            </a:solidFill>
+            <a:prstDash/>
+          </a:ln>
+        </p:spPr>
+        <p:txBody>
           <a:bodyPr wrap="none" lIns="89535" tIns="46355" rIns="89535" bIns="46355" vert="horz" anchor="t">
             <a:spAutoFit/>
           </a:bodyPr>
@@ -4521,25 +5204,273 @@
           <a:p>
             <a:pPr marL="0" indent="0" algn="l" hangingPunct="1"/>
             <a:r>
+              <a:rPr lang="ko-KR" sz="1800">
+                <a:latin typeface="맑은 고딕" charset="0"/>
+                <a:ea typeface="맑은 고딕" charset="0"/>
+              </a:rPr>
+              <a:t>I</a:t>
+            </a:r>
+            <a:r>
+              <a:rPr lang="ko-KR" sz="1800">
+                <a:latin typeface="맑은 고딕" charset="0"/>
+                <a:ea typeface="맑은 고딕" charset="0"/>
+              </a:rPr>
+              <a:t>D</a:t>
+            </a:r>
+            <a:endParaRPr lang="ko-KR" altLang="en-US" sz="1800">
+              <a:latin typeface="맑은 고딕" charset="0"/>
+              <a:ea typeface="맑은 고딕" charset="0"/>
+            </a:endParaRPr>
+          </a:p>
+        </p:txBody>
+      </p:sp>
+      <p:sp>
+        <p:nvSpPr>
+          <p:cNvPr id="27" name="도형 44"/>
+          <p:cNvSpPr>
+            <a:spLocks/>
+          </p:cNvSpPr>
+          <p:nvPr/>
+        </p:nvSpPr>
+        <p:spPr>
+          <a:xfrm rot="0">
+            <a:off x="6612255" y="3698240"/>
+            <a:ext cx="1995170" cy="464820"/>
+          </a:xfrm>
+          <a:prstGeom prst="rect"/>
+          <a:solidFill>
+            <a:schemeClr val="bg1"/>
+          </a:solidFill>
+        </p:spPr>
+        <p:style>
+          <a:lnRef idx="2">
+            <a:schemeClr val="accent1">
+              <a:shade val="50000"/>
+            </a:schemeClr>
+          </a:lnRef>
+          <a:fillRef idx="1">
+            <a:schemeClr val="accent1"/>
+          </a:fillRef>
+          <a:effectRef idx="0">
+            <a:schemeClr val="accent1"/>
+          </a:effectRef>
+          <a:fontRef idx="minor">
+            <a:schemeClr val="lt1"/>
+          </a:fontRef>
+        </p:style>
+        <p:txBody>
+          <a:bodyPr wrap="square" lIns="91440" tIns="45720" rIns="91440" bIns="45720" vert="horz" anchor="ctr">
+            <a:noAutofit/>
+          </a:bodyPr>
+          <a:lstStyle/>
+          <a:p>
+            <a:pPr marL="0" indent="0" algn="ctr" hangingPunct="1"/>
+            <a:r>
+              <a:rPr lang="ko-KR" sz="1800">
+                <a:solidFill>
+                  <a:schemeClr val="accent1">
+                    <a:lumMod val="50000"/>
+                    <a:lumOff val="0"/>
+                  </a:schemeClr>
+                </a:solidFill>
+                <a:latin typeface="맑은 고딕" charset="0"/>
+                <a:ea typeface="맑은 고딕" charset="0"/>
+              </a:rPr>
+              <a:t>P</a:t>
+            </a:r>
+            <a:r>
+              <a:rPr lang="ko-KR" sz="1800">
+                <a:solidFill>
+                  <a:schemeClr val="accent1">
+                    <a:lumMod val="50000"/>
+                    <a:lumOff val="0"/>
+                  </a:schemeClr>
+                </a:solidFill>
+                <a:latin typeface="맑은 고딕" charset="0"/>
+                <a:ea typeface="맑은 고딕" charset="0"/>
+              </a:rPr>
+              <a:t>ASSWORD</a:t>
+            </a:r>
+            <a:r>
+              <a:rPr lang="ko-KR" sz="1800">
+                <a:solidFill>
+                  <a:schemeClr val="accent1">
+                    <a:lumMod val="50000"/>
+                    <a:lumOff val="0"/>
+                  </a:schemeClr>
+                </a:solidFill>
+                <a:latin typeface="맑은 고딕" charset="0"/>
+                <a:ea typeface="맑은 고딕" charset="0"/>
+              </a:rPr>
+              <a:t>입력</a:t>
+            </a:r>
+            <a:endParaRPr lang="ko-KR" altLang="en-US" sz="1800">
+              <a:solidFill>
+                <a:schemeClr val="accent1">
+                  <a:lumMod val="50000"/>
+                  <a:lumOff val="0"/>
+                </a:schemeClr>
+              </a:solidFill>
+              <a:latin typeface="맑은 고딕" charset="0"/>
+              <a:ea typeface="맑은 고딕" charset="0"/>
+            </a:endParaRPr>
+          </a:p>
+        </p:txBody>
+      </p:sp>
+      <p:sp>
+        <p:nvSpPr>
+          <p:cNvPr id="28" name="텍스트 상자 45"/>
+          <p:cNvSpPr txBox="1">
+            <a:spLocks/>
+          </p:cNvSpPr>
+          <p:nvPr/>
+        </p:nvSpPr>
+        <p:spPr>
+          <a:xfrm rot="0">
+            <a:off x="5988685" y="3698240"/>
+            <a:ext cx="630555" cy="370205"/>
+          </a:xfrm>
+          <a:prstGeom prst="rect"/>
+          <a:noFill/>
+          <a:ln w="0" cap="flat" cmpd="sng">
+            <a:solidFill>
+              <a:srgbClr val="FFFFFF">
+                <a:alpha val="100000"/>
+              </a:srgbClr>
+            </a:solidFill>
+            <a:prstDash/>
+          </a:ln>
+        </p:spPr>
+        <p:txBody>
+          <a:bodyPr wrap="square" lIns="89535" tIns="46355" rIns="89535" bIns="46355" vert="horz" anchor="t">
+            <a:spAutoFit/>
+          </a:bodyPr>
+          <a:lstStyle/>
+          <a:p>
+            <a:pPr marL="0" indent="0" algn="l" hangingPunct="1"/>
+            <a:r>
+              <a:rPr lang="ko-KR" sz="1800">
+                <a:latin typeface="맑은 고딕" charset="0"/>
+                <a:ea typeface="맑은 고딕" charset="0"/>
+              </a:rPr>
+              <a:t>p</a:t>
+            </a:r>
+            <a:r>
+              <a:rPr lang="ko-KR" sz="1800">
+                <a:latin typeface="맑은 고딕" charset="0"/>
+                <a:ea typeface="맑은 고딕" charset="0"/>
+              </a:rPr>
+              <a:t>ass</a:t>
+            </a:r>
+            <a:endParaRPr lang="ko-KR" altLang="en-US" sz="1800">
+              <a:latin typeface="맑은 고딕" charset="0"/>
+              <a:ea typeface="맑은 고딕" charset="0"/>
+            </a:endParaRPr>
+          </a:p>
+        </p:txBody>
+      </p:sp>
+      <p:sp>
+        <p:nvSpPr>
+          <p:cNvPr id="29" name="도형 46"/>
+          <p:cNvSpPr>
+            <a:spLocks/>
+          </p:cNvSpPr>
+          <p:nvPr/>
+        </p:nvSpPr>
+        <p:spPr>
+          <a:xfrm rot="0">
+            <a:off x="6341110" y="4860925"/>
+            <a:ext cx="909320" cy="386080"/>
+          </a:xfrm>
+          <a:prstGeom prst="rect"/>
+          <a:solidFill>
+            <a:schemeClr val="tx1"/>
+          </a:solidFill>
+        </p:spPr>
+        <p:style>
+          <a:lnRef idx="2">
+            <a:schemeClr val="accent1">
+              <a:shade val="50000"/>
+            </a:schemeClr>
+          </a:lnRef>
+          <a:fillRef idx="1">
+            <a:schemeClr val="accent1"/>
+          </a:fillRef>
+          <a:effectRef idx="0">
+            <a:schemeClr val="accent1"/>
+          </a:effectRef>
+          <a:fontRef idx="minor">
+            <a:schemeClr val="lt1"/>
+          </a:fontRef>
+        </p:style>
+        <p:txBody>
+          <a:bodyPr wrap="square" lIns="91440" tIns="45720" rIns="91440" bIns="45720" vert="horz" anchor="ctr">
+            <a:noAutofit/>
+          </a:bodyPr>
+          <a:lstStyle/>
+          <a:p>
+            <a:pPr marL="0" indent="0" algn="ctr" hangingPunct="1"/>
+            <a:r>
+              <a:rPr lang="ko-KR" sz="1800">
+                <a:latin typeface="맑은 고딕" charset="0"/>
+                <a:ea typeface="맑은 고딕" charset="0"/>
+              </a:rPr>
+              <a:t>로그인</a:t>
+            </a:r>
+            <a:endParaRPr lang="ko-KR" altLang="en-US" sz="1800">
+              <a:latin typeface="맑은 고딕" charset="0"/>
+              <a:ea typeface="맑은 고딕" charset="0"/>
+            </a:endParaRPr>
+          </a:p>
+        </p:txBody>
+      </p:sp>
+      <p:sp>
+        <p:nvSpPr>
+          <p:cNvPr id="30" name="도형 47"/>
+          <p:cNvSpPr>
+            <a:spLocks/>
+          </p:cNvSpPr>
+          <p:nvPr/>
+        </p:nvSpPr>
+        <p:spPr>
+          <a:xfrm rot="0">
+            <a:off x="7391400" y="4863465"/>
+            <a:ext cx="909320" cy="386080"/>
+          </a:xfrm>
+          <a:prstGeom prst="rect"/>
+          <a:solidFill>
+            <a:schemeClr val="tx1"/>
+          </a:solidFill>
+        </p:spPr>
+        <p:style>
+          <a:lnRef idx="2">
+            <a:schemeClr val="accent1">
+              <a:shade val="50000"/>
+            </a:schemeClr>
+          </a:lnRef>
+          <a:fillRef idx="1">
+            <a:schemeClr val="accent1"/>
+          </a:fillRef>
+          <a:effectRef idx="0">
+            <a:schemeClr val="accent1"/>
+          </a:effectRef>
+          <a:fontRef idx="minor">
+            <a:schemeClr val="lt1"/>
+          </a:fontRef>
+        </p:style>
+        <p:txBody>
+          <a:bodyPr wrap="square" lIns="91440" tIns="45720" rIns="91440" bIns="45720" vert="horz" anchor="ctr">
+            <a:noAutofit/>
+          </a:bodyPr>
+          <a:lstStyle/>
+          <a:p>
+            <a:pPr marL="0" indent="0" algn="ctr" hangingPunct="1"/>
+            <a:r>
               <a:rPr sz="1800">
                 <a:latin typeface="맑은 고딕" charset="0"/>
                 <a:ea typeface="맑은 고딕" charset="0"/>
               </a:rPr>
-              <a:t>가격</a:t>
-            </a:r>
-            <a:r>
-              <a:rPr lang="ko-KR" sz="1800">
-                <a:latin typeface="맑은 고딕" charset="0"/>
-                <a:ea typeface="맑은 고딕" charset="0"/>
-              </a:rPr>
-              <a:t> </a:t>
-            </a:r>
-            <a:r>
-              <a:rPr lang="ko-KR" sz="1800">
-                <a:latin typeface="맑은 고딕" charset="0"/>
-                <a:ea typeface="맑은 고딕" charset="0"/>
-              </a:rPr>
-              <a:t>예측</a:t>
+              <a:t>취소</a:t>
             </a:r>
             <a:endParaRPr lang="ko-KR" altLang="en-US" sz="1800">
               <a:latin typeface="맑은 고딕" charset="0"/>
@@ -4561,13 +5492,6 @@
       <p:transition spd="slow"/>
     </mc:Fallback>
   </mc:AlternateContent>
-  <p:timing>
-    <p:tnLst>
-      <p:par>
-        <p:cTn id="1" dur="indefinite" restart="never" nodeType="tmRoot"/>
-      </p:par>
-    </p:tnLst>
-  </p:timing>
 </p:sld>
 </file>
 
@@ -4590,7 +5514,7 @@
       </p:grpSpPr>
       <p:sp>
         <p:nvSpPr>
-          <p:cNvPr id="2" name="도형 2"/>
+          <p:cNvPr id="2" name="도형 1"/>
           <p:cNvSpPr>
             <a:spLocks/>
           </p:cNvSpPr>
@@ -4598,8 +5522,8 @@
         </p:nvSpPr>
         <p:spPr>
           <a:xfrm rot="0">
-            <a:off x="1087755" y="1016635"/>
-            <a:ext cx="9412605" cy="4979670"/>
+            <a:off x="1115695" y="977265"/>
+            <a:ext cx="9413240" cy="4980305"/>
           </a:xfrm>
           <a:prstGeom prst="rect"/>
           <a:solidFill>
@@ -4644,482 +5568,29 @@
       </p:sp>
       <p:sp>
         <p:nvSpPr>
-          <p:cNvPr id="3" name="텍스트 상자 5"/>
-          <p:cNvSpPr txBox="1">
+          <p:cNvPr id="4" name="도형 6"/>
+          <p:cNvSpPr>
             <a:spLocks/>
           </p:cNvSpPr>
           <p:nvPr/>
         </p:nvSpPr>
         <p:spPr>
           <a:xfrm rot="0">
-            <a:off x="1838960" y="1875790"/>
-            <a:ext cx="2620010" cy="370840"/>
+            <a:off x="1125855" y="977265"/>
+            <a:ext cx="9401175" cy="800100"/>
           </a:xfrm>
           <a:prstGeom prst="rect"/>
-          <a:noFill/>
-          <a:ln w="19050" cap="flat" cmpd="sng">
+          <a:solidFill>
+            <a:schemeClr val="bg1"/>
+          </a:solidFill>
+          <a:ln w="12700" cap="flat" cmpd="sng">
             <a:solidFill>
-              <a:schemeClr val="bg1">
+              <a:schemeClr val="tx1">
                 <a:alpha val="100000"/>
               </a:schemeClr>
             </a:solidFill>
             <a:prstDash val="solid"/>
-            <a:round/>
           </a:ln>
-        </p:spPr>
-        <p:txBody>
-          <a:bodyPr wrap="square" lIns="89535" tIns="46355" rIns="89535" bIns="46355" numCol="1" vert="horz" anchor="t">
-            <a:spAutoFit/>
-          </a:bodyPr>
-          <a:lstStyle/>
-          <a:p>
-            <a:pPr marL="0" indent="0" algn="l" hangingPunct="1">
-              <a:buFontTx/>
-              <a:buNone/>
-            </a:pPr>
-            <a:r>
-              <a:rPr sz="1800">
-                <a:latin typeface="맑은 고딕" charset="0"/>
-                <a:ea typeface="맑은 고딕" charset="0"/>
-              </a:rPr>
-              <a:t>스마트팜 </a:t>
-            </a:r>
-            <a:r>
-              <a:rPr lang="ko-KR" sz="1800">
-                <a:latin typeface="맑은 고딕" charset="0"/>
-                <a:ea typeface="맑은 고딕" charset="0"/>
-              </a:rPr>
-              <a:t>AI</a:t>
-            </a:r>
-            <a:r>
-              <a:rPr lang="ko-KR" sz="1800">
-                <a:latin typeface="맑은 고딕" charset="0"/>
-                <a:ea typeface="맑은 고딕" charset="0"/>
-              </a:rPr>
-              <a:t> </a:t>
-            </a:r>
-            <a:r>
-              <a:rPr lang="ko-KR" sz="1800">
-                <a:latin typeface="맑은 고딕" charset="0"/>
-                <a:ea typeface="맑은 고딕" charset="0"/>
-              </a:rPr>
-              <a:t>환경플랫폼</a:t>
-            </a:r>
-            <a:endParaRPr lang="ko-KR" altLang="en-US" sz="1800">
-              <a:latin typeface="맑은 고딕" charset="0"/>
-              <a:ea typeface="맑은 고딕" charset="0"/>
-            </a:endParaRPr>
-          </a:p>
-        </p:txBody>
-      </p:sp>
-      <p:sp>
-        <p:nvSpPr>
-          <p:cNvPr id="4" name="텍스트 상자 6"/>
-          <p:cNvSpPr txBox="1">
-            <a:spLocks/>
-          </p:cNvSpPr>
-          <p:nvPr/>
-        </p:nvSpPr>
-        <p:spPr>
-          <a:xfrm rot="0">
-            <a:off x="2082165" y="2429510"/>
-            <a:ext cx="2089150" cy="1477645"/>
-          </a:xfrm>
-          <a:prstGeom prst="rect"/>
-          <a:noFill/>
-          <a:ln w="19050" cap="flat" cmpd="sng">
-            <a:solidFill>
-              <a:schemeClr val="bg1">
-                <a:alpha val="100000"/>
-              </a:schemeClr>
-            </a:solidFill>
-            <a:prstDash val="solid"/>
-            <a:round/>
-          </a:ln>
-        </p:spPr>
-        <p:txBody>
-          <a:bodyPr wrap="none" lIns="89535" tIns="46355" rIns="89535" bIns="46355" numCol="1" vert="horz" anchor="t">
-            <a:spAutoFit/>
-          </a:bodyPr>
-          <a:lstStyle/>
-          <a:p>
-            <a:pPr marL="0" indent="0" algn="l" hangingPunct="1">
-              <a:buFontTx/>
-              <a:buNone/>
-            </a:pPr>
-            <a:r>
-              <a:rPr sz="1800">
-                <a:solidFill>
-                  <a:schemeClr val="bg1"/>
-                </a:solidFill>
-                <a:latin typeface="맑은 고딕" charset="0"/>
-                <a:ea typeface="맑은 고딕" charset="0"/>
-              </a:rPr>
-              <a:t>스마</a:t>
-            </a:r>
-            <a:r>
-              <a:rPr lang="ko-KR" sz="1800">
-                <a:solidFill>
-                  <a:schemeClr val="bg1"/>
-                </a:solidFill>
-                <a:latin typeface="맑은 고딕" charset="0"/>
-                <a:ea typeface="맑은 고딕" charset="0"/>
-              </a:rPr>
-              <a:t>트팜</a:t>
-            </a:r>
-            <a:r>
-              <a:rPr lang="ko-KR" sz="1800">
-                <a:solidFill>
-                  <a:schemeClr val="bg1"/>
-                </a:solidFill>
-                <a:latin typeface="맑은 고딕" charset="0"/>
-                <a:ea typeface="맑은 고딕" charset="0"/>
-              </a:rPr>
-              <a:t> </a:t>
-            </a:r>
-            <a:r>
-              <a:rPr lang="ko-KR" sz="1800">
-                <a:solidFill>
-                  <a:schemeClr val="bg1"/>
-                </a:solidFill>
-                <a:latin typeface="맑은 고딕" charset="0"/>
-                <a:ea typeface="맑은 고딕" charset="0"/>
-              </a:rPr>
-              <a:t>대시보드</a:t>
-            </a:r>
-            <a:endParaRPr lang="ko-KR" altLang="en-US" sz="1800">
-              <a:solidFill>
-                <a:schemeClr val="bg1"/>
-              </a:solidFill>
-              <a:latin typeface="맑은 고딕" charset="0"/>
-              <a:ea typeface="맑은 고딕" charset="0"/>
-            </a:endParaRPr>
-          </a:p>
-          <a:p>
-            <a:pPr marL="0" indent="0" algn="l" hangingPunct="1">
-              <a:buFontTx/>
-              <a:buNone/>
-            </a:pPr>
-            <a:endParaRPr lang="ko-KR" altLang="en-US" sz="1800">
-              <a:solidFill>
-                <a:schemeClr val="bg1"/>
-              </a:solidFill>
-              <a:latin typeface="맑은 고딕" charset="0"/>
-              <a:ea typeface="맑은 고딕" charset="0"/>
-            </a:endParaRPr>
-          </a:p>
-          <a:p>
-            <a:pPr marL="0" indent="0" algn="l" hangingPunct="1">
-              <a:buFontTx/>
-              <a:buNone/>
-            </a:pPr>
-            <a:r>
-              <a:rPr lang="ko-KR" sz="1800">
-                <a:solidFill>
-                  <a:schemeClr val="bg1"/>
-                </a:solidFill>
-                <a:latin typeface="맑은 고딕" charset="0"/>
-                <a:ea typeface="맑은 고딕" charset="0"/>
-              </a:rPr>
-              <a:t>데이터 분석</a:t>
-            </a:r>
-            <a:endParaRPr lang="ko-KR" altLang="en-US" sz="1800">
-              <a:solidFill>
-                <a:schemeClr val="bg1"/>
-              </a:solidFill>
-              <a:latin typeface="맑은 고딕" charset="0"/>
-              <a:ea typeface="맑은 고딕" charset="0"/>
-            </a:endParaRPr>
-          </a:p>
-          <a:p>
-            <a:pPr marL="0" indent="0" algn="l" hangingPunct="1">
-              <a:buFontTx/>
-              <a:buNone/>
-            </a:pPr>
-            <a:endParaRPr lang="ko-KR" altLang="en-US" sz="1800">
-              <a:solidFill>
-                <a:schemeClr val="bg1"/>
-              </a:solidFill>
-              <a:latin typeface="맑은 고딕" charset="0"/>
-              <a:ea typeface="맑은 고딕" charset="0"/>
-            </a:endParaRPr>
-          </a:p>
-          <a:p>
-            <a:pPr marL="0" indent="0" algn="l" hangingPunct="1">
-              <a:buFontTx/>
-              <a:buNone/>
-            </a:pPr>
-            <a:r>
-              <a:rPr lang="ko-KR" sz="1800">
-                <a:solidFill>
-                  <a:schemeClr val="bg1"/>
-                </a:solidFill>
-                <a:latin typeface="맑은 고딕" charset="0"/>
-                <a:ea typeface="맑은 고딕" charset="0"/>
-              </a:rPr>
-              <a:t>가격 예측</a:t>
-            </a:r>
-            <a:endParaRPr lang="ko-KR" altLang="en-US" sz="1800">
-              <a:solidFill>
-                <a:schemeClr val="bg1"/>
-              </a:solidFill>
-              <a:latin typeface="맑은 고딕" charset="0"/>
-              <a:ea typeface="맑은 고딕" charset="0"/>
-            </a:endParaRPr>
-          </a:p>
-        </p:txBody>
-      </p:sp>
-      <p:sp>
-        <p:nvSpPr>
-          <p:cNvPr id="7" name="텍스트 상자 7"/>
-          <p:cNvSpPr txBox="1">
-            <a:spLocks/>
-          </p:cNvSpPr>
-          <p:nvPr/>
-        </p:nvSpPr>
-        <p:spPr>
-          <a:xfrm rot="0">
-            <a:off x="1974850" y="4311650"/>
-            <a:ext cx="2089150" cy="647065"/>
-          </a:xfrm>
-          <a:prstGeom prst="rect"/>
-          <a:noFill/>
-          <a:ln w="19050" cap="flat" cmpd="sng">
-            <a:solidFill>
-              <a:schemeClr val="bg1">
-                <a:alpha val="100000"/>
-              </a:schemeClr>
-            </a:solidFill>
-            <a:prstDash val="solid"/>
-            <a:round/>
-          </a:ln>
-        </p:spPr>
-        <p:txBody>
-          <a:bodyPr wrap="none" lIns="89535" tIns="46355" rIns="89535" bIns="46355" numCol="1" vert="horz" anchor="t">
-            <a:spAutoFit/>
-          </a:bodyPr>
-          <a:lstStyle/>
-          <a:p>
-            <a:pPr marL="0" indent="0" algn="l" hangingPunct="1">
-              <a:buFontTx/>
-              <a:buNone/>
-            </a:pPr>
-            <a:r>
-              <a:rPr lang="ko-KR" sz="1800">
-                <a:solidFill>
-                  <a:schemeClr val="bg1"/>
-                </a:solidFill>
-                <a:latin typeface="맑은 고딕" charset="0"/>
-                <a:ea typeface="맑은 고딕" charset="0"/>
-              </a:rPr>
-              <a:t>왼쪽 </a:t>
-            </a:r>
-            <a:r>
-              <a:rPr lang="ko-KR" sz="1800">
-                <a:solidFill>
-                  <a:schemeClr val="bg1"/>
-                </a:solidFill>
-                <a:latin typeface="맑은 고딕" charset="0"/>
-                <a:ea typeface="맑은 고딕" charset="0"/>
-              </a:rPr>
-              <a:t>카테고리나 </a:t>
-            </a:r>
-            <a:endParaRPr lang="ko-KR" altLang="en-US" sz="1800">
-              <a:solidFill>
-                <a:schemeClr val="bg1"/>
-              </a:solidFill>
-              <a:latin typeface="맑은 고딕" charset="0"/>
-              <a:ea typeface="맑은 고딕" charset="0"/>
-            </a:endParaRPr>
-          </a:p>
-          <a:p>
-            <a:pPr marL="0" indent="0" algn="l" hangingPunct="1">
-              <a:buFontTx/>
-              <a:buNone/>
-            </a:pPr>
-            <a:r>
-              <a:rPr lang="ko-KR" sz="1800">
-                <a:solidFill>
-                  <a:schemeClr val="bg1"/>
-                </a:solidFill>
-                <a:latin typeface="맑은 고딕" charset="0"/>
-                <a:ea typeface="맑은 고딕" charset="0"/>
-              </a:rPr>
-              <a:t>슬라이드</a:t>
-            </a:r>
-            <a:r>
-              <a:rPr lang="ko-KR" sz="1800">
-                <a:solidFill>
-                  <a:schemeClr val="bg1"/>
-                </a:solidFill>
-                <a:latin typeface="맑은 고딕" charset="0"/>
-                <a:ea typeface="맑은 고딕" charset="0"/>
-              </a:rPr>
-              <a:t>메뉴 분류</a:t>
-            </a:r>
-            <a:endParaRPr lang="ko-KR" altLang="en-US" sz="1800">
-              <a:solidFill>
-                <a:schemeClr val="bg1"/>
-              </a:solidFill>
-              <a:latin typeface="맑은 고딕" charset="0"/>
-              <a:ea typeface="맑은 고딕" charset="0"/>
-            </a:endParaRPr>
-          </a:p>
-        </p:txBody>
-      </p:sp>
-      <p:cxnSp>
-        <p:nvCxnSpPr>
-          <p:cNvPr id="8" name="도형 8"/>
-          <p:cNvCxnSpPr/>
-          <p:nvPr/>
-        </p:nvCxnSpPr>
-        <p:spPr>
-          <a:xfrm rot="0">
-            <a:off x="3153410" y="3950970"/>
-            <a:ext cx="7620" cy="345440"/>
-          </a:xfrm>
-          <a:prstGeom prst="straightConnector1"/>
-          <a:ln w="6350" cap="flat" cmpd="sng">
-            <a:prstDash/>
-            <a:tailEnd type="triangle" w="med" len="med"/>
-          </a:ln>
-        </p:spPr>
-        <p:style>
-          <a:lnRef idx="1">
-            <a:schemeClr val="dk1"/>
-          </a:lnRef>
-          <a:fillRef idx="0">
-            <a:schemeClr val="dk1"/>
-          </a:fillRef>
-          <a:effectRef idx="0">
-            <a:schemeClr val="dk1"/>
-          </a:effectRef>
-          <a:fontRef idx="minor">
-            <a:schemeClr val="tx1"/>
-          </a:fontRef>
-        </p:style>
-      </p:cxnSp>
-      <p:sp>
-        <p:nvSpPr>
-          <p:cNvPr id="9" name="텍스트 상자 10"/>
-          <p:cNvSpPr txBox="1">
-            <a:spLocks/>
-          </p:cNvSpPr>
-          <p:nvPr/>
-        </p:nvSpPr>
-        <p:spPr>
-          <a:xfrm rot="0">
-            <a:off x="5243195" y="1797050"/>
-            <a:ext cx="1094740" cy="370840"/>
-          </a:xfrm>
-          <a:prstGeom prst="rect"/>
-          <a:noFill/>
-          <a:ln w="19050" cap="flat" cmpd="sng">
-            <a:solidFill>
-              <a:schemeClr val="bg1">
-                <a:alpha val="100000"/>
-              </a:schemeClr>
-            </a:solidFill>
-            <a:prstDash val="solid"/>
-            <a:round/>
-          </a:ln>
-        </p:spPr>
-        <p:txBody>
-          <a:bodyPr wrap="none" lIns="89535" tIns="46355" rIns="89535" bIns="46355" numCol="1" vert="horz" anchor="t">
-            <a:spAutoFit/>
-          </a:bodyPr>
-          <a:lstStyle/>
-          <a:p>
-            <a:pPr marL="0" indent="0" algn="l" hangingPunct="1">
-              <a:buFontTx/>
-              <a:buNone/>
-            </a:pPr>
-            <a:r>
-              <a:rPr lang="ko-KR" sz="1800">
-                <a:latin typeface="맑은 고딕" charset="0"/>
-                <a:ea typeface="맑은 고딕" charset="0"/>
-              </a:rPr>
-              <a:t>대시보드</a:t>
-            </a:r>
-            <a:endParaRPr lang="ko-KR" altLang="en-US" sz="1800">
-              <a:latin typeface="맑은 고딕" charset="0"/>
-              <a:ea typeface="맑은 고딕" charset="0"/>
-            </a:endParaRPr>
-          </a:p>
-        </p:txBody>
-      </p:sp>
-      <p:sp>
-        <p:nvSpPr>
-          <p:cNvPr id="10" name="텍스트 상자 12"/>
-          <p:cNvSpPr txBox="1">
-            <a:spLocks/>
-          </p:cNvSpPr>
-          <p:nvPr/>
-        </p:nvSpPr>
-        <p:spPr>
-          <a:xfrm rot="0">
-            <a:off x="5026660" y="2300605"/>
-            <a:ext cx="3002915" cy="370840"/>
-          </a:xfrm>
-          <a:prstGeom prst="rect"/>
-          <a:noFill/>
-          <a:ln w="19050" cap="flat" cmpd="sng">
-            <a:solidFill>
-              <a:schemeClr val="bg1">
-                <a:alpha val="100000"/>
-              </a:schemeClr>
-            </a:solidFill>
-            <a:prstDash val="solid"/>
-            <a:round/>
-          </a:ln>
-        </p:spPr>
-        <p:txBody>
-          <a:bodyPr wrap="none" lIns="89535" tIns="46355" rIns="89535" bIns="46355" numCol="1" vert="horz" anchor="t">
-            <a:spAutoFit/>
-          </a:bodyPr>
-          <a:lstStyle/>
-          <a:p>
-            <a:pPr marL="0" indent="0" algn="l" hangingPunct="1">
-              <a:buFontTx/>
-              <a:buNone/>
-            </a:pPr>
-            <a:r>
-              <a:rPr lang="ko-KR" sz="1800">
-                <a:solidFill>
-                  <a:schemeClr val="bg1"/>
-                </a:solidFill>
-                <a:latin typeface="맑은 고딕" charset="0"/>
-                <a:ea typeface="맑은 고딕" charset="0"/>
-              </a:rPr>
-              <a:t>스마트팜 현황 한눈에 보기!</a:t>
-            </a:r>
-            <a:endParaRPr lang="ko-KR" altLang="en-US" sz="1800">
-              <a:solidFill>
-                <a:schemeClr val="bg1"/>
-              </a:solidFill>
-              <a:latin typeface="맑은 고딕" charset="0"/>
-              <a:ea typeface="맑은 고딕" charset="0"/>
-            </a:endParaRPr>
-          </a:p>
-        </p:txBody>
-      </p:sp>
-      <p:sp>
-        <p:nvSpPr>
-          <p:cNvPr id="11" name="도형 13"/>
-          <p:cNvSpPr>
-            <a:spLocks/>
-          </p:cNvSpPr>
-          <p:nvPr/>
-        </p:nvSpPr>
-        <p:spPr>
-          <a:xfrm rot="0">
-            <a:off x="5184140" y="2853690"/>
-            <a:ext cx="879475" cy="652145"/>
-          </a:xfrm>
-          <a:prstGeom prst="rect"/>
-          <a:solidFill>
-            <a:schemeClr val="bg1"/>
-          </a:solidFill>
         </p:spPr>
         <p:style>
           <a:lnRef idx="2">
@@ -5153,7 +5624,7 @@
       </p:sp>
       <p:sp>
         <p:nvSpPr>
-          <p:cNvPr id="12" name="도형 15"/>
+          <p:cNvPr id="5" name="도형 10"/>
           <p:cNvSpPr>
             <a:spLocks/>
           </p:cNvSpPr>
@@ -5161,13 +5632,10 @@
         </p:nvSpPr>
         <p:spPr>
           <a:xfrm rot="0">
-            <a:off x="6381750" y="2856230"/>
-            <a:ext cx="879475" cy="652145"/>
+            <a:off x="6812915" y="1203960"/>
+            <a:ext cx="2203450" cy="445770"/>
           </a:xfrm>
           <a:prstGeom prst="rect"/>
-          <a:solidFill>
-            <a:schemeClr val="bg1"/>
-          </a:solidFill>
         </p:spPr>
         <p:style>
           <a:lnRef idx="2">
@@ -5186,22 +5654,32 @@
           </a:fontRef>
         </p:style>
         <p:txBody>
-          <a:bodyPr wrap="square" lIns="91440" tIns="45720" rIns="91440" bIns="45720" vert="horz" anchor="ctr">
+          <a:bodyPr wrap="square" lIns="91440" tIns="45720" rIns="91440" bIns="45720" numCol="1" vert="horz" anchor="ctr">
             <a:noAutofit/>
           </a:bodyPr>
           <a:lstStyle/>
           <a:p>
-            <a:pPr marL="0" indent="0" algn="ctr" hangingPunct="1"/>
-            <a:endParaRPr lang="ko-KR" altLang="en-US" sz="1800">
-              <a:latin typeface="맑은 고딕" charset="0"/>
-              <a:ea typeface="맑은 고딕" charset="0"/>
-            </a:endParaRPr>
-          </a:p>
-        </p:txBody>
-      </p:sp>
-      <p:sp>
-        <p:nvSpPr>
-          <p:cNvPr id="13" name="도형 16"/>
+            <a:pPr marL="0" indent="0" algn="ctr" hangingPunct="1">
+              <a:buFontTx/>
+              <a:buNone/>
+            </a:pPr>
+            <a:r>
+              <a:rPr lang="ko-KR" sz="1800">
+                <a:latin typeface="맑은 고딕" charset="0"/>
+                <a:ea typeface="맑은 고딕" charset="0"/>
+              </a:rPr>
+              <a:t>Snss님 반갑습니다</a:t>
+            </a:r>
+            <a:endParaRPr lang="ko-KR" altLang="en-US" sz="1800">
+              <a:latin typeface="맑은 고딕" charset="0"/>
+              <a:ea typeface="맑은 고딕" charset="0"/>
+            </a:endParaRPr>
+          </a:p>
+        </p:txBody>
+      </p:sp>
+      <p:sp>
+        <p:nvSpPr>
+          <p:cNvPr id="6" name="도형 11"/>
           <p:cNvSpPr>
             <a:spLocks/>
           </p:cNvSpPr>
@@ -5209,12 +5687,12 @@
         </p:nvSpPr>
         <p:spPr>
           <a:xfrm rot="0">
-            <a:off x="7588885" y="2849245"/>
-            <a:ext cx="879475" cy="652145"/>
+            <a:off x="9143365" y="1184275"/>
+            <a:ext cx="1146810" cy="465455"/>
           </a:xfrm>
           <a:prstGeom prst="rect"/>
           <a:solidFill>
-            <a:schemeClr val="bg1"/>
+            <a:schemeClr val="tx1"/>
           </a:solidFill>
         </p:spPr>
         <p:style>
@@ -5234,22 +5712,39 @@
           </a:fontRef>
         </p:style>
         <p:txBody>
-          <a:bodyPr wrap="square" lIns="91440" tIns="45720" rIns="91440" bIns="45720" vert="horz" anchor="ctr">
+          <a:bodyPr wrap="square" lIns="91440" tIns="45720" rIns="91440" bIns="45720" numCol="1" vert="horz" anchor="ctr">
             <a:noAutofit/>
           </a:bodyPr>
           <a:lstStyle/>
           <a:p>
-            <a:pPr marL="0" indent="0" algn="ctr" hangingPunct="1"/>
-            <a:endParaRPr lang="ko-KR" altLang="en-US" sz="1800">
-              <a:latin typeface="맑은 고딕" charset="0"/>
-              <a:ea typeface="맑은 고딕" charset="0"/>
-            </a:endParaRPr>
-          </a:p>
-        </p:txBody>
-      </p:sp>
-      <p:sp>
-        <p:nvSpPr>
-          <p:cNvPr id="14" name="도형 17"/>
+            <a:pPr marL="0" indent="0" algn="ctr" hangingPunct="1">
+              <a:buFontTx/>
+              <a:buNone/>
+            </a:pPr>
+            <a:r>
+              <a:rPr sz="1800">
+                <a:latin typeface="맑은 고딕" charset="0"/>
+                <a:ea typeface="맑은 고딕" charset="0"/>
+              </a:rPr>
+              <a:t>로그</a:t>
+            </a:r>
+            <a:r>
+              <a:rPr sz="1800">
+                <a:latin typeface="맑은 고딕" charset="0"/>
+                <a:ea typeface="맑은 고딕" charset="0"/>
+              </a:rPr>
+              <a:t>아웃</a:t>
+            </a:r>
+            <a:endParaRPr lang="ko-KR" altLang="en-US" sz="1800">
+              <a:latin typeface="맑은 고딕" charset="0"/>
+              <a:ea typeface="맑은 고딕" charset="0"/>
+            </a:endParaRPr>
+          </a:p>
+        </p:txBody>
+      </p:sp>
+      <p:sp>
+        <p:nvSpPr>
+          <p:cNvPr id="7" name="도형 17"/>
           <p:cNvSpPr>
             <a:spLocks/>
           </p:cNvSpPr>
@@ -5257,12 +5752,12 @@
         </p:nvSpPr>
         <p:spPr>
           <a:xfrm rot="0">
-            <a:off x="8786495" y="2851785"/>
-            <a:ext cx="879475" cy="652145"/>
+            <a:off x="1283970" y="1144905"/>
+            <a:ext cx="1067435" cy="544830"/>
           </a:xfrm>
           <a:prstGeom prst="rect"/>
           <a:solidFill>
-            <a:schemeClr val="bg1"/>
+            <a:schemeClr val="tx1"/>
           </a:solidFill>
         </p:spPr>
         <p:style>
@@ -5282,22 +5777,32 @@
           </a:fontRef>
         </p:style>
         <p:txBody>
-          <a:bodyPr wrap="square" lIns="91440" tIns="45720" rIns="91440" bIns="45720" vert="horz" anchor="ctr">
+          <a:bodyPr wrap="square" lIns="91440" tIns="45720" rIns="91440" bIns="45720" numCol="1" vert="horz" anchor="ctr">
             <a:noAutofit/>
           </a:bodyPr>
           <a:lstStyle/>
           <a:p>
-            <a:pPr marL="0" indent="0" algn="ctr" hangingPunct="1"/>
-            <a:endParaRPr lang="ko-KR" altLang="en-US" sz="1800">
-              <a:latin typeface="맑은 고딕" charset="0"/>
-              <a:ea typeface="맑은 고딕" charset="0"/>
-            </a:endParaRPr>
-          </a:p>
-        </p:txBody>
-      </p:sp>
-      <p:sp>
-        <p:nvSpPr>
-          <p:cNvPr id="15" name="텍스트 상자 18"/>
+            <a:pPr marL="0" indent="0" algn="ctr" hangingPunct="1">
+              <a:buFontTx/>
+              <a:buNone/>
+            </a:pPr>
+            <a:r>
+              <a:rPr lang="ko-KR" sz="1800">
+                <a:latin typeface="맑은 고딕" charset="0"/>
+                <a:ea typeface="맑은 고딕" charset="0"/>
+              </a:rPr>
+              <a:t>Header logo</a:t>
+            </a:r>
+            <a:endParaRPr lang="ko-KR" altLang="en-US" sz="1800">
+              <a:latin typeface="맑은 고딕" charset="0"/>
+              <a:ea typeface="맑은 고딕" charset="0"/>
+            </a:endParaRPr>
+          </a:p>
+        </p:txBody>
+      </p:sp>
+      <p:sp>
+        <p:nvSpPr>
+          <p:cNvPr id="8" name="텍스트 상자 19"/>
           <p:cNvSpPr txBox="1">
             <a:spLocks/>
           </p:cNvSpPr>
@@ -5305,8 +5810,8 @@
         </p:nvSpPr>
         <p:spPr>
           <a:xfrm rot="0">
-            <a:off x="5193665" y="2941955"/>
-            <a:ext cx="306705" cy="254635"/>
+            <a:off x="2597150" y="1195070"/>
+            <a:ext cx="1094105" cy="370205"/>
           </a:xfrm>
           <a:prstGeom prst="rect"/>
           <a:noFill/>
@@ -5323,22 +5828,22 @@
           <a:p>
             <a:pPr marL="0" indent="0" algn="l" hangingPunct="1"/>
             <a:r>
-              <a:rPr sz="1050" i="0" b="0">
-                <a:latin typeface="Segoe UI Emoji" charset="0"/>
-                <a:ea typeface="ui-sans-serif" charset="0"/>
-              </a:rPr>
-              <a:t>이번 달 예상 수확량</a:t>
-            </a:r>
-            <a:endParaRPr lang="ko-KR" altLang="en-US" sz="1800">
-              <a:latin typeface="맑은 고딕" charset="0"/>
-              <a:ea typeface="맑은 고딕" charset="0"/>
-            </a:endParaRPr>
-          </a:p>
-        </p:txBody>
-      </p:sp>
-      <p:sp>
-        <p:nvSpPr>
-          <p:cNvPr id="16" name="텍스트 상자 19"/>
+              <a:rPr lang="ko-KR" sz="1800">
+                <a:latin typeface="맑은 고딕" charset="0"/>
+                <a:ea typeface="맑은 고딕" charset="0"/>
+              </a:rPr>
+              <a:t>대시보드</a:t>
+            </a:r>
+            <a:endParaRPr lang="ko-KR" altLang="en-US" sz="1800">
+              <a:latin typeface="맑은 고딕" charset="0"/>
+              <a:ea typeface="맑은 고딕" charset="0"/>
+            </a:endParaRPr>
+          </a:p>
+        </p:txBody>
+      </p:sp>
+      <p:sp>
+        <p:nvSpPr>
+          <p:cNvPr id="9" name="텍스트 상자 20"/>
           <p:cNvSpPr txBox="1">
             <a:spLocks/>
           </p:cNvSpPr>
@@ -5346,8 +5851,8 @@
         </p:nvSpPr>
         <p:spPr>
           <a:xfrm rot="0">
-            <a:off x="6391275" y="2983865"/>
-            <a:ext cx="306705" cy="254635"/>
+            <a:off x="3695700" y="1207135"/>
+            <a:ext cx="1403350" cy="370205"/>
           </a:xfrm>
           <a:prstGeom prst="rect"/>
           <a:noFill/>
@@ -5368,22 +5873,22 @@
           <a:p>
             <a:pPr marL="0" indent="0" algn="l" hangingPunct="1"/>
             <a:r>
-              <a:rPr sz="1050" i="0" b="0">
-                <a:latin typeface="Segoe UI Emoji" charset="0"/>
-                <a:ea typeface="ui-sans-serif" charset="0"/>
-              </a:rPr>
-              <a:t>평균 품질 점수</a:t>
-            </a:r>
-            <a:endParaRPr lang="ko-KR" altLang="en-US" sz="1800">
-              <a:latin typeface="맑은 고딕" charset="0"/>
-              <a:ea typeface="맑은 고딕" charset="0"/>
-            </a:endParaRPr>
-          </a:p>
-        </p:txBody>
-      </p:sp>
-      <p:sp>
-        <p:nvSpPr>
-          <p:cNvPr id="17" name="텍스트 상자 20"/>
+              <a:rPr lang="ko-KR" sz="1800">
+                <a:latin typeface="맑은 고딕" charset="0"/>
+                <a:ea typeface="맑은 고딕" charset="0"/>
+              </a:rPr>
+              <a:t>데이터 분석</a:t>
+            </a:r>
+            <a:endParaRPr lang="ko-KR" altLang="en-US" sz="1800">
+              <a:latin typeface="맑은 고딕" charset="0"/>
+              <a:ea typeface="맑은 고딕" charset="0"/>
+            </a:endParaRPr>
+          </a:p>
+        </p:txBody>
+      </p:sp>
+      <p:sp>
+        <p:nvSpPr>
+          <p:cNvPr id="10" name="텍스트 상자 21"/>
           <p:cNvSpPr txBox="1">
             <a:spLocks/>
           </p:cNvSpPr>
@@ -5391,8 +5896,8 @@
         </p:nvSpPr>
         <p:spPr>
           <a:xfrm rot="0">
-            <a:off x="7578725" y="2907665"/>
-            <a:ext cx="953770" cy="415925"/>
+            <a:off x="5071110" y="1189990"/>
+            <a:ext cx="1174750" cy="370205"/>
           </a:xfrm>
           <a:prstGeom prst="rect"/>
           <a:noFill/>
@@ -5406,58 +5911,6 @@
           </a:ln>
         </p:spPr>
         <p:txBody>
-          <a:bodyPr wrap="square" lIns="89535" tIns="46355" rIns="89535" bIns="46355" vert="horz" anchor="t">
-            <a:spAutoFit/>
-          </a:bodyPr>
-          <a:lstStyle/>
-          <a:p>
-            <a:pPr marL="0" indent="0" algn="l" hangingPunct="1"/>
-            <a:r>
-              <a:rPr sz="1050" i="0" b="0">
-                <a:latin typeface="Segoe UI Emoji" charset="0"/>
-                <a:ea typeface="ui-sans-serif" charset="0"/>
-              </a:rPr>
-              <a:t>재배식물</a:t>
-            </a:r>
-            <a:r>
-              <a:rPr sz="1050" i="0" b="0">
-                <a:latin typeface="Segoe UI Emoji" charset="0"/>
-                <a:ea typeface="ui-sans-serif" charset="0"/>
-              </a:rPr>
-              <a:t> 현재가 (소매)</a:t>
-            </a:r>
-            <a:endParaRPr lang="ko-KR" altLang="en-US" sz="1100">
-              <a:latin typeface="맑은 고딕" charset="0"/>
-              <a:ea typeface="맑은 고딕" charset="0"/>
-            </a:endParaRPr>
-          </a:p>
-        </p:txBody>
-      </p:sp>
-      <p:sp>
-        <p:nvSpPr>
-          <p:cNvPr id="18" name="텍스트 상자 21"/>
-          <p:cNvSpPr txBox="1">
-            <a:spLocks/>
-          </p:cNvSpPr>
-          <p:nvPr/>
-        </p:nvSpPr>
-        <p:spPr>
-          <a:xfrm rot="0">
-            <a:off x="8813165" y="2986405"/>
-            <a:ext cx="245745" cy="370205"/>
-          </a:xfrm>
-          <a:prstGeom prst="rect"/>
-          <a:noFill/>
-          <a:ln w="0" cap="flat" cmpd="sng">
-            <a:solidFill>
-              <a:srgbClr val="FFFFFF">
-                <a:alpha val="100000"/>
-              </a:srgbClr>
-            </a:solidFill>
-            <a:prstDash/>
-          </a:ln>
-        </p:spPr>
-        <p:txBody>
           <a:bodyPr wrap="none" lIns="89535" tIns="46355" rIns="89535" bIns="46355" vert="horz" anchor="t">
             <a:spAutoFit/>
           </a:bodyPr>
@@ -5465,29 +5918,123 @@
           <a:p>
             <a:pPr marL="0" indent="0" algn="l" hangingPunct="1"/>
             <a:r>
-              <a:rPr sz="1050" i="0" b="0">
-                <a:latin typeface="Segoe UI Emoji" charset="0"/>
-                <a:ea typeface="ui-sans-serif" charset="0"/>
-              </a:rPr>
-              <a:t>예측 수익률</a:t>
-            </a:r>
-            <a:r>
-              <a:rPr lang="ko-KR" sz="1800">
-                <a:latin typeface="맑은 고딕" charset="0"/>
-                <a:ea typeface="맑은 고딕" charset="0"/>
-              </a:rPr>
-              <a:t>!</a:t>
-            </a:r>
-            <a:endParaRPr lang="ko-KR" altLang="en-US" sz="1800">
-              <a:latin typeface="맑은 고딕" charset="0"/>
-              <a:ea typeface="맑은 고딕" charset="0"/>
-            </a:endParaRPr>
-          </a:p>
-        </p:txBody>
-      </p:sp>
-      <p:sp>
-        <p:nvSpPr>
-          <p:cNvPr id="19" name="도형 22"/>
+              <a:rPr sz="1800">
+                <a:latin typeface="맑은 고딕" charset="0"/>
+                <a:ea typeface="맑은 고딕" charset="0"/>
+              </a:rPr>
+              <a:t>가격</a:t>
+            </a:r>
+            <a:r>
+              <a:rPr lang="ko-KR" sz="1800">
+                <a:latin typeface="맑은 고딕" charset="0"/>
+                <a:ea typeface="맑은 고딕" charset="0"/>
+              </a:rPr>
+              <a:t> </a:t>
+            </a:r>
+            <a:r>
+              <a:rPr lang="ko-KR" sz="1800">
+                <a:latin typeface="맑은 고딕" charset="0"/>
+                <a:ea typeface="맑은 고딕" charset="0"/>
+              </a:rPr>
+              <a:t>예측</a:t>
+            </a:r>
+            <a:endParaRPr lang="ko-KR" altLang="en-US" sz="1800">
+              <a:latin typeface="맑은 고딕" charset="0"/>
+              <a:ea typeface="맑은 고딕" charset="0"/>
+            </a:endParaRPr>
+          </a:p>
+        </p:txBody>
+      </p:sp>
+      <p:pic>
+        <p:nvPicPr>
+          <p:cNvPr id="11" name="그림 48" descr="C:/Users/sky88/AppData/Roaming/PolarisOffice/ETemp/1972_18047344/fImage2628122541.jpeg"/>
+          <p:cNvPicPr>
+            <a:picLocks noChangeAspect="1"/>
+          </p:cNvPicPr>
+          <p:nvPr/>
+        </p:nvPicPr>
+        <p:blipFill rotWithShape="1">
+          <a:blip r:embed="rId3" cstate="print">
+            <a:extLst>
+              <a:ext uri="{28A0092B-C50C-407E-A947-70E740481C1C}">
+                <a14:useLocalDpi xmlns:a14="http://schemas.microsoft.com/office/drawing/2010/main" val="0"/>
+              </a:ext>
+            </a:extLst>
+          </a:blip>
+          <a:stretch>
+            <a:fillRect/>
+          </a:stretch>
+        </p:blipFill>
+        <p:spPr>
+          <a:xfrm rot="0">
+            <a:off x="2705100" y="2557145"/>
+            <a:ext cx="1866265" cy="1805305"/>
+          </a:xfrm>
+          <a:prstGeom prst="rect"/>
+          <a:noFill/>
+        </p:spPr>
+      </p:pic>
+      <p:pic>
+        <p:nvPicPr>
+          <p:cNvPr id="12" name="그림 49" descr="C:/Users/sky88/AppData/Roaming/PolarisOffice/ETemp/1972_18047344/fImage49762268467.jpeg"/>
+          <p:cNvPicPr>
+            <a:picLocks noChangeAspect="1"/>
+          </p:cNvPicPr>
+          <p:nvPr/>
+        </p:nvPicPr>
+        <p:blipFill rotWithShape="1">
+          <a:blip r:embed="rId4" cstate="print">
+            <a:extLst>
+              <a:ext uri="{28A0092B-C50C-407E-A947-70E740481C1C}">
+                <a14:useLocalDpi xmlns:a14="http://schemas.microsoft.com/office/drawing/2010/main" val="0"/>
+              </a:ext>
+            </a:extLst>
+          </a:blip>
+          <a:stretch>
+            <a:fillRect/>
+          </a:stretch>
+        </p:blipFill>
+        <p:spPr>
+          <a:xfrm rot="0">
+            <a:off x="6872605" y="2567305"/>
+            <a:ext cx="1965960" cy="1797685"/>
+          </a:xfrm>
+          <a:prstGeom prst="rect"/>
+          <a:noFill/>
+        </p:spPr>
+      </p:pic>
+      <p:pic>
+        <p:nvPicPr>
+          <p:cNvPr id="13" name="그림 50" descr="C:/Users/sky88/AppData/Roaming/PolarisOffice/ETemp/1972_18047344/fImage34002276334.jpeg"/>
+          <p:cNvPicPr>
+            <a:picLocks noChangeAspect="1"/>
+          </p:cNvPicPr>
+          <p:nvPr/>
+        </p:nvPicPr>
+        <p:blipFill rotWithShape="1">
+          <a:blip r:embed="rId5" cstate="print">
+            <a:extLst>
+              <a:ext uri="{28A0092B-C50C-407E-A947-70E740481C1C}">
+                <a14:useLocalDpi xmlns:a14="http://schemas.microsoft.com/office/drawing/2010/main" val="0"/>
+              </a:ext>
+            </a:extLst>
+          </a:blip>
+          <a:stretch>
+            <a:fillRect/>
+          </a:stretch>
+        </p:blipFill>
+        <p:spPr>
+          <a:xfrm rot="0">
+            <a:off x="4728845" y="2547620"/>
+            <a:ext cx="1966595" cy="1807210"/>
+          </a:xfrm>
+          <a:prstGeom prst="rect"/>
+          <a:noFill/>
+        </p:spPr>
+      </p:pic>
+      <p:sp>
+        <p:nvSpPr>
+          <p:cNvPr id="14" name="도형 51"/>
           <p:cNvSpPr>
             <a:spLocks/>
           </p:cNvSpPr>
@@ -5495,12 +6042,15 @@
         </p:nvSpPr>
         <p:spPr>
           <a:xfrm rot="0">
-            <a:off x="5105400" y="3761740"/>
-            <a:ext cx="2469515" cy="1116330"/>
-          </a:xfrm>
-          <a:prstGeom prst="rect"/>
+            <a:off x="4305300" y="4156710"/>
+            <a:ext cx="158750" cy="139065"/>
+          </a:xfrm>
+          <a:prstGeom prst="ellipse"/>
           <a:solidFill>
-            <a:schemeClr val="bg1"/>
+            <a:schemeClr val="tx1">
+              <a:lumMod val="95000"/>
+              <a:lumOff val="5000"/>
+            </a:schemeClr>
           </a:solidFill>
         </p:spPr>
         <p:style>
@@ -5535,7 +6085,7 @@
       </p:sp>
       <p:sp>
         <p:nvSpPr>
-          <p:cNvPr id="20" name="도형 24"/>
+          <p:cNvPr id="15" name="도형 53"/>
           <p:cNvSpPr>
             <a:spLocks/>
           </p:cNvSpPr>
@@ -5543,12 +6093,15 @@
         </p:nvSpPr>
         <p:spPr>
           <a:xfrm rot="0">
-            <a:off x="7853045" y="3764280"/>
-            <a:ext cx="2469515" cy="1116330"/>
-          </a:xfrm>
-          <a:prstGeom prst="rect"/>
+            <a:off x="6450965" y="4178935"/>
+            <a:ext cx="158750" cy="139065"/>
+          </a:xfrm>
+          <a:prstGeom prst="ellipse"/>
           <a:solidFill>
-            <a:schemeClr val="bg1"/>
+            <a:schemeClr val="tx1">
+              <a:lumMod val="95000"/>
+              <a:lumOff val="5000"/>
+            </a:schemeClr>
           </a:solidFill>
         </p:spPr>
         <p:style>
@@ -5583,368 +6136,23 @@
       </p:sp>
       <p:sp>
         <p:nvSpPr>
-          <p:cNvPr id="21" name="텍스트 상자 25"/>
-          <p:cNvSpPr txBox="1">
+          <p:cNvPr id="16" name="도형 54"/>
+          <p:cNvSpPr>
             <a:spLocks/>
           </p:cNvSpPr>
           <p:nvPr/>
         </p:nvSpPr>
         <p:spPr>
           <a:xfrm rot="0">
-            <a:off x="5441315" y="3909695"/>
-            <a:ext cx="1403350" cy="370205"/>
-          </a:xfrm>
-          <a:prstGeom prst="rect"/>
-          <a:noFill/>
-          <a:ln>
-            <a:noFill/>
-            <a:prstDash/>
-          </a:ln>
-        </p:spPr>
-        <p:txBody>
-          <a:bodyPr wrap="square" lIns="89535" tIns="46355" rIns="89535" bIns="46355" vert="horz" anchor="t">
-            <a:spAutoFit/>
-          </a:bodyPr>
-          <a:lstStyle/>
-          <a:p>
-            <a:pPr marL="0" indent="0" algn="l" hangingPunct="1"/>
-            <a:r>
-              <a:rPr lang="ko-KR" sz="1800">
-                <a:latin typeface="맑은 고딕" charset="0"/>
-                <a:ea typeface="맑은 고딕" charset="0"/>
-              </a:rPr>
-              <a:t>생산량 </a:t>
-            </a:r>
-            <a:r>
-              <a:rPr lang="ko-KR" sz="1800">
-                <a:latin typeface="맑은 고딕" charset="0"/>
-                <a:ea typeface="맑은 고딕" charset="0"/>
-              </a:rPr>
-              <a:t>추이</a:t>
-            </a:r>
-            <a:endParaRPr lang="ko-KR" altLang="en-US" sz="1800">
-              <a:latin typeface="맑은 고딕" charset="0"/>
-              <a:ea typeface="맑은 고딕" charset="0"/>
-            </a:endParaRPr>
-          </a:p>
-        </p:txBody>
-      </p:sp>
-      <p:sp>
-        <p:nvSpPr>
-          <p:cNvPr id="22" name="텍스트 상자 26"/>
-          <p:cNvSpPr txBox="1">
-            <a:spLocks/>
-          </p:cNvSpPr>
-          <p:nvPr/>
-        </p:nvSpPr>
-        <p:spPr>
-          <a:xfrm rot="0">
-            <a:off x="5243830" y="4284980"/>
-            <a:ext cx="1930400" cy="647065"/>
-          </a:xfrm>
-          <a:prstGeom prst="rect"/>
-          <a:noFill/>
-          <a:ln>
-            <a:noFill/>
-            <a:prstDash/>
-          </a:ln>
-        </p:spPr>
-        <p:txBody>
-          <a:bodyPr wrap="none" lIns="89535" tIns="46355" rIns="89535" bIns="46355" vert="horz" anchor="t">
-            <a:spAutoFit/>
-          </a:bodyPr>
-          <a:lstStyle/>
-          <a:p>
-            <a:pPr marL="0" indent="0">
-              <a:buFontTx/>
-              <a:buNone/>
-            </a:pPr>
-            <a:r>
-              <a:rPr lang="ko-KR" sz="1800">
-                <a:latin typeface="맑은 고딕" charset="0"/>
-                <a:ea typeface="맑은 고딕" charset="0"/>
-              </a:rPr>
-              <a:t>막대그래프 </a:t>
-            </a:r>
-            <a:r>
-              <a:rPr lang="ko-KR" sz="1800">
-                <a:latin typeface="맑은 고딕" charset="0"/>
-                <a:ea typeface="맑은 고딕" charset="0"/>
-              </a:rPr>
-              <a:t>그림</a:t>
-            </a:r>
-            <a:r>
-              <a:rPr lang="ko-KR" sz="1800">
-                <a:latin typeface="맑은 고딕" charset="0"/>
-                <a:ea typeface="맑은 고딕" charset="0"/>
-              </a:rPr>
-              <a:t>(</a:t>
-            </a:r>
-            <a:endParaRPr lang="ko-KR" altLang="en-US" sz="1800">
-              <a:latin typeface="맑은 고딕" charset="0"/>
-              <a:ea typeface="맑은 고딕" charset="0"/>
-            </a:endParaRPr>
-          </a:p>
-          <a:p>
-            <a:pPr marL="0" indent="0">
-              <a:buFontTx/>
-              <a:buNone/>
-            </a:pPr>
-            <a:r>
-              <a:rPr sz="1200" i="0" b="0">
-                <a:solidFill>
-                  <a:schemeClr val="tx1"/>
-                </a:solidFill>
-                <a:latin typeface="Segoe UI Emoji" charset="0"/>
-                <a:ea typeface="ui-sans-serif" charset="0"/>
-              </a:rPr>
-              <a:t>생산량 (kg)</a:t>
-            </a:r>
-            <a:r>
-              <a:rPr sz="1200" i="0" b="0">
-                <a:solidFill>
-                  <a:schemeClr val="tx1"/>
-                </a:solidFill>
-                <a:latin typeface="Segoe UI Emoji" charset="0"/>
-                <a:ea typeface="ui-sans-serif" charset="0"/>
-              </a:rPr>
-              <a:t>,</a:t>
-            </a:r>
-            <a:r>
-              <a:rPr lang="ko-KR" sz="1200" i="0" b="0">
-                <a:solidFill>
-                  <a:schemeClr val="tx1"/>
-                </a:solidFill>
-                <a:latin typeface="Segoe UI Emoji" charset="0"/>
-                <a:ea typeface="ui-sans-serif" charset="0"/>
-              </a:rPr>
-              <a:t> </a:t>
-            </a:r>
-            <a:r>
-              <a:rPr sz="1200" i="0" b="0">
-                <a:solidFill>
-                  <a:schemeClr val="tx1"/>
-                </a:solidFill>
-                <a:latin typeface="Segoe UI Emoji" charset="0"/>
-                <a:ea typeface="ui-sans-serif" charset="0"/>
-              </a:rPr>
-              <a:t>품질 점수</a:t>
-            </a:r>
-            <a:r>
-              <a:rPr lang="ko-KR" sz="1800">
-                <a:latin typeface="맑은 고딕" charset="0"/>
-                <a:ea typeface="맑은 고딕" charset="0"/>
-              </a:rPr>
-              <a:t>)</a:t>
-            </a:r>
-            <a:endParaRPr lang="ko-KR" altLang="en-US" sz="1800">
-              <a:latin typeface="맑은 고딕" charset="0"/>
-              <a:ea typeface="맑은 고딕" charset="0"/>
-            </a:endParaRPr>
-          </a:p>
-        </p:txBody>
-      </p:sp>
-      <p:sp>
-        <p:nvSpPr>
-          <p:cNvPr id="23" name="텍스트 상자 29"/>
-          <p:cNvSpPr txBox="1">
-            <a:spLocks/>
-          </p:cNvSpPr>
-          <p:nvPr/>
-        </p:nvSpPr>
-        <p:spPr>
-          <a:xfrm rot="0">
-            <a:off x="8050530" y="3912235"/>
-            <a:ext cx="2042160" cy="370205"/>
-          </a:xfrm>
-          <a:prstGeom prst="rect"/>
-          <a:noFill/>
-          <a:ln w="0" cap="flat" cmpd="sng">
-            <a:solidFill>
-              <a:srgbClr val="FFFFFF">
-                <a:alpha val="100000"/>
-              </a:srgbClr>
-            </a:solidFill>
-            <a:prstDash/>
-          </a:ln>
-        </p:spPr>
-        <p:txBody>
-          <a:bodyPr wrap="square" lIns="89535" tIns="46355" rIns="89535" bIns="46355" vert="horz" anchor="t">
-            <a:spAutoFit/>
-          </a:bodyPr>
-          <a:lstStyle/>
-          <a:p>
-            <a:pPr marL="0" indent="0" algn="l" hangingPunct="1"/>
-            <a:r>
-              <a:rPr lang="ko-KR" sz="1800">
-                <a:latin typeface="맑은 고딕" charset="0"/>
-                <a:ea typeface="맑은 고딕" charset="0"/>
-              </a:rPr>
-              <a:t>토마토 </a:t>
-            </a:r>
-            <a:r>
-              <a:rPr lang="ko-KR" sz="1800">
-                <a:latin typeface="맑은 고딕" charset="0"/>
-                <a:ea typeface="맑은 고딕" charset="0"/>
-              </a:rPr>
-              <a:t>가격</a:t>
-            </a:r>
-            <a:r>
-              <a:rPr lang="ko-KR" sz="1800">
-                <a:latin typeface="맑은 고딕" charset="0"/>
-                <a:ea typeface="맑은 고딕" charset="0"/>
-              </a:rPr>
-              <a:t> </a:t>
-            </a:r>
-            <a:r>
-              <a:rPr lang="ko-KR" sz="1800">
-                <a:latin typeface="맑은 고딕" charset="0"/>
-                <a:ea typeface="맑은 고딕" charset="0"/>
-              </a:rPr>
-              <a:t>추이</a:t>
-            </a:r>
-            <a:endParaRPr lang="ko-KR" altLang="en-US" sz="1800">
-              <a:latin typeface="맑은 고딕" charset="0"/>
-              <a:ea typeface="맑은 고딕" charset="0"/>
-            </a:endParaRPr>
-          </a:p>
-        </p:txBody>
-      </p:sp>
-      <p:sp>
-        <p:nvSpPr>
-          <p:cNvPr id="24" name="텍스트 상자 30"/>
-          <p:cNvSpPr txBox="1">
-            <a:spLocks/>
-          </p:cNvSpPr>
-          <p:nvPr/>
-        </p:nvSpPr>
-        <p:spPr>
-          <a:xfrm rot="0">
-            <a:off x="7961630" y="4228465"/>
-            <a:ext cx="2239645" cy="647065"/>
-          </a:xfrm>
-          <a:prstGeom prst="rect"/>
-          <a:noFill/>
-          <a:ln w="0" cap="flat" cmpd="sng">
-            <a:solidFill>
-              <a:srgbClr val="FFFFFF">
-                <a:alpha val="100000"/>
-              </a:srgbClr>
-            </a:solidFill>
-            <a:prstDash/>
-          </a:ln>
-        </p:spPr>
-        <p:txBody>
-          <a:bodyPr wrap="none" lIns="89535" tIns="46355" rIns="89535" bIns="46355" vert="horz" anchor="t">
-            <a:spAutoFit/>
-          </a:bodyPr>
-          <a:lstStyle/>
-          <a:p>
-            <a:pPr marL="0" indent="0">
-              <a:buFontTx/>
-              <a:buNone/>
-            </a:pPr>
-            <a:r>
-              <a:rPr lang="ko-KR" sz="1800">
-                <a:latin typeface="맑은 고딕" charset="0"/>
-                <a:ea typeface="맑은 고딕" charset="0"/>
-              </a:rPr>
-              <a:t>꺽은선 그래프 </a:t>
-            </a:r>
-            <a:r>
-              <a:rPr lang="ko-KR" sz="1800">
-                <a:latin typeface="맑은 고딕" charset="0"/>
-                <a:ea typeface="맑은 고딕" charset="0"/>
-              </a:rPr>
-              <a:t>그림</a:t>
-            </a:r>
-            <a:r>
-              <a:rPr lang="ko-KR" sz="1800">
-                <a:latin typeface="맑은 고딕" charset="0"/>
-                <a:ea typeface="맑은 고딕" charset="0"/>
-              </a:rPr>
-              <a:t>(</a:t>
-            </a:r>
-            <a:endParaRPr lang="ko-KR" altLang="en-US" sz="1800">
-              <a:latin typeface="맑은 고딕" charset="0"/>
-              <a:ea typeface="맑은 고딕" charset="0"/>
-            </a:endParaRPr>
-          </a:p>
-          <a:p>
-            <a:pPr marL="0" indent="0">
-              <a:buFontTx/>
-              <a:buNone/>
-            </a:pPr>
-            <a:r>
-              <a:rPr sz="1200" i="0" b="0">
-                <a:solidFill>
-                  <a:schemeClr val="tx1"/>
-                </a:solidFill>
-                <a:latin typeface="Segoe UI Emoji" charset="0"/>
-                <a:ea typeface="ui-sans-serif" charset="0"/>
-              </a:rPr>
-              <a:t>도매가 (원/kg)</a:t>
-            </a:r>
-            <a:r>
-              <a:rPr sz="1200" i="0" b="0">
-                <a:solidFill>
-                  <a:schemeClr val="tx1"/>
-                </a:solidFill>
-                <a:latin typeface="Segoe UI Emoji" charset="0"/>
-                <a:ea typeface="ui-sans-serif" charset="0"/>
-              </a:rPr>
-              <a:t>,</a:t>
-            </a:r>
-            <a:r>
-              <a:rPr lang="ko-KR" sz="1200" i="0" b="0">
-                <a:solidFill>
-                  <a:schemeClr val="tx1"/>
-                </a:solidFill>
-                <a:latin typeface="Segoe UI Emoji" charset="0"/>
-                <a:ea typeface="ui-sans-serif" charset="0"/>
-              </a:rPr>
-              <a:t> </a:t>
-            </a:r>
-            <a:r>
-              <a:rPr sz="1200" i="0" b="0">
-                <a:solidFill>
-                  <a:schemeClr val="tx1"/>
-                </a:solidFill>
-                <a:latin typeface="Segoe UI Emoji" charset="0"/>
-                <a:ea typeface="ui-sans-serif" charset="0"/>
-              </a:rPr>
-              <a:t>소매가 (원/kg</a:t>
-            </a:r>
-            <a:r>
-              <a:rPr lang="ko-KR" sz="1800">
-                <a:latin typeface="맑은 고딕" charset="0"/>
-                <a:ea typeface="맑은 고딕" charset="0"/>
-              </a:rPr>
-              <a:t>)</a:t>
-            </a:r>
-            <a:endParaRPr lang="ko-KR" altLang="en-US" sz="1800">
-              <a:latin typeface="맑은 고딕" charset="0"/>
-              <a:ea typeface="맑은 고딕" charset="0"/>
-            </a:endParaRPr>
-          </a:p>
-        </p:txBody>
-      </p:sp>
-      <p:sp>
-        <p:nvSpPr>
-          <p:cNvPr id="25" name="도형 31"/>
-          <p:cNvSpPr>
-            <a:spLocks/>
-          </p:cNvSpPr>
-          <p:nvPr/>
-        </p:nvSpPr>
-        <p:spPr>
-          <a:xfrm>
-            <a:off x="5668010" y="4975860"/>
-            <a:ext cx="3279775" cy="850900"/>
-          </a:xfrm>
-          <a:prstGeom prst="rect"/>
+            <a:off x="8586470" y="4151630"/>
+            <a:ext cx="158750" cy="139065"/>
+          </a:xfrm>
+          <a:prstGeom prst="ellipse"/>
           <a:solidFill>
-            <a:schemeClr val="bg1"/>
+            <a:schemeClr val="tx1">
+              <a:lumMod val="95000"/>
+              <a:lumOff val="5000"/>
+            </a:schemeClr>
           </a:solidFill>
         </p:spPr>
         <p:style>
@@ -5964,88 +6172,66 @@
           </a:fontRef>
         </p:style>
         <p:txBody>
-          <a:bodyPr wrap="square" lIns="91440" tIns="45720" rIns="91440" bIns="45720" numCol="1" vert="horz" anchor="ctr">
+          <a:bodyPr wrap="square" lIns="91440" tIns="45720" rIns="91440" bIns="45720" vert="horz" anchor="ctr">
             <a:noAutofit/>
           </a:bodyPr>
           <a:lstStyle/>
           <a:p>
-            <a:pPr marL="0" indent="0" algn="ctr" hangingPunct="1">
-              <a:buFontTx/>
-              <a:buNone/>
-            </a:pPr>
+            <a:pPr marL="0" indent="0" algn="ctr" hangingPunct="1"/>
+            <a:endParaRPr lang="ko-KR" altLang="en-US" sz="1800">
+              <a:latin typeface="맑은 고딕" charset="0"/>
+              <a:ea typeface="맑은 고딕" charset="0"/>
+            </a:endParaRPr>
+          </a:p>
+        </p:txBody>
+      </p:sp>
+      <p:sp>
+        <p:nvSpPr>
+          <p:cNvPr id="17" name="텍스트 상자 58"/>
+          <p:cNvSpPr txBox="1">
+            <a:spLocks/>
+          </p:cNvSpPr>
+          <p:nvPr/>
+        </p:nvSpPr>
+        <p:spPr>
+          <a:xfrm rot="0">
+            <a:off x="3011805" y="4937125"/>
+            <a:ext cx="5421630" cy="370205"/>
+          </a:xfrm>
+          <a:prstGeom prst="rect"/>
+          <a:noFill/>
+          <a:ln>
+            <a:noFill/>
+            <a:prstDash/>
+          </a:ln>
+        </p:spPr>
+        <p:txBody>
+          <a:bodyPr wrap="square" lIns="89535" tIns="46355" rIns="89535" bIns="46355" vert="horz" anchor="t">
+            <a:spAutoFit/>
+          </a:bodyPr>
+          <a:lstStyle/>
+          <a:p>
+            <a:pPr marL="0" indent="0" algn="l" hangingPunct="1"/>
             <a:r>
               <a:rPr sz="1800">
                 <a:solidFill>
-                  <a:schemeClr val="tx1"/>
+                  <a:schemeClr val="bg1"/>
                 </a:solidFill>
                 <a:latin typeface="맑은 고딕" charset="0"/>
                 <a:ea typeface="맑은 고딕" charset="0"/>
-              </a:rPr>
-              <a:t>재배</a:t>
-            </a:r>
-            <a:r>
-              <a:rPr lang="ko-KR" sz="1800">
-                <a:solidFill>
-                  <a:schemeClr val="tx1"/>
-                </a:solidFill>
-                <a:latin typeface="맑은 고딕" charset="0"/>
-                <a:ea typeface="맑은 고딕" charset="0"/>
-              </a:rPr>
-              <a:t>현황</a:t>
-            </a:r>
-            <a:r>
-              <a:rPr lang="ko-KR" sz="1800">
-                <a:solidFill>
-                  <a:schemeClr val="tx1"/>
-                </a:solidFill>
-                <a:latin typeface="맑은 고딕" charset="0"/>
-                <a:ea typeface="맑은 고딕" charset="0"/>
-              </a:rPr>
-              <a:t> </a:t>
-            </a:r>
-            <a:r>
-              <a:rPr lang="ko-KR" sz="1800">
-                <a:solidFill>
-                  <a:schemeClr val="tx1"/>
-                </a:solidFill>
-                <a:latin typeface="맑은 고딕" charset="0"/>
-                <a:ea typeface="맑은 고딕" charset="0"/>
-              </a:rPr>
-              <a:t>수확까지 일/날짜로 표시하기(</a:t>
-            </a:r>
-            <a:r>
-              <a:rPr lang="ko-KR" sz="1800">
-                <a:solidFill>
-                  <a:schemeClr val="tx1"/>
-                </a:solidFill>
-                <a:latin typeface="맑은 고딕" charset="0"/>
-                <a:ea typeface="맑은 고딕" charset="0"/>
-              </a:rPr>
-              <a:t>파프리카 </a:t>
-            </a:r>
-            <a:r>
-              <a:rPr lang="ko-KR" sz="1800">
-                <a:solidFill>
-                  <a:schemeClr val="tx1"/>
-                </a:solidFill>
-                <a:latin typeface="맑은 고딕" charset="0"/>
-                <a:ea typeface="맑은 고딕" charset="0"/>
-              </a:rPr>
-              <a:t>위주로</a:t>
-            </a:r>
-            <a:r>
-              <a:rPr lang="ko-KR" sz="1800">
-                <a:solidFill>
-                  <a:schemeClr val="tx1"/>
-                </a:solidFill>
-                <a:latin typeface="맑은 고딕" charset="0"/>
-                <a:ea typeface="맑은 고딕" charset="0"/>
-              </a:rPr>
-              <a:t>)</a:t>
+                <a:hlinkClick r:id="rId6">
+                  <a:extLst>
+                    <a:ext uri="{A12FA001-AC4F-418D-AE19-62706E023703}">
+                      <ahyp:hlinkClr xmlns:ahyp="http://schemas.microsoft.com/office/drawing/2018/hyperlinkcolor" xmlns="" val="hlink"/>
+                    </a:ext>
+                  </a:extLst>
+                </a:hlinkClick>
+              </a:rPr>
+              <a:t>https://www.youtube.com/watch?v=5HPnDnlQ2CY</a:t>
             </a:r>
             <a:endParaRPr lang="ko-KR" altLang="en-US" sz="1800">
               <a:solidFill>
-                <a:schemeClr val="tx1"/>
+                <a:schemeClr val="bg1"/>
               </a:solidFill>
               <a:latin typeface="맑은 고딕" charset="0"/>
               <a:ea typeface="맑은 고딕" charset="0"/>
@@ -6055,7 +6241,7 @@
       </p:sp>
       <p:sp>
         <p:nvSpPr>
-          <p:cNvPr id="26" name="도형 22"/>
+          <p:cNvPr id="18" name="도형 76"/>
           <p:cNvSpPr>
             <a:spLocks/>
           </p:cNvSpPr>
@@ -6063,21 +6249,13 @@
         </p:nvSpPr>
         <p:spPr>
           <a:xfrm rot="0">
-            <a:off x="1086485" y="1016635"/>
-            <a:ext cx="9401810" cy="800735"/>
+            <a:off x="9084310" y="2141855"/>
+            <a:ext cx="1146175" cy="3387725"/>
           </a:xfrm>
           <a:prstGeom prst="rect"/>
           <a:solidFill>
             <a:schemeClr val="bg1"/>
           </a:solidFill>
-          <a:ln w="12700" cap="flat" cmpd="sng">
-            <a:solidFill>
-              <a:schemeClr val="tx1">
-                <a:alpha val="100000"/>
-              </a:schemeClr>
-            </a:solidFill>
-            <a:prstDash val="solid"/>
-          </a:ln>
         </p:spPr>
         <p:style>
           <a:lnRef idx="2">
@@ -6096,196 +6274,22 @@
           </a:fontRef>
         </p:style>
         <p:txBody>
-          <a:bodyPr wrap="square" lIns="91440" tIns="45720" rIns="91440" bIns="45720" numCol="1" vert="horz" anchor="ctr">
+          <a:bodyPr wrap="square" lIns="91440" tIns="45720" rIns="91440" bIns="45720" vert="horz" anchor="ctr">
             <a:noAutofit/>
           </a:bodyPr>
           <a:lstStyle/>
           <a:p>
-            <a:pPr marL="0" indent="0" algn="ctr" hangingPunct="1">
-              <a:buFontTx/>
-              <a:buNone/>
-            </a:pPr>
-            <a:endParaRPr lang="ko-KR" altLang="en-US" sz="1800">
-              <a:latin typeface="맑은 고딕" charset="0"/>
-              <a:ea typeface="맑은 고딕" charset="0"/>
-            </a:endParaRPr>
-          </a:p>
-        </p:txBody>
-      </p:sp>
-      <p:sp>
-        <p:nvSpPr>
-          <p:cNvPr id="27" name="도형 23"/>
-          <p:cNvSpPr>
-            <a:spLocks/>
-          </p:cNvSpPr>
-          <p:nvPr/>
-        </p:nvSpPr>
-        <p:spPr>
-          <a:xfrm rot="0">
-            <a:off x="6773545" y="1243330"/>
-            <a:ext cx="2204085" cy="446405"/>
-          </a:xfrm>
-          <a:prstGeom prst="rect"/>
-        </p:spPr>
-        <p:style>
-          <a:lnRef idx="2">
-            <a:schemeClr val="accent1">
-              <a:shade val="50000"/>
-            </a:schemeClr>
-          </a:lnRef>
-          <a:fillRef idx="1">
-            <a:schemeClr val="accent1"/>
-          </a:fillRef>
-          <a:effectRef idx="0">
-            <a:schemeClr val="accent1"/>
-          </a:effectRef>
-          <a:fontRef idx="minor">
-            <a:schemeClr val="lt1"/>
-          </a:fontRef>
-        </p:style>
-        <p:txBody>
-          <a:bodyPr wrap="square" lIns="91440" tIns="45720" rIns="91440" bIns="45720" numCol="1" vert="horz" anchor="ctr">
-            <a:noAutofit/>
-          </a:bodyPr>
-          <a:lstStyle/>
-          <a:p>
-            <a:pPr marL="0" indent="0" algn="ctr" hangingPunct="1">
-              <a:buFontTx/>
-              <a:buNone/>
-            </a:pPr>
-            <a:r>
-              <a:rPr lang="ko-KR" sz="1800">
-                <a:latin typeface="맑은 고딕" charset="0"/>
-                <a:ea typeface="맑은 고딕" charset="0"/>
-              </a:rPr>
-              <a:t>Snss님 반갑습니다</a:t>
-            </a:r>
-            <a:endParaRPr lang="ko-KR" altLang="en-US" sz="1800">
-              <a:latin typeface="맑은 고딕" charset="0"/>
-              <a:ea typeface="맑은 고딕" charset="0"/>
-            </a:endParaRPr>
-          </a:p>
-        </p:txBody>
-      </p:sp>
-      <p:sp>
-        <p:nvSpPr>
-          <p:cNvPr id="28" name="도형 24"/>
-          <p:cNvSpPr>
-            <a:spLocks/>
-          </p:cNvSpPr>
-          <p:nvPr/>
-        </p:nvSpPr>
-        <p:spPr>
-          <a:xfrm rot="0">
-            <a:off x="9103995" y="1223645"/>
-            <a:ext cx="1147445" cy="466090"/>
-          </a:xfrm>
-          <a:prstGeom prst="rect"/>
-          <a:solidFill>
-            <a:schemeClr val="tx1"/>
-          </a:solidFill>
-        </p:spPr>
-        <p:style>
-          <a:lnRef idx="2">
-            <a:schemeClr val="accent1">
-              <a:shade val="50000"/>
-            </a:schemeClr>
-          </a:lnRef>
-          <a:fillRef idx="1">
-            <a:schemeClr val="accent1"/>
-          </a:fillRef>
-          <a:effectRef idx="0">
-            <a:schemeClr val="accent1"/>
-          </a:effectRef>
-          <a:fontRef idx="minor">
-            <a:schemeClr val="lt1"/>
-          </a:fontRef>
-        </p:style>
-        <p:txBody>
-          <a:bodyPr wrap="square" lIns="91440" tIns="45720" rIns="91440" bIns="45720" numCol="1" vert="horz" anchor="ctr">
-            <a:noAutofit/>
-          </a:bodyPr>
-          <a:lstStyle/>
-          <a:p>
-            <a:pPr marL="0" indent="0" algn="ctr" hangingPunct="1">
-              <a:buFontTx/>
-              <a:buNone/>
-            </a:pPr>
-            <a:r>
-              <a:rPr sz="1800">
-                <a:latin typeface="맑은 고딕" charset="0"/>
-                <a:ea typeface="맑은 고딕" charset="0"/>
-              </a:rPr>
-              <a:t>로그아웃</a:t>
-            </a:r>
-            <a:endParaRPr lang="ko-KR" altLang="en-US" sz="1800">
-              <a:latin typeface="맑은 고딕" charset="0"/>
-              <a:ea typeface="맑은 고딕" charset="0"/>
-            </a:endParaRPr>
-          </a:p>
-        </p:txBody>
-      </p:sp>
-      <p:sp>
-        <p:nvSpPr>
-          <p:cNvPr id="29" name="도형 25"/>
-          <p:cNvSpPr>
-            <a:spLocks/>
-          </p:cNvSpPr>
-          <p:nvPr/>
-        </p:nvSpPr>
-        <p:spPr>
-          <a:xfrm rot="0">
-            <a:off x="1244600" y="1184275"/>
-            <a:ext cx="1067435" cy="544830"/>
-          </a:xfrm>
-          <a:prstGeom prst="rect"/>
-          <a:solidFill>
-            <a:schemeClr val="tx1"/>
-          </a:solidFill>
-        </p:spPr>
-        <p:style>
-          <a:lnRef idx="2">
-            <a:schemeClr val="accent1">
-              <a:shade val="50000"/>
-            </a:schemeClr>
-          </a:lnRef>
-          <a:fillRef idx="1">
-            <a:schemeClr val="accent1"/>
-          </a:fillRef>
-          <a:effectRef idx="0">
-            <a:schemeClr val="accent1"/>
-          </a:effectRef>
-          <a:fontRef idx="minor">
-            <a:schemeClr val="lt1"/>
-          </a:fontRef>
-        </p:style>
-        <p:txBody>
-          <a:bodyPr wrap="square" lIns="91440" tIns="45720" rIns="91440" bIns="45720" numCol="1" vert="horz" anchor="ctr">
-            <a:noAutofit/>
-          </a:bodyPr>
-          <a:lstStyle/>
-          <a:p>
-            <a:pPr marL="0" indent="0" algn="ctr" hangingPunct="1">
-              <a:buFontTx/>
-              <a:buNone/>
-            </a:pPr>
-            <a:r>
-              <a:rPr lang="ko-KR" sz="1800">
-                <a:latin typeface="맑은 고딕" charset="0"/>
-                <a:ea typeface="맑은 고딕" charset="0"/>
-              </a:rPr>
-              <a:t>Header logo</a:t>
-            </a:r>
-            <a:endParaRPr lang="ko-KR" altLang="en-US" sz="1800">
-              <a:latin typeface="맑은 고딕" charset="0"/>
-              <a:ea typeface="맑은 고딕" charset="0"/>
-            </a:endParaRPr>
-          </a:p>
-        </p:txBody>
-      </p:sp>
-      <p:sp>
-        <p:nvSpPr>
-          <p:cNvPr id="30" name="텍스트 상자 26"/>
+            <a:pPr marL="0" indent="0" algn="ctr" hangingPunct="1"/>
+            <a:endParaRPr lang="ko-KR" altLang="en-US" sz="1800">
+              <a:latin typeface="맑은 고딕" charset="0"/>
+              <a:ea typeface="맑은 고딕" charset="0"/>
+            </a:endParaRPr>
+          </a:p>
+        </p:txBody>
+      </p:sp>
+      <p:sp>
+        <p:nvSpPr>
+          <p:cNvPr id="19" name="텍스트 상자 111"/>
           <p:cNvSpPr txBox="1">
             <a:spLocks/>
           </p:cNvSpPr>
@@ -6293,139 +6297,127 @@
         </p:nvSpPr>
         <p:spPr>
           <a:xfrm rot="0">
-            <a:off x="2557780" y="1234440"/>
-            <a:ext cx="1094740" cy="370840"/>
+            <a:off x="9212580" y="2734945"/>
+            <a:ext cx="899160" cy="2308225"/>
           </a:xfrm>
           <a:prstGeom prst="rect"/>
           <a:noFill/>
-          <a:ln w="0" cap="flat" cmpd="sng">
-            <a:solidFill>
-              <a:srgbClr val="FFFFFF">
-                <a:alpha val="100000"/>
-              </a:srgbClr>
-            </a:solidFill>
-            <a:prstDash val="solid"/>
+          <a:ln>
+            <a:noFill/>
+            <a:prstDash/>
           </a:ln>
         </p:spPr>
         <p:txBody>
-          <a:bodyPr wrap="none" lIns="89535" tIns="46355" rIns="89535" bIns="46355" numCol="1" vert="horz" anchor="t">
+          <a:bodyPr wrap="square" lIns="89535" tIns="46355" rIns="89535" bIns="46355" vert="horz" anchor="t">
             <a:spAutoFit/>
           </a:bodyPr>
           <a:lstStyle/>
           <a:p>
-            <a:pPr marL="0" indent="0" algn="l" hangingPunct="1">
-              <a:buFontTx/>
-              <a:buNone/>
-            </a:pPr>
-            <a:r>
-              <a:rPr lang="ko-KR" sz="1800">
-                <a:latin typeface="맑은 고딕" charset="0"/>
-                <a:ea typeface="맑은 고딕" charset="0"/>
-              </a:rPr>
-              <a:t>대시보드</a:t>
-            </a:r>
-            <a:endParaRPr lang="ko-KR" altLang="en-US" sz="1800">
-              <a:latin typeface="맑은 고딕" charset="0"/>
-              <a:ea typeface="맑은 고딕" charset="0"/>
-            </a:endParaRPr>
-          </a:p>
-        </p:txBody>
-      </p:sp>
-      <p:sp>
-        <p:nvSpPr>
-          <p:cNvPr id="31" name="텍스트 상자 27"/>
-          <p:cNvSpPr txBox="1">
-            <a:spLocks/>
-          </p:cNvSpPr>
-          <p:nvPr/>
-        </p:nvSpPr>
-        <p:spPr>
-          <a:xfrm rot="0">
-            <a:off x="3656330" y="1246505"/>
-            <a:ext cx="1403985" cy="370840"/>
-          </a:xfrm>
-          <a:prstGeom prst="rect"/>
-          <a:noFill/>
-          <a:ln w="0" cap="flat" cmpd="sng">
-            <a:solidFill>
-              <a:srgbClr val="FFFFFF">
-                <a:alpha val="100000"/>
-              </a:srgbClr>
-            </a:solidFill>
-            <a:prstDash val="solid"/>
-          </a:ln>
-        </p:spPr>
-        <p:txBody>
-          <a:bodyPr wrap="none" lIns="89535" tIns="46355" rIns="89535" bIns="46355" numCol="1" vert="horz" anchor="t">
-            <a:spAutoFit/>
-          </a:bodyPr>
-          <a:lstStyle/>
-          <a:p>
-            <a:pPr marL="0" indent="0" algn="l" hangingPunct="1">
-              <a:buFontTx/>
-              <a:buNone/>
-            </a:pPr>
-            <a:r>
-              <a:rPr lang="ko-KR" sz="1800">
-                <a:latin typeface="맑은 고딕" charset="0"/>
-                <a:ea typeface="맑은 고딕" charset="0"/>
-              </a:rPr>
-              <a:t>데이터 분석</a:t>
-            </a:r>
-            <a:endParaRPr lang="ko-KR" altLang="en-US" sz="1800">
-              <a:latin typeface="맑은 고딕" charset="0"/>
-              <a:ea typeface="맑은 고딕" charset="0"/>
-            </a:endParaRPr>
-          </a:p>
-        </p:txBody>
-      </p:sp>
-      <p:sp>
-        <p:nvSpPr>
-          <p:cNvPr id="32" name="텍스트 상자 28"/>
-          <p:cNvSpPr txBox="1">
-            <a:spLocks/>
-          </p:cNvSpPr>
-          <p:nvPr/>
-        </p:nvSpPr>
-        <p:spPr>
-          <a:xfrm rot="0">
-            <a:off x="5031740" y="1229360"/>
-            <a:ext cx="1175385" cy="370840"/>
-          </a:xfrm>
-          <a:prstGeom prst="rect"/>
-          <a:noFill/>
-          <a:ln w="0" cap="flat" cmpd="sng">
-            <a:solidFill>
-              <a:srgbClr val="FFFFFF">
-                <a:alpha val="100000"/>
-              </a:srgbClr>
-            </a:solidFill>
-            <a:prstDash val="solid"/>
-          </a:ln>
-        </p:spPr>
-        <p:txBody>
-          <a:bodyPr wrap="none" lIns="89535" tIns="46355" rIns="89535" bIns="46355" numCol="1" vert="horz" anchor="t">
-            <a:spAutoFit/>
-          </a:bodyPr>
-          <a:lstStyle/>
-          <a:p>
-            <a:pPr marL="0" indent="0" algn="l" hangingPunct="1">
-              <a:buFontTx/>
-              <a:buNone/>
-            </a:pPr>
+            <a:pPr marL="0" indent="0" algn="l" hangingPunct="1"/>
             <a:r>
               <a:rPr sz="1800">
                 <a:latin typeface="맑은 고딕" charset="0"/>
                 <a:ea typeface="맑은 고딕" charset="0"/>
               </a:rPr>
-              <a:t>가격</a:t>
-            </a:r>
-            <a:r>
-              <a:rPr lang="ko-KR" sz="1800">
-                <a:latin typeface="맑은 고딕" charset="0"/>
-                <a:ea typeface="맑은 고딕" charset="0"/>
-              </a:rPr>
-              <a:t> 예측</a:t>
+              <a:t>A</a:t>
+            </a:r>
+            <a:r>
+              <a:rPr lang="ko-KR" sz="1800">
+                <a:latin typeface="맑은 고딕" charset="0"/>
+                <a:ea typeface="맑은 고딕" charset="0"/>
+              </a:rPr>
+              <a:t>i</a:t>
+            </a:r>
+            <a:endParaRPr lang="ko-KR" altLang="en-US" sz="1800">
+              <a:latin typeface="맑은 고딕" charset="0"/>
+              <a:ea typeface="맑은 고딕" charset="0"/>
+            </a:endParaRPr>
+          </a:p>
+          <a:p>
+            <a:pPr marL="0" indent="0" algn="l" hangingPunct="1"/>
+            <a:r>
+              <a:rPr lang="ko-KR" sz="1800">
+                <a:latin typeface="맑은 고딕" charset="0"/>
+                <a:ea typeface="맑은 고딕" charset="0"/>
+              </a:rPr>
+              <a:t>분석</a:t>
+            </a:r>
+            <a:endParaRPr lang="ko-KR" altLang="en-US" sz="1800">
+              <a:latin typeface="맑은 고딕" charset="0"/>
+              <a:ea typeface="맑은 고딕" charset="0"/>
+            </a:endParaRPr>
+          </a:p>
+          <a:p>
+            <a:pPr marL="0" indent="0" algn="l" hangingPunct="1"/>
+            <a:r>
+              <a:rPr lang="ko-KR" sz="1800">
+                <a:latin typeface="맑은 고딕" charset="0"/>
+                <a:ea typeface="맑은 고딕" charset="0"/>
+              </a:rPr>
+              <a:t>S</a:t>
+            </a:r>
+            <a:r>
+              <a:rPr lang="ko-KR" sz="1800">
+                <a:latin typeface="맑은 고딕" charset="0"/>
+                <a:ea typeface="맑은 고딕" charset="0"/>
+              </a:rPr>
+              <a:t>ite</a:t>
+            </a:r>
+            <a:endParaRPr lang="ko-KR" altLang="en-US" sz="1800">
+              <a:latin typeface="맑은 고딕" charset="0"/>
+              <a:ea typeface="맑은 고딕" charset="0"/>
+            </a:endParaRPr>
+          </a:p>
+          <a:p>
+            <a:pPr marL="0" indent="0" algn="l" hangingPunct="1"/>
+            <a:r>
+              <a:rPr lang="ko-KR" sz="1800">
+                <a:latin typeface="맑은 고딕" charset="0"/>
+                <a:ea typeface="맑은 고딕" charset="0"/>
+              </a:rPr>
+              <a:t>설명</a:t>
+            </a:r>
+            <a:endParaRPr lang="ko-KR" altLang="en-US" sz="1800">
+              <a:latin typeface="맑은 고딕" charset="0"/>
+              <a:ea typeface="맑은 고딕" charset="0"/>
+            </a:endParaRPr>
+          </a:p>
+          <a:p>
+            <a:pPr marL="0" indent="0" algn="l" hangingPunct="1"/>
+            <a:r>
+              <a:rPr lang="ko-KR" sz="1800">
+                <a:latin typeface="맑은 고딕" charset="0"/>
+                <a:ea typeface="맑은 고딕" charset="0"/>
+              </a:rPr>
+              <a:t>팜플릿??/</a:t>
+            </a:r>
+            <a:r>
+              <a:rPr lang="ko-KR" sz="1800">
+                <a:latin typeface="맑은 고딕" charset="0"/>
+                <a:ea typeface="맑은 고딕" charset="0"/>
+              </a:rPr>
+              <a:t>p</a:t>
+            </a:r>
+            <a:r>
+              <a:rPr lang="ko-KR" sz="1800">
+                <a:latin typeface="맑은 고딕" charset="0"/>
+                <a:ea typeface="맑은 고딕" charset="0"/>
+              </a:rPr>
+              <a:t>opup</a:t>
+            </a:r>
+            <a:r>
+              <a:rPr lang="ko-KR" sz="1800">
+                <a:latin typeface="맑은 고딕" charset="0"/>
+                <a:ea typeface="맑은 고딕" charset="0"/>
+              </a:rPr>
+              <a:t>m</a:t>
+            </a:r>
+            <a:r>
+              <a:rPr lang="ko-KR" sz="1800">
+                <a:latin typeface="맑은 고딕" charset="0"/>
+                <a:ea typeface="맑은 고딕" charset="0"/>
+              </a:rPr>
+              <a:t>enu</a:t>
             </a:r>
             <a:endParaRPr lang="ko-KR" altLang="en-US" sz="1800">
               <a:latin typeface="맑은 고딕" charset="0"/>
@@ -6476,7 +6468,7 @@
       </p:grpSpPr>
       <p:sp>
         <p:nvSpPr>
-          <p:cNvPr id="2" name="Rect 0"/>
+          <p:cNvPr id="2" name="도형 2"/>
           <p:cNvSpPr>
             <a:spLocks/>
           </p:cNvSpPr>
@@ -6484,8 +6476,8 @@
         </p:nvSpPr>
         <p:spPr>
           <a:xfrm rot="0">
-            <a:off x="1136015" y="1016635"/>
-            <a:ext cx="9411335" cy="4978400"/>
+            <a:off x="1087755" y="1016635"/>
+            <a:ext cx="9412605" cy="4979670"/>
           </a:xfrm>
           <a:prstGeom prst="rect"/>
           <a:solidFill>
@@ -6530,7 +6522,7 @@
       </p:sp>
       <p:sp>
         <p:nvSpPr>
-          <p:cNvPr id="3" name="Rect 0"/>
+          <p:cNvPr id="3" name="텍스트 상자 5"/>
           <p:cNvSpPr txBox="1">
             <a:spLocks/>
           </p:cNvSpPr>
@@ -6538,18 +6530,89 @@
         </p:nvSpPr>
         <p:spPr>
           <a:xfrm rot="0">
-            <a:off x="1875790" y="1913255"/>
-            <a:ext cx="2611120" cy="370840"/>
+            <a:off x="1838960" y="1875790"/>
+            <a:ext cx="2620010" cy="370840"/>
           </a:xfrm>
           <a:prstGeom prst="rect"/>
           <a:noFill/>
-          <a:ln w="0" cap="flat" cmpd="sng">
+          <a:ln w="19050" cap="flat" cmpd="sng">
             <a:solidFill>
-              <a:srgbClr val="FFFFFF">
+              <a:schemeClr val="bg1">
                 <a:alpha val="100000"/>
-              </a:srgbClr>
+              </a:schemeClr>
             </a:solidFill>
             <a:prstDash val="solid"/>
+            <a:round/>
+          </a:ln>
+        </p:spPr>
+        <p:txBody>
+          <a:bodyPr wrap="square" lIns="89535" tIns="46355" rIns="89535" bIns="46355" numCol="1" vert="horz" anchor="t">
+            <a:spAutoFit/>
+          </a:bodyPr>
+          <a:lstStyle/>
+          <a:p>
+            <a:pPr marL="0" indent="0" algn="l" hangingPunct="1">
+              <a:buFontTx/>
+              <a:buNone/>
+            </a:pPr>
+            <a:r>
+              <a:rPr sz="1800">
+                <a:latin typeface="맑은 고딕" charset="0"/>
+                <a:ea typeface="맑은 고딕" charset="0"/>
+              </a:rPr>
+              <a:t>스마트팜 </a:t>
+            </a:r>
+            <a:r>
+              <a:rPr lang="ko-KR" sz="1800">
+                <a:latin typeface="맑은 고딕" charset="0"/>
+                <a:ea typeface="맑은 고딕" charset="0"/>
+              </a:rPr>
+              <a:t>AI</a:t>
+            </a:r>
+            <a:r>
+              <a:rPr lang="ko-KR" sz="1800">
+                <a:latin typeface="맑은 고딕" charset="0"/>
+                <a:ea typeface="맑은 고딕" charset="0"/>
+              </a:rPr>
+              <a:t> </a:t>
+            </a:r>
+            <a:r>
+              <a:rPr lang="ko-KR" sz="1800">
+                <a:latin typeface="맑은 고딕" charset="0"/>
+                <a:ea typeface="맑은 고딕" charset="0"/>
+              </a:rPr>
+              <a:t>환경플랫폼</a:t>
+            </a:r>
+            <a:endParaRPr lang="ko-KR" altLang="en-US" sz="1800">
+              <a:latin typeface="맑은 고딕" charset="0"/>
+              <a:ea typeface="맑은 고딕" charset="0"/>
+            </a:endParaRPr>
+          </a:p>
+        </p:txBody>
+      </p:sp>
+      <p:sp>
+        <p:nvSpPr>
+          <p:cNvPr id="4" name="텍스트 상자 6"/>
+          <p:cNvSpPr txBox="1">
+            <a:spLocks/>
+          </p:cNvSpPr>
+          <p:nvPr/>
+        </p:nvSpPr>
+        <p:spPr>
+          <a:xfrm rot="0">
+            <a:off x="2082165" y="2429510"/>
+            <a:ext cx="2089150" cy="1477645"/>
+          </a:xfrm>
+          <a:prstGeom prst="rect"/>
+          <a:noFill/>
+          <a:ln w="19050" cap="flat" cmpd="sng">
+            <a:solidFill>
+              <a:schemeClr val="bg1">
+                <a:alpha val="100000"/>
+              </a:schemeClr>
+            </a:solidFill>
+            <a:prstDash val="solid"/>
+            <a:round/>
           </a:ln>
         </p:spPr>
         <p:txBody>
@@ -6562,58 +6625,6 @@
               <a:buFontTx/>
               <a:buNone/>
             </a:pPr>
-            <a:r>
-              <a:rPr sz="1800">
-                <a:latin typeface="맑은 고딕" charset="0"/>
-                <a:ea typeface="맑은 고딕" charset="0"/>
-              </a:rPr>
-              <a:t>스마트팜 </a:t>
-            </a:r>
-            <a:r>
-              <a:rPr lang="ko-KR" sz="1800">
-                <a:latin typeface="맑은 고딕" charset="0"/>
-                <a:ea typeface="맑은 고딕" charset="0"/>
-              </a:rPr>
-              <a:t>AI 환경플랫폼</a:t>
-            </a:r>
-            <a:endParaRPr lang="ko-KR" altLang="en-US" sz="1800">
-              <a:latin typeface="맑은 고딕" charset="0"/>
-              <a:ea typeface="맑은 고딕" charset="0"/>
-            </a:endParaRPr>
-          </a:p>
-        </p:txBody>
-      </p:sp>
-      <p:sp>
-        <p:nvSpPr>
-          <p:cNvPr id="4" name="Rect 0"/>
-          <p:cNvSpPr txBox="1">
-            <a:spLocks/>
-          </p:cNvSpPr>
-          <p:nvPr/>
-        </p:nvSpPr>
-        <p:spPr>
-          <a:xfrm rot="0">
-            <a:off x="2082165" y="2429510"/>
-            <a:ext cx="2089150" cy="1477645"/>
-          </a:xfrm>
-          <a:prstGeom prst="rect"/>
-          <a:noFill/>
-          <a:ln w="0" cap="flat" cmpd="sng">
-            <a:solidFill>
-              <a:srgbClr val="FFFFFF">
-                <a:alpha val="100000"/>
-              </a:srgbClr>
-            </a:solidFill>
-            <a:prstDash/>
-          </a:ln>
-        </p:spPr>
-        <p:txBody>
-          <a:bodyPr wrap="none" lIns="89535" tIns="46355" rIns="89535" bIns="46355" vert="horz" anchor="t">
-            <a:spAutoFit/>
-          </a:bodyPr>
-          <a:lstStyle/>
-          <a:p>
-            <a:pPr marL="0" indent="0" algn="l" hangingPunct="1"/>
             <a:r>
               <a:rPr sz="1800">
                 <a:solidFill>
@@ -6632,7 +6643,27 @@
                 <a:latin typeface="맑은 고딕" charset="0"/>
                 <a:ea typeface="맑은 고딕" charset="0"/>
               </a:rPr>
-              <a:t>트팜 대시보드</a:t>
+              <a:t>트팜</a:t>
+            </a:r>
+            <a:r>
+              <a:rPr lang="ko-KR" sz="1800">
+                <a:solidFill>
+                  <a:schemeClr val="bg1"/>
+                </a:solidFill>
+                <a:latin typeface="맑은 고딕" charset="0"/>
+                <a:ea typeface="맑은 고딕" charset="0"/>
+              </a:rPr>
+              <a:t> </a:t>
+            </a:r>
+            <a:r>
+              <a:rPr lang="ko-KR" sz="1800">
+                <a:solidFill>
+                  <a:schemeClr val="bg1"/>
+                </a:solidFill>
+                <a:latin typeface="맑은 고딕" charset="0"/>
+                <a:ea typeface="맑은 고딕" charset="0"/>
+              </a:rPr>
+              <a:t>대시보드</a:t>
             </a:r>
             <a:endParaRPr lang="ko-KR" altLang="en-US" sz="1800">
               <a:solidFill>
@@ -6643,7 +6674,10 @@
             </a:endParaRPr>
           </a:p>
           <a:p>
-            <a:pPr marL="0" indent="0" algn="l" hangingPunct="1"/>
+            <a:pPr marL="0" indent="0" algn="l" hangingPunct="1">
+              <a:buFontTx/>
+              <a:buNone/>
+            </a:pPr>
             <a:endParaRPr lang="ko-KR" altLang="en-US" sz="1800">
               <a:solidFill>
                 <a:schemeClr val="bg1"/>
@@ -6653,7 +6687,10 @@
             </a:endParaRPr>
           </a:p>
           <a:p>
-            <a:pPr marL="0" indent="0" algn="l" hangingPunct="1"/>
+            <a:pPr marL="0" indent="0" algn="l" hangingPunct="1">
+              <a:buFontTx/>
+              <a:buNone/>
+            </a:pPr>
             <a:r>
               <a:rPr lang="ko-KR" sz="1800">
                 <a:solidFill>
@@ -6662,8 +6699,34 @@
                 <a:latin typeface="맑은 고딕" charset="0"/>
                 <a:ea typeface="맑은 고딕" charset="0"/>
               </a:rPr>
-              <a:t>데이터 </a:t>
-            </a:r>
+              <a:t>데이터 분석</a:t>
+            </a:r>
+            <a:endParaRPr lang="ko-KR" altLang="en-US" sz="1800">
+              <a:solidFill>
+                <a:schemeClr val="bg1"/>
+              </a:solidFill>
+              <a:latin typeface="맑은 고딕" charset="0"/>
+              <a:ea typeface="맑은 고딕" charset="0"/>
+            </a:endParaRPr>
+          </a:p>
+          <a:p>
+            <a:pPr marL="0" indent="0" algn="l" hangingPunct="1">
+              <a:buFontTx/>
+              <a:buNone/>
+            </a:pPr>
+            <a:endParaRPr lang="ko-KR" altLang="en-US" sz="1800">
+              <a:solidFill>
+                <a:schemeClr val="bg1"/>
+              </a:solidFill>
+              <a:latin typeface="맑은 고딕" charset="0"/>
+              <a:ea typeface="맑은 고딕" charset="0"/>
+            </a:endParaRPr>
+          </a:p>
+          <a:p>
+            <a:pPr marL="0" indent="0" algn="l" hangingPunct="1">
+              <a:buFontTx/>
+              <a:buNone/>
+            </a:pPr>
             <a:r>
               <a:rPr lang="ko-KR" sz="1800">
                 <a:solidFill>
@@ -6672,7 +6735,7 @@
                 <a:latin typeface="맑은 고딕" charset="0"/>
                 <a:ea typeface="맑은 고딕" charset="0"/>
               </a:rPr>
-              <a:t>분석</a:t>
+              <a:t>가격 예측</a:t>
             </a:r>
             <a:endParaRPr lang="ko-KR" altLang="en-US" sz="1800">
               <a:solidFill>
@@ -6682,8 +6745,63 @@
               <a:ea typeface="맑은 고딕" charset="0"/>
             </a:endParaRPr>
           </a:p>
-          <a:p>
-            <a:pPr marL="0" indent="0" algn="l" hangingPunct="1"/>
+        </p:txBody>
+      </p:sp>
+      <p:sp>
+        <p:nvSpPr>
+          <p:cNvPr id="7" name="텍스트 상자 7"/>
+          <p:cNvSpPr txBox="1">
+            <a:spLocks/>
+          </p:cNvSpPr>
+          <p:nvPr/>
+        </p:nvSpPr>
+        <p:spPr>
+          <a:xfrm rot="0">
+            <a:off x="1974850" y="4311650"/>
+            <a:ext cx="2089150" cy="647065"/>
+          </a:xfrm>
+          <a:prstGeom prst="rect"/>
+          <a:noFill/>
+          <a:ln w="19050" cap="flat" cmpd="sng">
+            <a:solidFill>
+              <a:schemeClr val="bg1">
+                <a:alpha val="100000"/>
+              </a:schemeClr>
+            </a:solidFill>
+            <a:prstDash val="solid"/>
+            <a:round/>
+          </a:ln>
+        </p:spPr>
+        <p:txBody>
+          <a:bodyPr wrap="none" lIns="89535" tIns="46355" rIns="89535" bIns="46355" numCol="1" vert="horz" anchor="t">
+            <a:spAutoFit/>
+          </a:bodyPr>
+          <a:lstStyle/>
+          <a:p>
+            <a:pPr marL="0" indent="0" algn="l" hangingPunct="1">
+              <a:buFontTx/>
+              <a:buNone/>
+            </a:pPr>
+            <a:r>
+              <a:rPr lang="ko-KR" sz="1800">
+                <a:solidFill>
+                  <a:schemeClr val="bg1"/>
+                </a:solidFill>
+                <a:latin typeface="맑은 고딕" charset="0"/>
+                <a:ea typeface="맑은 고딕" charset="0"/>
+              </a:rPr>
+              <a:t>왼쪽 </a:t>
+            </a:r>
+            <a:r>
+              <a:rPr lang="ko-KR" sz="1800">
+                <a:solidFill>
+                  <a:schemeClr val="bg1"/>
+                </a:solidFill>
+                <a:latin typeface="맑은 고딕" charset="0"/>
+                <a:ea typeface="맑은 고딕" charset="0"/>
+              </a:rPr>
+              <a:t>카테고리나 </a:t>
+            </a:r>
             <a:endParaRPr lang="ko-KR" altLang="en-US" sz="1800">
               <a:solidFill>
                 <a:schemeClr val="bg1"/>
@@ -6693,7 +6811,10 @@
             </a:endParaRPr>
           </a:p>
           <a:p>
-            <a:pPr marL="0" indent="0" algn="l" hangingPunct="1"/>
+            <a:pPr marL="0" indent="0" algn="l" hangingPunct="1">
+              <a:buFontTx/>
+              <a:buNone/>
+            </a:pPr>
             <a:r>
               <a:rPr lang="ko-KR" sz="1800">
                 <a:solidFill>
@@ -6702,7 +6823,7 @@
                 <a:latin typeface="맑은 고딕" charset="0"/>
                 <a:ea typeface="맑은 고딕" charset="0"/>
               </a:rPr>
-              <a:t>가격 </a:t>
+              <a:t>슬라이드</a:t>
             </a:r>
             <a:r>
               <a:rPr lang="ko-KR" sz="1800">
@@ -6712,7 +6833,7 @@
                 <a:latin typeface="맑은 고딕" charset="0"/>
                 <a:ea typeface="맑은 고딕" charset="0"/>
               </a:rPr>
-              <a:t>예측</a:t>
+              <a:t>메뉴 분류</a:t>
             </a:r>
             <a:endParaRPr lang="ko-KR" altLang="en-US" sz="1800">
               <a:solidFill>
@@ -6724,113 +6845,16 @@
           </a:p>
         </p:txBody>
       </p:sp>
-      <p:sp>
-        <p:nvSpPr>
-          <p:cNvPr id="7" name="Rect 0"/>
-          <p:cNvSpPr txBox="1">
-            <a:spLocks/>
-          </p:cNvSpPr>
-          <p:nvPr/>
-        </p:nvSpPr>
-        <p:spPr>
-          <a:xfrm rot="0">
-            <a:off x="2743835" y="4452620"/>
-            <a:ext cx="2105660" cy="647065"/>
-          </a:xfrm>
-          <a:prstGeom prst="rect"/>
-          <a:noFill/>
-          <a:ln w="0" cap="flat" cmpd="sng">
-            <a:solidFill>
-              <a:srgbClr val="FFFFFF">
-                <a:alpha val="100000"/>
-              </a:srgbClr>
-            </a:solidFill>
-            <a:prstDash val="solid"/>
-          </a:ln>
-        </p:spPr>
-        <p:txBody>
-          <a:bodyPr wrap="square" lIns="89535" tIns="46355" rIns="89535" bIns="46355" numCol="1" vert="horz" anchor="t">
-            <a:spAutoFit/>
-          </a:bodyPr>
-          <a:lstStyle/>
-          <a:p>
-            <a:pPr marL="0" indent="0" algn="l" hangingPunct="1">
-              <a:buFontTx/>
-              <a:buNone/>
-            </a:pPr>
-            <a:r>
-              <a:rPr lang="ko-KR" sz="1800">
-                <a:solidFill>
-                  <a:schemeClr val="bg1"/>
-                </a:solidFill>
-                <a:latin typeface="맑은 고딕" charset="0"/>
-                <a:ea typeface="맑은 고딕" charset="0"/>
-              </a:rPr>
-              <a:t>왼쪽 </a:t>
-            </a:r>
-            <a:r>
-              <a:rPr lang="ko-KR" sz="1800">
-                <a:solidFill>
-                  <a:schemeClr val="bg1"/>
-                </a:solidFill>
-                <a:latin typeface="맑은 고딕" charset="0"/>
-                <a:ea typeface="맑은 고딕" charset="0"/>
-              </a:rPr>
-              <a:t>카테고리나 </a:t>
-            </a:r>
-            <a:endParaRPr lang="ko-KR" altLang="en-US" sz="1800">
-              <a:solidFill>
-                <a:schemeClr val="bg1"/>
-              </a:solidFill>
-              <a:latin typeface="맑은 고딕" charset="0"/>
-              <a:ea typeface="맑은 고딕" charset="0"/>
-            </a:endParaRPr>
-          </a:p>
-          <a:p>
-            <a:pPr marL="0" indent="0" algn="l" hangingPunct="1">
-              <a:buFontTx/>
-              <a:buNone/>
-            </a:pPr>
-            <a:r>
-              <a:rPr lang="ko-KR" sz="1800">
-                <a:solidFill>
-                  <a:schemeClr val="bg1"/>
-                </a:solidFill>
-                <a:latin typeface="맑은 고딕" charset="0"/>
-                <a:ea typeface="맑은 고딕" charset="0"/>
-              </a:rPr>
-              <a:t>슬라이드</a:t>
-            </a:r>
-            <a:r>
-              <a:rPr lang="ko-KR" sz="1800">
-                <a:solidFill>
-                  <a:schemeClr val="bg1"/>
-                </a:solidFill>
-                <a:latin typeface="맑은 고딕" charset="0"/>
-                <a:ea typeface="맑은 고딕" charset="0"/>
-              </a:rPr>
-              <a:t>메뉴 분류</a:t>
-            </a:r>
-            <a:endParaRPr lang="ko-KR" altLang="en-US" sz="1800">
-              <a:solidFill>
-                <a:schemeClr val="bg1"/>
-              </a:solidFill>
-              <a:latin typeface="맑은 고딕" charset="0"/>
-              <a:ea typeface="맑은 고딕" charset="0"/>
-            </a:endParaRPr>
-          </a:p>
-        </p:txBody>
-      </p:sp>
       <p:cxnSp>
         <p:nvCxnSpPr>
-          <p:cNvPr id="8" name="Rect 0"/>
+          <p:cNvPr id="8" name="도형 8"/>
           <p:cNvCxnSpPr/>
           <p:nvPr/>
         </p:nvCxnSpPr>
         <p:spPr>
-          <a:xfrm rot="0" flipH="1">
-            <a:off x="3244850" y="3912870"/>
-            <a:ext cx="3175" cy="561975"/>
+          <a:xfrm rot="0">
+            <a:off x="3153410" y="3950970"/>
+            <a:ext cx="7620" cy="345440"/>
           </a:xfrm>
           <a:prstGeom prst="straightConnector1"/>
           <a:ln w="6350" cap="flat" cmpd="sng">
@@ -6855,7 +6879,7 @@
       </p:cxnSp>
       <p:sp>
         <p:nvSpPr>
-          <p:cNvPr id="9" name="Rect 0"/>
+          <p:cNvPr id="9" name="텍스트 상자 10"/>
           <p:cNvSpPr txBox="1">
             <a:spLocks/>
           </p:cNvSpPr>
@@ -6864,17 +6888,18 @@
         <p:spPr>
           <a:xfrm rot="0">
             <a:off x="5243195" y="1797050"/>
-            <a:ext cx="1403985" cy="370840"/>
+            <a:ext cx="1094740" cy="370840"/>
           </a:xfrm>
           <a:prstGeom prst="rect"/>
           <a:noFill/>
-          <a:ln w="0" cap="flat" cmpd="sng">
+          <a:ln w="19050" cap="flat" cmpd="sng">
             <a:solidFill>
-              <a:srgbClr val="FFFFFF">
+              <a:schemeClr val="bg1">
                 <a:alpha val="100000"/>
-              </a:srgbClr>
+              </a:schemeClr>
             </a:solidFill>
             <a:prstDash val="solid"/>
+            <a:round/>
           </a:ln>
         </p:spPr>
         <p:txBody>
@@ -6888,22 +6913,22 @@
               <a:buNone/>
             </a:pPr>
             <a:r>
-              <a:rPr sz="1800">
-                <a:latin typeface="맑은 고딕" charset="0"/>
-                <a:ea typeface="맑은 고딕" charset="0"/>
-              </a:rPr>
-              <a:t>데이터 분석</a:t>
-            </a:r>
-            <a:endParaRPr lang="ko-KR" altLang="en-US" sz="1800">
-              <a:latin typeface="맑은 고딕" charset="0"/>
-              <a:ea typeface="맑은 고딕" charset="0"/>
-            </a:endParaRPr>
-          </a:p>
-        </p:txBody>
-      </p:sp>
-      <p:sp>
-        <p:nvSpPr>
-          <p:cNvPr id="10" name="Rect 0"/>
+              <a:rPr lang="ko-KR" sz="1800">
+                <a:latin typeface="맑은 고딕" charset="0"/>
+                <a:ea typeface="맑은 고딕" charset="0"/>
+              </a:rPr>
+              <a:t>대시보드</a:t>
+            </a:r>
+            <a:endParaRPr lang="ko-KR" altLang="en-US" sz="1800">
+              <a:latin typeface="맑은 고딕" charset="0"/>
+              <a:ea typeface="맑은 고딕" charset="0"/>
+            </a:endParaRPr>
+          </a:p>
+        </p:txBody>
+      </p:sp>
+      <p:sp>
+        <p:nvSpPr>
+          <p:cNvPr id="10" name="텍스트 상자 12"/>
           <p:cNvSpPr txBox="1">
             <a:spLocks/>
           </p:cNvSpPr>
@@ -6911,22 +6936,23 @@
         </p:nvSpPr>
         <p:spPr>
           <a:xfrm rot="0">
-            <a:off x="4964430" y="2278380"/>
-            <a:ext cx="3990340" cy="278765"/>
+            <a:off x="5026660" y="2300605"/>
+            <a:ext cx="3002915" cy="370840"/>
           </a:xfrm>
           <a:prstGeom prst="rect"/>
           <a:noFill/>
-          <a:ln w="0" cap="flat" cmpd="sng">
+          <a:ln w="19050" cap="flat" cmpd="sng">
             <a:solidFill>
-              <a:srgbClr val="FFFFFF">
+              <a:schemeClr val="bg1">
                 <a:alpha val="100000"/>
-              </a:srgbClr>
+              </a:schemeClr>
             </a:solidFill>
             <a:prstDash val="solid"/>
+            <a:round/>
           </a:ln>
         </p:spPr>
         <p:txBody>
-          <a:bodyPr wrap="square" lIns="89535" tIns="46355" rIns="89535" bIns="46355" numCol="1" vert="horz" anchor="t">
+          <a:bodyPr wrap="none" lIns="89535" tIns="46355" rIns="89535" bIns="46355" numCol="1" vert="horz" anchor="t">
             <a:spAutoFit/>
           </a:bodyPr>
           <a:lstStyle/>
@@ -6936,48 +6962,28 @@
               <a:buNone/>
             </a:pPr>
             <a:r>
-              <a:rPr sz="1200" i="0" b="0">
+              <a:rPr lang="ko-KR" sz="1800">
                 <a:solidFill>
                   <a:schemeClr val="bg1"/>
                 </a:solidFill>
-                <a:latin typeface="Segoe UI Emoji" charset="0"/>
-                <a:ea typeface="ui-sans-serif" charset="0"/>
-              </a:rPr>
-              <a:t>축적된 농가 데이터를 분석하여 최적 환경</a:t>
-            </a:r>
-            <a:r>
-              <a:rPr lang="ko-KR" sz="1200" i="0" b="0">
-                <a:solidFill>
-                  <a:schemeClr val="bg1"/>
-                </a:solidFill>
-                <a:latin typeface="Segoe UI Emoji" charset="0"/>
-                <a:ea typeface="ui-sans-serif" charset="0"/>
-              </a:rPr>
-              <a:t> </a:t>
-            </a:r>
-            <a:r>
-              <a:rPr lang="ko-KR" sz="1200" i="0" b="0">
-                <a:solidFill>
-                  <a:schemeClr val="bg1"/>
-                </a:solidFill>
-                <a:latin typeface="Segoe UI Emoji" charset="0"/>
-                <a:ea typeface="ui-sans-serif" charset="0"/>
-              </a:rPr>
-              <a:t>추천서비스</a:t>
-            </a:r>
-            <a:endParaRPr lang="ko-KR" altLang="en-US" sz="1200" i="0" b="0">
+                <a:latin typeface="맑은 고딕" charset="0"/>
+                <a:ea typeface="맑은 고딕" charset="0"/>
+              </a:rPr>
+              <a:t>스마트팜 현황 한눈에 보기!</a:t>
+            </a:r>
+            <a:endParaRPr lang="ko-KR" altLang="en-US" sz="1800">
               <a:solidFill>
                 <a:schemeClr val="bg1"/>
               </a:solidFill>
-              <a:latin typeface="Segoe UI Emoji" charset="0"/>
-              <a:ea typeface="ui-sans-serif" charset="0"/>
-            </a:endParaRPr>
-          </a:p>
-        </p:txBody>
-      </p:sp>
-      <p:sp>
-        <p:nvSpPr>
-          <p:cNvPr id="11" name="도형 35"/>
+              <a:latin typeface="맑은 고딕" charset="0"/>
+              <a:ea typeface="맑은 고딕" charset="0"/>
+            </a:endParaRPr>
+          </a:p>
+        </p:txBody>
+      </p:sp>
+      <p:sp>
+        <p:nvSpPr>
+          <p:cNvPr id="11" name="도형 13"/>
           <p:cNvSpPr>
             <a:spLocks/>
           </p:cNvSpPr>
@@ -6985,8 +6991,8 @@
         </p:nvSpPr>
         <p:spPr>
           <a:xfrm rot="0">
-            <a:off x="5509895" y="2705100"/>
-            <a:ext cx="3615055" cy="929005"/>
+            <a:off x="5184140" y="2853690"/>
+            <a:ext cx="879475" cy="652145"/>
           </a:xfrm>
           <a:prstGeom prst="rect"/>
           <a:solidFill>
@@ -7016,109 +7022,16 @@
           <a:lstStyle/>
           <a:p>
             <a:pPr marL="0" indent="0" algn="ctr" hangingPunct="1"/>
-            <a:r>
-              <a:rPr lang="ko-KR" sz="1800">
-                <a:solidFill>
-                  <a:schemeClr val="tx1"/>
-                </a:solidFill>
-                <a:latin typeface="맑은 고딕" charset="0"/>
-                <a:ea typeface="맑은 고딕" charset="0"/>
-              </a:rPr>
-              <a:t>데이터 </a:t>
-            </a:r>
-            <a:r>
-              <a:rPr lang="ko-KR" sz="1800">
-                <a:solidFill>
-                  <a:schemeClr val="tx1"/>
-                </a:solidFill>
-                <a:latin typeface="맑은 고딕" charset="0"/>
-                <a:ea typeface="맑은 고딕" charset="0"/>
-              </a:rPr>
-              <a:t>업로드(환경데이터,</a:t>
-            </a:r>
-            <a:r>
-              <a:rPr lang="ko-KR" sz="1800">
-                <a:solidFill>
-                  <a:schemeClr val="tx1"/>
-                </a:solidFill>
-                <a:latin typeface="맑은 고딕" charset="0"/>
-                <a:ea typeface="맑은 고딕" charset="0"/>
-              </a:rPr>
-              <a:t> 생육</a:t>
-            </a:r>
-            <a:r>
-              <a:rPr lang="ko-KR" sz="1800">
-                <a:solidFill>
-                  <a:schemeClr val="tx1"/>
-                </a:solidFill>
-                <a:latin typeface="맑은 고딕" charset="0"/>
-                <a:ea typeface="맑은 고딕" charset="0"/>
-              </a:rPr>
-              <a:t>데이터,</a:t>
-            </a:r>
-            <a:r>
-              <a:rPr lang="ko-KR" sz="1800">
-                <a:solidFill>
-                  <a:schemeClr val="tx1"/>
-                </a:solidFill>
-                <a:latin typeface="맑은 고딕" charset="0"/>
-                <a:ea typeface="맑은 고딕" charset="0"/>
-              </a:rPr>
-              <a:t> 생산량데이터</a:t>
-            </a:r>
-            <a:r>
-              <a:rPr lang="ko-KR" sz="1800">
-                <a:solidFill>
-                  <a:schemeClr val="tx1"/>
-                </a:solidFill>
-                <a:latin typeface="맑은 고딕" charset="0"/>
-                <a:ea typeface="맑은 고딕" charset="0"/>
-              </a:rPr>
-              <a:t> </a:t>
-            </a:r>
-            <a:r>
-              <a:rPr lang="ko-KR" sz="1800">
-                <a:solidFill>
-                  <a:schemeClr val="tx1"/>
-                </a:solidFill>
-                <a:latin typeface="맑은 고딕" charset="0"/>
-                <a:ea typeface="맑은 고딕" charset="0"/>
-              </a:rPr>
-              <a:t>-ㅡ csv나 xl</a:t>
-            </a:r>
-            <a:r>
-              <a:rPr lang="ko-KR" sz="1800">
-                <a:solidFill>
-                  <a:schemeClr val="tx1"/>
-                </a:solidFill>
-                <a:latin typeface="맑은 고딕" charset="0"/>
-                <a:ea typeface="맑은 고딕" charset="0"/>
-              </a:rPr>
-              <a:t>s</a:t>
-            </a:r>
-            <a:r>
-              <a:rPr lang="ko-KR" sz="1800">
-                <a:solidFill>
-                  <a:schemeClr val="tx1"/>
-                </a:solidFill>
-                <a:latin typeface="맑은 고딕" charset="0"/>
-                <a:ea typeface="맑은 고딕" charset="0"/>
-              </a:rPr>
-              <a:t>x파일들)</a:t>
-            </a:r>
-            <a:endParaRPr lang="ko-KR" altLang="en-US" sz="1800">
-              <a:solidFill>
-                <a:schemeClr val="tx1"/>
-              </a:solidFill>
-              <a:latin typeface="맑은 고딕" charset="0"/>
-              <a:ea typeface="맑은 고딕" charset="0"/>
-            </a:endParaRPr>
-          </a:p>
-        </p:txBody>
-      </p:sp>
-      <p:sp>
-        <p:nvSpPr>
-          <p:cNvPr id="12" name="도형 37"/>
+            <a:endParaRPr lang="ko-KR" altLang="en-US" sz="1800">
+              <a:latin typeface="맑은 고딕" charset="0"/>
+              <a:ea typeface="맑은 고딕" charset="0"/>
+            </a:endParaRPr>
+          </a:p>
+        </p:txBody>
+      </p:sp>
+      <p:sp>
+        <p:nvSpPr>
+          <p:cNvPr id="12" name="도형 15"/>
           <p:cNvSpPr>
             <a:spLocks/>
           </p:cNvSpPr>
@@ -7126,12 +7039,12 @@
         </p:nvSpPr>
         <p:spPr>
           <a:xfrm rot="0">
-            <a:off x="9082405" y="1979295"/>
-            <a:ext cx="1363980" cy="485140"/>
+            <a:off x="6381750" y="2856230"/>
+            <a:ext cx="879475" cy="652145"/>
           </a:xfrm>
           <a:prstGeom prst="rect"/>
           <a:solidFill>
-            <a:schemeClr val="tx1"/>
+            <a:schemeClr val="bg1"/>
           </a:solidFill>
         </p:spPr>
         <p:style>
@@ -7151,41 +7064,31 @@
           </a:fontRef>
         </p:style>
         <p:txBody>
-          <a:bodyPr wrap="square" lIns="91440" tIns="45720" rIns="91440" bIns="45720" numCol="1" vert="horz" anchor="ctr">
+          <a:bodyPr wrap="square" lIns="91440" tIns="45720" rIns="91440" bIns="45720" vert="horz" anchor="ctr">
             <a:noAutofit/>
           </a:bodyPr>
           <a:lstStyle/>
           <a:p>
-            <a:pPr marL="0" indent="0" algn="ctr" hangingPunct="1">
-              <a:buFontTx/>
-              <a:buNone/>
-            </a:pPr>
-            <a:r>
-              <a:rPr lang="ko-KR" sz="1800">
-                <a:latin typeface="맑은 고딕" charset="0"/>
-                <a:ea typeface="맑은 고딕" charset="0"/>
-              </a:rPr>
-              <a:t>ai분석버튼</a:t>
-            </a:r>
-            <a:endParaRPr lang="ko-KR" altLang="en-US" sz="1800">
-              <a:latin typeface="맑은 고딕" charset="0"/>
-              <a:ea typeface="맑은 고딕" charset="0"/>
-            </a:endParaRPr>
-          </a:p>
-        </p:txBody>
-      </p:sp>
-      <p:sp>
-        <p:nvSpPr>
-          <p:cNvPr id="15" name="도형 1"/>
+            <a:pPr marL="0" indent="0" algn="ctr" hangingPunct="1"/>
+            <a:endParaRPr lang="ko-KR" altLang="en-US" sz="1800">
+              <a:latin typeface="맑은 고딕" charset="0"/>
+              <a:ea typeface="맑은 고딕" charset="0"/>
+            </a:endParaRPr>
+          </a:p>
+        </p:txBody>
+      </p:sp>
+      <p:sp>
+        <p:nvSpPr>
+          <p:cNvPr id="13" name="도형 16"/>
           <p:cNvSpPr>
             <a:spLocks/>
           </p:cNvSpPr>
           <p:nvPr/>
         </p:nvSpPr>
         <p:spPr>
-          <a:xfrm>
-            <a:off x="5312410" y="4008755"/>
-            <a:ext cx="4247515" cy="1522095"/>
+          <a:xfrm rot="0">
+            <a:off x="7588885" y="2849245"/>
+            <a:ext cx="879475" cy="652145"/>
           </a:xfrm>
           <a:prstGeom prst="rect"/>
           <a:solidFill>
@@ -7209,58 +7112,22 @@
           </a:fontRef>
         </p:style>
         <p:txBody>
-          <a:bodyPr wrap="square" lIns="91440" tIns="45720" rIns="91440" bIns="45720" numCol="1" vert="horz" anchor="ctr">
+          <a:bodyPr wrap="square" lIns="91440" tIns="45720" rIns="91440" bIns="45720" vert="horz" anchor="ctr">
             <a:noAutofit/>
           </a:bodyPr>
           <a:lstStyle/>
           <a:p>
-            <a:pPr marL="0" indent="0" algn="ctr" hangingPunct="1">
-              <a:buFontTx/>
-              <a:buNone/>
-            </a:pPr>
-            <a:r>
-              <a:rPr lang="ko-KR" sz="1800">
-                <a:solidFill>
-                  <a:schemeClr val="tx1"/>
-                </a:solidFill>
-                <a:latin typeface="맑은 고딕" charset="0"/>
-                <a:ea typeface="맑은 고딕" charset="0"/>
-              </a:rPr>
-              <a:t>분석한 축적된 농가의 데이터들이 나오게끔 할 예정</a:t>
-            </a:r>
-            <a:r>
-              <a:rPr lang="ko-KR" sz="1800">
-                <a:solidFill>
-                  <a:schemeClr val="tx1"/>
-                </a:solidFill>
-                <a:latin typeface="맑은 고딕" charset="0"/>
-                <a:ea typeface="맑은 고딕" charset="0"/>
-              </a:rPr>
-              <a:t>임</a:t>
-            </a:r>
-            <a:r>
-              <a:rPr lang="ko-KR" sz="1800">
-                <a:solidFill>
-                  <a:schemeClr val="tx1"/>
-                </a:solidFill>
-                <a:latin typeface="맑은 고딕" charset="0"/>
-                <a:ea typeface="맑은 고딕" charset="0"/>
-              </a:rPr>
-              <a:t>!</a:t>
-            </a:r>
-            <a:endParaRPr lang="ko-KR" altLang="en-US" sz="1800">
-              <a:solidFill>
-                <a:schemeClr val="tx1"/>
-              </a:solidFill>
-              <a:latin typeface="맑은 고딕" charset="0"/>
-              <a:ea typeface="맑은 고딕" charset="0"/>
-            </a:endParaRPr>
-          </a:p>
-        </p:txBody>
-      </p:sp>
-      <p:sp>
-        <p:nvSpPr>
-          <p:cNvPr id="16" name="도형 29"/>
+            <a:pPr marL="0" indent="0" algn="ctr" hangingPunct="1"/>
+            <a:endParaRPr lang="ko-KR" altLang="en-US" sz="1800">
+              <a:latin typeface="맑은 고딕" charset="0"/>
+              <a:ea typeface="맑은 고딕" charset="0"/>
+            </a:endParaRPr>
+          </a:p>
+        </p:txBody>
+      </p:sp>
+      <p:sp>
+        <p:nvSpPr>
+          <p:cNvPr id="14" name="도형 17"/>
           <p:cNvSpPr>
             <a:spLocks/>
           </p:cNvSpPr>
@@ -7268,21 +7135,13 @@
         </p:nvSpPr>
         <p:spPr>
           <a:xfrm rot="0">
-            <a:off x="1125855" y="977265"/>
-            <a:ext cx="9401175" cy="800100"/>
+            <a:off x="8786495" y="2851785"/>
+            <a:ext cx="879475" cy="652145"/>
           </a:xfrm>
           <a:prstGeom prst="rect"/>
           <a:solidFill>
             <a:schemeClr val="bg1"/>
           </a:solidFill>
-          <a:ln w="12700" cap="flat" cmpd="sng">
-            <a:solidFill>
-              <a:schemeClr val="tx1">
-                <a:alpha val="100000"/>
-              </a:schemeClr>
-            </a:solidFill>
-            <a:prstDash val="solid"/>
-          </a:ln>
         </p:spPr>
         <p:style>
           <a:lnRef idx="2">
@@ -7316,18 +7175,211 @@
       </p:sp>
       <p:sp>
         <p:nvSpPr>
-          <p:cNvPr id="17" name="도형 30"/>
-          <p:cNvSpPr>
+          <p:cNvPr id="15" name="텍스트 상자 18"/>
+          <p:cNvSpPr txBox="1">
             <a:spLocks/>
           </p:cNvSpPr>
           <p:nvPr/>
         </p:nvSpPr>
         <p:spPr>
           <a:xfrm rot="0">
-            <a:off x="6812915" y="1203960"/>
-            <a:ext cx="2203450" cy="445770"/>
+            <a:off x="5193665" y="2941955"/>
+            <a:ext cx="306705" cy="254635"/>
           </a:xfrm>
           <a:prstGeom prst="rect"/>
+          <a:noFill/>
+          <a:ln>
+            <a:noFill/>
+            <a:prstDash/>
+          </a:ln>
+        </p:spPr>
+        <p:txBody>
+          <a:bodyPr wrap="none" lIns="89535" tIns="46355" rIns="89535" bIns="46355" vert="horz" anchor="t">
+            <a:spAutoFit/>
+          </a:bodyPr>
+          <a:lstStyle/>
+          <a:p>
+            <a:pPr marL="0" indent="0" algn="l" hangingPunct="1"/>
+            <a:r>
+              <a:rPr sz="1050" i="0" b="0">
+                <a:latin typeface="Segoe UI Emoji" charset="0"/>
+                <a:ea typeface="ui-sans-serif" charset="0"/>
+              </a:rPr>
+              <a:t>이번 달 예상 수확량</a:t>
+            </a:r>
+            <a:endParaRPr lang="ko-KR" altLang="en-US" sz="1800">
+              <a:latin typeface="맑은 고딕" charset="0"/>
+              <a:ea typeface="맑은 고딕" charset="0"/>
+            </a:endParaRPr>
+          </a:p>
+        </p:txBody>
+      </p:sp>
+      <p:sp>
+        <p:nvSpPr>
+          <p:cNvPr id="16" name="텍스트 상자 19"/>
+          <p:cNvSpPr txBox="1">
+            <a:spLocks/>
+          </p:cNvSpPr>
+          <p:nvPr/>
+        </p:nvSpPr>
+        <p:spPr>
+          <a:xfrm rot="0">
+            <a:off x="6391275" y="2983865"/>
+            <a:ext cx="306705" cy="254635"/>
+          </a:xfrm>
+          <a:prstGeom prst="rect"/>
+          <a:noFill/>
+          <a:ln w="0" cap="flat" cmpd="sng">
+            <a:solidFill>
+              <a:srgbClr val="FFFFFF">
+                <a:alpha val="100000"/>
+              </a:srgbClr>
+            </a:solidFill>
+            <a:prstDash/>
+          </a:ln>
+        </p:spPr>
+        <p:txBody>
+          <a:bodyPr wrap="none" lIns="89535" tIns="46355" rIns="89535" bIns="46355" vert="horz" anchor="t">
+            <a:spAutoFit/>
+          </a:bodyPr>
+          <a:lstStyle/>
+          <a:p>
+            <a:pPr marL="0" indent="0" algn="l" hangingPunct="1"/>
+            <a:r>
+              <a:rPr sz="1050" i="0" b="0">
+                <a:latin typeface="Segoe UI Emoji" charset="0"/>
+                <a:ea typeface="ui-sans-serif" charset="0"/>
+              </a:rPr>
+              <a:t>평균 품질 점수</a:t>
+            </a:r>
+            <a:endParaRPr lang="ko-KR" altLang="en-US" sz="1800">
+              <a:latin typeface="맑은 고딕" charset="0"/>
+              <a:ea typeface="맑은 고딕" charset="0"/>
+            </a:endParaRPr>
+          </a:p>
+        </p:txBody>
+      </p:sp>
+      <p:sp>
+        <p:nvSpPr>
+          <p:cNvPr id="17" name="텍스트 상자 20"/>
+          <p:cNvSpPr txBox="1">
+            <a:spLocks/>
+          </p:cNvSpPr>
+          <p:nvPr/>
+        </p:nvSpPr>
+        <p:spPr>
+          <a:xfrm rot="0">
+            <a:off x="7578725" y="2907665"/>
+            <a:ext cx="953770" cy="415925"/>
+          </a:xfrm>
+          <a:prstGeom prst="rect"/>
+          <a:noFill/>
+          <a:ln w="0" cap="flat" cmpd="sng">
+            <a:solidFill>
+              <a:srgbClr val="FFFFFF">
+                <a:alpha val="100000"/>
+              </a:srgbClr>
+            </a:solidFill>
+            <a:prstDash/>
+          </a:ln>
+        </p:spPr>
+        <p:txBody>
+          <a:bodyPr wrap="square" lIns="89535" tIns="46355" rIns="89535" bIns="46355" vert="horz" anchor="t">
+            <a:spAutoFit/>
+          </a:bodyPr>
+          <a:lstStyle/>
+          <a:p>
+            <a:pPr marL="0" indent="0" algn="l" hangingPunct="1"/>
+            <a:r>
+              <a:rPr sz="1050" i="0" b="0">
+                <a:latin typeface="Segoe UI Emoji" charset="0"/>
+                <a:ea typeface="ui-sans-serif" charset="0"/>
+              </a:rPr>
+              <a:t>재배식물</a:t>
+            </a:r>
+            <a:r>
+              <a:rPr sz="1050" i="0" b="0">
+                <a:latin typeface="Segoe UI Emoji" charset="0"/>
+                <a:ea typeface="ui-sans-serif" charset="0"/>
+              </a:rPr>
+              <a:t> 현재가 (소매)</a:t>
+            </a:r>
+            <a:endParaRPr lang="ko-KR" altLang="en-US" sz="1100">
+              <a:latin typeface="맑은 고딕" charset="0"/>
+              <a:ea typeface="맑은 고딕" charset="0"/>
+            </a:endParaRPr>
+          </a:p>
+        </p:txBody>
+      </p:sp>
+      <p:sp>
+        <p:nvSpPr>
+          <p:cNvPr id="18" name="텍스트 상자 21"/>
+          <p:cNvSpPr txBox="1">
+            <a:spLocks/>
+          </p:cNvSpPr>
+          <p:nvPr/>
+        </p:nvSpPr>
+        <p:spPr>
+          <a:xfrm rot="0">
+            <a:off x="8813165" y="2986405"/>
+            <a:ext cx="245745" cy="370205"/>
+          </a:xfrm>
+          <a:prstGeom prst="rect"/>
+          <a:noFill/>
+          <a:ln w="0" cap="flat" cmpd="sng">
+            <a:solidFill>
+              <a:srgbClr val="FFFFFF">
+                <a:alpha val="100000"/>
+              </a:srgbClr>
+            </a:solidFill>
+            <a:prstDash/>
+          </a:ln>
+        </p:spPr>
+        <p:txBody>
+          <a:bodyPr wrap="none" lIns="89535" tIns="46355" rIns="89535" bIns="46355" vert="horz" anchor="t">
+            <a:spAutoFit/>
+          </a:bodyPr>
+          <a:lstStyle/>
+          <a:p>
+            <a:pPr marL="0" indent="0" algn="l" hangingPunct="1"/>
+            <a:r>
+              <a:rPr sz="1050" i="0" b="0">
+                <a:latin typeface="Segoe UI Emoji" charset="0"/>
+                <a:ea typeface="ui-sans-serif" charset="0"/>
+              </a:rPr>
+              <a:t>예측 수익률</a:t>
+            </a:r>
+            <a:r>
+              <a:rPr lang="ko-KR" sz="1800">
+                <a:latin typeface="맑은 고딕" charset="0"/>
+                <a:ea typeface="맑은 고딕" charset="0"/>
+              </a:rPr>
+              <a:t>!</a:t>
+            </a:r>
+            <a:endParaRPr lang="ko-KR" altLang="en-US" sz="1800">
+              <a:latin typeface="맑은 고딕" charset="0"/>
+              <a:ea typeface="맑은 고딕" charset="0"/>
+            </a:endParaRPr>
+          </a:p>
+        </p:txBody>
+      </p:sp>
+      <p:sp>
+        <p:nvSpPr>
+          <p:cNvPr id="19" name="도형 22"/>
+          <p:cNvSpPr>
+            <a:spLocks/>
+          </p:cNvSpPr>
+          <p:nvPr/>
+        </p:nvSpPr>
+        <p:spPr>
+          <a:xfrm rot="0">
+            <a:off x="5105400" y="3761740"/>
+            <a:ext cx="2469515" cy="1116330"/>
+          </a:xfrm>
+          <a:prstGeom prst="rect"/>
+          <a:solidFill>
+            <a:schemeClr val="bg1"/>
+          </a:solidFill>
         </p:spPr>
         <p:style>
           <a:lnRef idx="2">
@@ -7346,32 +7398,22 @@
           </a:fontRef>
         </p:style>
         <p:txBody>
-          <a:bodyPr wrap="square" lIns="91440" tIns="45720" rIns="91440" bIns="45720" numCol="1" vert="horz" anchor="ctr">
+          <a:bodyPr wrap="square" lIns="91440" tIns="45720" rIns="91440" bIns="45720" vert="horz" anchor="ctr">
             <a:noAutofit/>
           </a:bodyPr>
           <a:lstStyle/>
           <a:p>
-            <a:pPr marL="0" indent="0" algn="ctr" hangingPunct="1">
-              <a:buFontTx/>
-              <a:buNone/>
-            </a:pPr>
-            <a:r>
-              <a:rPr lang="ko-KR" sz="1800">
-                <a:latin typeface="맑은 고딕" charset="0"/>
-                <a:ea typeface="맑은 고딕" charset="0"/>
-              </a:rPr>
-              <a:t>Snss님 반갑습니다</a:t>
-            </a:r>
-            <a:endParaRPr lang="ko-KR" altLang="en-US" sz="1800">
-              <a:latin typeface="맑은 고딕" charset="0"/>
-              <a:ea typeface="맑은 고딕" charset="0"/>
-            </a:endParaRPr>
-          </a:p>
-        </p:txBody>
-      </p:sp>
-      <p:sp>
-        <p:nvSpPr>
-          <p:cNvPr id="18" name="도형 31"/>
+            <a:pPr marL="0" indent="0" algn="ctr" hangingPunct="1"/>
+            <a:endParaRPr lang="ko-KR" altLang="en-US" sz="1800">
+              <a:latin typeface="맑은 고딕" charset="0"/>
+              <a:ea typeface="맑은 고딕" charset="0"/>
+            </a:endParaRPr>
+          </a:p>
+        </p:txBody>
+      </p:sp>
+      <p:sp>
+        <p:nvSpPr>
+          <p:cNvPr id="20" name="도형 24"/>
           <p:cNvSpPr>
             <a:spLocks/>
           </p:cNvSpPr>
@@ -7379,12 +7421,12 @@
         </p:nvSpPr>
         <p:spPr>
           <a:xfrm rot="0">
-            <a:off x="9143365" y="1184275"/>
-            <a:ext cx="1146810" cy="465455"/>
+            <a:off x="7853045" y="3764280"/>
+            <a:ext cx="2469515" cy="1116330"/>
           </a:xfrm>
           <a:prstGeom prst="rect"/>
           <a:solidFill>
-            <a:schemeClr val="tx1"/>
+            <a:schemeClr val="bg1"/>
           </a:solidFill>
         </p:spPr>
         <p:style>
@@ -7404,52 +7446,383 @@
           </a:fontRef>
         </p:style>
         <p:txBody>
-          <a:bodyPr wrap="square" lIns="91440" tIns="45720" rIns="91440" bIns="45720" numCol="1" vert="horz" anchor="ctr">
+          <a:bodyPr wrap="square" lIns="91440" tIns="45720" rIns="91440" bIns="45720" vert="horz" anchor="ctr">
             <a:noAutofit/>
           </a:bodyPr>
           <a:lstStyle/>
           <a:p>
-            <a:pPr marL="0" indent="0" algn="ctr" hangingPunct="1">
+            <a:pPr marL="0" indent="0" algn="ctr" hangingPunct="1"/>
+            <a:endParaRPr lang="ko-KR" altLang="en-US" sz="1800">
+              <a:latin typeface="맑은 고딕" charset="0"/>
+              <a:ea typeface="맑은 고딕" charset="0"/>
+            </a:endParaRPr>
+          </a:p>
+        </p:txBody>
+      </p:sp>
+      <p:sp>
+        <p:nvSpPr>
+          <p:cNvPr id="21" name="텍스트 상자 25"/>
+          <p:cNvSpPr txBox="1">
+            <a:spLocks/>
+          </p:cNvSpPr>
+          <p:nvPr/>
+        </p:nvSpPr>
+        <p:spPr>
+          <a:xfrm rot="0">
+            <a:off x="5441315" y="3909695"/>
+            <a:ext cx="1403350" cy="370205"/>
+          </a:xfrm>
+          <a:prstGeom prst="rect"/>
+          <a:noFill/>
+          <a:ln>
+            <a:noFill/>
+            <a:prstDash/>
+          </a:ln>
+        </p:spPr>
+        <p:txBody>
+          <a:bodyPr wrap="square" lIns="89535" tIns="46355" rIns="89535" bIns="46355" vert="horz" anchor="t">
+            <a:spAutoFit/>
+          </a:bodyPr>
+          <a:lstStyle/>
+          <a:p>
+            <a:pPr marL="0" indent="0" algn="l" hangingPunct="1"/>
+            <a:r>
+              <a:rPr lang="ko-KR" sz="1800">
+                <a:latin typeface="맑은 고딕" charset="0"/>
+                <a:ea typeface="맑은 고딕" charset="0"/>
+              </a:rPr>
+              <a:t>생산량 </a:t>
+            </a:r>
+            <a:r>
+              <a:rPr lang="ko-KR" sz="1800">
+                <a:latin typeface="맑은 고딕" charset="0"/>
+                <a:ea typeface="맑은 고딕" charset="0"/>
+              </a:rPr>
+              <a:t>추이</a:t>
+            </a:r>
+            <a:endParaRPr lang="ko-KR" altLang="en-US" sz="1800">
+              <a:latin typeface="맑은 고딕" charset="0"/>
+              <a:ea typeface="맑은 고딕" charset="0"/>
+            </a:endParaRPr>
+          </a:p>
+        </p:txBody>
+      </p:sp>
+      <p:sp>
+        <p:nvSpPr>
+          <p:cNvPr id="22" name="텍스트 상자 26"/>
+          <p:cNvSpPr txBox="1">
+            <a:spLocks/>
+          </p:cNvSpPr>
+          <p:nvPr/>
+        </p:nvSpPr>
+        <p:spPr>
+          <a:xfrm rot="0">
+            <a:off x="5243830" y="4284980"/>
+            <a:ext cx="1930400" cy="647065"/>
+          </a:xfrm>
+          <a:prstGeom prst="rect"/>
+          <a:noFill/>
+          <a:ln>
+            <a:noFill/>
+            <a:prstDash/>
+          </a:ln>
+        </p:spPr>
+        <p:txBody>
+          <a:bodyPr wrap="none" lIns="89535" tIns="46355" rIns="89535" bIns="46355" vert="horz" anchor="t">
+            <a:spAutoFit/>
+          </a:bodyPr>
+          <a:lstStyle/>
+          <a:p>
+            <a:pPr marL="0" indent="0">
               <a:buFontTx/>
               <a:buNone/>
             </a:pPr>
             <a:r>
-              <a:rPr sz="1800">
-                <a:latin typeface="맑은 고딕" charset="0"/>
-                <a:ea typeface="맑은 고딕" charset="0"/>
-              </a:rPr>
-              <a:t>로그</a:t>
-            </a:r>
-            <a:r>
-              <a:rPr sz="1800">
-                <a:latin typeface="맑은 고딕" charset="0"/>
-                <a:ea typeface="맑은 고딕" charset="0"/>
-              </a:rPr>
-              <a:t>아웃</a:t>
-            </a:r>
-            <a:endParaRPr lang="ko-KR" altLang="en-US" sz="1800">
-              <a:latin typeface="맑은 고딕" charset="0"/>
-              <a:ea typeface="맑은 고딕" charset="0"/>
-            </a:endParaRPr>
-          </a:p>
-        </p:txBody>
-      </p:sp>
-      <p:sp>
-        <p:nvSpPr>
-          <p:cNvPr id="19" name="도형 32"/>
-          <p:cNvSpPr>
+              <a:rPr lang="ko-KR" sz="1800">
+                <a:latin typeface="맑은 고딕" charset="0"/>
+                <a:ea typeface="맑은 고딕" charset="0"/>
+              </a:rPr>
+              <a:t>막대그래프 </a:t>
+            </a:r>
+            <a:r>
+              <a:rPr lang="ko-KR" sz="1800">
+                <a:latin typeface="맑은 고딕" charset="0"/>
+                <a:ea typeface="맑은 고딕" charset="0"/>
+              </a:rPr>
+              <a:t>그림</a:t>
+            </a:r>
+            <a:r>
+              <a:rPr lang="ko-KR" sz="1800">
+                <a:latin typeface="맑은 고딕" charset="0"/>
+                <a:ea typeface="맑은 고딕" charset="0"/>
+              </a:rPr>
+              <a:t>(</a:t>
+            </a:r>
+            <a:endParaRPr lang="ko-KR" altLang="en-US" sz="1800">
+              <a:latin typeface="맑은 고딕" charset="0"/>
+              <a:ea typeface="맑은 고딕" charset="0"/>
+            </a:endParaRPr>
+          </a:p>
+          <a:p>
+            <a:pPr marL="0" indent="0">
+              <a:buFontTx/>
+              <a:buNone/>
+            </a:pPr>
+            <a:r>
+              <a:rPr sz="1200" i="0" b="0">
+                <a:solidFill>
+                  <a:schemeClr val="tx1"/>
+                </a:solidFill>
+                <a:latin typeface="Segoe UI Emoji" charset="0"/>
+                <a:ea typeface="ui-sans-serif" charset="0"/>
+              </a:rPr>
+              <a:t>생산량 (kg)</a:t>
+            </a:r>
+            <a:r>
+              <a:rPr sz="1200" i="0" b="0">
+                <a:solidFill>
+                  <a:schemeClr val="tx1"/>
+                </a:solidFill>
+                <a:latin typeface="Segoe UI Emoji" charset="0"/>
+                <a:ea typeface="ui-sans-serif" charset="0"/>
+              </a:rPr>
+              <a:t>,</a:t>
+            </a:r>
+            <a:r>
+              <a:rPr lang="ko-KR" sz="1200" i="0" b="0">
+                <a:solidFill>
+                  <a:schemeClr val="tx1"/>
+                </a:solidFill>
+                <a:latin typeface="Segoe UI Emoji" charset="0"/>
+                <a:ea typeface="ui-sans-serif" charset="0"/>
+              </a:rPr>
+              <a:t> </a:t>
+            </a:r>
+            <a:r>
+              <a:rPr sz="1200" i="0" b="0">
+                <a:solidFill>
+                  <a:schemeClr val="tx1"/>
+                </a:solidFill>
+                <a:latin typeface="Segoe UI Emoji" charset="0"/>
+                <a:ea typeface="ui-sans-serif" charset="0"/>
+              </a:rPr>
+              <a:t>품질 점수</a:t>
+            </a:r>
+            <a:r>
+              <a:rPr lang="ko-KR" sz="1800">
+                <a:latin typeface="맑은 고딕" charset="0"/>
+                <a:ea typeface="맑은 고딕" charset="0"/>
+              </a:rPr>
+              <a:t>)</a:t>
+            </a:r>
+            <a:endParaRPr lang="ko-KR" altLang="en-US" sz="1800">
+              <a:latin typeface="맑은 고딕" charset="0"/>
+              <a:ea typeface="맑은 고딕" charset="0"/>
+            </a:endParaRPr>
+          </a:p>
+        </p:txBody>
+      </p:sp>
+      <p:sp>
+        <p:nvSpPr>
+          <p:cNvPr id="23" name="텍스트 상자 29"/>
+          <p:cNvSpPr txBox="1">
             <a:spLocks/>
           </p:cNvSpPr>
           <p:nvPr/>
         </p:nvSpPr>
         <p:spPr>
           <a:xfrm rot="0">
-            <a:off x="1283970" y="1144905"/>
-            <a:ext cx="1066800" cy="544195"/>
+            <a:off x="8050530" y="3912235"/>
+            <a:ext cx="2042160" cy="370205"/>
+          </a:xfrm>
+          <a:prstGeom prst="rect"/>
+          <a:noFill/>
+          <a:ln w="0" cap="flat" cmpd="sng">
+            <a:solidFill>
+              <a:srgbClr val="FFFFFF">
+                <a:alpha val="100000"/>
+              </a:srgbClr>
+            </a:solidFill>
+            <a:prstDash/>
+          </a:ln>
+        </p:spPr>
+        <p:txBody>
+          <a:bodyPr wrap="square" lIns="89535" tIns="46355" rIns="89535" bIns="46355" vert="horz" anchor="t">
+            <a:spAutoFit/>
+          </a:bodyPr>
+          <a:lstStyle/>
+          <a:p>
+            <a:pPr marL="0" indent="0" algn="l" hangingPunct="1"/>
+            <a:r>
+              <a:rPr lang="ko-KR" sz="1800">
+                <a:latin typeface="맑은 고딕" charset="0"/>
+                <a:ea typeface="맑은 고딕" charset="0"/>
+              </a:rPr>
+              <a:t>토마토 </a:t>
+            </a:r>
+            <a:r>
+              <a:rPr lang="ko-KR" sz="1800">
+                <a:latin typeface="맑은 고딕" charset="0"/>
+                <a:ea typeface="맑은 고딕" charset="0"/>
+              </a:rPr>
+              <a:t>가격</a:t>
+            </a:r>
+            <a:r>
+              <a:rPr lang="ko-KR" sz="1800">
+                <a:latin typeface="맑은 고딕" charset="0"/>
+                <a:ea typeface="맑은 고딕" charset="0"/>
+              </a:rPr>
+              <a:t> </a:t>
+            </a:r>
+            <a:r>
+              <a:rPr lang="ko-KR" sz="1800">
+                <a:latin typeface="맑은 고딕" charset="0"/>
+                <a:ea typeface="맑은 고딕" charset="0"/>
+              </a:rPr>
+              <a:t>추이</a:t>
+            </a:r>
+            <a:endParaRPr lang="ko-KR" altLang="en-US" sz="1800">
+              <a:latin typeface="맑은 고딕" charset="0"/>
+              <a:ea typeface="맑은 고딕" charset="0"/>
+            </a:endParaRPr>
+          </a:p>
+        </p:txBody>
+      </p:sp>
+      <p:sp>
+        <p:nvSpPr>
+          <p:cNvPr id="24" name="텍스트 상자 30"/>
+          <p:cNvSpPr txBox="1">
+            <a:spLocks/>
+          </p:cNvSpPr>
+          <p:nvPr/>
+        </p:nvSpPr>
+        <p:spPr>
+          <a:xfrm rot="0">
+            <a:off x="7961630" y="4228465"/>
+            <a:ext cx="2239645" cy="647065"/>
+          </a:xfrm>
+          <a:prstGeom prst="rect"/>
+          <a:noFill/>
+          <a:ln w="0" cap="flat" cmpd="sng">
+            <a:solidFill>
+              <a:srgbClr val="FFFFFF">
+                <a:alpha val="100000"/>
+              </a:srgbClr>
+            </a:solidFill>
+            <a:prstDash/>
+          </a:ln>
+        </p:spPr>
+        <p:txBody>
+          <a:bodyPr wrap="none" lIns="89535" tIns="46355" rIns="89535" bIns="46355" vert="horz" anchor="t">
+            <a:spAutoFit/>
+          </a:bodyPr>
+          <a:lstStyle/>
+          <a:p>
+            <a:pPr marL="0" indent="0">
+              <a:buFontTx/>
+              <a:buNone/>
+            </a:pPr>
+            <a:r>
+              <a:rPr lang="ko-KR" sz="1800">
+                <a:latin typeface="맑은 고딕" charset="0"/>
+                <a:ea typeface="맑은 고딕" charset="0"/>
+              </a:rPr>
+              <a:t>꺽은선 그래프 </a:t>
+            </a:r>
+            <a:r>
+              <a:rPr lang="ko-KR" sz="1800">
+                <a:latin typeface="맑은 고딕" charset="0"/>
+                <a:ea typeface="맑은 고딕" charset="0"/>
+              </a:rPr>
+              <a:t>그림</a:t>
+            </a:r>
+            <a:r>
+              <a:rPr lang="ko-KR" sz="1800">
+                <a:latin typeface="맑은 고딕" charset="0"/>
+                <a:ea typeface="맑은 고딕" charset="0"/>
+              </a:rPr>
+              <a:t>(</a:t>
+            </a:r>
+            <a:endParaRPr lang="ko-KR" altLang="en-US" sz="1800">
+              <a:latin typeface="맑은 고딕" charset="0"/>
+              <a:ea typeface="맑은 고딕" charset="0"/>
+            </a:endParaRPr>
+          </a:p>
+          <a:p>
+            <a:pPr marL="0" indent="0">
+              <a:buFontTx/>
+              <a:buNone/>
+            </a:pPr>
+            <a:r>
+              <a:rPr sz="1200" i="0" b="0">
+                <a:solidFill>
+                  <a:schemeClr val="tx1"/>
+                </a:solidFill>
+                <a:latin typeface="Segoe UI Emoji" charset="0"/>
+                <a:ea typeface="ui-sans-serif" charset="0"/>
+              </a:rPr>
+              <a:t>도매가 (원/kg)</a:t>
+            </a:r>
+            <a:r>
+              <a:rPr sz="1200" i="0" b="0">
+                <a:solidFill>
+                  <a:schemeClr val="tx1"/>
+                </a:solidFill>
+                <a:latin typeface="Segoe UI Emoji" charset="0"/>
+                <a:ea typeface="ui-sans-serif" charset="0"/>
+              </a:rPr>
+              <a:t>,</a:t>
+            </a:r>
+            <a:r>
+              <a:rPr lang="ko-KR" sz="1200" i="0" b="0">
+                <a:solidFill>
+                  <a:schemeClr val="tx1"/>
+                </a:solidFill>
+                <a:latin typeface="Segoe UI Emoji" charset="0"/>
+                <a:ea typeface="ui-sans-serif" charset="0"/>
+              </a:rPr>
+              <a:t> </a:t>
+            </a:r>
+            <a:r>
+              <a:rPr sz="1200" i="0" b="0">
+                <a:solidFill>
+                  <a:schemeClr val="tx1"/>
+                </a:solidFill>
+                <a:latin typeface="Segoe UI Emoji" charset="0"/>
+                <a:ea typeface="ui-sans-serif" charset="0"/>
+              </a:rPr>
+              <a:t>소매가 (원/kg</a:t>
+            </a:r>
+            <a:r>
+              <a:rPr lang="ko-KR" sz="1800">
+                <a:latin typeface="맑은 고딕" charset="0"/>
+                <a:ea typeface="맑은 고딕" charset="0"/>
+              </a:rPr>
+              <a:t>)</a:t>
+            </a:r>
+            <a:endParaRPr lang="ko-KR" altLang="en-US" sz="1800">
+              <a:latin typeface="맑은 고딕" charset="0"/>
+              <a:ea typeface="맑은 고딕" charset="0"/>
+            </a:endParaRPr>
+          </a:p>
+        </p:txBody>
+      </p:sp>
+      <p:sp>
+        <p:nvSpPr>
+          <p:cNvPr id="25" name="도형 31"/>
+          <p:cNvSpPr>
+            <a:spLocks/>
+          </p:cNvSpPr>
+          <p:nvPr/>
+        </p:nvSpPr>
+        <p:spPr>
+          <a:xfrm>
+            <a:off x="5668010" y="4975860"/>
+            <a:ext cx="3279775" cy="850900"/>
           </a:xfrm>
           <a:prstGeom prst="rect"/>
           <a:solidFill>
-            <a:schemeClr val="tx1"/>
+            <a:schemeClr val="bg1"/>
           </a:solidFill>
         </p:spPr>
         <p:style>
@@ -7469,50 +7842,328 @@
           </a:fontRef>
         </p:style>
         <p:txBody>
-          <a:bodyPr wrap="square" lIns="91440" tIns="45720" rIns="91440" bIns="45720" vert="horz" anchor="ctr">
+          <a:bodyPr wrap="square" lIns="91440" tIns="45720" rIns="91440" bIns="45720" numCol="1" vert="horz" anchor="ctr">
             <a:noAutofit/>
           </a:bodyPr>
           <a:lstStyle/>
           <a:p>
-            <a:pPr marL="0" indent="0" algn="ctr" hangingPunct="1"/>
-            <a:r>
-              <a:rPr lang="ko-KR" sz="1800">
-                <a:latin typeface="맑은 고딕" charset="0"/>
-                <a:ea typeface="맑은 고딕" charset="0"/>
-              </a:rPr>
-              <a:t>H</a:t>
-            </a:r>
-            <a:r>
-              <a:rPr lang="ko-KR" sz="1800">
-                <a:latin typeface="맑은 고딕" charset="0"/>
-                <a:ea typeface="맑은 고딕" charset="0"/>
-              </a:rPr>
-              <a:t>ea</a:t>
-            </a:r>
-            <a:r>
-              <a:rPr lang="ko-KR" sz="1800">
-                <a:latin typeface="맑은 고딕" charset="0"/>
-                <a:ea typeface="맑은 고딕" charset="0"/>
-              </a:rPr>
-              <a:t>de</a:t>
-            </a:r>
-            <a:r>
-              <a:rPr lang="ko-KR" sz="1800">
-                <a:latin typeface="맑은 고딕" charset="0"/>
-                <a:ea typeface="맑은 고딕" charset="0"/>
-              </a:rPr>
-              <a:t>r logo</a:t>
-            </a:r>
-            <a:endParaRPr lang="ko-KR" altLang="en-US" sz="1800">
-              <a:latin typeface="맑은 고딕" charset="0"/>
-              <a:ea typeface="맑은 고딕" charset="0"/>
-            </a:endParaRPr>
-          </a:p>
-        </p:txBody>
-      </p:sp>
-      <p:sp>
-        <p:nvSpPr>
-          <p:cNvPr id="20" name="텍스트 상자 33"/>
+            <a:pPr marL="0" indent="0" algn="ctr" hangingPunct="1">
+              <a:buFontTx/>
+              <a:buNone/>
+            </a:pPr>
+            <a:r>
+              <a:rPr sz="1800">
+                <a:solidFill>
+                  <a:schemeClr val="tx1"/>
+                </a:solidFill>
+                <a:latin typeface="맑은 고딕" charset="0"/>
+                <a:ea typeface="맑은 고딕" charset="0"/>
+              </a:rPr>
+              <a:t>재배</a:t>
+            </a:r>
+            <a:r>
+              <a:rPr lang="ko-KR" sz="1800">
+                <a:solidFill>
+                  <a:schemeClr val="tx1"/>
+                </a:solidFill>
+                <a:latin typeface="맑은 고딕" charset="0"/>
+                <a:ea typeface="맑은 고딕" charset="0"/>
+              </a:rPr>
+              <a:t>현황</a:t>
+            </a:r>
+            <a:r>
+              <a:rPr lang="ko-KR" sz="1800">
+                <a:solidFill>
+                  <a:schemeClr val="tx1"/>
+                </a:solidFill>
+                <a:latin typeface="맑은 고딕" charset="0"/>
+                <a:ea typeface="맑은 고딕" charset="0"/>
+              </a:rPr>
+              <a:t> </a:t>
+            </a:r>
+            <a:r>
+              <a:rPr lang="ko-KR" sz="1800">
+                <a:solidFill>
+                  <a:schemeClr val="tx1"/>
+                </a:solidFill>
+                <a:latin typeface="맑은 고딕" charset="0"/>
+                <a:ea typeface="맑은 고딕" charset="0"/>
+              </a:rPr>
+              <a:t>수확까지 일/날짜로 표시하기(</a:t>
+            </a:r>
+            <a:r>
+              <a:rPr lang="ko-KR" sz="1800">
+                <a:solidFill>
+                  <a:schemeClr val="tx1"/>
+                </a:solidFill>
+                <a:latin typeface="맑은 고딕" charset="0"/>
+                <a:ea typeface="맑은 고딕" charset="0"/>
+              </a:rPr>
+              <a:t>파프리카 </a:t>
+            </a:r>
+            <a:r>
+              <a:rPr lang="ko-KR" sz="1800">
+                <a:solidFill>
+                  <a:schemeClr val="tx1"/>
+                </a:solidFill>
+                <a:latin typeface="맑은 고딕" charset="0"/>
+                <a:ea typeface="맑은 고딕" charset="0"/>
+              </a:rPr>
+              <a:t>위주로</a:t>
+            </a:r>
+            <a:r>
+              <a:rPr lang="ko-KR" sz="1800">
+                <a:solidFill>
+                  <a:schemeClr val="tx1"/>
+                </a:solidFill>
+                <a:latin typeface="맑은 고딕" charset="0"/>
+                <a:ea typeface="맑은 고딕" charset="0"/>
+              </a:rPr>
+              <a:t>)</a:t>
+            </a:r>
+            <a:endParaRPr lang="ko-KR" altLang="en-US" sz="1800">
+              <a:solidFill>
+                <a:schemeClr val="tx1"/>
+              </a:solidFill>
+              <a:latin typeface="맑은 고딕" charset="0"/>
+              <a:ea typeface="맑은 고딕" charset="0"/>
+            </a:endParaRPr>
+          </a:p>
+        </p:txBody>
+      </p:sp>
+      <p:sp>
+        <p:nvSpPr>
+          <p:cNvPr id="26" name="도형 22"/>
+          <p:cNvSpPr>
+            <a:spLocks/>
+          </p:cNvSpPr>
+          <p:nvPr/>
+        </p:nvSpPr>
+        <p:spPr>
+          <a:xfrm rot="0">
+            <a:off x="1086485" y="1016635"/>
+            <a:ext cx="9401810" cy="800735"/>
+          </a:xfrm>
+          <a:prstGeom prst="rect"/>
+          <a:solidFill>
+            <a:schemeClr val="bg1"/>
+          </a:solidFill>
+          <a:ln w="12700" cap="flat" cmpd="sng">
+            <a:solidFill>
+              <a:schemeClr val="tx1">
+                <a:alpha val="100000"/>
+              </a:schemeClr>
+            </a:solidFill>
+            <a:prstDash val="solid"/>
+          </a:ln>
+        </p:spPr>
+        <p:style>
+          <a:lnRef idx="2">
+            <a:schemeClr val="accent1">
+              <a:shade val="50000"/>
+            </a:schemeClr>
+          </a:lnRef>
+          <a:fillRef idx="1">
+            <a:schemeClr val="accent1"/>
+          </a:fillRef>
+          <a:effectRef idx="0">
+            <a:schemeClr val="accent1"/>
+          </a:effectRef>
+          <a:fontRef idx="minor">
+            <a:schemeClr val="lt1"/>
+          </a:fontRef>
+        </p:style>
+        <p:txBody>
+          <a:bodyPr wrap="square" lIns="91440" tIns="45720" rIns="91440" bIns="45720" numCol="1" vert="horz" anchor="ctr">
+            <a:noAutofit/>
+          </a:bodyPr>
+          <a:lstStyle/>
+          <a:p>
+            <a:pPr marL="0" indent="0" algn="ctr" hangingPunct="1">
+              <a:buFontTx/>
+              <a:buNone/>
+            </a:pPr>
+            <a:endParaRPr lang="ko-KR" altLang="en-US" sz="1800">
+              <a:latin typeface="맑은 고딕" charset="0"/>
+              <a:ea typeface="맑은 고딕" charset="0"/>
+            </a:endParaRPr>
+          </a:p>
+        </p:txBody>
+      </p:sp>
+      <p:sp>
+        <p:nvSpPr>
+          <p:cNvPr id="27" name="도형 23"/>
+          <p:cNvSpPr>
+            <a:spLocks/>
+          </p:cNvSpPr>
+          <p:nvPr/>
+        </p:nvSpPr>
+        <p:spPr>
+          <a:xfrm rot="0">
+            <a:off x="6773545" y="1243330"/>
+            <a:ext cx="2204085" cy="446405"/>
+          </a:xfrm>
+          <a:prstGeom prst="rect"/>
+        </p:spPr>
+        <p:style>
+          <a:lnRef idx="2">
+            <a:schemeClr val="accent1">
+              <a:shade val="50000"/>
+            </a:schemeClr>
+          </a:lnRef>
+          <a:fillRef idx="1">
+            <a:schemeClr val="accent1"/>
+          </a:fillRef>
+          <a:effectRef idx="0">
+            <a:schemeClr val="accent1"/>
+          </a:effectRef>
+          <a:fontRef idx="minor">
+            <a:schemeClr val="lt1"/>
+          </a:fontRef>
+        </p:style>
+        <p:txBody>
+          <a:bodyPr wrap="square" lIns="91440" tIns="45720" rIns="91440" bIns="45720" numCol="1" vert="horz" anchor="ctr">
+            <a:noAutofit/>
+          </a:bodyPr>
+          <a:lstStyle/>
+          <a:p>
+            <a:pPr marL="0" indent="0" algn="ctr" hangingPunct="1">
+              <a:buFontTx/>
+              <a:buNone/>
+            </a:pPr>
+            <a:r>
+              <a:rPr lang="ko-KR" sz="1800">
+                <a:latin typeface="맑은 고딕" charset="0"/>
+                <a:ea typeface="맑은 고딕" charset="0"/>
+              </a:rPr>
+              <a:t>Snss님 반갑습니다</a:t>
+            </a:r>
+            <a:endParaRPr lang="ko-KR" altLang="en-US" sz="1800">
+              <a:latin typeface="맑은 고딕" charset="0"/>
+              <a:ea typeface="맑은 고딕" charset="0"/>
+            </a:endParaRPr>
+          </a:p>
+        </p:txBody>
+      </p:sp>
+      <p:sp>
+        <p:nvSpPr>
+          <p:cNvPr id="28" name="도형 24"/>
+          <p:cNvSpPr>
+            <a:spLocks/>
+          </p:cNvSpPr>
+          <p:nvPr/>
+        </p:nvSpPr>
+        <p:spPr>
+          <a:xfrm rot="0">
+            <a:off x="9103995" y="1223645"/>
+            <a:ext cx="1147445" cy="466090"/>
+          </a:xfrm>
+          <a:prstGeom prst="rect"/>
+          <a:solidFill>
+            <a:schemeClr val="tx1"/>
+          </a:solidFill>
+        </p:spPr>
+        <p:style>
+          <a:lnRef idx="2">
+            <a:schemeClr val="accent1">
+              <a:shade val="50000"/>
+            </a:schemeClr>
+          </a:lnRef>
+          <a:fillRef idx="1">
+            <a:schemeClr val="accent1"/>
+          </a:fillRef>
+          <a:effectRef idx="0">
+            <a:schemeClr val="accent1"/>
+          </a:effectRef>
+          <a:fontRef idx="minor">
+            <a:schemeClr val="lt1"/>
+          </a:fontRef>
+        </p:style>
+        <p:txBody>
+          <a:bodyPr wrap="square" lIns="91440" tIns="45720" rIns="91440" bIns="45720" numCol="1" vert="horz" anchor="ctr">
+            <a:noAutofit/>
+          </a:bodyPr>
+          <a:lstStyle/>
+          <a:p>
+            <a:pPr marL="0" indent="0" algn="ctr" hangingPunct="1">
+              <a:buFontTx/>
+              <a:buNone/>
+            </a:pPr>
+            <a:r>
+              <a:rPr sz="1800">
+                <a:latin typeface="맑은 고딕" charset="0"/>
+                <a:ea typeface="맑은 고딕" charset="0"/>
+              </a:rPr>
+              <a:t>로그아웃</a:t>
+            </a:r>
+            <a:endParaRPr lang="ko-KR" altLang="en-US" sz="1800">
+              <a:latin typeface="맑은 고딕" charset="0"/>
+              <a:ea typeface="맑은 고딕" charset="0"/>
+            </a:endParaRPr>
+          </a:p>
+        </p:txBody>
+      </p:sp>
+      <p:sp>
+        <p:nvSpPr>
+          <p:cNvPr id="29" name="도형 25"/>
+          <p:cNvSpPr>
+            <a:spLocks/>
+          </p:cNvSpPr>
+          <p:nvPr/>
+        </p:nvSpPr>
+        <p:spPr>
+          <a:xfrm rot="0">
+            <a:off x="1244600" y="1184275"/>
+            <a:ext cx="1067435" cy="544830"/>
+          </a:xfrm>
+          <a:prstGeom prst="rect"/>
+          <a:solidFill>
+            <a:schemeClr val="tx1"/>
+          </a:solidFill>
+        </p:spPr>
+        <p:style>
+          <a:lnRef idx="2">
+            <a:schemeClr val="accent1">
+              <a:shade val="50000"/>
+            </a:schemeClr>
+          </a:lnRef>
+          <a:fillRef idx="1">
+            <a:schemeClr val="accent1"/>
+          </a:fillRef>
+          <a:effectRef idx="0">
+            <a:schemeClr val="accent1"/>
+          </a:effectRef>
+          <a:fontRef idx="minor">
+            <a:schemeClr val="lt1"/>
+          </a:fontRef>
+        </p:style>
+        <p:txBody>
+          <a:bodyPr wrap="square" lIns="91440" tIns="45720" rIns="91440" bIns="45720" numCol="1" vert="horz" anchor="ctr">
+            <a:noAutofit/>
+          </a:bodyPr>
+          <a:lstStyle/>
+          <a:p>
+            <a:pPr marL="0" indent="0" algn="ctr" hangingPunct="1">
+              <a:buFontTx/>
+              <a:buNone/>
+            </a:pPr>
+            <a:r>
+              <a:rPr lang="ko-KR" sz="1800">
+                <a:latin typeface="맑은 고딕" charset="0"/>
+                <a:ea typeface="맑은 고딕" charset="0"/>
+              </a:rPr>
+              <a:t>Header logo</a:t>
+            </a:r>
+            <a:endParaRPr lang="ko-KR" altLang="en-US" sz="1800">
+              <a:latin typeface="맑은 고딕" charset="0"/>
+              <a:ea typeface="맑은 고딕" charset="0"/>
+            </a:endParaRPr>
+          </a:p>
+        </p:txBody>
+      </p:sp>
+      <p:sp>
+        <p:nvSpPr>
+          <p:cNvPr id="30" name="텍스트 상자 26"/>
           <p:cNvSpPr txBox="1">
             <a:spLocks/>
           </p:cNvSpPr>
@@ -7520,8 +8171,8 @@
         </p:nvSpPr>
         <p:spPr>
           <a:xfrm rot="0">
-            <a:off x="2597150" y="1195070"/>
-            <a:ext cx="1094105" cy="370205"/>
+            <a:off x="2557780" y="1234440"/>
+            <a:ext cx="1094740" cy="370840"/>
           </a:xfrm>
           <a:prstGeom prst="rect"/>
           <a:noFill/>
@@ -7531,16 +8182,19 @@
                 <a:alpha val="100000"/>
               </a:srgbClr>
             </a:solidFill>
-            <a:prstDash/>
+            <a:prstDash val="solid"/>
           </a:ln>
         </p:spPr>
         <p:txBody>
-          <a:bodyPr wrap="none" lIns="89535" tIns="46355" rIns="89535" bIns="46355" vert="horz" anchor="t">
+          <a:bodyPr wrap="none" lIns="89535" tIns="46355" rIns="89535" bIns="46355" numCol="1" vert="horz" anchor="t">
             <a:spAutoFit/>
           </a:bodyPr>
           <a:lstStyle/>
           <a:p>
-            <a:pPr marL="0" indent="0" algn="l" hangingPunct="1"/>
+            <a:pPr marL="0" indent="0" algn="l" hangingPunct="1">
+              <a:buFontTx/>
+              <a:buNone/>
+            </a:pPr>
             <a:r>
               <a:rPr lang="ko-KR" sz="1800">
                 <a:latin typeface="맑은 고딕" charset="0"/>
@@ -7557,7 +8211,7 @@
       </p:sp>
       <p:sp>
         <p:nvSpPr>
-          <p:cNvPr id="21" name="텍스트 상자 34"/>
+          <p:cNvPr id="31" name="텍스트 상자 27"/>
           <p:cNvSpPr txBox="1">
             <a:spLocks/>
           </p:cNvSpPr>
@@ -7565,8 +8219,8 @@
         </p:nvSpPr>
         <p:spPr>
           <a:xfrm rot="0">
-            <a:off x="3695700" y="1207135"/>
-            <a:ext cx="1403350" cy="370205"/>
+            <a:off x="3656330" y="1246505"/>
+            <a:ext cx="1403985" cy="370840"/>
           </a:xfrm>
           <a:prstGeom prst="rect"/>
           <a:noFill/>
@@ -7576,16 +8230,19 @@
                 <a:alpha val="100000"/>
               </a:srgbClr>
             </a:solidFill>
-            <a:prstDash/>
+            <a:prstDash val="solid"/>
           </a:ln>
         </p:spPr>
         <p:txBody>
-          <a:bodyPr wrap="none" lIns="89535" tIns="46355" rIns="89535" bIns="46355" vert="horz" anchor="t">
+          <a:bodyPr wrap="none" lIns="89535" tIns="46355" rIns="89535" bIns="46355" numCol="1" vert="horz" anchor="t">
             <a:spAutoFit/>
           </a:bodyPr>
           <a:lstStyle/>
           <a:p>
-            <a:pPr marL="0" indent="0" algn="l" hangingPunct="1"/>
+            <a:pPr marL="0" indent="0" algn="l" hangingPunct="1">
+              <a:buFontTx/>
+              <a:buNone/>
+            </a:pPr>
             <a:r>
               <a:rPr lang="ko-KR" sz="1800">
                 <a:latin typeface="맑은 고딕" charset="0"/>
@@ -7602,7 +8259,7 @@
       </p:sp>
       <p:sp>
         <p:nvSpPr>
-          <p:cNvPr id="22" name="텍스트 상자 35"/>
+          <p:cNvPr id="32" name="텍스트 상자 28"/>
           <p:cNvSpPr txBox="1">
             <a:spLocks/>
           </p:cNvSpPr>
@@ -7610,8 +8267,8 @@
         </p:nvSpPr>
         <p:spPr>
           <a:xfrm rot="0">
-            <a:off x="5071110" y="1189990"/>
-            <a:ext cx="1174750" cy="370205"/>
+            <a:off x="5031740" y="1229360"/>
+            <a:ext cx="1175385" cy="370840"/>
           </a:xfrm>
           <a:prstGeom prst="rect"/>
           <a:noFill/>
@@ -7621,16 +8278,19 @@
                 <a:alpha val="100000"/>
               </a:srgbClr>
             </a:solidFill>
-            <a:prstDash/>
+            <a:prstDash val="solid"/>
           </a:ln>
         </p:spPr>
         <p:txBody>
-          <a:bodyPr wrap="none" lIns="89535" tIns="46355" rIns="89535" bIns="46355" vert="horz" anchor="t">
+          <a:bodyPr wrap="none" lIns="89535" tIns="46355" rIns="89535" bIns="46355" numCol="1" vert="horz" anchor="t">
             <a:spAutoFit/>
           </a:bodyPr>
           <a:lstStyle/>
           <a:p>
-            <a:pPr marL="0" indent="0" algn="l" hangingPunct="1"/>
+            <a:pPr marL="0" indent="0" algn="l" hangingPunct="1">
+              <a:buFontTx/>
+              <a:buNone/>
+            </a:pPr>
             <a:r>
               <a:rPr sz="1800">
                 <a:latin typeface="맑은 고딕" charset="0"/>
@@ -7643,14 +8303,7 @@
                 <a:latin typeface="맑은 고딕" charset="0"/>
                 <a:ea typeface="맑은 고딕" charset="0"/>
               </a:rPr>
-              <a:t> </a:t>
-            </a:r>
-            <a:r>
-              <a:rPr lang="ko-KR" sz="1800">
-                <a:latin typeface="맑은 고딕" charset="0"/>
-                <a:ea typeface="맑은 고딕" charset="0"/>
-              </a:rPr>
-              <a:t>예측</a:t>
+              <a:t> 예측</a:t>
             </a:r>
             <a:endParaRPr lang="ko-KR" altLang="en-US" sz="1800">
               <a:latin typeface="맑은 고딕" charset="0"/>
@@ -7709,8 +8362,8 @@
         </p:nvSpPr>
         <p:spPr>
           <a:xfrm rot="0">
-            <a:off x="1116965" y="1026160"/>
-            <a:ext cx="9412605" cy="4979670"/>
+            <a:off x="1136015" y="1016635"/>
+            <a:ext cx="9411335" cy="4978400"/>
           </a:xfrm>
           <a:prstGeom prst="rect"/>
           <a:solidFill>
@@ -7763,7 +8416,7 @@
         </p:nvSpPr>
         <p:spPr>
           <a:xfrm rot="0">
-            <a:off x="1894840" y="1903730"/>
+            <a:off x="1875790" y="1913255"/>
             <a:ext cx="2611120" cy="370840"/>
           </a:xfrm>
           <a:prstGeom prst="rect"/>
@@ -7959,8 +8612,8 @@
         </p:nvSpPr>
         <p:spPr>
           <a:xfrm rot="0">
-            <a:off x="2490470" y="4443095"/>
-            <a:ext cx="2162175" cy="647065"/>
+            <a:off x="2743835" y="4452620"/>
+            <a:ext cx="2105660" cy="647065"/>
           </a:xfrm>
           <a:prstGeom prst="rect"/>
           <a:noFill/>
@@ -8053,9 +8706,9 @@
           <p:nvPr/>
         </p:nvCxnSpPr>
         <p:spPr>
-          <a:xfrm rot="0">
-            <a:off x="3088005" y="3931920"/>
-            <a:ext cx="7620" cy="476885"/>
+          <a:xfrm rot="0" flipH="1">
+            <a:off x="3244850" y="3912870"/>
+            <a:ext cx="3175" cy="561975"/>
           </a:xfrm>
           <a:prstGeom prst="straightConnector1"/>
           <a:ln w="6350" cap="flat" cmpd="sng">
@@ -8088,8 +8741,8 @@
         </p:nvSpPr>
         <p:spPr>
           <a:xfrm rot="0">
-            <a:off x="5173980" y="1905635"/>
-            <a:ext cx="1175385" cy="370840"/>
+            <a:off x="5243195" y="1797050"/>
+            <a:ext cx="1403985" cy="370840"/>
           </a:xfrm>
           <a:prstGeom prst="rect"/>
           <a:noFill/>
@@ -8117,14 +8770,7 @@
                 <a:latin typeface="맑은 고딕" charset="0"/>
                 <a:ea typeface="맑은 고딕" charset="0"/>
               </a:rPr>
-              <a:t>가격</a:t>
-            </a:r>
-            <a:r>
-              <a:rPr lang="ko-KR" sz="1800">
-                <a:latin typeface="맑은 고딕" charset="0"/>
-                <a:ea typeface="맑은 고딕" charset="0"/>
-              </a:rPr>
-              <a:t> 예측</a:t>
+              <a:t>데이터 분석</a:t>
             </a:r>
             <a:endParaRPr lang="ko-KR" altLang="en-US" sz="1800">
               <a:latin typeface="맑은 고딕" charset="0"/>
@@ -8143,8 +8789,8 @@
         </p:nvSpPr>
         <p:spPr>
           <a:xfrm rot="0">
-            <a:off x="4622165" y="2428875"/>
-            <a:ext cx="3990340" cy="463550"/>
+            <a:off x="4964430" y="2278380"/>
+            <a:ext cx="3990340" cy="278765"/>
           </a:xfrm>
           <a:prstGeom prst="rect"/>
           <a:noFill/>
@@ -8175,7 +8821,7 @@
                 <a:latin typeface="Segoe UI Emoji" charset="0"/>
                 <a:ea typeface="ui-sans-serif" charset="0"/>
               </a:rPr>
-              <a:t>도/소매가 분석과 날씨 데이터를 연동하여 정확한 가격예</a:t>
+              <a:t>축적된 농가 데이터를 분석하여 최적 환경</a:t>
             </a:r>
             <a:r>
               <a:rPr lang="ko-KR" sz="1200" i="0" b="0">
@@ -8185,7 +8831,17 @@
                 <a:latin typeface="Segoe UI Emoji" charset="0"/>
                 <a:ea typeface="ui-sans-serif" charset="0"/>
               </a:rPr>
-              <a:t>측하기!</a:t>
+              <a:t> </a:t>
+            </a:r>
+            <a:r>
+              <a:rPr lang="ko-KR" sz="1200" i="0" b="0">
+                <a:solidFill>
+                  <a:schemeClr val="bg1"/>
+                </a:solidFill>
+                <a:latin typeface="Segoe UI Emoji" charset="0"/>
+                <a:ea typeface="ui-sans-serif" charset="0"/>
+              </a:rPr>
+              <a:t>추천서비스</a:t>
             </a:r>
             <a:endParaRPr lang="ko-KR" altLang="en-US" sz="1200" i="0" b="0">
               <a:solidFill>
@@ -8199,7 +8855,7 @@
       </p:sp>
       <p:sp>
         <p:nvSpPr>
-          <p:cNvPr id="11" name="도형 39"/>
+          <p:cNvPr id="11" name="도형 35"/>
           <p:cNvSpPr>
             <a:spLocks/>
           </p:cNvSpPr>
@@ -8207,12 +8863,12 @@
         </p:nvSpPr>
         <p:spPr>
           <a:xfrm rot="0">
-            <a:off x="8801100" y="1943735"/>
-            <a:ext cx="1670685" cy="485775"/>
+            <a:off x="5509895" y="2705100"/>
+            <a:ext cx="3615055" cy="929005"/>
           </a:xfrm>
           <a:prstGeom prst="rect"/>
           <a:solidFill>
-            <a:schemeClr val="tx1"/>
+            <a:schemeClr val="bg1"/>
           </a:solidFill>
         </p:spPr>
         <p:style>
@@ -8232,32 +8888,115 @@
           </a:fontRef>
         </p:style>
         <p:txBody>
-          <a:bodyPr wrap="square" lIns="91440" tIns="45720" rIns="91440" bIns="45720" numCol="1" vert="horz" anchor="ctr">
+          <a:bodyPr wrap="square" lIns="91440" tIns="45720" rIns="91440" bIns="45720" vert="horz" anchor="ctr">
             <a:noAutofit/>
           </a:bodyPr>
           <a:lstStyle/>
           <a:p>
-            <a:pPr marL="0" indent="0" algn="ctr" hangingPunct="1">
-              <a:buFontTx/>
-              <a:buNone/>
-            </a:pPr>
-            <a:r>
-              <a:rPr lang="ko-KR" sz="1800">
-                <a:latin typeface="맑은 고딕" charset="0"/>
-                <a:ea typeface="맑은 고딕" charset="0"/>
-              </a:rPr>
-              <a:t>가격예측실행버튼</a:t>
-            </a:r>
-            <a:endParaRPr lang="ko-KR" altLang="en-US" sz="1800">
-              <a:latin typeface="맑은 고딕" charset="0"/>
-              <a:ea typeface="맑은 고딕" charset="0"/>
-            </a:endParaRPr>
-          </a:p>
-        </p:txBody>
-      </p:sp>
-      <p:sp>
-        <p:nvSpPr>
-          <p:cNvPr id="14" name="도형 3"/>
+            <a:pPr marL="0" indent="0" algn="ctr" hangingPunct="1"/>
+            <a:r>
+              <a:rPr lang="ko-KR" sz="1800">
+                <a:solidFill>
+                  <a:schemeClr val="tx1"/>
+                </a:solidFill>
+                <a:latin typeface="맑은 고딕" charset="0"/>
+                <a:ea typeface="맑은 고딕" charset="0"/>
+              </a:rPr>
+              <a:t>데이터 </a:t>
+            </a:r>
+            <a:r>
+              <a:rPr lang="ko-KR" sz="1800">
+                <a:solidFill>
+                  <a:schemeClr val="tx1"/>
+                </a:solidFill>
+                <a:latin typeface="맑은 고딕" charset="0"/>
+                <a:ea typeface="맑은 고딕" charset="0"/>
+              </a:rPr>
+              <a:t>업로드(환경데이터,</a:t>
+            </a:r>
+            <a:r>
+              <a:rPr lang="ko-KR" sz="1800">
+                <a:solidFill>
+                  <a:schemeClr val="tx1"/>
+                </a:solidFill>
+                <a:latin typeface="맑은 고딕" charset="0"/>
+                <a:ea typeface="맑은 고딕" charset="0"/>
+              </a:rPr>
+              <a:t> 생육</a:t>
+            </a:r>
+            <a:r>
+              <a:rPr lang="ko-KR" sz="1800">
+                <a:solidFill>
+                  <a:schemeClr val="tx1"/>
+                </a:solidFill>
+                <a:latin typeface="맑은 고딕" charset="0"/>
+                <a:ea typeface="맑은 고딕" charset="0"/>
+              </a:rPr>
+              <a:t>데이터,</a:t>
+            </a:r>
+            <a:r>
+              <a:rPr lang="ko-KR" sz="1800">
+                <a:solidFill>
+                  <a:schemeClr val="tx1"/>
+                </a:solidFill>
+                <a:latin typeface="맑은 고딕" charset="0"/>
+                <a:ea typeface="맑은 고딕" charset="0"/>
+              </a:rPr>
+              <a:t> 생산량데이터</a:t>
+            </a:r>
+            <a:r>
+              <a:rPr lang="ko-KR" sz="1800">
+                <a:solidFill>
+                  <a:schemeClr val="tx1"/>
+                </a:solidFill>
+                <a:latin typeface="맑은 고딕" charset="0"/>
+                <a:ea typeface="맑은 고딕" charset="0"/>
+              </a:rPr>
+              <a:t> </a:t>
+            </a:r>
+            <a:r>
+              <a:rPr lang="ko-KR" sz="1800">
+                <a:solidFill>
+                  <a:schemeClr val="tx1"/>
+                </a:solidFill>
+                <a:latin typeface="맑은 고딕" charset="0"/>
+                <a:ea typeface="맑은 고딕" charset="0"/>
+              </a:rPr>
+              <a:t>-ㅡ csv나 xl</a:t>
+            </a:r>
+            <a:r>
+              <a:rPr lang="ko-KR" sz="1800">
+                <a:solidFill>
+                  <a:schemeClr val="tx1"/>
+                </a:solidFill>
+                <a:latin typeface="맑은 고딕" charset="0"/>
+                <a:ea typeface="맑은 고딕" charset="0"/>
+              </a:rPr>
+              <a:t>s</a:t>
+            </a:r>
+            <a:r>
+              <a:rPr lang="ko-KR" sz="1800">
+                <a:solidFill>
+                  <a:schemeClr val="tx1"/>
+                </a:solidFill>
+                <a:latin typeface="맑은 고딕" charset="0"/>
+                <a:ea typeface="맑은 고딕" charset="0"/>
+              </a:rPr>
+              <a:t>x파일들)</a:t>
+            </a:r>
+            <a:endParaRPr lang="ko-KR" altLang="en-US" sz="1800">
+              <a:solidFill>
+                <a:schemeClr val="tx1"/>
+              </a:solidFill>
+              <a:latin typeface="맑은 고딕" charset="0"/>
+              <a:ea typeface="맑은 고딕" charset="0"/>
+            </a:endParaRPr>
+          </a:p>
+        </p:txBody>
+      </p:sp>
+      <p:sp>
+        <p:nvSpPr>
+          <p:cNvPr id="12" name="도형 37"/>
           <p:cNvSpPr>
             <a:spLocks/>
           </p:cNvSpPr>
@@ -8265,12 +9004,12 @@
         </p:nvSpPr>
         <p:spPr>
           <a:xfrm rot="0">
-            <a:off x="5381625" y="3110230"/>
-            <a:ext cx="4078605" cy="1235075"/>
+            <a:off x="9082405" y="1979295"/>
+            <a:ext cx="1363980" cy="485140"/>
           </a:xfrm>
           <a:prstGeom prst="rect"/>
           <a:solidFill>
-            <a:schemeClr val="bg1"/>
+            <a:schemeClr val="tx1"/>
           </a:solidFill>
         </p:spPr>
         <p:style>
@@ -8290,145 +9029,32 @@
           </a:fontRef>
         </p:style>
         <p:txBody>
-          <a:bodyPr wrap="square" lIns="91440" tIns="45720" rIns="91440" bIns="45720" vert="horz" anchor="ctr">
+          <a:bodyPr wrap="square" lIns="91440" tIns="45720" rIns="91440" bIns="45720" numCol="1" vert="horz" anchor="ctr">
             <a:noAutofit/>
           </a:bodyPr>
           <a:lstStyle/>
           <a:p>
-            <a:pPr marL="0" indent="0" algn="ctr" hangingPunct="1"/>
-            <a:r>
-              <a:rPr lang="ko-KR" sz="1800">
-                <a:solidFill>
-                  <a:schemeClr val="tx1"/>
-                </a:solidFill>
-                <a:latin typeface="맑은 고딕" charset="0"/>
-                <a:ea typeface="맑은 고딕" charset="0"/>
-              </a:rPr>
-              <a:t>날씨데이터</a:t>
-            </a:r>
-            <a:r>
-              <a:rPr lang="ko-KR" sz="1800">
-                <a:solidFill>
-                  <a:schemeClr val="tx1"/>
-                </a:solidFill>
-                <a:latin typeface="맑은 고딕" charset="0"/>
-                <a:ea typeface="맑은 고딕" charset="0"/>
-              </a:rPr>
-              <a:t>들의 </a:t>
-            </a:r>
-            <a:r>
-              <a:rPr lang="ko-KR" sz="1800">
-                <a:solidFill>
-                  <a:schemeClr val="tx1"/>
-                </a:solidFill>
-                <a:latin typeface="맑은 고딕" charset="0"/>
-                <a:ea typeface="맑은 고딕" charset="0"/>
-              </a:rPr>
-              <a:t>모아서 차례대로 나오게끔 1</a:t>
-            </a:r>
-            <a:r>
-              <a:rPr lang="ko-KR" sz="1800">
-                <a:solidFill>
-                  <a:schemeClr val="tx1"/>
-                </a:solidFill>
-                <a:latin typeface="맑은 고딕" charset="0"/>
-                <a:ea typeface="맑은 고딕" charset="0"/>
-              </a:rPr>
-              <a:t>s</a:t>
-            </a:r>
-            <a:r>
-              <a:rPr lang="ko-KR" sz="1800">
-                <a:solidFill>
-                  <a:schemeClr val="tx1"/>
-                </a:solidFill>
-                <a:latin typeface="맑은 고딕" charset="0"/>
-                <a:ea typeface="맑은 고딕" charset="0"/>
-              </a:rPr>
-              <a:t>t/2</a:t>
-            </a:r>
-            <a:r>
-              <a:rPr lang="ko-KR" sz="1800">
-                <a:solidFill>
-                  <a:schemeClr val="tx1"/>
-                </a:solidFill>
-                <a:latin typeface="맑은 고딕" charset="0"/>
-                <a:ea typeface="맑은 고딕" charset="0"/>
-              </a:rPr>
-              <a:t>n</a:t>
-            </a:r>
-            <a:r>
-              <a:rPr lang="ko-KR" sz="1800">
-                <a:solidFill>
-                  <a:schemeClr val="tx1"/>
-                </a:solidFill>
-                <a:latin typeface="맑은 고딕" charset="0"/>
-                <a:ea typeface="맑은 고딕" charset="0"/>
-              </a:rPr>
-              <a:t>d/3</a:t>
-            </a:r>
-            <a:r>
-              <a:rPr lang="ko-KR" sz="1800">
-                <a:solidFill>
-                  <a:schemeClr val="tx1"/>
-                </a:solidFill>
-                <a:latin typeface="맑은 고딕" charset="0"/>
-                <a:ea typeface="맑은 고딕" charset="0"/>
-              </a:rPr>
-              <a:t>r</a:t>
-            </a:r>
-            <a:r>
-              <a:rPr lang="ko-KR" sz="1800">
-                <a:solidFill>
-                  <a:schemeClr val="tx1"/>
-                </a:solidFill>
-                <a:latin typeface="맑은 고딕" charset="0"/>
-                <a:ea typeface="맑은 고딕" charset="0"/>
-              </a:rPr>
-              <a:t>d/</a:t>
-            </a:r>
-            <a:r>
-              <a:rPr lang="ko-KR" sz="1800">
-                <a:solidFill>
-                  <a:schemeClr val="tx1"/>
-                </a:solidFill>
-                <a:latin typeface="맑은 고딕" charset="0"/>
-                <a:ea typeface="맑은 고딕" charset="0"/>
-              </a:rPr>
-              <a:t>4</a:t>
-            </a:r>
-            <a:r>
-              <a:rPr lang="ko-KR" sz="1800" baseline="30000">
-                <a:solidFill>
-                  <a:schemeClr val="tx1"/>
-                </a:solidFill>
-                <a:latin typeface="맑은 고딕" charset="0"/>
-                <a:ea typeface="맑은 고딕" charset="0"/>
-              </a:rPr>
-              <a:t>th</a:t>
-            </a:r>
-            <a:r>
-              <a:rPr lang="ko-KR" sz="1800">
-                <a:solidFill>
-                  <a:schemeClr val="tx1"/>
-                </a:solidFill>
-                <a:latin typeface="맑은 고딕" charset="0"/>
-                <a:ea typeface="맑은 고딕" charset="0"/>
-              </a:rPr>
-              <a:t> 순으로!</a:t>
-            </a:r>
-            <a:endParaRPr lang="ko-KR" altLang="en-US" sz="1800">
-              <a:solidFill>
-                <a:schemeClr val="tx1"/>
-              </a:solidFill>
-              <a:latin typeface="맑은 고딕" charset="0"/>
-              <a:ea typeface="맑은 고딕" charset="0"/>
-            </a:endParaRPr>
-          </a:p>
-        </p:txBody>
-      </p:sp>
-      <p:sp>
-        <p:nvSpPr>
-          <p:cNvPr id="15" name="도형 5"/>
+            <a:pPr marL="0" indent="0" algn="ctr" hangingPunct="1">
+              <a:buFontTx/>
+              <a:buNone/>
+            </a:pPr>
+            <a:r>
+              <a:rPr lang="ko-KR" sz="1800">
+                <a:latin typeface="맑은 고딕" charset="0"/>
+                <a:ea typeface="맑은 고딕" charset="0"/>
+              </a:rPr>
+              <a:t>ai분석버튼</a:t>
+            </a:r>
+            <a:endParaRPr lang="ko-KR" altLang="en-US" sz="1800">
+              <a:latin typeface="맑은 고딕" charset="0"/>
+              <a:ea typeface="맑은 고딕" charset="0"/>
+            </a:endParaRPr>
+          </a:p>
+        </p:txBody>
+      </p:sp>
+      <p:sp>
+        <p:nvSpPr>
+          <p:cNvPr id="15" name="도형 1"/>
           <p:cNvSpPr>
             <a:spLocks/>
           </p:cNvSpPr>
@@ -8436,8 +9062,8 @@
         </p:nvSpPr>
         <p:spPr>
           <a:xfrm>
-            <a:off x="5372100" y="4443095"/>
-            <a:ext cx="4128770" cy="1353820"/>
+            <a:off x="5312410" y="4008755"/>
+            <a:ext cx="4247515" cy="1522095"/>
           </a:xfrm>
           <a:prstGeom prst="rect"/>
           <a:solidFill>
@@ -8471,14 +9097,14 @@
               <a:buNone/>
             </a:pPr>
             <a:r>
-              <a:rPr sz="1800">
+              <a:rPr lang="ko-KR" sz="1800">
                 <a:solidFill>
                   <a:schemeClr val="tx1"/>
                 </a:solidFill>
                 <a:latin typeface="맑은 고딕" charset="0"/>
                 <a:ea typeface="맑은 고딕" charset="0"/>
               </a:rPr>
-              <a:t>도/소매가 시</a:t>
+              <a:t>분석한 축적된 농가의 데이터들이 나오게끔 할 예정</a:t>
             </a:r>
             <a:r>
               <a:rPr lang="ko-KR" sz="1800">
@@ -8488,7 +9114,17 @@
                 <a:latin typeface="맑은 고딕" charset="0"/>
                 <a:ea typeface="맑은 고딕" charset="0"/>
               </a:rPr>
-              <a:t>기별 분석 / 최적 판매 </a:t>
+              <a:t>임</a:t>
+            </a:r>
+            <a:r>
+              <a:rPr lang="ko-KR" sz="1800">
+                <a:solidFill>
+                  <a:schemeClr val="tx1"/>
+                </a:solidFill>
+                <a:latin typeface="맑은 고딕" charset="0"/>
+                <a:ea typeface="맑은 고딕" charset="0"/>
+              </a:rPr>
+              <a:t>!</a:t>
             </a:r>
             <a:endParaRPr lang="ko-KR" altLang="en-US" sz="1800">
               <a:solidFill>
@@ -8498,34 +9134,11 @@
               <a:ea typeface="맑은 고딕" charset="0"/>
             </a:endParaRPr>
           </a:p>
-          <a:p>
-            <a:pPr marL="0" indent="0" algn="ctr" hangingPunct="1">
-              <a:buFontTx/>
-              <a:buNone/>
-            </a:pPr>
-            <a:r>
-              <a:rPr lang="ko-KR" sz="1800">
-                <a:solidFill>
-                  <a:schemeClr val="tx1"/>
-                </a:solidFill>
-                <a:latin typeface="맑은 고딕" charset="0"/>
-                <a:ea typeface="맑은 고딕" charset="0"/>
-              </a:rPr>
-              <a:t>시기 알림데이터들이 같이나오게!</a:t>
-            </a:r>
-            <a:endParaRPr lang="ko-KR" altLang="en-US" sz="1800">
-              <a:solidFill>
-                <a:schemeClr val="tx1"/>
-              </a:solidFill>
-              <a:latin typeface="맑은 고딕" charset="0"/>
-              <a:ea typeface="맑은 고딕" charset="0"/>
-            </a:endParaRPr>
-          </a:p>
-        </p:txBody>
-      </p:sp>
-      <p:sp>
-        <p:nvSpPr>
-          <p:cNvPr id="16" name="도형 43"/>
+        </p:txBody>
+      </p:sp>
+      <p:sp>
+        <p:nvSpPr>
+          <p:cNvPr id="16" name="도형 29"/>
           <p:cNvSpPr>
             <a:spLocks/>
           </p:cNvSpPr>
@@ -8533,8 +9146,8 @@
         </p:nvSpPr>
         <p:spPr>
           <a:xfrm rot="0">
-            <a:off x="1115695" y="1026795"/>
-            <a:ext cx="9401810" cy="800735"/>
+            <a:off x="1125855" y="977265"/>
+            <a:ext cx="9401175" cy="800100"/>
           </a:xfrm>
           <a:prstGeom prst="rect"/>
           <a:solidFill>
@@ -8566,25 +9179,22 @@
           </a:fontRef>
         </p:style>
         <p:txBody>
-          <a:bodyPr wrap="square" lIns="91440" tIns="45720" rIns="91440" bIns="45720" numCol="1" vert="horz" anchor="ctr">
+          <a:bodyPr wrap="square" lIns="91440" tIns="45720" rIns="91440" bIns="45720" vert="horz" anchor="ctr">
             <a:noAutofit/>
           </a:bodyPr>
           <a:lstStyle/>
           <a:p>
-            <a:pPr marL="0" indent="0" algn="ctr" hangingPunct="1">
-              <a:buFontTx/>
-              <a:buNone/>
-            </a:pPr>
-            <a:endParaRPr lang="ko-KR" altLang="en-US" sz="1800">
-              <a:latin typeface="맑은 고딕" charset="0"/>
-              <a:ea typeface="맑은 고딕" charset="0"/>
-            </a:endParaRPr>
-          </a:p>
-        </p:txBody>
-      </p:sp>
-      <p:sp>
-        <p:nvSpPr>
-          <p:cNvPr id="17" name="도형 44"/>
+            <a:pPr marL="0" indent="0" algn="ctr" hangingPunct="1"/>
+            <a:endParaRPr lang="ko-KR" altLang="en-US" sz="1800">
+              <a:latin typeface="맑은 고딕" charset="0"/>
+              <a:ea typeface="맑은 고딕" charset="0"/>
+            </a:endParaRPr>
+          </a:p>
+        </p:txBody>
+      </p:sp>
+      <p:sp>
+        <p:nvSpPr>
+          <p:cNvPr id="17" name="도형 30"/>
           <p:cNvSpPr>
             <a:spLocks/>
           </p:cNvSpPr>
@@ -8592,8 +9202,8 @@
         </p:nvSpPr>
         <p:spPr>
           <a:xfrm rot="0">
-            <a:off x="6802755" y="1253490"/>
-            <a:ext cx="2204085" cy="446405"/>
+            <a:off x="6812915" y="1203960"/>
+            <a:ext cx="2203450" cy="445770"/>
           </a:xfrm>
           <a:prstGeom prst="rect"/>
         </p:spPr>
@@ -8639,7 +9249,7 @@
       </p:sp>
       <p:sp>
         <p:nvSpPr>
-          <p:cNvPr id="18" name="도형 45"/>
+          <p:cNvPr id="18" name="도형 31"/>
           <p:cNvSpPr>
             <a:spLocks/>
           </p:cNvSpPr>
@@ -8647,8 +9257,8 @@
         </p:nvSpPr>
         <p:spPr>
           <a:xfrm rot="0">
-            <a:off x="9133205" y="1233805"/>
-            <a:ext cx="1147445" cy="466090"/>
+            <a:off x="9143365" y="1184275"/>
+            <a:ext cx="1146810" cy="465455"/>
           </a:xfrm>
           <a:prstGeom prst="rect"/>
           <a:solidFill>
@@ -8686,18 +9296,25 @@
                 <a:latin typeface="맑은 고딕" charset="0"/>
                 <a:ea typeface="맑은 고딕" charset="0"/>
               </a:rPr>
-              <a:t>로그아웃</a:t>
-            </a:r>
-            <a:endParaRPr lang="ko-KR" altLang="en-US" sz="1800">
-              <a:latin typeface="맑은 고딕" charset="0"/>
-              <a:ea typeface="맑은 고딕" charset="0"/>
-            </a:endParaRPr>
-          </a:p>
-        </p:txBody>
-      </p:sp>
-      <p:sp>
-        <p:nvSpPr>
-          <p:cNvPr id="19" name="도형 46"/>
+              <a:t>로그</a:t>
+            </a:r>
+            <a:r>
+              <a:rPr sz="1800">
+                <a:latin typeface="맑은 고딕" charset="0"/>
+                <a:ea typeface="맑은 고딕" charset="0"/>
+              </a:rPr>
+              <a:t>아웃</a:t>
+            </a:r>
+            <a:endParaRPr lang="ko-KR" altLang="en-US" sz="1800">
+              <a:latin typeface="맑은 고딕" charset="0"/>
+              <a:ea typeface="맑은 고딕" charset="0"/>
+            </a:endParaRPr>
+          </a:p>
+        </p:txBody>
+      </p:sp>
+      <p:sp>
+        <p:nvSpPr>
+          <p:cNvPr id="19" name="도형 32"/>
           <p:cNvSpPr>
             <a:spLocks/>
           </p:cNvSpPr>
@@ -8705,8 +9322,8 @@
         </p:nvSpPr>
         <p:spPr>
           <a:xfrm rot="0">
-            <a:off x="1273810" y="1194435"/>
-            <a:ext cx="1067435" cy="544830"/>
+            <a:off x="1283970" y="1144905"/>
+            <a:ext cx="1066800" cy="544195"/>
           </a:xfrm>
           <a:prstGeom prst="rect"/>
           <a:solidFill>
@@ -8730,32 +9347,50 @@
           </a:fontRef>
         </p:style>
         <p:txBody>
-          <a:bodyPr wrap="square" lIns="91440" tIns="45720" rIns="91440" bIns="45720" numCol="1" vert="horz" anchor="ctr">
+          <a:bodyPr wrap="square" lIns="91440" tIns="45720" rIns="91440" bIns="45720" vert="horz" anchor="ctr">
             <a:noAutofit/>
           </a:bodyPr>
           <a:lstStyle/>
           <a:p>
-            <a:pPr marL="0" indent="0" algn="ctr" hangingPunct="1">
-              <a:buFontTx/>
-              <a:buNone/>
-            </a:pPr>
-            <a:r>
-              <a:rPr lang="ko-KR" sz="1800">
-                <a:latin typeface="맑은 고딕" charset="0"/>
-                <a:ea typeface="맑은 고딕" charset="0"/>
-              </a:rPr>
-              <a:t>Header logo</a:t>
-            </a:r>
-            <a:endParaRPr lang="ko-KR" altLang="en-US" sz="1800">
-              <a:latin typeface="맑은 고딕" charset="0"/>
-              <a:ea typeface="맑은 고딕" charset="0"/>
-            </a:endParaRPr>
-          </a:p>
-        </p:txBody>
-      </p:sp>
-      <p:sp>
-        <p:nvSpPr>
-          <p:cNvPr id="20" name="텍스트 상자 47"/>
+            <a:pPr marL="0" indent="0" algn="ctr" hangingPunct="1"/>
+            <a:r>
+              <a:rPr lang="ko-KR" sz="1800">
+                <a:latin typeface="맑은 고딕" charset="0"/>
+                <a:ea typeface="맑은 고딕" charset="0"/>
+              </a:rPr>
+              <a:t>H</a:t>
+            </a:r>
+            <a:r>
+              <a:rPr lang="ko-KR" sz="1800">
+                <a:latin typeface="맑은 고딕" charset="0"/>
+                <a:ea typeface="맑은 고딕" charset="0"/>
+              </a:rPr>
+              <a:t>ea</a:t>
+            </a:r>
+            <a:r>
+              <a:rPr lang="ko-KR" sz="1800">
+                <a:latin typeface="맑은 고딕" charset="0"/>
+                <a:ea typeface="맑은 고딕" charset="0"/>
+              </a:rPr>
+              <a:t>de</a:t>
+            </a:r>
+            <a:r>
+              <a:rPr lang="ko-KR" sz="1800">
+                <a:latin typeface="맑은 고딕" charset="0"/>
+                <a:ea typeface="맑은 고딕" charset="0"/>
+              </a:rPr>
+              <a:t>r logo</a:t>
+            </a:r>
+            <a:endParaRPr lang="ko-KR" altLang="en-US" sz="1800">
+              <a:latin typeface="맑은 고딕" charset="0"/>
+              <a:ea typeface="맑은 고딕" charset="0"/>
+            </a:endParaRPr>
+          </a:p>
+        </p:txBody>
+      </p:sp>
+      <p:sp>
+        <p:nvSpPr>
+          <p:cNvPr id="20" name="텍스트 상자 33"/>
           <p:cNvSpPr txBox="1">
             <a:spLocks/>
           </p:cNvSpPr>
@@ -8763,8 +9398,8 @@
         </p:nvSpPr>
         <p:spPr>
           <a:xfrm rot="0">
-            <a:off x="2586990" y="1244600"/>
-            <a:ext cx="1094740" cy="370840"/>
+            <a:off x="2597150" y="1195070"/>
+            <a:ext cx="1094105" cy="370205"/>
           </a:xfrm>
           <a:prstGeom prst="rect"/>
           <a:noFill/>
@@ -8774,19 +9409,16 @@
                 <a:alpha val="100000"/>
               </a:srgbClr>
             </a:solidFill>
-            <a:prstDash val="solid"/>
+            <a:prstDash/>
           </a:ln>
         </p:spPr>
         <p:txBody>
-          <a:bodyPr wrap="none" lIns="89535" tIns="46355" rIns="89535" bIns="46355" numCol="1" vert="horz" anchor="t">
+          <a:bodyPr wrap="none" lIns="89535" tIns="46355" rIns="89535" bIns="46355" vert="horz" anchor="t">
             <a:spAutoFit/>
           </a:bodyPr>
           <a:lstStyle/>
           <a:p>
-            <a:pPr marL="0" indent="0" algn="l" hangingPunct="1">
-              <a:buFontTx/>
-              <a:buNone/>
-            </a:pPr>
+            <a:pPr marL="0" indent="0" algn="l" hangingPunct="1"/>
             <a:r>
               <a:rPr lang="ko-KR" sz="1800">
                 <a:latin typeface="맑은 고딕" charset="0"/>
@@ -8803,7 +9435,7 @@
       </p:sp>
       <p:sp>
         <p:nvSpPr>
-          <p:cNvPr id="21" name="텍스트 상자 48"/>
+          <p:cNvPr id="21" name="텍스트 상자 34"/>
           <p:cNvSpPr txBox="1">
             <a:spLocks/>
           </p:cNvSpPr>
@@ -8811,8 +9443,8 @@
         </p:nvSpPr>
         <p:spPr>
           <a:xfrm rot="0">
-            <a:off x="3685540" y="1256665"/>
-            <a:ext cx="1403985" cy="370840"/>
+            <a:off x="3695700" y="1207135"/>
+            <a:ext cx="1403350" cy="370205"/>
           </a:xfrm>
           <a:prstGeom prst="rect"/>
           <a:noFill/>
@@ -8822,19 +9454,16 @@
                 <a:alpha val="100000"/>
               </a:srgbClr>
             </a:solidFill>
-            <a:prstDash val="solid"/>
+            <a:prstDash/>
           </a:ln>
         </p:spPr>
         <p:txBody>
-          <a:bodyPr wrap="none" lIns="89535" tIns="46355" rIns="89535" bIns="46355" numCol="1" vert="horz" anchor="t">
+          <a:bodyPr wrap="none" lIns="89535" tIns="46355" rIns="89535" bIns="46355" vert="horz" anchor="t">
             <a:spAutoFit/>
           </a:bodyPr>
           <a:lstStyle/>
           <a:p>
-            <a:pPr marL="0" indent="0" algn="l" hangingPunct="1">
-              <a:buFontTx/>
-              <a:buNone/>
-            </a:pPr>
+            <a:pPr marL="0" indent="0" algn="l" hangingPunct="1"/>
             <a:r>
               <a:rPr lang="ko-KR" sz="1800">
                 <a:latin typeface="맑은 고딕" charset="0"/>
@@ -8851,7 +9480,7 @@
       </p:sp>
       <p:sp>
         <p:nvSpPr>
-          <p:cNvPr id="22" name="텍스트 상자 49"/>
+          <p:cNvPr id="22" name="텍스트 상자 35"/>
           <p:cNvSpPr txBox="1">
             <a:spLocks/>
           </p:cNvSpPr>
@@ -8859,8 +9488,8 @@
         </p:nvSpPr>
         <p:spPr>
           <a:xfrm rot="0">
-            <a:off x="5060950" y="1239520"/>
-            <a:ext cx="1175385" cy="370840"/>
+            <a:off x="5071110" y="1189990"/>
+            <a:ext cx="1174750" cy="370205"/>
           </a:xfrm>
           <a:prstGeom prst="rect"/>
           <a:noFill/>
@@ -8870,19 +9499,16 @@
                 <a:alpha val="100000"/>
               </a:srgbClr>
             </a:solidFill>
-            <a:prstDash val="solid"/>
+            <a:prstDash/>
           </a:ln>
         </p:spPr>
         <p:txBody>
-          <a:bodyPr wrap="none" lIns="89535" tIns="46355" rIns="89535" bIns="46355" numCol="1" vert="horz" anchor="t">
+          <a:bodyPr wrap="none" lIns="89535" tIns="46355" rIns="89535" bIns="46355" vert="horz" anchor="t">
             <a:spAutoFit/>
           </a:bodyPr>
           <a:lstStyle/>
           <a:p>
-            <a:pPr marL="0" indent="0" algn="l" hangingPunct="1">
-              <a:buFontTx/>
-              <a:buNone/>
-            </a:pPr>
+            <a:pPr marL="0" indent="0" algn="l" hangingPunct="1"/>
             <a:r>
               <a:rPr sz="1800">
                 <a:latin typeface="맑은 고딕" charset="0"/>
@@ -8895,7 +9521,14 @@
                 <a:latin typeface="맑은 고딕" charset="0"/>
                 <a:ea typeface="맑은 고딕" charset="0"/>
               </a:rPr>
-              <a:t> 예측</a:t>
+              <a:t> </a:t>
+            </a:r>
+            <a:r>
+              <a:rPr lang="ko-KR" sz="1800">
+                <a:latin typeface="맑은 고딕" charset="0"/>
+                <a:ea typeface="맑은 고딕" charset="0"/>
+              </a:rPr>
+              <a:t>예측</a:t>
             </a:r>
             <a:endParaRPr lang="ko-KR" altLang="en-US" sz="1800">
               <a:latin typeface="맑은 고딕" charset="0"/>
@@ -8924,6 +9557,1337 @@
       </p:par>
     </p:tnLst>
   </p:timing>
+</p:sld>
+</file>
+
+<file path=ppt/slides/slide6.xml><?xml version="1.0" encoding="utf-8"?>
+<p:sld xmlns:a="http://schemas.openxmlformats.org/drawingml/2006/main" xmlns:r="http://schemas.openxmlformats.org/officeDocument/2006/relationships" xmlns:p="http://schemas.openxmlformats.org/presentationml/2006/main" xmlns:p14="http://schemas.microsoft.com/office/powerpoint/2010/main">
+  <p:cSld>
+    <p:spTree>
+      <p:nvGrpSpPr>
+        <p:cNvPr id="1" name=""/>
+        <p:cNvGrpSpPr/>
+        <p:nvPr/>
+      </p:nvGrpSpPr>
+      <p:grpSpPr>
+        <a:xfrm>
+          <a:off x="0" y="0"/>
+          <a:ext cx="0" cy="0"/>
+          <a:chOff x="0" y="0"/>
+          <a:chExt cx="0" cy="0"/>
+        </a:xfrm>
+      </p:grpSpPr>
+      <p:sp>
+        <p:nvSpPr>
+          <p:cNvPr id="2" name="Rect 0"/>
+          <p:cNvSpPr>
+            <a:spLocks/>
+          </p:cNvSpPr>
+          <p:nvPr/>
+        </p:nvSpPr>
+        <p:spPr>
+          <a:xfrm rot="0">
+            <a:off x="1116965" y="1026160"/>
+            <a:ext cx="9412605" cy="4979670"/>
+          </a:xfrm>
+          <a:prstGeom prst="rect"/>
+          <a:solidFill>
+            <a:schemeClr val="bg1">
+              <a:lumMod val="50000"/>
+              <a:lumOff val="0"/>
+            </a:schemeClr>
+          </a:solidFill>
+        </p:spPr>
+        <p:style>
+          <a:lnRef idx="2">
+            <a:schemeClr val="accent1">
+              <a:shade val="50000"/>
+            </a:schemeClr>
+          </a:lnRef>
+          <a:fillRef idx="1">
+            <a:schemeClr val="accent1"/>
+          </a:fillRef>
+          <a:effectRef idx="0">
+            <a:schemeClr val="accent1"/>
+          </a:effectRef>
+          <a:fontRef idx="minor">
+            <a:schemeClr val="lt1"/>
+          </a:fontRef>
+        </p:style>
+        <p:txBody>
+          <a:bodyPr wrap="square" lIns="91440" tIns="45720" rIns="91440" bIns="45720" numCol="1" vert="horz" anchor="ctr">
+            <a:noAutofit/>
+          </a:bodyPr>
+          <a:lstStyle/>
+          <a:p>
+            <a:pPr marL="0" indent="0" algn="ctr" hangingPunct="1">
+              <a:buFontTx/>
+              <a:buNone/>
+            </a:pPr>
+            <a:endParaRPr lang="ko-KR" altLang="en-US" sz="1800">
+              <a:latin typeface="맑은 고딕" charset="0"/>
+              <a:ea typeface="맑은 고딕" charset="0"/>
+            </a:endParaRPr>
+          </a:p>
+        </p:txBody>
+      </p:sp>
+      <p:sp>
+        <p:nvSpPr>
+          <p:cNvPr id="3" name="Rect 0"/>
+          <p:cNvSpPr txBox="1">
+            <a:spLocks/>
+          </p:cNvSpPr>
+          <p:nvPr/>
+        </p:nvSpPr>
+        <p:spPr>
+          <a:xfrm rot="0">
+            <a:off x="1894840" y="1903730"/>
+            <a:ext cx="2611120" cy="370840"/>
+          </a:xfrm>
+          <a:prstGeom prst="rect"/>
+          <a:noFill/>
+          <a:ln w="0" cap="flat" cmpd="sng">
+            <a:solidFill>
+              <a:srgbClr val="FFFFFF">
+                <a:alpha val="100000"/>
+              </a:srgbClr>
+            </a:solidFill>
+            <a:prstDash val="solid"/>
+          </a:ln>
+        </p:spPr>
+        <p:txBody>
+          <a:bodyPr wrap="none" lIns="89535" tIns="46355" rIns="89535" bIns="46355" numCol="1" vert="horz" anchor="t">
+            <a:spAutoFit/>
+          </a:bodyPr>
+          <a:lstStyle/>
+          <a:p>
+            <a:pPr marL="0" indent="0" algn="l" hangingPunct="1">
+              <a:buFontTx/>
+              <a:buNone/>
+            </a:pPr>
+            <a:r>
+              <a:rPr sz="1800">
+                <a:latin typeface="맑은 고딕" charset="0"/>
+                <a:ea typeface="맑은 고딕" charset="0"/>
+              </a:rPr>
+              <a:t>스마트팜 </a:t>
+            </a:r>
+            <a:r>
+              <a:rPr lang="ko-KR" sz="1800">
+                <a:latin typeface="맑은 고딕" charset="0"/>
+                <a:ea typeface="맑은 고딕" charset="0"/>
+              </a:rPr>
+              <a:t>AI 환경플랫폼</a:t>
+            </a:r>
+            <a:endParaRPr lang="ko-KR" altLang="en-US" sz="1800">
+              <a:latin typeface="맑은 고딕" charset="0"/>
+              <a:ea typeface="맑은 고딕" charset="0"/>
+            </a:endParaRPr>
+          </a:p>
+        </p:txBody>
+      </p:sp>
+      <p:sp>
+        <p:nvSpPr>
+          <p:cNvPr id="4" name="Rect 0"/>
+          <p:cNvSpPr txBox="1">
+            <a:spLocks/>
+          </p:cNvSpPr>
+          <p:nvPr/>
+        </p:nvSpPr>
+        <p:spPr>
+          <a:xfrm rot="0">
+            <a:off x="2082165" y="2429510"/>
+            <a:ext cx="2089150" cy="1477645"/>
+          </a:xfrm>
+          <a:prstGeom prst="rect"/>
+          <a:noFill/>
+          <a:ln w="0" cap="flat" cmpd="sng">
+            <a:solidFill>
+              <a:srgbClr val="FFFFFF">
+                <a:alpha val="100000"/>
+              </a:srgbClr>
+            </a:solidFill>
+            <a:prstDash/>
+          </a:ln>
+        </p:spPr>
+        <p:txBody>
+          <a:bodyPr wrap="none" lIns="89535" tIns="46355" rIns="89535" bIns="46355" vert="horz" anchor="t">
+            <a:spAutoFit/>
+          </a:bodyPr>
+          <a:lstStyle/>
+          <a:p>
+            <a:pPr marL="0" indent="0" algn="l" hangingPunct="1"/>
+            <a:r>
+              <a:rPr sz="1800">
+                <a:solidFill>
+                  <a:schemeClr val="bg1"/>
+                </a:solidFill>
+                <a:latin typeface="맑은 고딕" charset="0"/>
+                <a:ea typeface="맑은 고딕" charset="0"/>
+              </a:rPr>
+              <a:t>스마</a:t>
+            </a:r>
+            <a:r>
+              <a:rPr lang="ko-KR" sz="1800">
+                <a:solidFill>
+                  <a:schemeClr val="bg1"/>
+                </a:solidFill>
+                <a:latin typeface="맑은 고딕" charset="0"/>
+                <a:ea typeface="맑은 고딕" charset="0"/>
+              </a:rPr>
+              <a:t>트팜 대시보드</a:t>
+            </a:r>
+            <a:endParaRPr lang="ko-KR" altLang="en-US" sz="1800">
+              <a:solidFill>
+                <a:schemeClr val="bg1"/>
+              </a:solidFill>
+              <a:latin typeface="맑은 고딕" charset="0"/>
+              <a:ea typeface="맑은 고딕" charset="0"/>
+            </a:endParaRPr>
+          </a:p>
+          <a:p>
+            <a:pPr marL="0" indent="0" algn="l" hangingPunct="1"/>
+            <a:endParaRPr lang="ko-KR" altLang="en-US" sz="1800">
+              <a:solidFill>
+                <a:schemeClr val="bg1"/>
+              </a:solidFill>
+              <a:latin typeface="맑은 고딕" charset="0"/>
+              <a:ea typeface="맑은 고딕" charset="0"/>
+            </a:endParaRPr>
+          </a:p>
+          <a:p>
+            <a:pPr marL="0" indent="0" algn="l" hangingPunct="1"/>
+            <a:r>
+              <a:rPr lang="ko-KR" sz="1800">
+                <a:solidFill>
+                  <a:schemeClr val="bg1"/>
+                </a:solidFill>
+                <a:latin typeface="맑은 고딕" charset="0"/>
+                <a:ea typeface="맑은 고딕" charset="0"/>
+              </a:rPr>
+              <a:t>데이터 </a:t>
+            </a:r>
+            <a:r>
+              <a:rPr lang="ko-KR" sz="1800">
+                <a:solidFill>
+                  <a:schemeClr val="bg1"/>
+                </a:solidFill>
+                <a:latin typeface="맑은 고딕" charset="0"/>
+                <a:ea typeface="맑은 고딕" charset="0"/>
+              </a:rPr>
+              <a:t>분석</a:t>
+            </a:r>
+            <a:endParaRPr lang="ko-KR" altLang="en-US" sz="1800">
+              <a:solidFill>
+                <a:schemeClr val="bg1"/>
+              </a:solidFill>
+              <a:latin typeface="맑은 고딕" charset="0"/>
+              <a:ea typeface="맑은 고딕" charset="0"/>
+            </a:endParaRPr>
+          </a:p>
+          <a:p>
+            <a:pPr marL="0" indent="0" algn="l" hangingPunct="1"/>
+            <a:endParaRPr lang="ko-KR" altLang="en-US" sz="1800">
+              <a:solidFill>
+                <a:schemeClr val="bg1"/>
+              </a:solidFill>
+              <a:latin typeface="맑은 고딕" charset="0"/>
+              <a:ea typeface="맑은 고딕" charset="0"/>
+            </a:endParaRPr>
+          </a:p>
+          <a:p>
+            <a:pPr marL="0" indent="0" algn="l" hangingPunct="1"/>
+            <a:r>
+              <a:rPr lang="ko-KR" sz="1800">
+                <a:solidFill>
+                  <a:schemeClr val="bg1"/>
+                </a:solidFill>
+                <a:latin typeface="맑은 고딕" charset="0"/>
+                <a:ea typeface="맑은 고딕" charset="0"/>
+              </a:rPr>
+              <a:t>가격 </a:t>
+            </a:r>
+            <a:r>
+              <a:rPr lang="ko-KR" sz="1800">
+                <a:solidFill>
+                  <a:schemeClr val="bg1"/>
+                </a:solidFill>
+                <a:latin typeface="맑은 고딕" charset="0"/>
+                <a:ea typeface="맑은 고딕" charset="0"/>
+              </a:rPr>
+              <a:t>예측</a:t>
+            </a:r>
+            <a:endParaRPr lang="ko-KR" altLang="en-US" sz="1800">
+              <a:solidFill>
+                <a:schemeClr val="bg1"/>
+              </a:solidFill>
+              <a:latin typeface="맑은 고딕" charset="0"/>
+              <a:ea typeface="맑은 고딕" charset="0"/>
+            </a:endParaRPr>
+          </a:p>
+        </p:txBody>
+      </p:sp>
+      <p:sp>
+        <p:nvSpPr>
+          <p:cNvPr id="7" name="Rect 0"/>
+          <p:cNvSpPr txBox="1">
+            <a:spLocks/>
+          </p:cNvSpPr>
+          <p:nvPr/>
+        </p:nvSpPr>
+        <p:spPr>
+          <a:xfrm rot="0">
+            <a:off x="2490470" y="4443095"/>
+            <a:ext cx="2162175" cy="647065"/>
+          </a:xfrm>
+          <a:prstGeom prst="rect"/>
+          <a:noFill/>
+          <a:ln w="0" cap="flat" cmpd="sng">
+            <a:solidFill>
+              <a:srgbClr val="FFFFFF">
+                <a:alpha val="100000"/>
+              </a:srgbClr>
+            </a:solidFill>
+            <a:prstDash val="solid"/>
+          </a:ln>
+        </p:spPr>
+        <p:txBody>
+          <a:bodyPr wrap="square" lIns="89535" tIns="46355" rIns="89535" bIns="46355" numCol="1" vert="horz" anchor="t">
+            <a:spAutoFit/>
+          </a:bodyPr>
+          <a:lstStyle/>
+          <a:p>
+            <a:pPr marL="0" indent="0" algn="l" hangingPunct="1">
+              <a:buFontTx/>
+              <a:buNone/>
+            </a:pPr>
+            <a:r>
+              <a:rPr lang="ko-KR" sz="1800">
+                <a:solidFill>
+                  <a:schemeClr val="bg1"/>
+                </a:solidFill>
+                <a:latin typeface="맑은 고딕" charset="0"/>
+                <a:ea typeface="맑은 고딕" charset="0"/>
+              </a:rPr>
+              <a:t>왼쪽 </a:t>
+            </a:r>
+            <a:r>
+              <a:rPr lang="ko-KR" sz="1800">
+                <a:solidFill>
+                  <a:schemeClr val="bg1"/>
+                </a:solidFill>
+                <a:latin typeface="맑은 고딕" charset="0"/>
+                <a:ea typeface="맑은 고딕" charset="0"/>
+              </a:rPr>
+              <a:t>카테고리나 </a:t>
+            </a:r>
+            <a:endParaRPr lang="ko-KR" altLang="en-US" sz="1800">
+              <a:solidFill>
+                <a:schemeClr val="bg1"/>
+              </a:solidFill>
+              <a:latin typeface="맑은 고딕" charset="0"/>
+              <a:ea typeface="맑은 고딕" charset="0"/>
+            </a:endParaRPr>
+          </a:p>
+          <a:p>
+            <a:pPr marL="0" indent="0" algn="l" hangingPunct="1">
+              <a:buFontTx/>
+              <a:buNone/>
+            </a:pPr>
+            <a:r>
+              <a:rPr lang="ko-KR" sz="1800">
+                <a:solidFill>
+                  <a:schemeClr val="bg1"/>
+                </a:solidFill>
+                <a:latin typeface="맑은 고딕" charset="0"/>
+                <a:ea typeface="맑은 고딕" charset="0"/>
+              </a:rPr>
+              <a:t>슬라이드</a:t>
+            </a:r>
+            <a:r>
+              <a:rPr lang="ko-KR" sz="1800">
+                <a:solidFill>
+                  <a:schemeClr val="bg1"/>
+                </a:solidFill>
+                <a:latin typeface="맑은 고딕" charset="0"/>
+                <a:ea typeface="맑은 고딕" charset="0"/>
+              </a:rPr>
+              <a:t>메뉴 분류</a:t>
+            </a:r>
+            <a:endParaRPr lang="ko-KR" altLang="en-US" sz="1800">
+              <a:solidFill>
+                <a:schemeClr val="bg1"/>
+              </a:solidFill>
+              <a:latin typeface="맑은 고딕" charset="0"/>
+              <a:ea typeface="맑은 고딕" charset="0"/>
+            </a:endParaRPr>
+          </a:p>
+        </p:txBody>
+      </p:sp>
+      <p:cxnSp>
+        <p:nvCxnSpPr>
+          <p:cNvPr id="8" name="Rect 0"/>
+          <p:cNvCxnSpPr/>
+          <p:nvPr/>
+        </p:nvCxnSpPr>
+        <p:spPr>
+          <a:xfrm rot="0">
+            <a:off x="3088005" y="3931920"/>
+            <a:ext cx="7620" cy="476885"/>
+          </a:xfrm>
+          <a:prstGeom prst="straightConnector1"/>
+          <a:ln w="6350" cap="flat" cmpd="sng">
+            <a:prstDash/>
+            <a:tailEnd type="triangle" w="med" len="med"/>
+          </a:ln>
+        </p:spPr>
+        <p:style>
+          <a:lnRef idx="1">
+            <a:schemeClr val="dk1"/>
+          </a:lnRef>
+          <a:fillRef idx="0">
+            <a:schemeClr val="dk1"/>
+          </a:fillRef>
+          <a:effectRef idx="0">
+            <a:schemeClr val="dk1"/>
+          </a:effectRef>
+          <a:fontRef idx="minor">
+            <a:schemeClr val="tx1"/>
+          </a:fontRef>
+        </p:style>
+      </p:cxnSp>
+      <p:sp>
+        <p:nvSpPr>
+          <p:cNvPr id="9" name="Rect 0"/>
+          <p:cNvSpPr txBox="1">
+            <a:spLocks/>
+          </p:cNvSpPr>
+          <p:nvPr/>
+        </p:nvSpPr>
+        <p:spPr>
+          <a:xfrm rot="0">
+            <a:off x="5173980" y="1905635"/>
+            <a:ext cx="1175385" cy="370840"/>
+          </a:xfrm>
+          <a:prstGeom prst="rect"/>
+          <a:noFill/>
+          <a:ln w="0" cap="flat" cmpd="sng">
+            <a:solidFill>
+              <a:srgbClr val="FFFFFF">
+                <a:alpha val="100000"/>
+              </a:srgbClr>
+            </a:solidFill>
+            <a:prstDash val="solid"/>
+          </a:ln>
+        </p:spPr>
+        <p:txBody>
+          <a:bodyPr wrap="none" lIns="89535" tIns="46355" rIns="89535" bIns="46355" numCol="1" vert="horz" anchor="t">
+            <a:spAutoFit/>
+          </a:bodyPr>
+          <a:lstStyle/>
+          <a:p>
+            <a:pPr marL="0" indent="0" algn="l" hangingPunct="1">
+              <a:buFontTx/>
+              <a:buNone/>
+            </a:pPr>
+            <a:r>
+              <a:rPr sz="1800">
+                <a:latin typeface="맑은 고딕" charset="0"/>
+                <a:ea typeface="맑은 고딕" charset="0"/>
+              </a:rPr>
+              <a:t>가격</a:t>
+            </a:r>
+            <a:r>
+              <a:rPr lang="ko-KR" sz="1800">
+                <a:latin typeface="맑은 고딕" charset="0"/>
+                <a:ea typeface="맑은 고딕" charset="0"/>
+              </a:rPr>
+              <a:t> 예측</a:t>
+            </a:r>
+            <a:endParaRPr lang="ko-KR" altLang="en-US" sz="1800">
+              <a:latin typeface="맑은 고딕" charset="0"/>
+              <a:ea typeface="맑은 고딕" charset="0"/>
+            </a:endParaRPr>
+          </a:p>
+        </p:txBody>
+      </p:sp>
+      <p:sp>
+        <p:nvSpPr>
+          <p:cNvPr id="10" name="Rect 0"/>
+          <p:cNvSpPr txBox="1">
+            <a:spLocks/>
+          </p:cNvSpPr>
+          <p:nvPr/>
+        </p:nvSpPr>
+        <p:spPr>
+          <a:xfrm rot="0">
+            <a:off x="4622165" y="2428875"/>
+            <a:ext cx="3990340" cy="463550"/>
+          </a:xfrm>
+          <a:prstGeom prst="rect"/>
+          <a:noFill/>
+          <a:ln w="0" cap="flat" cmpd="sng">
+            <a:solidFill>
+              <a:srgbClr val="FFFFFF">
+                <a:alpha val="100000"/>
+              </a:srgbClr>
+            </a:solidFill>
+            <a:prstDash val="solid"/>
+          </a:ln>
+        </p:spPr>
+        <p:txBody>
+          <a:bodyPr wrap="square" lIns="89535" tIns="46355" rIns="89535" bIns="46355" numCol="1" vert="horz" anchor="t">
+            <a:spAutoFit/>
+          </a:bodyPr>
+          <a:lstStyle/>
+          <a:p>
+            <a:pPr marL="0" indent="0" algn="l" hangingPunct="1">
+              <a:buFontTx/>
+              <a:buNone/>
+            </a:pPr>
+            <a:r>
+              <a:rPr sz="1200" i="0" b="0">
+                <a:solidFill>
+                  <a:schemeClr val="bg1"/>
+                </a:solidFill>
+                <a:latin typeface="Segoe UI Emoji" charset="0"/>
+                <a:ea typeface="ui-sans-serif" charset="0"/>
+              </a:rPr>
+              <a:t>도/소매가 분석과 날씨 데이터를 연동하여 정확한 가격예</a:t>
+            </a:r>
+            <a:r>
+              <a:rPr lang="ko-KR" sz="1200" i="0" b="0">
+                <a:solidFill>
+                  <a:schemeClr val="bg1"/>
+                </a:solidFill>
+                <a:latin typeface="Segoe UI Emoji" charset="0"/>
+                <a:ea typeface="ui-sans-serif" charset="0"/>
+              </a:rPr>
+              <a:t>측하기!</a:t>
+            </a:r>
+            <a:endParaRPr lang="ko-KR" altLang="en-US" sz="1200" i="0" b="0">
+              <a:solidFill>
+                <a:schemeClr val="bg1"/>
+              </a:solidFill>
+              <a:latin typeface="Segoe UI Emoji" charset="0"/>
+              <a:ea typeface="ui-sans-serif" charset="0"/>
+            </a:endParaRPr>
+          </a:p>
+        </p:txBody>
+      </p:sp>
+      <p:sp>
+        <p:nvSpPr>
+          <p:cNvPr id="11" name="도형 39"/>
+          <p:cNvSpPr>
+            <a:spLocks/>
+          </p:cNvSpPr>
+          <p:nvPr/>
+        </p:nvSpPr>
+        <p:spPr>
+          <a:xfrm rot="0">
+            <a:off x="8801100" y="1943735"/>
+            <a:ext cx="1670685" cy="485775"/>
+          </a:xfrm>
+          <a:prstGeom prst="rect"/>
+          <a:solidFill>
+            <a:schemeClr val="tx1"/>
+          </a:solidFill>
+        </p:spPr>
+        <p:style>
+          <a:lnRef idx="2">
+            <a:schemeClr val="accent1">
+              <a:shade val="50000"/>
+            </a:schemeClr>
+          </a:lnRef>
+          <a:fillRef idx="1">
+            <a:schemeClr val="accent1"/>
+          </a:fillRef>
+          <a:effectRef idx="0">
+            <a:schemeClr val="accent1"/>
+          </a:effectRef>
+          <a:fontRef idx="minor">
+            <a:schemeClr val="lt1"/>
+          </a:fontRef>
+        </p:style>
+        <p:txBody>
+          <a:bodyPr wrap="square" lIns="91440" tIns="45720" rIns="91440" bIns="45720" numCol="1" vert="horz" anchor="ctr">
+            <a:noAutofit/>
+          </a:bodyPr>
+          <a:lstStyle/>
+          <a:p>
+            <a:pPr marL="0" indent="0" algn="ctr" hangingPunct="1">
+              <a:buFontTx/>
+              <a:buNone/>
+            </a:pPr>
+            <a:r>
+              <a:rPr lang="ko-KR" sz="1800">
+                <a:latin typeface="맑은 고딕" charset="0"/>
+                <a:ea typeface="맑은 고딕" charset="0"/>
+              </a:rPr>
+              <a:t>가격예측실행버튼</a:t>
+            </a:r>
+            <a:endParaRPr lang="ko-KR" altLang="en-US" sz="1800">
+              <a:latin typeface="맑은 고딕" charset="0"/>
+              <a:ea typeface="맑은 고딕" charset="0"/>
+            </a:endParaRPr>
+          </a:p>
+        </p:txBody>
+      </p:sp>
+      <p:sp>
+        <p:nvSpPr>
+          <p:cNvPr id="14" name="도형 3"/>
+          <p:cNvSpPr>
+            <a:spLocks/>
+          </p:cNvSpPr>
+          <p:nvPr/>
+        </p:nvSpPr>
+        <p:spPr>
+          <a:xfrm rot="0">
+            <a:off x="5381625" y="3110230"/>
+            <a:ext cx="4078605" cy="1235075"/>
+          </a:xfrm>
+          <a:prstGeom prst="rect"/>
+          <a:solidFill>
+            <a:schemeClr val="bg1"/>
+          </a:solidFill>
+        </p:spPr>
+        <p:style>
+          <a:lnRef idx="2">
+            <a:schemeClr val="accent1">
+              <a:shade val="50000"/>
+            </a:schemeClr>
+          </a:lnRef>
+          <a:fillRef idx="1">
+            <a:schemeClr val="accent1"/>
+          </a:fillRef>
+          <a:effectRef idx="0">
+            <a:schemeClr val="accent1"/>
+          </a:effectRef>
+          <a:fontRef idx="minor">
+            <a:schemeClr val="lt1"/>
+          </a:fontRef>
+        </p:style>
+        <p:txBody>
+          <a:bodyPr wrap="square" lIns="91440" tIns="45720" rIns="91440" bIns="45720" vert="horz" anchor="ctr">
+            <a:noAutofit/>
+          </a:bodyPr>
+          <a:lstStyle/>
+          <a:p>
+            <a:pPr marL="0" indent="0" algn="ctr" hangingPunct="1"/>
+            <a:r>
+              <a:rPr lang="ko-KR" sz="1800">
+                <a:solidFill>
+                  <a:schemeClr val="tx1"/>
+                </a:solidFill>
+                <a:latin typeface="맑은 고딕" charset="0"/>
+                <a:ea typeface="맑은 고딕" charset="0"/>
+              </a:rPr>
+              <a:t>날씨데이터</a:t>
+            </a:r>
+            <a:r>
+              <a:rPr lang="ko-KR" sz="1800">
+                <a:solidFill>
+                  <a:schemeClr val="tx1"/>
+                </a:solidFill>
+                <a:latin typeface="맑은 고딕" charset="0"/>
+                <a:ea typeface="맑은 고딕" charset="0"/>
+              </a:rPr>
+              <a:t>들의 </a:t>
+            </a:r>
+            <a:r>
+              <a:rPr lang="ko-KR" sz="1800">
+                <a:solidFill>
+                  <a:schemeClr val="tx1"/>
+                </a:solidFill>
+                <a:latin typeface="맑은 고딕" charset="0"/>
+                <a:ea typeface="맑은 고딕" charset="0"/>
+              </a:rPr>
+              <a:t>모아서 차례대로 나오게끔 1</a:t>
+            </a:r>
+            <a:r>
+              <a:rPr lang="ko-KR" sz="1800">
+                <a:solidFill>
+                  <a:schemeClr val="tx1"/>
+                </a:solidFill>
+                <a:latin typeface="맑은 고딕" charset="0"/>
+                <a:ea typeface="맑은 고딕" charset="0"/>
+              </a:rPr>
+              <a:t>s</a:t>
+            </a:r>
+            <a:r>
+              <a:rPr lang="ko-KR" sz="1800">
+                <a:solidFill>
+                  <a:schemeClr val="tx1"/>
+                </a:solidFill>
+                <a:latin typeface="맑은 고딕" charset="0"/>
+                <a:ea typeface="맑은 고딕" charset="0"/>
+              </a:rPr>
+              <a:t>t/2</a:t>
+            </a:r>
+            <a:r>
+              <a:rPr lang="ko-KR" sz="1800">
+                <a:solidFill>
+                  <a:schemeClr val="tx1"/>
+                </a:solidFill>
+                <a:latin typeface="맑은 고딕" charset="0"/>
+                <a:ea typeface="맑은 고딕" charset="0"/>
+              </a:rPr>
+              <a:t>n</a:t>
+            </a:r>
+            <a:r>
+              <a:rPr lang="ko-KR" sz="1800">
+                <a:solidFill>
+                  <a:schemeClr val="tx1"/>
+                </a:solidFill>
+                <a:latin typeface="맑은 고딕" charset="0"/>
+                <a:ea typeface="맑은 고딕" charset="0"/>
+              </a:rPr>
+              <a:t>d/3</a:t>
+            </a:r>
+            <a:r>
+              <a:rPr lang="ko-KR" sz="1800">
+                <a:solidFill>
+                  <a:schemeClr val="tx1"/>
+                </a:solidFill>
+                <a:latin typeface="맑은 고딕" charset="0"/>
+                <a:ea typeface="맑은 고딕" charset="0"/>
+              </a:rPr>
+              <a:t>r</a:t>
+            </a:r>
+            <a:r>
+              <a:rPr lang="ko-KR" sz="1800">
+                <a:solidFill>
+                  <a:schemeClr val="tx1"/>
+                </a:solidFill>
+                <a:latin typeface="맑은 고딕" charset="0"/>
+                <a:ea typeface="맑은 고딕" charset="0"/>
+              </a:rPr>
+              <a:t>d/</a:t>
+            </a:r>
+            <a:r>
+              <a:rPr lang="ko-KR" sz="1800">
+                <a:solidFill>
+                  <a:schemeClr val="tx1"/>
+                </a:solidFill>
+                <a:latin typeface="맑은 고딕" charset="0"/>
+                <a:ea typeface="맑은 고딕" charset="0"/>
+              </a:rPr>
+              <a:t>4</a:t>
+            </a:r>
+            <a:r>
+              <a:rPr lang="ko-KR" sz="1800" baseline="30000">
+                <a:solidFill>
+                  <a:schemeClr val="tx1"/>
+                </a:solidFill>
+                <a:latin typeface="맑은 고딕" charset="0"/>
+                <a:ea typeface="맑은 고딕" charset="0"/>
+              </a:rPr>
+              <a:t>th</a:t>
+            </a:r>
+            <a:r>
+              <a:rPr lang="ko-KR" sz="1800">
+                <a:solidFill>
+                  <a:schemeClr val="tx1"/>
+                </a:solidFill>
+                <a:latin typeface="맑은 고딕" charset="0"/>
+                <a:ea typeface="맑은 고딕" charset="0"/>
+              </a:rPr>
+              <a:t> 순으로!</a:t>
+            </a:r>
+            <a:endParaRPr lang="ko-KR" altLang="en-US" sz="1800">
+              <a:solidFill>
+                <a:schemeClr val="tx1"/>
+              </a:solidFill>
+              <a:latin typeface="맑은 고딕" charset="0"/>
+              <a:ea typeface="맑은 고딕" charset="0"/>
+            </a:endParaRPr>
+          </a:p>
+        </p:txBody>
+      </p:sp>
+      <p:sp>
+        <p:nvSpPr>
+          <p:cNvPr id="15" name="도형 5"/>
+          <p:cNvSpPr>
+            <a:spLocks/>
+          </p:cNvSpPr>
+          <p:nvPr/>
+        </p:nvSpPr>
+        <p:spPr>
+          <a:xfrm>
+            <a:off x="5372100" y="4443095"/>
+            <a:ext cx="4128770" cy="1353820"/>
+          </a:xfrm>
+          <a:prstGeom prst="rect"/>
+          <a:solidFill>
+            <a:schemeClr val="bg1"/>
+          </a:solidFill>
+        </p:spPr>
+        <p:style>
+          <a:lnRef idx="2">
+            <a:schemeClr val="accent1">
+              <a:shade val="50000"/>
+            </a:schemeClr>
+          </a:lnRef>
+          <a:fillRef idx="1">
+            <a:schemeClr val="accent1"/>
+          </a:fillRef>
+          <a:effectRef idx="0">
+            <a:schemeClr val="accent1"/>
+          </a:effectRef>
+          <a:fontRef idx="minor">
+            <a:schemeClr val="lt1"/>
+          </a:fontRef>
+        </p:style>
+        <p:txBody>
+          <a:bodyPr wrap="square" lIns="91440" tIns="45720" rIns="91440" bIns="45720" numCol="1" vert="horz" anchor="ctr">
+            <a:noAutofit/>
+          </a:bodyPr>
+          <a:lstStyle/>
+          <a:p>
+            <a:pPr marL="0" indent="0" algn="ctr" hangingPunct="1">
+              <a:buFontTx/>
+              <a:buNone/>
+            </a:pPr>
+            <a:r>
+              <a:rPr sz="1800">
+                <a:solidFill>
+                  <a:schemeClr val="tx1"/>
+                </a:solidFill>
+                <a:latin typeface="맑은 고딕" charset="0"/>
+                <a:ea typeface="맑은 고딕" charset="0"/>
+              </a:rPr>
+              <a:t>도/소매가 시</a:t>
+            </a:r>
+            <a:r>
+              <a:rPr lang="ko-KR" sz="1800">
+                <a:solidFill>
+                  <a:schemeClr val="tx1"/>
+                </a:solidFill>
+                <a:latin typeface="맑은 고딕" charset="0"/>
+                <a:ea typeface="맑은 고딕" charset="0"/>
+              </a:rPr>
+              <a:t>기별 분석 / 최적 판매 </a:t>
+            </a:r>
+            <a:endParaRPr lang="ko-KR" altLang="en-US" sz="1800">
+              <a:solidFill>
+                <a:schemeClr val="tx1"/>
+              </a:solidFill>
+              <a:latin typeface="맑은 고딕" charset="0"/>
+              <a:ea typeface="맑은 고딕" charset="0"/>
+            </a:endParaRPr>
+          </a:p>
+          <a:p>
+            <a:pPr marL="0" indent="0" algn="ctr" hangingPunct="1">
+              <a:buFontTx/>
+              <a:buNone/>
+            </a:pPr>
+            <a:r>
+              <a:rPr lang="ko-KR" sz="1800">
+                <a:solidFill>
+                  <a:schemeClr val="tx1"/>
+                </a:solidFill>
+                <a:latin typeface="맑은 고딕" charset="0"/>
+                <a:ea typeface="맑은 고딕" charset="0"/>
+              </a:rPr>
+              <a:t>시기 알림데이터들이 같이나오게!</a:t>
+            </a:r>
+            <a:endParaRPr lang="ko-KR" altLang="en-US" sz="1800">
+              <a:solidFill>
+                <a:schemeClr val="tx1"/>
+              </a:solidFill>
+              <a:latin typeface="맑은 고딕" charset="0"/>
+              <a:ea typeface="맑은 고딕" charset="0"/>
+            </a:endParaRPr>
+          </a:p>
+        </p:txBody>
+      </p:sp>
+      <p:sp>
+        <p:nvSpPr>
+          <p:cNvPr id="16" name="도형 43"/>
+          <p:cNvSpPr>
+            <a:spLocks/>
+          </p:cNvSpPr>
+          <p:nvPr/>
+        </p:nvSpPr>
+        <p:spPr>
+          <a:xfrm rot="0">
+            <a:off x="1115695" y="1026795"/>
+            <a:ext cx="9401810" cy="800735"/>
+          </a:xfrm>
+          <a:prstGeom prst="rect"/>
+          <a:solidFill>
+            <a:schemeClr val="bg1"/>
+          </a:solidFill>
+          <a:ln w="12700" cap="flat" cmpd="sng">
+            <a:solidFill>
+              <a:schemeClr val="tx1">
+                <a:alpha val="100000"/>
+              </a:schemeClr>
+            </a:solidFill>
+            <a:prstDash val="solid"/>
+          </a:ln>
+        </p:spPr>
+        <p:style>
+          <a:lnRef idx="2">
+            <a:schemeClr val="accent1">
+              <a:shade val="50000"/>
+            </a:schemeClr>
+          </a:lnRef>
+          <a:fillRef idx="1">
+            <a:schemeClr val="accent1"/>
+          </a:fillRef>
+          <a:effectRef idx="0">
+            <a:schemeClr val="accent1"/>
+          </a:effectRef>
+          <a:fontRef idx="minor">
+            <a:schemeClr val="lt1"/>
+          </a:fontRef>
+        </p:style>
+        <p:txBody>
+          <a:bodyPr wrap="square" lIns="91440" tIns="45720" rIns="91440" bIns="45720" numCol="1" vert="horz" anchor="ctr">
+            <a:noAutofit/>
+          </a:bodyPr>
+          <a:lstStyle/>
+          <a:p>
+            <a:pPr marL="0" indent="0" algn="ctr" hangingPunct="1">
+              <a:buFontTx/>
+              <a:buNone/>
+            </a:pPr>
+            <a:endParaRPr lang="ko-KR" altLang="en-US" sz="1800">
+              <a:latin typeface="맑은 고딕" charset="0"/>
+              <a:ea typeface="맑은 고딕" charset="0"/>
+            </a:endParaRPr>
+          </a:p>
+        </p:txBody>
+      </p:sp>
+      <p:sp>
+        <p:nvSpPr>
+          <p:cNvPr id="17" name="도형 44"/>
+          <p:cNvSpPr>
+            <a:spLocks/>
+          </p:cNvSpPr>
+          <p:nvPr/>
+        </p:nvSpPr>
+        <p:spPr>
+          <a:xfrm rot="0">
+            <a:off x="6802755" y="1253490"/>
+            <a:ext cx="2204085" cy="446405"/>
+          </a:xfrm>
+          <a:prstGeom prst="rect"/>
+        </p:spPr>
+        <p:style>
+          <a:lnRef idx="2">
+            <a:schemeClr val="accent1">
+              <a:shade val="50000"/>
+            </a:schemeClr>
+          </a:lnRef>
+          <a:fillRef idx="1">
+            <a:schemeClr val="accent1"/>
+          </a:fillRef>
+          <a:effectRef idx="0">
+            <a:schemeClr val="accent1"/>
+          </a:effectRef>
+          <a:fontRef idx="minor">
+            <a:schemeClr val="lt1"/>
+          </a:fontRef>
+        </p:style>
+        <p:txBody>
+          <a:bodyPr wrap="square" lIns="91440" tIns="45720" rIns="91440" bIns="45720" numCol="1" vert="horz" anchor="ctr">
+            <a:noAutofit/>
+          </a:bodyPr>
+          <a:lstStyle/>
+          <a:p>
+            <a:pPr marL="0" indent="0" algn="ctr" hangingPunct="1">
+              <a:buFontTx/>
+              <a:buNone/>
+            </a:pPr>
+            <a:r>
+              <a:rPr lang="ko-KR" sz="1800">
+                <a:latin typeface="맑은 고딕" charset="0"/>
+                <a:ea typeface="맑은 고딕" charset="0"/>
+              </a:rPr>
+              <a:t>Snss님 반갑습니다</a:t>
+            </a:r>
+            <a:endParaRPr lang="ko-KR" altLang="en-US" sz="1800">
+              <a:latin typeface="맑은 고딕" charset="0"/>
+              <a:ea typeface="맑은 고딕" charset="0"/>
+            </a:endParaRPr>
+          </a:p>
+        </p:txBody>
+      </p:sp>
+      <p:sp>
+        <p:nvSpPr>
+          <p:cNvPr id="18" name="도형 45"/>
+          <p:cNvSpPr>
+            <a:spLocks/>
+          </p:cNvSpPr>
+          <p:nvPr/>
+        </p:nvSpPr>
+        <p:spPr>
+          <a:xfrm rot="0">
+            <a:off x="9133205" y="1233805"/>
+            <a:ext cx="1147445" cy="466090"/>
+          </a:xfrm>
+          <a:prstGeom prst="rect"/>
+          <a:solidFill>
+            <a:schemeClr val="tx1"/>
+          </a:solidFill>
+        </p:spPr>
+        <p:style>
+          <a:lnRef idx="2">
+            <a:schemeClr val="accent1">
+              <a:shade val="50000"/>
+            </a:schemeClr>
+          </a:lnRef>
+          <a:fillRef idx="1">
+            <a:schemeClr val="accent1"/>
+          </a:fillRef>
+          <a:effectRef idx="0">
+            <a:schemeClr val="accent1"/>
+          </a:effectRef>
+          <a:fontRef idx="minor">
+            <a:schemeClr val="lt1"/>
+          </a:fontRef>
+        </p:style>
+        <p:txBody>
+          <a:bodyPr wrap="square" lIns="91440" tIns="45720" rIns="91440" bIns="45720" numCol="1" vert="horz" anchor="ctr">
+            <a:noAutofit/>
+          </a:bodyPr>
+          <a:lstStyle/>
+          <a:p>
+            <a:pPr marL="0" indent="0" algn="ctr" hangingPunct="1">
+              <a:buFontTx/>
+              <a:buNone/>
+            </a:pPr>
+            <a:r>
+              <a:rPr sz="1800">
+                <a:latin typeface="맑은 고딕" charset="0"/>
+                <a:ea typeface="맑은 고딕" charset="0"/>
+              </a:rPr>
+              <a:t>로그아웃</a:t>
+            </a:r>
+            <a:endParaRPr lang="ko-KR" altLang="en-US" sz="1800">
+              <a:latin typeface="맑은 고딕" charset="0"/>
+              <a:ea typeface="맑은 고딕" charset="0"/>
+            </a:endParaRPr>
+          </a:p>
+        </p:txBody>
+      </p:sp>
+      <p:sp>
+        <p:nvSpPr>
+          <p:cNvPr id="19" name="도형 46"/>
+          <p:cNvSpPr>
+            <a:spLocks/>
+          </p:cNvSpPr>
+          <p:nvPr/>
+        </p:nvSpPr>
+        <p:spPr>
+          <a:xfrm rot="0">
+            <a:off x="1273810" y="1194435"/>
+            <a:ext cx="1067435" cy="544830"/>
+          </a:xfrm>
+          <a:prstGeom prst="rect"/>
+          <a:solidFill>
+            <a:schemeClr val="tx1"/>
+          </a:solidFill>
+        </p:spPr>
+        <p:style>
+          <a:lnRef idx="2">
+            <a:schemeClr val="accent1">
+              <a:shade val="50000"/>
+            </a:schemeClr>
+          </a:lnRef>
+          <a:fillRef idx="1">
+            <a:schemeClr val="accent1"/>
+          </a:fillRef>
+          <a:effectRef idx="0">
+            <a:schemeClr val="accent1"/>
+          </a:effectRef>
+          <a:fontRef idx="minor">
+            <a:schemeClr val="lt1"/>
+          </a:fontRef>
+        </p:style>
+        <p:txBody>
+          <a:bodyPr wrap="square" lIns="91440" tIns="45720" rIns="91440" bIns="45720" numCol="1" vert="horz" anchor="ctr">
+            <a:noAutofit/>
+          </a:bodyPr>
+          <a:lstStyle/>
+          <a:p>
+            <a:pPr marL="0" indent="0" algn="ctr" hangingPunct="1">
+              <a:buFontTx/>
+              <a:buNone/>
+            </a:pPr>
+            <a:r>
+              <a:rPr lang="ko-KR" sz="1800">
+                <a:latin typeface="맑은 고딕" charset="0"/>
+                <a:ea typeface="맑은 고딕" charset="0"/>
+              </a:rPr>
+              <a:t>Header logo</a:t>
+            </a:r>
+            <a:endParaRPr lang="ko-KR" altLang="en-US" sz="1800">
+              <a:latin typeface="맑은 고딕" charset="0"/>
+              <a:ea typeface="맑은 고딕" charset="0"/>
+            </a:endParaRPr>
+          </a:p>
+        </p:txBody>
+      </p:sp>
+      <p:sp>
+        <p:nvSpPr>
+          <p:cNvPr id="20" name="텍스트 상자 47"/>
+          <p:cNvSpPr txBox="1">
+            <a:spLocks/>
+          </p:cNvSpPr>
+          <p:nvPr/>
+        </p:nvSpPr>
+        <p:spPr>
+          <a:xfrm rot="0">
+            <a:off x="2586990" y="1244600"/>
+            <a:ext cx="1094740" cy="370840"/>
+          </a:xfrm>
+          <a:prstGeom prst="rect"/>
+          <a:noFill/>
+          <a:ln w="0" cap="flat" cmpd="sng">
+            <a:solidFill>
+              <a:srgbClr val="FFFFFF">
+                <a:alpha val="100000"/>
+              </a:srgbClr>
+            </a:solidFill>
+            <a:prstDash val="solid"/>
+          </a:ln>
+        </p:spPr>
+        <p:txBody>
+          <a:bodyPr wrap="none" lIns="89535" tIns="46355" rIns="89535" bIns="46355" numCol="1" vert="horz" anchor="t">
+            <a:spAutoFit/>
+          </a:bodyPr>
+          <a:lstStyle/>
+          <a:p>
+            <a:pPr marL="0" indent="0" algn="l" hangingPunct="1">
+              <a:buFontTx/>
+              <a:buNone/>
+            </a:pPr>
+            <a:r>
+              <a:rPr lang="ko-KR" sz="1800">
+                <a:latin typeface="맑은 고딕" charset="0"/>
+                <a:ea typeface="맑은 고딕" charset="0"/>
+              </a:rPr>
+              <a:t>대시보드</a:t>
+            </a:r>
+            <a:endParaRPr lang="ko-KR" altLang="en-US" sz="1800">
+              <a:latin typeface="맑은 고딕" charset="0"/>
+              <a:ea typeface="맑은 고딕" charset="0"/>
+            </a:endParaRPr>
+          </a:p>
+        </p:txBody>
+      </p:sp>
+      <p:sp>
+        <p:nvSpPr>
+          <p:cNvPr id="21" name="텍스트 상자 48"/>
+          <p:cNvSpPr txBox="1">
+            <a:spLocks/>
+          </p:cNvSpPr>
+          <p:nvPr/>
+        </p:nvSpPr>
+        <p:spPr>
+          <a:xfrm rot="0">
+            <a:off x="3685540" y="1256665"/>
+            <a:ext cx="1403985" cy="370840"/>
+          </a:xfrm>
+          <a:prstGeom prst="rect"/>
+          <a:noFill/>
+          <a:ln w="0" cap="flat" cmpd="sng">
+            <a:solidFill>
+              <a:srgbClr val="FFFFFF">
+                <a:alpha val="100000"/>
+              </a:srgbClr>
+            </a:solidFill>
+            <a:prstDash val="solid"/>
+          </a:ln>
+        </p:spPr>
+        <p:txBody>
+          <a:bodyPr wrap="none" lIns="89535" tIns="46355" rIns="89535" bIns="46355" numCol="1" vert="horz" anchor="t">
+            <a:spAutoFit/>
+          </a:bodyPr>
+          <a:lstStyle/>
+          <a:p>
+            <a:pPr marL="0" indent="0" algn="l" hangingPunct="1">
+              <a:buFontTx/>
+              <a:buNone/>
+            </a:pPr>
+            <a:r>
+              <a:rPr lang="ko-KR" sz="1800">
+                <a:latin typeface="맑은 고딕" charset="0"/>
+                <a:ea typeface="맑은 고딕" charset="0"/>
+              </a:rPr>
+              <a:t>데이터 분석</a:t>
+            </a:r>
+            <a:endParaRPr lang="ko-KR" altLang="en-US" sz="1800">
+              <a:latin typeface="맑은 고딕" charset="0"/>
+              <a:ea typeface="맑은 고딕" charset="0"/>
+            </a:endParaRPr>
+          </a:p>
+        </p:txBody>
+      </p:sp>
+      <p:sp>
+        <p:nvSpPr>
+          <p:cNvPr id="22" name="텍스트 상자 49"/>
+          <p:cNvSpPr txBox="1">
+            <a:spLocks/>
+          </p:cNvSpPr>
+          <p:nvPr/>
+        </p:nvSpPr>
+        <p:spPr>
+          <a:xfrm rot="0">
+            <a:off x="5060950" y="1239520"/>
+            <a:ext cx="1175385" cy="370840"/>
+          </a:xfrm>
+          <a:prstGeom prst="rect"/>
+          <a:noFill/>
+          <a:ln w="0" cap="flat" cmpd="sng">
+            <a:solidFill>
+              <a:srgbClr val="FFFFFF">
+                <a:alpha val="100000"/>
+              </a:srgbClr>
+            </a:solidFill>
+            <a:prstDash val="solid"/>
+          </a:ln>
+        </p:spPr>
+        <p:txBody>
+          <a:bodyPr wrap="none" lIns="89535" tIns="46355" rIns="89535" bIns="46355" numCol="1" vert="horz" anchor="t">
+            <a:spAutoFit/>
+          </a:bodyPr>
+          <a:lstStyle/>
+          <a:p>
+            <a:pPr marL="0" indent="0" algn="l" hangingPunct="1">
+              <a:buFontTx/>
+              <a:buNone/>
+            </a:pPr>
+            <a:r>
+              <a:rPr sz="1800">
+                <a:latin typeface="맑은 고딕" charset="0"/>
+                <a:ea typeface="맑은 고딕" charset="0"/>
+              </a:rPr>
+              <a:t>가격</a:t>
+            </a:r>
+            <a:r>
+              <a:rPr lang="ko-KR" sz="1800">
+                <a:latin typeface="맑은 고딕" charset="0"/>
+                <a:ea typeface="맑은 고딕" charset="0"/>
+              </a:rPr>
+              <a:t> 예측</a:t>
+            </a:r>
+            <a:endParaRPr lang="ko-KR" altLang="en-US" sz="1800">
+              <a:latin typeface="맑은 고딕" charset="0"/>
+              <a:ea typeface="맑은 고딕" charset="0"/>
+            </a:endParaRPr>
+          </a:p>
+        </p:txBody>
+      </p:sp>
+    </p:spTree>
+  </p:cSld>
+  <p:clrMapOvr>
+    <a:masterClrMapping/>
+  </p:clrMapOvr>
+  <mc:AlternateContent xmlns:mc="http://schemas.openxmlformats.org/markup-compatibility/2006">
+    <mc:Choice xmlns:p14="http://schemas.microsoft.com/office/powerpoint/2010/main" Requires="p14">
+      <p:transition spd="slow" p14:dur="2000"/>
+    </mc:Choice>
+    <mc:Fallback>
+      <p:transition spd="slow"/>
+    </mc:Fallback>
+  </mc:AlternateContent>
+  <p:timing>
+    <p:tnLst>
+      <p:par>
+        <p:cTn id="1" dur="indefinite" restart="never" nodeType="tmRoot"/>
+      </p:par>
+    </p:tnLst>
+  </p:timing>
+</p:sld>
+</file>
+
+<file path=ppt/slides/slide7.xml><?xml version="1.0" encoding="utf-8"?>
+<p:sld xmlns:a="http://schemas.openxmlformats.org/drawingml/2006/main" xmlns:r="http://schemas.openxmlformats.org/officeDocument/2006/relationships" xmlns:p="http://schemas.openxmlformats.org/presentationml/2006/main">
+  <p:cSld>
+    <p:spTree>
+      <p:nvGrpSpPr>
+        <p:cNvPr id="1" name=""/>
+        <p:cNvGrpSpPr/>
+        <p:nvPr/>
+      </p:nvGrpSpPr>
+      <p:grpSpPr>
+        <a:xfrm>
+          <a:off x="0" y="0"/>
+          <a:ext cx="0" cy="0"/>
+          <a:chOff x="0" y="0"/>
+          <a:chExt cx="0" cy="0"/>
+        </a:xfrm>
+      </p:grpSpPr>
+      <p:sp>
+        <p:nvSpPr>
+          <p:cNvPr id="2" name="텍스트 상자 5"/>
+          <p:cNvSpPr txBox="1">
+            <a:spLocks/>
+          </p:cNvSpPr>
+          <p:nvPr/>
+        </p:nvSpPr>
+        <p:spPr>
+          <a:xfrm rot="0">
+            <a:off x="1224280" y="1007110"/>
+            <a:ext cx="3713480" cy="923925"/>
+          </a:xfrm>
+          <a:prstGeom prst="rect"/>
+          <a:noFill/>
+          <a:ln>
+            <a:noFill/>
+            <a:prstDash/>
+          </a:ln>
+        </p:spPr>
+        <p:txBody>
+          <a:bodyPr wrap="square" lIns="89535" tIns="46355" rIns="89535" bIns="46355" vert="horz" anchor="t">
+            <a:spAutoFit/>
+          </a:bodyPr>
+          <a:lstStyle/>
+          <a:p>
+            <a:pPr marL="0" indent="0" algn="l" hangingPunct="1"/>
+            <a:r>
+              <a:rPr sz="5400" b="1">
+                <a:solidFill>
+                  <a:schemeClr val="accent1">
+                    <a:lumMod val="50000"/>
+                    <a:lumOff val="0"/>
+                  </a:schemeClr>
+                </a:solidFill>
+                <a:latin typeface="나눔고딕 ExtraBold" charset="0"/>
+                <a:ea typeface="나눔고딕 ExtraBold" charset="0"/>
+              </a:rPr>
+              <a:t>감사합니다!</a:t>
+            </a:r>
+            <a:endParaRPr lang="ko-KR" altLang="en-US" sz="5400" b="1">
+              <a:solidFill>
+                <a:schemeClr val="accent1">
+                  <a:lumMod val="50000"/>
+                  <a:lumOff val="0"/>
+                </a:schemeClr>
+              </a:solidFill>
+              <a:latin typeface="나눔고딕 ExtraBold" charset="0"/>
+              <a:ea typeface="나눔고딕 ExtraBold" charset="0"/>
+            </a:endParaRPr>
+          </a:p>
+        </p:txBody>
+      </p:sp>
+    </p:spTree>
+  </p:cSld>
+  <p:clrMapOvr>
+    <a:masterClrMapping/>
+  </p:clrMapOvr>
+  <mc:AlternateContent xmlns:mc="http://schemas.openxmlformats.org/markup-compatibility/2006">
+    <mc:Choice xmlns:p14="http://schemas.microsoft.com/office/powerpoint/2010/main" Requires="p14">
+      <p:transition spd="slow" p14:dur="2000"/>
+    </mc:Choice>
+    <mc:Fallback>
+      <p:transition spd="slow"/>
+    </mc:Fallback>
+  </mc:AlternateContent>
 </p:sld>
 </file>
 

--- a/1st_document/화면설계서.pptx
+++ b/1st_document/화면설계서.pptx
@@ -2,7 +2,7 @@
 <file path=ppt/presentation.xml><?xml version="1.0" encoding="utf-8"?>
 <p:presentation xmlns:a="http://schemas.openxmlformats.org/drawingml/2006/main" xmlns:r="http://schemas.openxmlformats.org/officeDocument/2006/relationships" xmlns:p="http://schemas.openxmlformats.org/presentationml/2006/main" xmlns:p14="http://schemas.microsoft.com/office/powerpoint/2010/main" saveSubsetFonts="1">
   <p:sldMasterIdLst>
-    <p:sldMasterId id="2147483802" r:id="rId13"/>
+    <p:sldMasterId id="2147483804" r:id="rId13"/>
   </p:sldMasterIdLst>
   <p:notesMasterIdLst>
     <p:notesMasterId r:id="rId17"/>
@@ -12,12 +12,12 @@
   </p:handoutMasterIdLst>
   <p:sldIdLst>
     <p:sldId id="256" r:id="rId19"/>
-    <p:sldId id="262" r:id="rId20"/>
-    <p:sldId id="260" r:id="rId21"/>
-    <p:sldId id="257" r:id="rId22"/>
-    <p:sldId id="258" r:id="rId23"/>
-    <p:sldId id="259" r:id="rId24"/>
-    <p:sldId id="261" r:id="rId25"/>
+    <p:sldId id="262" r:id="rId21"/>
+    <p:sldId id="260" r:id="rId22"/>
+    <p:sldId id="257" r:id="rId24"/>
+    <p:sldId id="258" r:id="rId25"/>
+    <p:sldId id="259" r:id="rId26"/>
+    <p:sldId id="261" r:id="rId27"/>
   </p:sldIdLst>
   <p:sldSz cx="12192000" cy="6858000"/>
   <p:notesSz cx="6858000" cy="9144000"/>
@@ -3876,7 +3876,7 @@
 </file>
 
 <file path=ppt/slides/slide2.xml><?xml version="1.0" encoding="utf-8"?>
-<p:sld xmlns:a="http://schemas.openxmlformats.org/drawingml/2006/main" xmlns:r="http://schemas.openxmlformats.org/officeDocument/2006/relationships" xmlns:p="http://schemas.openxmlformats.org/presentationml/2006/main">
+<p:sld xmlns:a="http://schemas.openxmlformats.org/drawingml/2006/main" xmlns:r="http://schemas.openxmlformats.org/officeDocument/2006/relationships" xmlns:p="http://schemas.openxmlformats.org/presentationml/2006/main" xmlns:p14="http://schemas.microsoft.com/office/powerpoint/2010/main">
   <p:cSld>
     <p:spTree>
       <p:nvGrpSpPr>
@@ -4471,35 +4471,36 @@
         <p:spPr>
           <a:xfrm rot="0">
             <a:off x="2734945" y="2724785"/>
-            <a:ext cx="405130" cy="370205"/>
+            <a:ext cx="405765" cy="370840"/>
           </a:xfrm>
           <a:prstGeom prst="rect"/>
           <a:noFill/>
-          <a:ln>
-            <a:noFill/>
-            <a:prstDash/>
+          <a:ln w="9525" cap="flat" cmpd="sng">
+            <a:solidFill>
+              <a:schemeClr val="bg1">
+                <a:alpha val="100000"/>
+              </a:schemeClr>
+            </a:solidFill>
+            <a:prstDash val="solid"/>
+            <a:round/>
           </a:ln>
         </p:spPr>
         <p:txBody>
-          <a:bodyPr wrap="none" lIns="89535" tIns="46355" rIns="89535" bIns="46355" vert="horz" anchor="t">
+          <a:bodyPr wrap="none" lIns="89535" tIns="46355" rIns="89535" bIns="46355" numCol="1" vert="horz" anchor="t">
             <a:spAutoFit/>
           </a:bodyPr>
           <a:lstStyle/>
           <a:p>
-            <a:pPr marL="0" indent="0" algn="l" hangingPunct="1"/>
-            <a:r>
-              <a:rPr lang="ko-KR" sz="1800">
-                <a:latin typeface="맑은 고딕" charset="0"/>
-                <a:ea typeface="맑은 고딕" charset="0"/>
-              </a:rPr>
-              <a:t>I</a:t>
-            </a:r>
-            <a:r>
-              <a:rPr lang="ko-KR" sz="1800">
-                <a:latin typeface="맑은 고딕" charset="0"/>
-                <a:ea typeface="맑은 고딕" charset="0"/>
-              </a:rPr>
-              <a:t>D</a:t>
+            <a:pPr marL="0" indent="0" algn="l" hangingPunct="1">
+              <a:buFontTx/>
+              <a:buNone/>
+            </a:pPr>
+            <a:r>
+              <a:rPr lang="ko-KR" sz="1800">
+                <a:latin typeface="맑은 고딕" charset="0"/>
+                <a:ea typeface="맑은 고딕" charset="0"/>
+              </a:rPr>
+              <a:t>ID</a:t>
             </a:r>
             <a:endParaRPr lang="ko-KR" altLang="en-US" sz="1800">
               <a:latin typeface="맑은 고딕" charset="0"/>
@@ -4612,7 +4613,7 @@
         <p:spPr>
           <a:xfrm rot="0">
             <a:off x="2599055" y="3329940"/>
-            <a:ext cx="630555" cy="370205"/>
+            <a:ext cx="631190" cy="370840"/>
           </a:xfrm>
           <a:prstGeom prst="rect"/>
           <a:noFill/>
@@ -4622,29 +4623,25 @@
                 <a:alpha val="100000"/>
               </a:srgbClr>
             </a:solidFill>
-            <a:prstDash/>
+            <a:prstDash val="solid"/>
           </a:ln>
         </p:spPr>
         <p:txBody>
-          <a:bodyPr wrap="square" lIns="89535" tIns="46355" rIns="89535" bIns="46355" vert="horz" anchor="t">
+          <a:bodyPr wrap="square" lIns="89535" tIns="46355" rIns="89535" bIns="46355" numCol="1" vert="horz" anchor="t">
             <a:spAutoFit/>
           </a:bodyPr>
           <a:lstStyle/>
           <a:p>
-            <a:pPr marL="0" indent="0" algn="l" hangingPunct="1"/>
-            <a:r>
-              <a:rPr lang="ko-KR" sz="1800">
-                <a:latin typeface="맑은 고딕" charset="0"/>
-                <a:ea typeface="맑은 고딕" charset="0"/>
-              </a:rPr>
-              <a:t>p</a:t>
-            </a:r>
-            <a:r>
-              <a:rPr lang="ko-KR" sz="1800">
-                <a:latin typeface="맑은 고딕" charset="0"/>
-                <a:ea typeface="맑은 고딕" charset="0"/>
-              </a:rPr>
-              <a:t>ass</a:t>
+            <a:pPr marL="0" indent="0" algn="l" hangingPunct="1">
+              <a:buFontTx/>
+              <a:buNone/>
+            </a:pPr>
+            <a:r>
+              <a:rPr lang="ko-KR" sz="1800">
+                <a:latin typeface="맑은 고딕" charset="0"/>
+                <a:ea typeface="맑은 고딕" charset="0"/>
+              </a:rPr>
+              <a:t>pass</a:t>
             </a:r>
             <a:endParaRPr lang="ko-KR" altLang="en-US" sz="1800">
               <a:latin typeface="맑은 고딕" charset="0"/>
@@ -5327,8 +5324,8 @@
         </p:nvSpPr>
         <p:spPr>
           <a:xfrm rot="0">
-            <a:off x="5988685" y="3698240"/>
-            <a:ext cx="630555" cy="370205"/>
+            <a:off x="5939155" y="3767455"/>
+            <a:ext cx="631190" cy="370840"/>
           </a:xfrm>
           <a:prstGeom prst="rect"/>
           <a:noFill/>
@@ -5338,29 +5335,25 @@
                 <a:alpha val="100000"/>
               </a:srgbClr>
             </a:solidFill>
-            <a:prstDash/>
+            <a:prstDash val="solid"/>
           </a:ln>
         </p:spPr>
         <p:txBody>
-          <a:bodyPr wrap="square" lIns="89535" tIns="46355" rIns="89535" bIns="46355" vert="horz" anchor="t">
+          <a:bodyPr wrap="square" lIns="89535" tIns="46355" rIns="89535" bIns="46355" numCol="1" vert="horz" anchor="t">
             <a:spAutoFit/>
           </a:bodyPr>
           <a:lstStyle/>
           <a:p>
-            <a:pPr marL="0" indent="0" algn="l" hangingPunct="1"/>
-            <a:r>
-              <a:rPr lang="ko-KR" sz="1800">
-                <a:latin typeface="맑은 고딕" charset="0"/>
-                <a:ea typeface="맑은 고딕" charset="0"/>
-              </a:rPr>
-              <a:t>p</a:t>
-            </a:r>
-            <a:r>
-              <a:rPr lang="ko-KR" sz="1800">
-                <a:latin typeface="맑은 고딕" charset="0"/>
-                <a:ea typeface="맑은 고딕" charset="0"/>
-              </a:rPr>
-              <a:t>ass</a:t>
+            <a:pPr marL="0" indent="0" algn="l" hangingPunct="1">
+              <a:buFontTx/>
+              <a:buNone/>
+            </a:pPr>
+            <a:r>
+              <a:rPr lang="ko-KR" sz="1800">
+                <a:latin typeface="맑은 고딕" charset="0"/>
+                <a:ea typeface="맑은 고딕" charset="0"/>
+              </a:rPr>
+              <a:t>pass</a:t>
             </a:r>
             <a:endParaRPr lang="ko-KR" altLang="en-US" sz="1800">
               <a:latin typeface="맑은 고딕" charset="0"/>
@@ -5492,6 +5485,13 @@
       <p:transition spd="slow"/>
     </mc:Fallback>
   </mc:AlternateContent>
+  <p:timing>
+    <p:tnLst>
+      <p:par>
+        <p:cTn id="1" dur="indefinite" restart="never" nodeType="tmRoot"/>
+      </p:par>
+    </p:tnLst>
+  </p:timing>
 </p:sld>
 </file>
 

--- a/1st_document/화면설계서.pptx
+++ b/1st_document/화면설계서.pptx
@@ -2,7 +2,7 @@
 <file path=ppt/presentation.xml><?xml version="1.0" encoding="utf-8"?>
 <p:presentation xmlns:a="http://schemas.openxmlformats.org/drawingml/2006/main" xmlns:r="http://schemas.openxmlformats.org/officeDocument/2006/relationships" xmlns:p="http://schemas.openxmlformats.org/presentationml/2006/main" xmlns:p14="http://schemas.microsoft.com/office/powerpoint/2010/main" saveSubsetFonts="1">
   <p:sldMasterIdLst>
-    <p:sldMasterId id="2147483804" r:id="rId13"/>
+    <p:sldMasterId id="2147483807" r:id="rId13"/>
   </p:sldMasterIdLst>
   <p:notesMasterIdLst>
     <p:notesMasterId r:id="rId17"/>
@@ -12,12 +12,11 @@
   </p:handoutMasterIdLst>
   <p:sldIdLst>
     <p:sldId id="256" r:id="rId19"/>
-    <p:sldId id="262" r:id="rId21"/>
-    <p:sldId id="260" r:id="rId22"/>
-    <p:sldId id="257" r:id="rId24"/>
-    <p:sldId id="258" r:id="rId25"/>
-    <p:sldId id="259" r:id="rId26"/>
-    <p:sldId id="261" r:id="rId27"/>
+    <p:sldId id="262" r:id="rId20"/>
+    <p:sldId id="260" r:id="rId21"/>
+    <p:sldId id="257" r:id="rId23"/>
+    <p:sldId id="258" r:id="rId24"/>
+    <p:sldId id="259" r:id="rId25"/>
   </p:sldIdLst>
   <p:sldSz cx="12192000" cy="6858000"/>
   <p:notesSz cx="6858000" cy="9144000"/>
@@ -3785,68 +3784,6 @@
           </a:p>
         </p:txBody>
       </p:sp>
-      <p:sp>
-        <p:nvSpPr>
-          <p:cNvPr id="3" name="텍스트 상자 1"/>
-          <p:cNvSpPr txBox="1">
-            <a:spLocks/>
-          </p:cNvSpPr>
-          <p:nvPr/>
-        </p:nvSpPr>
-        <p:spPr>
-          <a:xfrm rot="0">
-            <a:off x="4265295" y="3860165"/>
-            <a:ext cx="1373505" cy="370205"/>
-          </a:xfrm>
-          <a:prstGeom prst="rect"/>
-          <a:noFill/>
-          <a:ln>
-            <a:noFill/>
-            <a:prstDash/>
-          </a:ln>
-        </p:spPr>
-        <p:txBody>
-          <a:bodyPr wrap="none" lIns="89535" tIns="46355" rIns="89535" bIns="46355" vert="horz" anchor="t">
-            <a:spAutoFit/>
-          </a:bodyPr>
-          <a:lstStyle/>
-          <a:p>
-            <a:pPr marL="0" indent="0" algn="l" hangingPunct="1"/>
-            <a:r>
-              <a:rPr sz="1800">
-                <a:latin typeface="맑은 고딕" charset="0"/>
-                <a:ea typeface="맑은 고딕" charset="0"/>
-              </a:rPr>
-              <a:t>2</a:t>
-            </a:r>
-            <a:r>
-              <a:rPr sz="1800">
-                <a:latin typeface="맑은 고딕" charset="0"/>
-                <a:ea typeface="맑은 고딕" charset="0"/>
-              </a:rPr>
-              <a:t>02</a:t>
-            </a:r>
-            <a:r>
-              <a:rPr lang="ko-KR" sz="1800">
-                <a:latin typeface="맑은 고딕" charset="0"/>
-                <a:ea typeface="맑은 고딕" charset="0"/>
-              </a:rPr>
-              <a:t>6</a:t>
-            </a:r>
-            <a:r>
-              <a:rPr lang="ko-KR" sz="1800">
-                <a:latin typeface="맑은 고딕" charset="0"/>
-                <a:ea typeface="맑은 고딕" charset="0"/>
-              </a:rPr>
-              <a:t>-03-24</a:t>
-            </a:r>
-            <a:endParaRPr lang="ko-KR" altLang="en-US" sz="1800">
-              <a:latin typeface="맑은 고딕" charset="0"/>
-              <a:ea typeface="맑은 고딕" charset="0"/>
-            </a:endParaRPr>
-          </a:p>
-        </p:txBody>
-      </p:sp>
     </p:spTree>
     <p:extLst>
       <p:ext uri="{BB962C8B-B14F-4D97-AF65-F5344CB8AC3E}">
@@ -10802,92 +10739,6 @@
       </p:par>
     </p:tnLst>
   </p:timing>
-</p:sld>
-</file>
-
-<file path=ppt/slides/slide7.xml><?xml version="1.0" encoding="utf-8"?>
-<p:sld xmlns:a="http://schemas.openxmlformats.org/drawingml/2006/main" xmlns:r="http://schemas.openxmlformats.org/officeDocument/2006/relationships" xmlns:p="http://schemas.openxmlformats.org/presentationml/2006/main">
-  <p:cSld>
-    <p:spTree>
-      <p:nvGrpSpPr>
-        <p:cNvPr id="1" name=""/>
-        <p:cNvGrpSpPr/>
-        <p:nvPr/>
-      </p:nvGrpSpPr>
-      <p:grpSpPr>
-        <a:xfrm>
-          <a:off x="0" y="0"/>
-          <a:ext cx="0" cy="0"/>
-          <a:chOff x="0" y="0"/>
-          <a:chExt cx="0" cy="0"/>
-        </a:xfrm>
-      </p:grpSpPr>
-      <p:sp>
-        <p:nvSpPr>
-          <p:cNvPr id="2" name="텍스트 상자 5"/>
-          <p:cNvSpPr txBox="1">
-            <a:spLocks/>
-          </p:cNvSpPr>
-          <p:nvPr/>
-        </p:nvSpPr>
-        <p:spPr>
-          <a:xfrm rot="0">
-            <a:off x="1224280" y="1007110"/>
-            <a:ext cx="3713480" cy="923925"/>
-          </a:xfrm>
-          <a:prstGeom prst="rect"/>
-          <a:noFill/>
-          <a:ln>
-            <a:noFill/>
-            <a:prstDash/>
-          </a:ln>
-        </p:spPr>
-        <p:txBody>
-          <a:bodyPr wrap="square" lIns="89535" tIns="46355" rIns="89535" bIns="46355" vert="horz" anchor="t">
-            <a:spAutoFit/>
-          </a:bodyPr>
-          <a:lstStyle/>
-          <a:p>
-            <a:pPr marL="0" indent="0" algn="l" hangingPunct="1"/>
-            <a:r>
-              <a:rPr sz="5400" b="1">
-                <a:solidFill>
-                  <a:schemeClr val="accent1">
-                    <a:lumMod val="50000"/>
-                    <a:lumOff val="0"/>
-                  </a:schemeClr>
-                </a:solidFill>
-                <a:latin typeface="나눔고딕 ExtraBold" charset="0"/>
-                <a:ea typeface="나눔고딕 ExtraBold" charset="0"/>
-              </a:rPr>
-              <a:t>감사합니다!</a:t>
-            </a:r>
-            <a:endParaRPr lang="ko-KR" altLang="en-US" sz="5400" b="1">
-              <a:solidFill>
-                <a:schemeClr val="accent1">
-                  <a:lumMod val="50000"/>
-                  <a:lumOff val="0"/>
-                </a:schemeClr>
-              </a:solidFill>
-              <a:latin typeface="나눔고딕 ExtraBold" charset="0"/>
-              <a:ea typeface="나눔고딕 ExtraBold" charset="0"/>
-            </a:endParaRPr>
-          </a:p>
-        </p:txBody>
-      </p:sp>
-    </p:spTree>
-  </p:cSld>
-  <p:clrMapOvr>
-    <a:masterClrMapping/>
-  </p:clrMapOvr>
-  <mc:AlternateContent xmlns:mc="http://schemas.openxmlformats.org/markup-compatibility/2006">
-    <mc:Choice xmlns:p14="http://schemas.microsoft.com/office/powerpoint/2010/main" Requires="p14">
-      <p:transition spd="slow" p14:dur="2000"/>
-    </mc:Choice>
-    <mc:Fallback>
-      <p:transition spd="slow"/>
-    </mc:Fallback>
-  </mc:AlternateContent>
 </p:sld>
 </file>
 
